--- a/InternHub_College_Internship_Management_Presentation.pptx
+++ b/InternHub_College_Internship_Management_Presentation.pptx
@@ -6,16 +6,15 @@
   </p:sldMasterIdLst>
   <p:sldIdLst>
     <p:sldId id="256" r:id="rId3"/>
-    <p:sldId id="258" r:id="rId4"/>
-    <p:sldId id="259" r:id="rId5"/>
-    <p:sldId id="262" r:id="rId6"/>
+    <p:sldId id="257" r:id="rId4"/>
+    <p:sldId id="258" r:id="rId5"/>
+    <p:sldId id="259" r:id="rId6"/>
     <p:sldId id="260" r:id="rId7"/>
-    <p:sldId id="264" r:id="rId8"/>
-    <p:sldId id="269" r:id="rId9"/>
-    <p:sldId id="270" r:id="rId10"/>
-    <p:sldId id="271" r:id="rId11"/>
-    <p:sldId id="273" r:id="rId12"/>
-    <p:sldId id="275" r:id="rId13"/>
+    <p:sldId id="261" r:id="rId8"/>
+    <p:sldId id="262" r:id="rId9"/>
+    <p:sldId id="263" r:id="rId10"/>
+    <p:sldId id="264" r:id="rId11"/>
+    <p:sldId id="265" r:id="rId12"/>
   </p:sldIdLst>
   <p:sldSz cx="12191365" cy="6858000" type="screen4x3"/>
   <p:notesSz cx="6858000" cy="9144000"/>
@@ -3088,7 +3087,7 @@
         <p:spPr>
           <a:xfrm>
             <a:off x="0" y="0"/>
-            <a:ext cx="12191695" cy="137160"/>
+            <a:ext cx="12191695" cy="109728"/>
           </a:xfrm>
           <a:prstGeom prst="rect">
             <a:avLst/>
@@ -3124,68 +3123,14 @@
       </p:sp>
       <p:sp>
         <p:nvSpPr>
-          <p:cNvPr id="3" name="Rounded Rectangle 2"/>
-          <p:cNvSpPr/>
-          <p:nvPr/>
-        </p:nvSpPr>
-        <p:spPr>
-          <a:xfrm>
-            <a:off x="914400" y="1005840"/>
-            <a:ext cx="2926080" cy="411480"/>
-          </a:xfrm>
-          <a:prstGeom prst="roundRect">
-            <a:avLst/>
-          </a:prstGeom>
-          <a:solidFill>
-            <a:srgbClr val="1E293B"/>
-          </a:solidFill>
-          <a:ln>
-            <a:solidFill>
-              <a:srgbClr val="2563EB"/>
-            </a:solidFill>
-          </a:ln>
-        </p:spPr>
-        <p:style>
-          <a:lnRef idx="1">
-            <a:schemeClr val="accent1"/>
-          </a:lnRef>
-          <a:fillRef idx="3">
-            <a:schemeClr val="accent1"/>
-          </a:fillRef>
-          <a:effectRef idx="2">
-            <a:schemeClr val="accent1"/>
-          </a:effectRef>
-          <a:fontRef idx="minor">
-            <a:schemeClr val="lt1"/>
-          </a:fontRef>
-        </p:style>
-        <p:txBody>
-          <a:bodyPr rtlCol="0" anchor="ctr"/>
-          <a:lstStyle/>
-          <a:p>
-            <a:pPr algn="ctr">
-              <a:defRPr sz="1000" b="1">
-                <a:solidFill>
-                  <a:srgbClr val="93C5FD"/>
-                </a:solidFill>
-              </a:defRPr>
-            </a:pPr>
-            <a:r>
-              <a:t>MCA FINAL PROJECT PRESENTATION</a:t>
-            </a:r>
-          </a:p>
-        </p:txBody>
-      </p:sp>
-      <p:sp>
-        <p:nvSpPr>
-          <p:cNvPr id="4" name="TextBox 3"/>
+          <p:cNvPr id="3" name="TextBox 2"/>
           <p:cNvSpPr txBox="1"/>
           <p:nvPr/>
         </p:nvSpPr>
         <p:spPr>
           <a:xfrm>
-            <a:off x="914400" y="1645920"/>
-            <a:ext cx="10332720" cy="2011680"/>
+            <a:off x="914400" y="1097280"/>
+            <a:ext cx="10362895" cy="2286000"/>
           </a:xfrm>
           <a:prstGeom prst="rect">
             <a:avLst/>
@@ -3199,7 +3144,7 @@
           <a:lstStyle/>
           <a:p>
             <a:pPr>
-              <a:defRPr sz="4400" b="1">
+              <a:defRPr sz="4600" b="1">
                 <a:solidFill>
                   <a:srgbClr val="FFFFFF"/>
                 </a:solidFill>
@@ -3211,7 +3156,10 @@
           </a:p>
           <a:p>
             <a:pPr>
-              <a:defRPr sz="2800" b="1">
+              <a:spcBef>
+                <a:spcPts val="600"/>
+              </a:spcBef>
+              <a:defRPr sz="2600" b="1">
                 <a:solidFill>
                   <a:srgbClr val="93C5FD"/>
                 </a:solidFill>
@@ -3233,21 +3181,21 @@
               </a:defRPr>
             </a:pPr>
             <a:r>
-              <a:t>A Centralized Web-Based Portal Streamlining Campus Internship Opportunities &amp; Application Tracking</a:t>
-            </a:r>
-          </a:p>
-        </p:txBody>
-      </p:sp>
-      <p:sp>
-        <p:nvSpPr>
-          <p:cNvPr id="5" name="Rounded Rectangle 4"/>
+              <a:t>A simple web portal for students to find internships and track applications online.</a:t>
+            </a:r>
+          </a:p>
+        </p:txBody>
+      </p:sp>
+      <p:sp>
+        <p:nvSpPr>
+          <p:cNvPr id="4" name="Rounded Rectangle 3"/>
           <p:cNvSpPr/>
           <p:nvPr/>
         </p:nvSpPr>
         <p:spPr>
           <a:xfrm>
-            <a:off x="914400" y="3931920"/>
-            <a:ext cx="4937760" cy="2103120"/>
+            <a:off x="914400" y="3840480"/>
+            <a:ext cx="4937760" cy="2194560"/>
           </a:xfrm>
           <a:prstGeom prst="roundRect">
             <a:avLst/>
@@ -3276,7 +3224,7 @@
           </a:fontRef>
         </p:style>
         <p:txBody>
-          <a:bodyPr wrap="square" rtlCol="0" anchor="ctr"/>
+          <a:bodyPr wrap="square" lIns="274320" tIns="228600" rIns="274320" rtlCol="0" anchor="ctr"/>
           <a:lstStyle/>
           <a:p>
             <a:pPr algn="ctr">
@@ -3287,7 +3235,7 @@
               </a:defRPr>
             </a:pPr>
             <a:r>
-              <a:t>SUBMITTED BY</a:t>
+              <a:t>STUDENT DETAILS</a:t>
             </a:r>
           </a:p>
           <a:p>
@@ -3314,7 +3262,7 @@
               </a:defRPr>
             </a:pPr>
             <a:r>
-              <a:t>Register No: MEA25MCA-2010</a:t>
+              <a:t>Reg. No: MEA25MCA-2010</a:t>
             </a:r>
           </a:p>
           <a:p>
@@ -3333,14 +3281,14 @@
       </p:sp>
       <p:sp>
         <p:nvSpPr>
-          <p:cNvPr id="6" name="Rounded Rectangle 5"/>
+          <p:cNvPr id="5" name="Rounded Rectangle 4"/>
           <p:cNvSpPr/>
           <p:nvPr/>
         </p:nvSpPr>
         <p:spPr>
           <a:xfrm>
-            <a:off x="6309360" y="3931920"/>
-            <a:ext cx="4937760" cy="2103120"/>
+            <a:off x="6309360" y="3840480"/>
+            <a:ext cx="4937760" cy="2194560"/>
           </a:xfrm>
           <a:prstGeom prst="roundRect">
             <a:avLst/>
@@ -3369,18 +3317,18 @@
           </a:fontRef>
         </p:style>
         <p:txBody>
-          <a:bodyPr wrap="square" rtlCol="0" anchor="ctr"/>
+          <a:bodyPr wrap="square" lIns="274320" tIns="228600" rIns="274320" rtlCol="0" anchor="ctr"/>
           <a:lstStyle/>
           <a:p>
             <a:pPr algn="ctr">
               <a:defRPr sz="1100" b="1">
                 <a:solidFill>
-                  <a:srgbClr val="10B981"/>
-                </a:solidFill>
-              </a:defRPr>
-            </a:pPr>
-            <a:r>
-              <a:t>GUIDANCE &amp; INSTITUTION</a:t>
+                  <a:srgbClr val="34D399"/>
+                </a:solidFill>
+              </a:defRPr>
+            </a:pPr>
+            <a:r>
+              <a:t>GUIDE &amp; INSTITUTION</a:t>
             </a:r>
           </a:p>
           <a:p>
@@ -3388,14 +3336,14 @@
               <a:spcBef>
                 <a:spcPts val="400"/>
               </a:spcBef>
-              <a:defRPr sz="1400" b="1">
+              <a:defRPr sz="1500" b="1">
                 <a:solidFill>
                   <a:srgbClr val="FFFFFF"/>
                 </a:solidFill>
               </a:defRPr>
             </a:pPr>
             <a:r>
-              <a:t>Project Guide: Mr. Adil Narakkoden</a:t>
+              <a:t>Guide: Mr. Adil Narakkoden</a:t>
             </a:r>
           </a:p>
           <a:p>
@@ -3413,7 +3361,7 @@
           <a:p>
             <a:pPr>
               <a:spcBef>
-                <a:spcPts val="600"/>
+                <a:spcPts val="400"/>
               </a:spcBef>
               <a:defRPr sz="1200" b="1">
                 <a:solidFill>
@@ -3448,594 +3396,6 @@
 </file>
 
 <file path=ppt/slides/slide10.xml><?xml version="1.0" encoding="utf-8"?>
-<p:sld xmlns:a="http://schemas.openxmlformats.org/drawingml/2006/main" xmlns:r="http://schemas.openxmlformats.org/officeDocument/2006/relationships" xmlns:p="http://schemas.openxmlformats.org/presentationml/2006/main">
-  <p:cSld>
-    <p:bg>
-      <p:bgPr>
-        <a:solidFill>
-          <a:srgbClr val="F4F7FB"/>
-        </a:solidFill>
-        <a:effectLst/>
-      </p:bgPr>
-    </p:bg>
-    <p:spTree>
-      <p:nvGrpSpPr>
-        <p:cNvPr id="1" name=""/>
-        <p:cNvGrpSpPr/>
-        <p:nvPr/>
-      </p:nvGrpSpPr>
-      <p:grpSpPr/>
-      <p:sp>
-        <p:nvSpPr>
-          <p:cNvPr id="2" name="TextBox 1"/>
-          <p:cNvSpPr txBox="1"/>
-          <p:nvPr/>
-        </p:nvSpPr>
-        <p:spPr>
-          <a:xfrm>
-            <a:off x="731520" y="411480"/>
-            <a:ext cx="10698480" cy="320040"/>
-          </a:xfrm>
-          <a:prstGeom prst="rect">
-            <a:avLst/>
-          </a:prstGeom>
-          <a:noFill/>
-        </p:spPr>
-        <p:txBody>
-          <a:bodyPr wrap="square" lIns="0" tIns="0" rIns="0" bIns="0">
-            <a:spAutoFit/>
-          </a:bodyPr>
-          <a:lstStyle/>
-          <a:p>
-            <a:pPr>
-              <a:defRPr sz="1000" b="1">
-                <a:solidFill>
-                  <a:srgbClr val="2563EB"/>
-                </a:solidFill>
-              </a:defRPr>
-            </a:pPr>
-            <a:r>
-              <a:t>ROADMAP</a:t>
-            </a:r>
-          </a:p>
-        </p:txBody>
-      </p:sp>
-      <p:sp>
-        <p:nvSpPr>
-          <p:cNvPr id="3" name="TextBox 2"/>
-          <p:cNvSpPr txBox="1"/>
-          <p:nvPr/>
-        </p:nvSpPr>
-        <p:spPr>
-          <a:xfrm>
-            <a:off x="731520" y="685800"/>
-            <a:ext cx="10698480" cy="640080"/>
-          </a:xfrm>
-          <a:prstGeom prst="rect">
-            <a:avLst/>
-          </a:prstGeom>
-          <a:noFill/>
-        </p:spPr>
-        <p:txBody>
-          <a:bodyPr wrap="square" lIns="0" tIns="0" rIns="0" bIns="0">
-            <a:spAutoFit/>
-          </a:bodyPr>
-          <a:lstStyle/>
-          <a:p>
-            <a:pPr>
-              <a:defRPr sz="2400" b="1">
-                <a:solidFill>
-                  <a:srgbClr val="0F172A"/>
-                </a:solidFill>
-              </a:defRPr>
-            </a:pPr>
-            <a:r>
-              <a:t>Future Enhancements</a:t>
-            </a:r>
-          </a:p>
-        </p:txBody>
-      </p:sp>
-      <p:sp>
-        <p:nvSpPr>
-          <p:cNvPr id="4" name="TextBox 3"/>
-          <p:cNvSpPr txBox="1"/>
-          <p:nvPr/>
-        </p:nvSpPr>
-        <p:spPr>
-          <a:xfrm>
-            <a:off x="731520" y="1325880"/>
-            <a:ext cx="10698480" cy="365760"/>
-          </a:xfrm>
-          <a:prstGeom prst="rect">
-            <a:avLst/>
-          </a:prstGeom>
-          <a:noFill/>
-        </p:spPr>
-        <p:txBody>
-          <a:bodyPr wrap="square" lIns="0" tIns="0" rIns="0" bIns="0">
-            <a:spAutoFit/>
-          </a:bodyPr>
-          <a:lstStyle/>
-          <a:p>
-            <a:pPr>
-              <a:defRPr sz="1200">
-                <a:solidFill>
-                  <a:srgbClr val="64748B"/>
-                </a:solidFill>
-              </a:defRPr>
-            </a:pPr>
-            <a:r>
-              <a:t>Strategic expansion roadmap to scale InternHub into an enterprise ecosystem</a:t>
-            </a:r>
-          </a:p>
-        </p:txBody>
-      </p:sp>
-      <p:sp>
-        <p:nvSpPr>
-          <p:cNvPr id="5" name="Rectangle 4"/>
-          <p:cNvSpPr/>
-          <p:nvPr/>
-        </p:nvSpPr>
-        <p:spPr>
-          <a:xfrm>
-            <a:off x="731520" y="1691640"/>
-            <a:ext cx="10728655" cy="18288"/>
-          </a:xfrm>
-          <a:prstGeom prst="rect">
-            <a:avLst/>
-          </a:prstGeom>
-          <a:solidFill>
-            <a:srgbClr val="E2E8F0"/>
-          </a:solidFill>
-          <a:ln>
-            <a:noFill/>
-          </a:ln>
-        </p:spPr>
-        <p:style>
-          <a:lnRef idx="1">
-            <a:schemeClr val="accent1"/>
-          </a:lnRef>
-          <a:fillRef idx="3">
-            <a:schemeClr val="accent1"/>
-          </a:fillRef>
-          <a:effectRef idx="2">
-            <a:schemeClr val="accent1"/>
-          </a:effectRef>
-          <a:fontRef idx="minor">
-            <a:schemeClr val="lt1"/>
-          </a:fontRef>
-        </p:style>
-        <p:txBody>
-          <a:bodyPr rtlCol="0" anchor="ctr"/>
-          <a:lstStyle/>
-          <a:p>
-            <a:pPr algn="ctr"/>
-          </a:p>
-        </p:txBody>
-      </p:sp>
-      <p:sp>
-        <p:nvSpPr>
-          <p:cNvPr id="6" name="Rounded Rectangle 5"/>
-          <p:cNvSpPr/>
-          <p:nvPr/>
-        </p:nvSpPr>
-        <p:spPr>
-          <a:xfrm>
-            <a:off x="731520" y="1920240"/>
-            <a:ext cx="3474720" cy="2057400"/>
-          </a:xfrm>
-          <a:prstGeom prst="roundRect">
-            <a:avLst/>
-          </a:prstGeom>
-          <a:solidFill>
-            <a:srgbClr val="FFFFFF"/>
-          </a:solidFill>
-          <a:ln w="15240">
-            <a:solidFill>
-              <a:srgbClr val="E2E8F0"/>
-            </a:solidFill>
-          </a:ln>
-        </p:spPr>
-        <p:style>
-          <a:lnRef idx="1">
-            <a:schemeClr val="accent1"/>
-          </a:lnRef>
-          <a:fillRef idx="3">
-            <a:schemeClr val="accent1"/>
-          </a:fillRef>
-          <a:effectRef idx="2">
-            <a:schemeClr val="accent1"/>
-          </a:effectRef>
-          <a:fontRef idx="minor">
-            <a:schemeClr val="lt1"/>
-          </a:fontRef>
-        </p:style>
-        <p:txBody>
-          <a:bodyPr wrap="square" lIns="228600" tIns="228600" rIns="228600" rtlCol="0" anchor="ctr"/>
-          <a:lstStyle/>
-          <a:p>
-            <a:pPr algn="ctr">
-              <a:defRPr sz="1300" b="1">
-                <a:solidFill>
-                  <a:srgbClr val="1F3C88"/>
-                </a:solidFill>
-              </a:defRPr>
-            </a:pPr>
-            <a:r>
-              <a:t>🤖 AI Resume Parser &amp; Matcher</a:t>
-            </a:r>
-          </a:p>
-          <a:p>
-            <a:pPr>
-              <a:spcBef>
-                <a:spcPts val="800"/>
-              </a:spcBef>
-              <a:defRPr sz="1050">
-                <a:solidFill>
-                  <a:srgbClr val="1E293B"/>
-                </a:solidFill>
-              </a:defRPr>
-            </a:pPr>
-            <a:r>
-              <a:t>Integrate NLP to parse student resumes (PDF/DOCX), extract key skills, and recommend the best-matching internships automatically using ML similarity scoring.</a:t>
-            </a:r>
-          </a:p>
-        </p:txBody>
-      </p:sp>
-      <p:sp>
-        <p:nvSpPr>
-          <p:cNvPr id="7" name="Rounded Rectangle 6"/>
-          <p:cNvSpPr/>
-          <p:nvPr/>
-        </p:nvSpPr>
-        <p:spPr>
-          <a:xfrm>
-            <a:off x="4370832" y="1920240"/>
-            <a:ext cx="3474720" cy="2057400"/>
-          </a:xfrm>
-          <a:prstGeom prst="roundRect">
-            <a:avLst/>
-          </a:prstGeom>
-          <a:solidFill>
-            <a:srgbClr val="FFFFFF"/>
-          </a:solidFill>
-          <a:ln w="15240">
-            <a:solidFill>
-              <a:srgbClr val="E2E8F0"/>
-            </a:solidFill>
-          </a:ln>
-        </p:spPr>
-        <p:style>
-          <a:lnRef idx="1">
-            <a:schemeClr val="accent1"/>
-          </a:lnRef>
-          <a:fillRef idx="3">
-            <a:schemeClr val="accent1"/>
-          </a:fillRef>
-          <a:effectRef idx="2">
-            <a:schemeClr val="accent1"/>
-          </a:effectRef>
-          <a:fontRef idx="minor">
-            <a:schemeClr val="lt1"/>
-          </a:fontRef>
-        </p:style>
-        <p:txBody>
-          <a:bodyPr wrap="square" lIns="228600" tIns="228600" rIns="228600" rtlCol="0" anchor="ctr"/>
-          <a:lstStyle/>
-          <a:p>
-            <a:pPr algn="ctr">
-              <a:defRPr sz="1300" b="1">
-                <a:solidFill>
-                  <a:srgbClr val="1F3C88"/>
-                </a:solidFill>
-              </a:defRPr>
-            </a:pPr>
-            <a:r>
-              <a:t>🏢 Dedicated Recruiter / Company Portal</a:t>
-            </a:r>
-          </a:p>
-          <a:p>
-            <a:pPr>
-              <a:spcBef>
-                <a:spcPts val="800"/>
-              </a:spcBef>
-              <a:defRPr sz="1050">
-                <a:solidFill>
-                  <a:srgbClr val="1E293B"/>
-                </a:solidFill>
-              </a:defRPr>
-            </a:pPr>
-            <a:r>
-              <a:t>Expand the platform beyond college admins to allow verified company HRs to create postings, review applicant pools, and shortlist candidates directly.</a:t>
-            </a:r>
-          </a:p>
-        </p:txBody>
-      </p:sp>
-      <p:sp>
-        <p:nvSpPr>
-          <p:cNvPr id="8" name="Rounded Rectangle 7"/>
-          <p:cNvSpPr/>
-          <p:nvPr/>
-        </p:nvSpPr>
-        <p:spPr>
-          <a:xfrm>
-            <a:off x="8010144" y="1920240"/>
-            <a:ext cx="3474720" cy="2057400"/>
-          </a:xfrm>
-          <a:prstGeom prst="roundRect">
-            <a:avLst/>
-          </a:prstGeom>
-          <a:solidFill>
-            <a:srgbClr val="FFFFFF"/>
-          </a:solidFill>
-          <a:ln w="15240">
-            <a:solidFill>
-              <a:srgbClr val="E2E8F0"/>
-            </a:solidFill>
-          </a:ln>
-        </p:spPr>
-        <p:style>
-          <a:lnRef idx="1">
-            <a:schemeClr val="accent1"/>
-          </a:lnRef>
-          <a:fillRef idx="3">
-            <a:schemeClr val="accent1"/>
-          </a:fillRef>
-          <a:effectRef idx="2">
-            <a:schemeClr val="accent1"/>
-          </a:effectRef>
-          <a:fontRef idx="minor">
-            <a:schemeClr val="lt1"/>
-          </a:fontRef>
-        </p:style>
-        <p:txBody>
-          <a:bodyPr wrap="square" lIns="228600" tIns="228600" rIns="228600" rtlCol="0" anchor="ctr"/>
-          <a:lstStyle/>
-          <a:p>
-            <a:pPr algn="ctr">
-              <a:defRPr sz="1300" b="1">
-                <a:solidFill>
-                  <a:srgbClr val="1F3C88"/>
-                </a:solidFill>
-              </a:defRPr>
-            </a:pPr>
-            <a:r>
-              <a:t>📅 Integrated Interview Scheduling</a:t>
-            </a:r>
-          </a:p>
-          <a:p>
-            <a:pPr>
-              <a:spcBef>
-                <a:spcPts val="800"/>
-              </a:spcBef>
-              <a:defRPr sz="1050">
-                <a:solidFill>
-                  <a:srgbClr val="1E293B"/>
-                </a:solidFill>
-              </a:defRPr>
-            </a:pPr>
-            <a:r>
-              <a:t>Add an interactive scheduling calendar with Google Calendar / Zoom / WebRTC integration for scheduling and conducting virtual interviews.</a:t>
-            </a:r>
-          </a:p>
-        </p:txBody>
-      </p:sp>
-      <p:sp>
-        <p:nvSpPr>
-          <p:cNvPr id="9" name="Rounded Rectangle 8"/>
-          <p:cNvSpPr/>
-          <p:nvPr/>
-        </p:nvSpPr>
-        <p:spPr>
-          <a:xfrm>
-            <a:off x="731520" y="4160520"/>
-            <a:ext cx="3474720" cy="2057400"/>
-          </a:xfrm>
-          <a:prstGeom prst="roundRect">
-            <a:avLst/>
-          </a:prstGeom>
-          <a:solidFill>
-            <a:srgbClr val="FFFFFF"/>
-          </a:solidFill>
-          <a:ln w="15240">
-            <a:solidFill>
-              <a:srgbClr val="E2E8F0"/>
-            </a:solidFill>
-          </a:ln>
-        </p:spPr>
-        <p:style>
-          <a:lnRef idx="1">
-            <a:schemeClr val="accent1"/>
-          </a:lnRef>
-          <a:fillRef idx="3">
-            <a:schemeClr val="accent1"/>
-          </a:fillRef>
-          <a:effectRef idx="2">
-            <a:schemeClr val="accent1"/>
-          </a:effectRef>
-          <a:fontRef idx="minor">
-            <a:schemeClr val="lt1"/>
-          </a:fontRef>
-        </p:style>
-        <p:txBody>
-          <a:bodyPr wrap="square" lIns="228600" tIns="228600" rIns="228600" rtlCol="0" anchor="ctr"/>
-          <a:lstStyle/>
-          <a:p>
-            <a:pPr algn="ctr">
-              <a:defRPr sz="1300" b="1">
-                <a:solidFill>
-                  <a:srgbClr val="1F3C88"/>
-                </a:solidFill>
-              </a:defRPr>
-            </a:pPr>
-            <a:r>
-              <a:t>📱 Native Mobile Application</a:t>
-            </a:r>
-          </a:p>
-          <a:p>
-            <a:pPr>
-              <a:spcBef>
-                <a:spcPts val="800"/>
-              </a:spcBef>
-              <a:defRPr sz="1050">
-                <a:solidFill>
-                  <a:srgbClr val="1E293B"/>
-                </a:solidFill>
-              </a:defRPr>
-            </a:pPr>
-            <a:r>
-              <a:t>Develop cross-platform mobile apps using Flutter or React Native to provide push notifications, mobile application tracking, and instant alerts.</a:t>
-            </a:r>
-          </a:p>
-        </p:txBody>
-      </p:sp>
-      <p:sp>
-        <p:nvSpPr>
-          <p:cNvPr id="10" name="Rounded Rectangle 9"/>
-          <p:cNvSpPr/>
-          <p:nvPr/>
-        </p:nvSpPr>
-        <p:spPr>
-          <a:xfrm>
-            <a:off x="4370832" y="4160520"/>
-            <a:ext cx="3474720" cy="2057400"/>
-          </a:xfrm>
-          <a:prstGeom prst="roundRect">
-            <a:avLst/>
-          </a:prstGeom>
-          <a:solidFill>
-            <a:srgbClr val="FFFFFF"/>
-          </a:solidFill>
-          <a:ln w="15240">
-            <a:solidFill>
-              <a:srgbClr val="E2E8F0"/>
-            </a:solidFill>
-          </a:ln>
-        </p:spPr>
-        <p:style>
-          <a:lnRef idx="1">
-            <a:schemeClr val="accent1"/>
-          </a:lnRef>
-          <a:fillRef idx="3">
-            <a:schemeClr val="accent1"/>
-          </a:fillRef>
-          <a:effectRef idx="2">
-            <a:schemeClr val="accent1"/>
-          </a:effectRef>
-          <a:fontRef idx="minor">
-            <a:schemeClr val="lt1"/>
-          </a:fontRef>
-        </p:style>
-        <p:txBody>
-          <a:bodyPr wrap="square" lIns="228600" tIns="228600" rIns="228600" rtlCol="0" anchor="ctr"/>
-          <a:lstStyle/>
-          <a:p>
-            <a:pPr algn="ctr">
-              <a:defRPr sz="1300" b="1">
-                <a:solidFill>
-                  <a:srgbClr val="1F3C88"/>
-                </a:solidFill>
-              </a:defRPr>
-            </a:pPr>
-            <a:r>
-              <a:t>📩 Automated Email &amp; SMS Alerts</a:t>
-            </a:r>
-          </a:p>
-          <a:p>
-            <a:pPr>
-              <a:spcBef>
-                <a:spcPts val="800"/>
-              </a:spcBef>
-              <a:defRPr sz="1050">
-                <a:solidFill>
-                  <a:srgbClr val="1E293B"/>
-                </a:solidFill>
-              </a:defRPr>
-            </a:pPr>
-            <a:r>
-              <a:t>Integrate Celery background workers with SendGrid / Twilio to send instant SMS and email alerts whenever application statuses change.</a:t>
-            </a:r>
-          </a:p>
-        </p:txBody>
-      </p:sp>
-      <p:sp>
-        <p:nvSpPr>
-          <p:cNvPr id="11" name="Rounded Rectangle 10"/>
-          <p:cNvSpPr/>
-          <p:nvPr/>
-        </p:nvSpPr>
-        <p:spPr>
-          <a:xfrm>
-            <a:off x="8010144" y="4160520"/>
-            <a:ext cx="3474720" cy="2057400"/>
-          </a:xfrm>
-          <a:prstGeom prst="roundRect">
-            <a:avLst/>
-          </a:prstGeom>
-          <a:solidFill>
-            <a:srgbClr val="FFFFFF"/>
-          </a:solidFill>
-          <a:ln w="15240">
-            <a:solidFill>
-              <a:srgbClr val="E2E8F0"/>
-            </a:solidFill>
-          </a:ln>
-        </p:spPr>
-        <p:style>
-          <a:lnRef idx="1">
-            <a:schemeClr val="accent1"/>
-          </a:lnRef>
-          <a:fillRef idx="3">
-            <a:schemeClr val="accent1"/>
-          </a:fillRef>
-          <a:effectRef idx="2">
-            <a:schemeClr val="accent1"/>
-          </a:effectRef>
-          <a:fontRef idx="minor">
-            <a:schemeClr val="lt1"/>
-          </a:fontRef>
-        </p:style>
-        <p:txBody>
-          <a:bodyPr wrap="square" lIns="228600" tIns="228600" rIns="228600" rtlCol="0" anchor="ctr"/>
-          <a:lstStyle/>
-          <a:p>
-            <a:pPr algn="ctr">
-              <a:defRPr sz="1300" b="1">
-                <a:solidFill>
-                  <a:srgbClr val="1F3C88"/>
-                </a:solidFill>
-              </a:defRPr>
-            </a:pPr>
-            <a:r>
-              <a:t>🎓 Digital Certificate Issuance</a:t>
-            </a:r>
-          </a:p>
-          <a:p>
-            <a:pPr>
-              <a:spcBef>
-                <a:spcPts val="800"/>
-              </a:spcBef>
-              <a:defRPr sz="1050">
-                <a:solidFill>
-                  <a:srgbClr val="1E293B"/>
-                </a:solidFill>
-              </a:defRPr>
-            </a:pPr>
-            <a:r>
-              <a:t>Implement automated, cryptographically verifiable digital certificate generation upon successful completion of an internship.</a:t>
-            </a:r>
-          </a:p>
-        </p:txBody>
-      </p:sp>
-    </p:spTree>
-  </p:cSld>
-  <p:clrMapOvr>
-    <a:masterClrMapping/>
-  </p:clrMapOvr>
-</p:sld>
-</file>
-
-<file path=ppt/slides/slide11.xml><?xml version="1.0" encoding="utf-8"?>
 <p:sld xmlns:a="http://schemas.openxmlformats.org/drawingml/2006/main" xmlns:r="http://schemas.openxmlformats.org/officeDocument/2006/relationships" xmlns:p="http://schemas.openxmlformats.org/presentationml/2006/main">
   <p:cSld>
     <p:bg>
@@ -4062,7 +3422,7 @@
         <p:spPr>
           <a:xfrm>
             <a:off x="0" y="0"/>
-            <a:ext cx="12191695" cy="137160"/>
+            <a:ext cx="12191695" cy="109728"/>
           </a:xfrm>
           <a:prstGeom prst="rect">
             <a:avLst/>
@@ -4098,79 +3458,14 @@
       </p:sp>
       <p:sp>
         <p:nvSpPr>
-          <p:cNvPr id="3" name="TextBox 2"/>
-          <p:cNvSpPr txBox="1"/>
-          <p:nvPr/>
-        </p:nvSpPr>
-        <p:spPr>
-          <a:xfrm>
-            <a:off x="1828800" y="1645920"/>
-            <a:ext cx="8534095" cy="2011680"/>
-          </a:xfrm>
-          <a:prstGeom prst="rect">
-            <a:avLst/>
-          </a:prstGeom>
-          <a:noFill/>
-        </p:spPr>
-        <p:txBody>
-          <a:bodyPr wrap="square">
-            <a:spAutoFit/>
-          </a:bodyPr>
-          <a:lstStyle/>
-          <a:p>
-            <a:pPr algn="ctr">
-              <a:defRPr sz="4600" b="1">
-                <a:solidFill>
-                  <a:srgbClr val="FFFFFF"/>
-                </a:solidFill>
-              </a:defRPr>
-            </a:pPr>
-            <a:r>
-              <a:t>Thank You!</a:t>
-            </a:r>
-          </a:p>
-          <a:p>
-            <a:pPr algn="ctr">
-              <a:spcBef>
-                <a:spcPts val="800"/>
-              </a:spcBef>
-              <a:defRPr sz="2200" b="1">
-                <a:solidFill>
-                  <a:srgbClr val="93C5FD"/>
-                </a:solidFill>
-              </a:defRPr>
-            </a:pPr>
-            <a:r>
-              <a:t>Questions &amp; Answers / Discussion</a:t>
-            </a:r>
-          </a:p>
-          <a:p>
-            <a:pPr algn="ctr">
-              <a:spcBef>
-                <a:spcPts val="1000"/>
-              </a:spcBef>
-              <a:defRPr sz="1400">
-                <a:solidFill>
-                  <a:srgbClr val="CBD5E1"/>
-                </a:solidFill>
-              </a:defRPr>
-            </a:pPr>
-            <a:r>
-              <a:t>InternHub — College Internship Management System</a:t>
-            </a:r>
-          </a:p>
-        </p:txBody>
-      </p:sp>
-      <p:sp>
-        <p:nvSpPr>
-          <p:cNvPr id="4" name="Rounded Rectangle 3"/>
+          <p:cNvPr id="3" name="Rounded Rectangle 2"/>
           <p:cNvSpPr/>
           <p:nvPr/>
         </p:nvSpPr>
         <p:spPr>
           <a:xfrm>
-            <a:off x="2286000" y="4114800"/>
-            <a:ext cx="7619695" cy="1828800"/>
+            <a:off x="914400" y="1097280"/>
+            <a:ext cx="4937760" cy="4754880"/>
           </a:xfrm>
           <a:prstGeom prst="roundRect">
             <a:avLst/>
@@ -4199,58 +3494,183 @@
           </a:fontRef>
         </p:style>
         <p:txBody>
-          <a:bodyPr wrap="square" tIns="228600" rtlCol="0" anchor="ctr"/>
+          <a:bodyPr wrap="square" lIns="320040" tIns="274320" rIns="320040" rtlCol="0" anchor="ctr"/>
           <a:lstStyle/>
           <a:p>
             <a:pPr algn="ctr">
-              <a:defRPr sz="1400" b="1">
+              <a:defRPr sz="1800" b="1">
+                <a:solidFill>
+                  <a:srgbClr val="93C5FD"/>
+                </a:solidFill>
+              </a:defRPr>
+            </a:pPr>
+            <a:r>
+              <a:t>🎯 Project Conclusion</a:t>
+            </a:r>
+          </a:p>
+          <a:p>
+            <a:pPr>
+              <a:spcBef>
+                <a:spcPts val="1400"/>
+              </a:spcBef>
+              <a:defRPr sz="1150">
+                <a:solidFill>
+                  <a:srgbClr val="E2E8F0"/>
+                </a:solidFill>
+              </a:defRPr>
+            </a:pPr>
+            <a:r>
+              <a:t>• Solves a Real Problem: Replaces slow, manual paper circulars with an easy, centralized website.</a:t>
+            </a:r>
+          </a:p>
+          <a:p>
+            <a:pPr>
+              <a:spcBef>
+                <a:spcPts val="1400"/>
+              </a:spcBef>
+              <a:defRPr sz="1150">
+                <a:solidFill>
+                  <a:srgbClr val="E2E8F0"/>
+                </a:solidFill>
+              </a:defRPr>
+            </a:pPr>
+            <a:r>
+              <a:t>• Empowers Students: Provides full transparency with 1-click apply, real-time status tracking, and instant alerts.</a:t>
+            </a:r>
+          </a:p>
+          <a:p>
+            <a:pPr>
+              <a:spcBef>
+                <a:spcPts val="1400"/>
+              </a:spcBef>
+              <a:defRPr sz="1150">
+                <a:solidFill>
+                  <a:srgbClr val="E2E8F0"/>
+                </a:solidFill>
+              </a:defRPr>
+            </a:pPr>
+            <a:r>
+              <a:t>• Reduces Staff Workload: Cuts down coordinator effort and completely prevents duplicate applications.</a:t>
+            </a:r>
+          </a:p>
+          <a:p>
+            <a:pPr>
+              <a:spcBef>
+                <a:spcPts val="1400"/>
+              </a:spcBef>
+              <a:defRPr sz="1150">
+                <a:solidFill>
+                  <a:srgbClr val="E2E8F0"/>
+                </a:solidFill>
+              </a:defRPr>
+            </a:pPr>
+            <a:r>
+              <a:t>• Clean Architecture: Built on Django's proven MVT architecture with a safe, normalized MySQL database.</a:t>
+            </a:r>
+          </a:p>
+        </p:txBody>
+      </p:sp>
+      <p:sp>
+        <p:nvSpPr>
+          <p:cNvPr id="4" name="Rounded Rectangle 3"/>
+          <p:cNvSpPr/>
+          <p:nvPr/>
+        </p:nvSpPr>
+        <p:spPr>
+          <a:xfrm>
+            <a:off x="6309360" y="1097280"/>
+            <a:ext cx="4937760" cy="4754880"/>
+          </a:xfrm>
+          <a:prstGeom prst="roundRect">
+            <a:avLst/>
+          </a:prstGeom>
+          <a:solidFill>
+            <a:srgbClr val="1E293B"/>
+          </a:solidFill>
+          <a:ln w="15240">
+            <a:solidFill>
+              <a:srgbClr val="334155"/>
+            </a:solidFill>
+          </a:ln>
+        </p:spPr>
+        <p:style>
+          <a:lnRef idx="1">
+            <a:schemeClr val="accent1"/>
+          </a:lnRef>
+          <a:fillRef idx="3">
+            <a:schemeClr val="accent1"/>
+          </a:fillRef>
+          <a:effectRef idx="2">
+            <a:schemeClr val="accent1"/>
+          </a:effectRef>
+          <a:fontRef idx="minor">
+            <a:schemeClr val="lt1"/>
+          </a:fontRef>
+        </p:style>
+        <p:txBody>
+          <a:bodyPr wrap="square" lIns="320040" tIns="457200" rIns="320040" rtlCol="0" anchor="ctr"/>
+          <a:lstStyle/>
+          <a:p>
+            <a:pPr algn="ctr">
+              <a:defRPr sz="4000" b="1">
                 <a:solidFill>
                   <a:srgbClr val="FFFFFF"/>
                 </a:solidFill>
               </a:defRPr>
             </a:pPr>
             <a:r>
-              <a:t>HISANA HAMZA  |  Register No: MEA25MCA-2010</a:t>
+              <a:t>Thank You!</a:t>
             </a:r>
           </a:p>
           <a:p>
             <a:pPr algn="ctr">
               <a:spcBef>
-                <a:spcPts val="400"/>
-              </a:spcBef>
-              <a:defRPr sz="1200">
+                <a:spcPts val="1000"/>
+              </a:spcBef>
+              <a:defRPr sz="1800" b="1">
+                <a:solidFill>
+                  <a:srgbClr val="93C5FD"/>
+                </a:solidFill>
+              </a:defRPr>
+            </a:pPr>
+            <a:r>
+              <a:t>Any Questions or Comments?</a:t>
+            </a:r>
+          </a:p>
+          <a:p>
+            <a:pPr algn="ctr">
+              <a:spcBef>
+                <a:spcPts val="1400"/>
+              </a:spcBef>
+              <a:defRPr sz="1300">
                 <a:solidFill>
                   <a:srgbClr val="CBD5E1"/>
                 </a:solidFill>
               </a:defRPr>
             </a:pPr>
             <a:r>
-              <a:t>Project Guide: Mr. Adil Narakkoden, Assistant Professor</a:t>
+              <a:t>InternHub — College Internship Management System</a:t>
             </a:r>
           </a:p>
           <a:p>
             <a:pPr algn="ctr">
               <a:spcBef>
-                <a:spcPts val="400"/>
-              </a:spcBef>
-              <a:defRPr sz="1200">
-                <a:solidFill>
-                  <a:srgbClr val="93C5FD"/>
-                </a:solidFill>
-              </a:defRPr>
-            </a:pPr>
-            <a:r>
-              <a:t>Department of Computer Applications — MEA Engineering College, Perinthalmanna</a:t>
-            </a:r>
-          </a:p>
-          <a:p>
-            <a:pPr algn="ctr">
-              <a:defRPr sz="1100">
+                <a:spcPts val="2000"/>
+              </a:spcBef>
+              <a:defRPr sz="1150">
                 <a:solidFill>
                   <a:srgbClr val="94A3B8"/>
                 </a:solidFill>
               </a:defRPr>
             </a:pPr>
+            <a:r>
+              <a:t>HISANA HAMZA  |  MEA25MCA-2010</a:t>
+            </a:r>
+            <a:br/>
+            <a:r>
+              <a:t>MEA Engineering College, Perinthalmanna</a:t>
+            </a:r>
+            <a:br/>
             <a:r>
               <a:t>APJ Abdul Kalam Technological University (KTU)</a:t>
             </a:r>
@@ -4291,8 +3711,8 @@
         </p:nvSpPr>
         <p:spPr>
           <a:xfrm>
-            <a:off x="731520" y="411480"/>
-            <a:ext cx="10698480" cy="320040"/>
+            <a:off x="731520" y="365760"/>
+            <a:ext cx="10698480" cy="274320"/>
           </a:xfrm>
           <a:prstGeom prst="rect">
             <a:avLst/>
@@ -4313,7 +3733,7 @@
               </a:defRPr>
             </a:pPr>
             <a:r>
-              <a:t>INTRODUCTION</a:t>
+              <a:t>SLIDE 2 • INTRODUCTION</a:t>
             </a:r>
           </a:p>
         </p:txBody>
@@ -4326,8 +3746,8 @@
         </p:nvSpPr>
         <p:spPr>
           <a:xfrm>
-            <a:off x="731520" y="685800"/>
-            <a:ext cx="10698480" cy="640080"/>
+            <a:off x="731520" y="640080"/>
+            <a:ext cx="10698480" cy="548640"/>
           </a:xfrm>
           <a:prstGeom prst="rect">
             <a:avLst/>
@@ -4361,8 +3781,8 @@
         </p:nvSpPr>
         <p:spPr>
           <a:xfrm>
-            <a:off x="731520" y="1325880"/>
-            <a:ext cx="10698480" cy="365760"/>
+            <a:off x="731520" y="1234440"/>
+            <a:ext cx="10698480" cy="320040"/>
           </a:xfrm>
           <a:prstGeom prst="rect">
             <a:avLst/>
@@ -4383,7 +3803,7 @@
               </a:defRPr>
             </a:pPr>
             <a:r>
-              <a:t>Context, purpose, and significance of InternHub</a:t>
+              <a:t>What is InternHub and why was it created?</a:t>
             </a:r>
           </a:p>
         </p:txBody>
@@ -4396,7 +3816,7 @@
         </p:nvSpPr>
         <p:spPr>
           <a:xfrm>
-            <a:off x="731520" y="1691640"/>
+            <a:off x="731520" y="1600200"/>
             <a:ext cx="10728655" cy="18288"/>
           </a:xfrm>
           <a:prstGeom prst="rect">
@@ -4439,8 +3859,8 @@
         </p:nvSpPr>
         <p:spPr>
           <a:xfrm>
-            <a:off x="731520" y="1920240"/>
-            <a:ext cx="5212080" cy="4389120"/>
+            <a:off x="731520" y="1828800"/>
+            <a:ext cx="5212080" cy="4480560"/>
           </a:xfrm>
           <a:prstGeom prst="roundRect">
             <a:avLst/>
@@ -4469,7 +3889,7 @@
           </a:fontRef>
         </p:style>
         <p:txBody>
-          <a:bodyPr wrap="square" lIns="274320" tIns="274320" rIns="274320" rtlCol="0" anchor="ctr"/>
+          <a:bodyPr wrap="square" lIns="320040" tIns="274320" rIns="320040" rtlCol="0" anchor="ctr"/>
           <a:lstStyle/>
           <a:p>
             <a:pPr algn="ctr">
@@ -4480,67 +3900,67 @@
               </a:defRPr>
             </a:pPr>
             <a:r>
-              <a:t>📌 Background &amp; Context</a:t>
-            </a:r>
-          </a:p>
-          <a:p>
-            <a:pPr>
-              <a:spcBef>
-                <a:spcPts val="1000"/>
-              </a:spcBef>
-              <a:defRPr sz="1100">
+              <a:t>💡 What is InternHub?</a:t>
+            </a:r>
+          </a:p>
+          <a:p>
+            <a:pPr>
+              <a:spcBef>
+                <a:spcPts val="1200"/>
+              </a:spcBef>
+              <a:defRPr sz="1150">
                 <a:solidFill>
                   <a:srgbClr val="1E293B"/>
                 </a:solidFill>
               </a:defRPr>
             </a:pPr>
             <a:r>
-              <a:t>• Industry-Academia Bridge: Internships offer students crucial exposure to real-world software workflows, hands-on development, and professional workplace standards.</a:t>
-            </a:r>
-          </a:p>
-          <a:p>
-            <a:pPr>
-              <a:spcBef>
-                <a:spcPts val="1000"/>
-              </a:spcBef>
-              <a:defRPr sz="1100">
+              <a:t>• A Centralized Website: InternHub is an easy-to-use web application built for college students and placement coordinators.</a:t>
+            </a:r>
+          </a:p>
+          <a:p>
+            <a:pPr>
+              <a:spcBef>
+                <a:spcPts val="1200"/>
+              </a:spcBef>
+              <a:defRPr sz="1150">
                 <a:solidFill>
                   <a:srgbClr val="1E293B"/>
                 </a:solidFill>
               </a:defRPr>
             </a:pPr>
             <a:r>
-              <a:t>• Fragmented Information: In traditional college settings, opportunities are circulated haphazardly across notice boards, disparate messaging channels, and forwarded emails.</a:t>
-            </a:r>
-          </a:p>
-          <a:p>
-            <a:pPr>
-              <a:spcBef>
-                <a:spcPts val="1000"/>
-              </a:spcBef>
-              <a:defRPr sz="1100">
+              <a:t>• One Single Platform: It brings all available internship openings into one organized website instead of keeping them on notice boards.</a:t>
+            </a:r>
+          </a:p>
+          <a:p>
+            <a:pPr>
+              <a:spcBef>
+                <a:spcPts val="1200"/>
+              </a:spcBef>
+              <a:defRPr sz="1150">
                 <a:solidFill>
                   <a:srgbClr val="1E293B"/>
                 </a:solidFill>
               </a:defRPr>
             </a:pPr>
             <a:r>
-              <a:t>• Lack of Direct Tracking: Students frequently lose track of their application status and deadlines, while placement coordinators struggle with disorganized records.</a:t>
-            </a:r>
-          </a:p>
-          <a:p>
-            <a:pPr>
-              <a:spcBef>
-                <a:spcPts val="1000"/>
-              </a:spcBef>
-              <a:defRPr sz="1100">
+              <a:t>• Direct Online Apply: Students can easily register, view job details, and apply online with a single click.</a:t>
+            </a:r>
+          </a:p>
+          <a:p>
+            <a:pPr>
+              <a:spcBef>
+                <a:spcPts val="1200"/>
+              </a:spcBef>
+              <a:defRPr sz="1150">
                 <a:solidFill>
                   <a:srgbClr val="1E293B"/>
                 </a:solidFill>
               </a:defRPr>
             </a:pPr>
             <a:r>
-              <a:t>• Administrative Overload: Manually gathering resumes, filtering applicants, and publishing updates via spreadsheets causes significant communication bottlenecks.</a:t>
+              <a:t>• Live Status Tracking: Students can check whether their application is Pending, Shortlisted, Selected, or Rejected in real time.</a:t>
             </a:r>
           </a:p>
         </p:txBody>
@@ -4553,8 +3973,8 @@
         </p:nvSpPr>
         <p:spPr>
           <a:xfrm>
-            <a:off x="6217920" y="1920240"/>
-            <a:ext cx="5212080" cy="4389120"/>
+            <a:off x="6217920" y="1828800"/>
+            <a:ext cx="5212080" cy="4480560"/>
           </a:xfrm>
           <a:prstGeom prst="roundRect">
             <a:avLst/>
@@ -4583,7 +4003,7 @@
           </a:fontRef>
         </p:style>
         <p:txBody>
-          <a:bodyPr wrap="square" lIns="274320" tIns="274320" rIns="274320" rtlCol="0" anchor="ctr"/>
+          <a:bodyPr wrap="square" lIns="320040" tIns="274320" rIns="320040" rtlCol="0" anchor="ctr"/>
           <a:lstStyle/>
           <a:p>
             <a:pPr algn="ctr">
@@ -4594,67 +4014,67 @@
               </a:defRPr>
             </a:pPr>
             <a:r>
-              <a:t>🚀 InternHub Solution</a:t>
-            </a:r>
-          </a:p>
-          <a:p>
-            <a:pPr>
-              <a:spcBef>
-                <a:spcPts val="1000"/>
-              </a:spcBef>
-              <a:defRPr sz="1100">
+              <a:t>❓ Why is it Needed?</a:t>
+            </a:r>
+          </a:p>
+          <a:p>
+            <a:pPr>
+              <a:spcBef>
+                <a:spcPts val="1200"/>
+              </a:spcBef>
+              <a:defRPr sz="1150">
                 <a:solidFill>
                   <a:srgbClr val="1E293B"/>
                 </a:solidFill>
               </a:defRPr>
             </a:pPr>
             <a:r>
-              <a:t>• Centralized Campus Portal: A unified, responsive web portal bringing verified internship listings directly to students in an accessible, structured environment.</a:t>
-            </a:r>
-          </a:p>
-          <a:p>
-            <a:pPr>
-              <a:spcBef>
-                <a:spcPts val="1000"/>
-              </a:spcBef>
-              <a:defRPr sz="1100">
+              <a:t>• Lost Opportunities: In colleges, internship news is often shared across WhatsApp groups or physical notices. Many students miss them.</a:t>
+            </a:r>
+          </a:p>
+          <a:p>
+            <a:pPr>
+              <a:spcBef>
+                <a:spcPts val="1200"/>
+              </a:spcBef>
+              <a:defRPr sz="1150">
                 <a:solidFill>
                   <a:srgbClr val="1E293B"/>
                 </a:solidFill>
               </a:defRPr>
             </a:pPr>
             <a:r>
-              <a:t>• Seamless Student Journey: Enables students to register, manage profiles, search listings using multi-field keywords, and apply with a single click.</a:t>
-            </a:r>
-          </a:p>
-          <a:p>
-            <a:pPr>
-              <a:spcBef>
-                <a:spcPts val="1000"/>
-              </a:spcBef>
-              <a:defRPr sz="1100">
+              <a:t>• Manual Paperwork: Collecting printed resumes and filling Google Forms creates confusion and delays.</a:t>
+            </a:r>
+          </a:p>
+          <a:p>
+            <a:pPr>
+              <a:spcBef>
+                <a:spcPts val="1200"/>
+              </a:spcBef>
+              <a:defRPr sz="1150">
                 <a:solidFill>
                   <a:srgbClr val="1E293B"/>
                 </a:solidFill>
               </a:defRPr>
             </a:pPr>
             <a:r>
-              <a:t>• Automated Feedback Loop: Eliminates uncertainty by providing live application tracking (Pending, Under Review, Shortlisted, Selected, Rejected) and in-app alerts.</a:t>
-            </a:r>
-          </a:p>
-          <a:p>
-            <a:pPr>
-              <a:spcBef>
-                <a:spcPts val="1000"/>
-              </a:spcBef>
-              <a:defRPr sz="1100">
+              <a:t>• No Updates for Students: After applying, students do not know if they were shortlisted or rejected.</a:t>
+            </a:r>
+          </a:p>
+          <a:p>
+            <a:pPr>
+              <a:spcBef>
+                <a:spcPts val="1200"/>
+              </a:spcBef>
+              <a:defRPr sz="1150">
                 <a:solidFill>
                   <a:srgbClr val="1E293B"/>
                 </a:solidFill>
               </a:defRPr>
             </a:pPr>
             <a:r>
-              <a:t>• Robust Administrative Control: Provides staff and coordinators full control via Django's secure admin interface to moderate listings and track candidates efficiently.</a:t>
+              <a:t>• Heavy Work for Staff: Teachers and placement officers have to manually track hundreds of student applications in Excel sheets.</a:t>
             </a:r>
           </a:p>
         </p:txBody>
@@ -4693,8 +4113,8 @@
         </p:nvSpPr>
         <p:spPr>
           <a:xfrm>
-            <a:off x="731520" y="411480"/>
-            <a:ext cx="10698480" cy="320040"/>
+            <a:off x="731520" y="365760"/>
+            <a:ext cx="10698480" cy="274320"/>
           </a:xfrm>
           <a:prstGeom prst="rect">
             <a:avLst/>
@@ -4715,7 +4135,7 @@
               </a:defRPr>
             </a:pPr>
             <a:r>
-              <a:t>PROJECT SCOPE</a:t>
+              <a:t>SLIDE 3 • GOALS</a:t>
             </a:r>
           </a:p>
         </p:txBody>
@@ -4728,8 +4148,8 @@
         </p:nvSpPr>
         <p:spPr>
           <a:xfrm>
-            <a:off x="731520" y="685800"/>
-            <a:ext cx="10698480" cy="640080"/>
+            <a:off x="731520" y="640080"/>
+            <a:ext cx="10698480" cy="548640"/>
           </a:xfrm>
           <a:prstGeom prst="rect">
             <a:avLst/>
@@ -4763,8 +4183,8 @@
         </p:nvSpPr>
         <p:spPr>
           <a:xfrm>
-            <a:off x="731520" y="1325880"/>
-            <a:ext cx="10698480" cy="365760"/>
+            <a:off x="731520" y="1234440"/>
+            <a:ext cx="10698480" cy="320040"/>
           </a:xfrm>
           <a:prstGeom prst="rect">
             <a:avLst/>
@@ -4785,7 +4205,7 @@
               </a:defRPr>
             </a:pPr>
             <a:r>
-              <a:t>Core strategic goals addressed by the InternHub platform</a:t>
+              <a:t>The main aims of the InternHub system</a:t>
             </a:r>
           </a:p>
         </p:txBody>
@@ -4798,7 +4218,7 @@
         </p:nvSpPr>
         <p:spPr>
           <a:xfrm>
-            <a:off x="731520" y="1691640"/>
+            <a:off x="731520" y="1600200"/>
             <a:ext cx="10728655" cy="18288"/>
           </a:xfrm>
           <a:prstGeom prst="rect">
@@ -4841,8 +4261,8 @@
         </p:nvSpPr>
         <p:spPr>
           <a:xfrm>
-            <a:off x="731520" y="1920240"/>
-            <a:ext cx="3474720" cy="2057400"/>
+            <a:off x="731520" y="1828800"/>
+            <a:ext cx="3474720" cy="2103120"/>
           </a:xfrm>
           <a:prstGeom prst="roundRect">
             <a:avLst/>
@@ -4875,14 +4295,14 @@
           <a:lstStyle/>
           <a:p>
             <a:pPr algn="ctr">
-              <a:defRPr sz="1300" b="1">
+              <a:defRPr sz="1400" b="1">
                 <a:solidFill>
                   <a:srgbClr val="1F3C88"/>
                 </a:solidFill>
               </a:defRPr>
             </a:pPr>
             <a:r>
-              <a:t>🎯 Centralize Opportunity Discovery</a:t>
+              <a:t>🎯 Centralize Listings</a:t>
             </a:r>
           </a:p>
           <a:p>
@@ -4897,7 +4317,7 @@
               </a:defRPr>
             </a:pPr>
             <a:r>
-              <a:t>Provide a single authoritative platform where verified company internships are listed with comprehensive details (stipend, duration, location, required skills, and deadline).</a:t>
+              <a:t>Bring all college internship opportunities into one website with clear details like stipend, duration, and last date to apply.</a:t>
             </a:r>
           </a:p>
         </p:txBody>
@@ -4910,8 +4330,8 @@
         </p:nvSpPr>
         <p:spPr>
           <a:xfrm>
-            <a:off x="4370832" y="1920240"/>
-            <a:ext cx="3474720" cy="2057400"/>
+            <a:off x="4370832" y="1828800"/>
+            <a:ext cx="3474720" cy="2103120"/>
           </a:xfrm>
           <a:prstGeom prst="roundRect">
             <a:avLst/>
@@ -4944,14 +4364,14 @@
           <a:lstStyle/>
           <a:p>
             <a:pPr algn="ctr">
-              <a:defRPr sz="1300" b="1">
+              <a:defRPr sz="1400" b="1">
                 <a:solidFill>
                   <a:srgbClr val="1F3C88"/>
                 </a:solidFill>
               </a:defRPr>
             </a:pPr>
             <a:r>
-              <a:t>⚡ Streamline Online Applications</a:t>
+              <a:t>⚡ 1-Click Online Apply</a:t>
             </a:r>
           </a:p>
           <a:p>
@@ -4966,7 +4386,7 @@
               </a:defRPr>
             </a:pPr>
             <a:r>
-              <a:t>Eliminate manual paperwork and email submissions by providing a quick, authenticated one-click application process directly linked to student academic profiles.</a:t>
+              <a:t>Allow students to apply directly online without paperwork, automatically attaching their student academic profile.</a:t>
             </a:r>
           </a:p>
         </p:txBody>
@@ -4979,8 +4399,8 @@
         </p:nvSpPr>
         <p:spPr>
           <a:xfrm>
-            <a:off x="8010144" y="1920240"/>
-            <a:ext cx="3474720" cy="2057400"/>
+            <a:off x="8010144" y="1828800"/>
+            <a:ext cx="3474720" cy="2103120"/>
           </a:xfrm>
           <a:prstGeom prst="roundRect">
             <a:avLst/>
@@ -5013,14 +4433,14 @@
           <a:lstStyle/>
           <a:p>
             <a:pPr algn="ctr">
-              <a:defRPr sz="1300" b="1">
+              <a:defRPr sz="1400" b="1">
                 <a:solidFill>
                   <a:srgbClr val="1F3C88"/>
                 </a:solidFill>
               </a:defRPr>
             </a:pPr>
             <a:r>
-              <a:t>📊 Real-Time Application Tracking</a:t>
+              <a:t>📊 Real-Time Status Tracking</a:t>
             </a:r>
           </a:p>
           <a:p>
@@ -5035,7 +4455,7 @@
               </a:defRPr>
             </a:pPr>
             <a:r>
-              <a:t>Offer students complete transparency into their application journey through a dynamic dashboard displaying real-time statuses (Pending, Shortlisted, Selected, Rejected).</a:t>
+              <a:t>Give students complete transparency so they can see their application status (Pending, Shortlisted, Selected, Rejected).</a:t>
             </a:r>
           </a:p>
         </p:txBody>
@@ -5048,8 +4468,8 @@
         </p:nvSpPr>
         <p:spPr>
           <a:xfrm>
-            <a:off x="731520" y="4160520"/>
-            <a:ext cx="3474720" cy="2057400"/>
+            <a:off x="731520" y="4114800"/>
+            <a:ext cx="3474720" cy="2103120"/>
           </a:xfrm>
           <a:prstGeom prst="roundRect">
             <a:avLst/>
@@ -5082,14 +4502,14 @@
           <a:lstStyle/>
           <a:p>
             <a:pPr algn="ctr">
-              <a:defRPr sz="1300" b="1">
+              <a:defRPr sz="1400" b="1">
                 <a:solidFill>
                   <a:srgbClr val="1F3C88"/>
                 </a:solidFill>
               </a:defRPr>
             </a:pPr>
             <a:r>
-              <a:t>🛡️ Ensure Strict Data Integrity</a:t>
+              <a:t>🛡️ Prevent Duplicate Applies</a:t>
             </a:r>
           </a:p>
           <a:p>
@@ -5104,7 +4524,7 @@
               </a:defRPr>
             </a:pPr>
             <a:r>
-              <a:t>Enforce database-level unique constraints to prevent duplicate applications for the same opening, ensuring clean, fair, and reliable records.</a:t>
+              <a:t>Automatically stop students from accidentally applying twice for the same internship opening.</a:t>
             </a:r>
           </a:p>
         </p:txBody>
@@ -5117,8 +4537,8 @@
         </p:nvSpPr>
         <p:spPr>
           <a:xfrm>
-            <a:off x="4370832" y="4160520"/>
-            <a:ext cx="3474720" cy="2057400"/>
+            <a:off x="4370832" y="4114800"/>
+            <a:ext cx="3474720" cy="2103120"/>
           </a:xfrm>
           <a:prstGeom prst="roundRect">
             <a:avLst/>
@@ -5151,14 +4571,14 @@
           <a:lstStyle/>
           <a:p>
             <a:pPr algn="ctr">
-              <a:defRPr sz="1300" b="1">
+              <a:defRPr sz="1400" b="1">
                 <a:solidFill>
                   <a:srgbClr val="1F3C88"/>
                 </a:solidFill>
               </a:defRPr>
             </a:pPr>
             <a:r>
-              <a:t>🔔 Instant Notification Mechanism</a:t>
+              <a:t>🔔 In-App Notifications</a:t>
             </a:r>
           </a:p>
           <a:p>
@@ -5173,7 +4593,7 @@
               </a:defRPr>
             </a:pPr>
             <a:r>
-              <a:t>Keep students informed immediately about their submission confirmations and subsequent status transitions through an integrated in-app notification center.</a:t>
+              <a:t>Send instant alerts to students inside the app whenever their application status is updated by the coordinator.</a:t>
             </a:r>
           </a:p>
         </p:txBody>
@@ -5186,8 +4606,8 @@
         </p:nvSpPr>
         <p:spPr>
           <a:xfrm>
-            <a:off x="8010144" y="4160520"/>
-            <a:ext cx="3474720" cy="2057400"/>
+            <a:off x="8010144" y="4114800"/>
+            <a:ext cx="3474720" cy="2103120"/>
           </a:xfrm>
           <a:prstGeom prst="roundRect">
             <a:avLst/>
@@ -5220,14 +4640,14 @@
           <a:lstStyle/>
           <a:p>
             <a:pPr algn="ctr">
-              <a:defRPr sz="1300" b="1">
+              <a:defRPr sz="1400" b="1">
                 <a:solidFill>
                   <a:srgbClr val="1F3C88"/>
                 </a:solidFill>
               </a:defRPr>
             </a:pPr>
             <a:r>
-              <a:t>⚙️ Empower Placement Coordinators</a:t>
+              <a:t>🛠️ Simplify Admin Work</a:t>
             </a:r>
           </a:p>
           <a:p>
@@ -5242,7 +4662,7 @@
               </a:defRPr>
             </a:pPr>
             <a:r>
-              <a:t>Provide administrative personnel with robust CRUD capabilities for managing job listings, monitoring registered students, and reviewing applications seamlessly.</a:t>
+              <a:t>Provide college administrators an easy control panel to post internships, view applicants, and update hiring statuses.</a:t>
             </a:r>
           </a:p>
         </p:txBody>
@@ -5281,8 +4701,8 @@
         </p:nvSpPr>
         <p:spPr>
           <a:xfrm>
-            <a:off x="731520" y="411480"/>
-            <a:ext cx="10698480" cy="320040"/>
+            <a:off x="731520" y="365760"/>
+            <a:ext cx="10698480" cy="274320"/>
           </a:xfrm>
           <a:prstGeom prst="rect">
             <a:avLst/>
@@ -5303,7 +4723,7 @@
               </a:defRPr>
             </a:pPr>
             <a:r>
-              <a:t>FUNCTIONALITY</a:t>
+              <a:t>SLIDE 4 • ANALYSIS</a:t>
             </a:r>
           </a:p>
         </p:txBody>
@@ -5316,8 +4736,8 @@
         </p:nvSpPr>
         <p:spPr>
           <a:xfrm>
-            <a:off x="731520" y="685800"/>
-            <a:ext cx="10698480" cy="640080"/>
+            <a:off x="731520" y="640080"/>
+            <a:ext cx="10698480" cy="548640"/>
           </a:xfrm>
           <a:prstGeom prst="rect">
             <a:avLst/>
@@ -5338,7 +4758,7 @@
               </a:defRPr>
             </a:pPr>
             <a:r>
-              <a:t>Core System Features</a:t>
+              <a:t>Existing System vs. Proposed System</a:t>
             </a:r>
           </a:p>
         </p:txBody>
@@ -5351,8 +4771,8 @@
         </p:nvSpPr>
         <p:spPr>
           <a:xfrm>
-            <a:off x="731520" y="1325880"/>
-            <a:ext cx="10698480" cy="365760"/>
+            <a:off x="731520" y="1234440"/>
+            <a:ext cx="10698480" cy="320040"/>
           </a:xfrm>
           <a:prstGeom prst="rect">
             <a:avLst/>
@@ -5373,7 +4793,7 @@
               </a:defRPr>
             </a:pPr>
             <a:r>
-              <a:t>Comprehensive capabilities designed for students and administrators</a:t>
+              <a:t>How InternHub improves the old manual way of managing internships</a:t>
             </a:r>
           </a:p>
         </p:txBody>
@@ -5386,7 +4806,7 @@
         </p:nvSpPr>
         <p:spPr>
           <a:xfrm>
-            <a:off x="731520" y="1691640"/>
+            <a:off x="731520" y="1600200"/>
             <a:ext cx="10728655" cy="18288"/>
           </a:xfrm>
           <a:prstGeom prst="rect">
@@ -5429,18 +4849,18 @@
         </p:nvSpPr>
         <p:spPr>
           <a:xfrm>
-            <a:off x="731520" y="1920240"/>
-            <a:ext cx="3474720" cy="2057400"/>
+            <a:off x="731520" y="1828800"/>
+            <a:ext cx="5212080" cy="4480560"/>
           </a:xfrm>
           <a:prstGeom prst="roundRect">
             <a:avLst/>
           </a:prstGeom>
           <a:solidFill>
-            <a:srgbClr val="FFFFFF"/>
+            <a:srgbClr val="FFF1F2"/>
           </a:solidFill>
           <a:ln w="15240">
             <a:solidFill>
-              <a:srgbClr val="E2E8F0"/>
+              <a:srgbClr val="FECDD3"/>
             </a:solidFill>
           </a:ln>
         </p:spPr>
@@ -5459,24 +4879,24 @@
           </a:fontRef>
         </p:style>
         <p:txBody>
-          <a:bodyPr wrap="square" lIns="228600" tIns="228600" rIns="228600" rtlCol="0" anchor="ctr"/>
+          <a:bodyPr wrap="square" lIns="320040" tIns="274320" rIns="320040" rtlCol="0" anchor="ctr"/>
           <a:lstStyle/>
           <a:p>
             <a:pPr algn="ctr">
-              <a:defRPr sz="1300" b="1">
-                <a:solidFill>
-                  <a:srgbClr val="1F3C88"/>
-                </a:solidFill>
-              </a:defRPr>
-            </a:pPr>
-            <a:r>
-              <a:t>🔐 Secure Student Authentication</a:t>
-            </a:r>
-          </a:p>
-          <a:p>
-            <a:pPr>
-              <a:spcBef>
-                <a:spcPts val="800"/>
+              <a:defRPr sz="1500" b="1">
+                <a:solidFill>
+                  <a:srgbClr val="DC2626"/>
+                </a:solidFill>
+              </a:defRPr>
+            </a:pPr>
+            <a:r>
+              <a:t>❌ Existing System (Manual Process)</a:t>
+            </a:r>
+          </a:p>
+          <a:p>
+            <a:pPr>
+              <a:spcBef>
+                <a:spcPts val="1000"/>
               </a:spcBef>
               <a:defRPr sz="1100">
                 <a:solidFill>
@@ -5485,7 +4905,67 @@
               </a:defRPr>
             </a:pPr>
             <a:r>
-              <a:t>Secure sign-up and login mechanism powered by Django Auth, featuring hashed passwords and protected student sessions.</a:t>
+              <a:t>• Scattered Notices: Jobs posted on physical boards or forwarded in WhatsApp groups; easily missed by students.</a:t>
+            </a:r>
+          </a:p>
+          <a:p>
+            <a:pPr>
+              <a:spcBef>
+                <a:spcPts val="1000"/>
+              </a:spcBef>
+              <a:defRPr sz="1100">
+                <a:solidFill>
+                  <a:srgbClr val="1E293B"/>
+                </a:solidFill>
+              </a:defRPr>
+            </a:pPr>
+            <a:r>
+              <a:t>• Manual Submissions: Resumes submitted via paper copies or messy email inboxes.</a:t>
+            </a:r>
+          </a:p>
+          <a:p>
+            <a:pPr>
+              <a:spcBef>
+                <a:spcPts val="1000"/>
+              </a:spcBef>
+              <a:defRPr sz="1100">
+                <a:solidFill>
+                  <a:srgbClr val="1E293B"/>
+                </a:solidFill>
+              </a:defRPr>
+            </a:pPr>
+            <a:r>
+              <a:t>• Zero Status Visibility: Students have no way to know if their application was checked, accepted, or rejected.</a:t>
+            </a:r>
+          </a:p>
+          <a:p>
+            <a:pPr>
+              <a:spcBef>
+                <a:spcPts val="1000"/>
+              </a:spcBef>
+              <a:defRPr sz="1100">
+                <a:solidFill>
+                  <a:srgbClr val="1E293B"/>
+                </a:solidFill>
+              </a:defRPr>
+            </a:pPr>
+            <a:r>
+              <a:t>• Duplicate Applications: Students re-apply multiple times by mistake, confusing the coordinators.</a:t>
+            </a:r>
+          </a:p>
+          <a:p>
+            <a:pPr>
+              <a:spcBef>
+                <a:spcPts val="1000"/>
+              </a:spcBef>
+              <a:defRPr sz="1100">
+                <a:solidFill>
+                  <a:srgbClr val="1E293B"/>
+                </a:solidFill>
+              </a:defRPr>
+            </a:pPr>
+            <a:r>
+              <a:t>• Heavy Manual Work: Staff must record everything manually in Excel, causing delays and errors.</a:t>
             </a:r>
           </a:p>
         </p:txBody>
@@ -5498,18 +4978,18 @@
         </p:nvSpPr>
         <p:spPr>
           <a:xfrm>
-            <a:off x="4370832" y="1920240"/>
-            <a:ext cx="3474720" cy="2057400"/>
+            <a:off x="6217920" y="1828800"/>
+            <a:ext cx="5212080" cy="4480560"/>
           </a:xfrm>
           <a:prstGeom prst="roundRect">
             <a:avLst/>
           </a:prstGeom>
           <a:solidFill>
-            <a:srgbClr val="FFFFFF"/>
+            <a:srgbClr val="F0FDF4"/>
           </a:solidFill>
           <a:ln w="15240">
             <a:solidFill>
-              <a:srgbClr val="E2E8F0"/>
+              <a:srgbClr val="BBF7D0"/>
             </a:solidFill>
           </a:ln>
         </p:spPr>
@@ -5528,24 +5008,24 @@
           </a:fontRef>
         </p:style>
         <p:txBody>
-          <a:bodyPr wrap="square" lIns="228600" tIns="228600" rIns="228600" rtlCol="0" anchor="ctr"/>
+          <a:bodyPr wrap="square" lIns="320040" tIns="274320" rIns="320040" rtlCol="0" anchor="ctr"/>
           <a:lstStyle/>
           <a:p>
             <a:pPr algn="ctr">
-              <a:defRPr sz="1300" b="1">
-                <a:solidFill>
-                  <a:srgbClr val="1F3C88"/>
-                </a:solidFill>
-              </a:defRPr>
-            </a:pPr>
-            <a:r>
-              <a:t>🔎 Smart Keyword Search Filter</a:t>
-            </a:r>
-          </a:p>
-          <a:p>
-            <a:pPr>
-              <a:spcBef>
-                <a:spcPts val="800"/>
+              <a:defRPr sz="1500" b="1">
+                <a:solidFill>
+                  <a:srgbClr val="10955A"/>
+                </a:solidFill>
+              </a:defRPr>
+            </a:pPr>
+            <a:r>
+              <a:t>✅ Proposed System (InternHub)</a:t>
+            </a:r>
+          </a:p>
+          <a:p>
+            <a:pPr>
+              <a:spcBef>
+                <a:spcPts val="1000"/>
               </a:spcBef>
               <a:defRPr sz="1100">
                 <a:solidFill>
@@ -5554,67 +5034,13 @@
               </a:defRPr>
             </a:pPr>
             <a:r>
-              <a:t>Dynamic multi-attribute query engine filtering postings by job title, company name, location, and specific required skills.</a:t>
-            </a:r>
-          </a:p>
-        </p:txBody>
-      </p:sp>
-      <p:sp>
-        <p:nvSpPr>
-          <p:cNvPr id="8" name="Rounded Rectangle 7"/>
-          <p:cNvSpPr/>
-          <p:nvPr/>
-        </p:nvSpPr>
-        <p:spPr>
-          <a:xfrm>
-            <a:off x="8010144" y="1920240"/>
-            <a:ext cx="3474720" cy="2057400"/>
-          </a:xfrm>
-          <a:prstGeom prst="roundRect">
-            <a:avLst/>
-          </a:prstGeom>
-          <a:solidFill>
-            <a:srgbClr val="FFFFFF"/>
-          </a:solidFill>
-          <a:ln w="15240">
-            <a:solidFill>
-              <a:srgbClr val="E2E8F0"/>
-            </a:solidFill>
-          </a:ln>
-        </p:spPr>
-        <p:style>
-          <a:lnRef idx="1">
-            <a:schemeClr val="accent1"/>
-          </a:lnRef>
-          <a:fillRef idx="3">
-            <a:schemeClr val="accent1"/>
-          </a:fillRef>
-          <a:effectRef idx="2">
-            <a:schemeClr val="accent1"/>
-          </a:effectRef>
-          <a:fontRef idx="minor">
-            <a:schemeClr val="lt1"/>
-          </a:fontRef>
-        </p:style>
-        <p:txBody>
-          <a:bodyPr wrap="square" lIns="228600" tIns="228600" rIns="228600" rtlCol="0" anchor="ctr"/>
-          <a:lstStyle/>
-          <a:p>
-            <a:pPr algn="ctr">
-              <a:defRPr sz="1300" b="1">
-                <a:solidFill>
-                  <a:srgbClr val="1F3C88"/>
-                </a:solidFill>
-              </a:defRPr>
-            </a:pPr>
-            <a:r>
-              <a:t>⚡ 1-Click Application Engine</a:t>
-            </a:r>
-          </a:p>
-          <a:p>
-            <a:pPr>
-              <a:spcBef>
-                <a:spcPts val="800"/>
+              <a:t>• Single Central Portal: All internship drives are organized in one clean, searchable website.</a:t>
+            </a:r>
+          </a:p>
+          <a:p>
+            <a:pPr>
+              <a:spcBef>
+                <a:spcPts val="1000"/>
               </a:spcBef>
               <a:defRPr sz="1100">
                 <a:solidFill>
@@ -5623,67 +5049,13 @@
               </a:defRPr>
             </a:pPr>
             <a:r>
-              <a:t>Instant application submission associating verified student profile with targeted opening, complete with duplicate submission checks.</a:t>
-            </a:r>
-          </a:p>
-        </p:txBody>
-      </p:sp>
-      <p:sp>
-        <p:nvSpPr>
-          <p:cNvPr id="9" name="Rounded Rectangle 8"/>
-          <p:cNvSpPr/>
-          <p:nvPr/>
-        </p:nvSpPr>
-        <p:spPr>
-          <a:xfrm>
-            <a:off x="731520" y="4160520"/>
-            <a:ext cx="3474720" cy="2057400"/>
-          </a:xfrm>
-          <a:prstGeom prst="roundRect">
-            <a:avLst/>
-          </a:prstGeom>
-          <a:solidFill>
-            <a:srgbClr val="FFFFFF"/>
-          </a:solidFill>
-          <a:ln w="15240">
-            <a:solidFill>
-              <a:srgbClr val="E2E8F0"/>
-            </a:solidFill>
-          </a:ln>
-        </p:spPr>
-        <p:style>
-          <a:lnRef idx="1">
-            <a:schemeClr val="accent1"/>
-          </a:lnRef>
-          <a:fillRef idx="3">
-            <a:schemeClr val="accent1"/>
-          </a:fillRef>
-          <a:effectRef idx="2">
-            <a:schemeClr val="accent1"/>
-          </a:effectRef>
-          <a:fontRef idx="minor">
-            <a:schemeClr val="lt1"/>
-          </a:fontRef>
-        </p:style>
-        <p:txBody>
-          <a:bodyPr wrap="square" lIns="228600" tIns="228600" rIns="228600" rtlCol="0" anchor="ctr"/>
-          <a:lstStyle/>
-          <a:p>
-            <a:pPr algn="ctr">
-              <a:defRPr sz="1300" b="1">
-                <a:solidFill>
-                  <a:srgbClr val="1F3C88"/>
-                </a:solidFill>
-              </a:defRPr>
-            </a:pPr>
-            <a:r>
-              <a:t>📊 Real-Time Analytics Dashboard</a:t>
-            </a:r>
-          </a:p>
-          <a:p>
-            <a:pPr>
-              <a:spcBef>
-                <a:spcPts val="800"/>
+              <a:t>• 1-Click Digital Apply: Students apply directly using their profile with an instant timestamp.</a:t>
+            </a:r>
+          </a:p>
+          <a:p>
+            <a:pPr>
+              <a:spcBef>
+                <a:spcPts val="1000"/>
               </a:spcBef>
               <a:defRPr sz="1100">
                 <a:solidFill>
@@ -5692,67 +5064,13 @@
               </a:defRPr>
             </a:pPr>
             <a:r>
-              <a:t>Intuitive dashboard providing interactive count cards for Total, Pending, Selected, and Rejected applications.</a:t>
-            </a:r>
-          </a:p>
-        </p:txBody>
-      </p:sp>
-      <p:sp>
-        <p:nvSpPr>
-          <p:cNvPr id="10" name="Rounded Rectangle 9"/>
-          <p:cNvSpPr/>
-          <p:nvPr/>
-        </p:nvSpPr>
-        <p:spPr>
-          <a:xfrm>
-            <a:off x="4370832" y="4160520"/>
-            <a:ext cx="3474720" cy="2057400"/>
-          </a:xfrm>
-          <a:prstGeom prst="roundRect">
-            <a:avLst/>
-          </a:prstGeom>
-          <a:solidFill>
-            <a:srgbClr val="FFFFFF"/>
-          </a:solidFill>
-          <a:ln w="15240">
-            <a:solidFill>
-              <a:srgbClr val="E2E8F0"/>
-            </a:solidFill>
-          </a:ln>
-        </p:spPr>
-        <p:style>
-          <a:lnRef idx="1">
-            <a:schemeClr val="accent1"/>
-          </a:lnRef>
-          <a:fillRef idx="3">
-            <a:schemeClr val="accent1"/>
-          </a:fillRef>
-          <a:effectRef idx="2">
-            <a:schemeClr val="accent1"/>
-          </a:effectRef>
-          <a:fontRef idx="minor">
-            <a:schemeClr val="lt1"/>
-          </a:fontRef>
-        </p:style>
-        <p:txBody>
-          <a:bodyPr wrap="square" lIns="228600" tIns="228600" rIns="228600" rtlCol="0" anchor="ctr"/>
-          <a:lstStyle/>
-          <a:p>
-            <a:pPr algn="ctr">
-              <a:defRPr sz="1300" b="1">
-                <a:solidFill>
-                  <a:srgbClr val="1F3C88"/>
-                </a:solidFill>
-              </a:defRPr>
-            </a:pPr>
-            <a:r>
-              <a:t>🔔 In-App Notification Center</a:t>
-            </a:r>
-          </a:p>
-          <a:p>
-            <a:pPr>
-              <a:spcBef>
-                <a:spcPts val="800"/>
+              <a:t>• Live Progress Tracking: Students can see their current status anytime (Pending, Selected, etc.).</a:t>
+            </a:r>
+          </a:p>
+          <a:p>
+            <a:pPr>
+              <a:spcBef>
+                <a:spcPts val="1000"/>
               </a:spcBef>
               <a:defRPr sz="1100">
                 <a:solidFill>
@@ -5761,67 +5079,13 @@
               </a:defRPr>
             </a:pPr>
             <a:r>
-              <a:t>Automated alert generation for application submissions and coordinator status changes, with read/unread tracking.</a:t>
-            </a:r>
-          </a:p>
-        </p:txBody>
-      </p:sp>
-      <p:sp>
-        <p:nvSpPr>
-          <p:cNvPr id="11" name="Rounded Rectangle 10"/>
-          <p:cNvSpPr/>
-          <p:nvPr/>
-        </p:nvSpPr>
-        <p:spPr>
-          <a:xfrm>
-            <a:off x="8010144" y="4160520"/>
-            <a:ext cx="3474720" cy="2057400"/>
-          </a:xfrm>
-          <a:prstGeom prst="roundRect">
-            <a:avLst/>
-          </a:prstGeom>
-          <a:solidFill>
-            <a:srgbClr val="FFFFFF"/>
-          </a:solidFill>
-          <a:ln w="15240">
-            <a:solidFill>
-              <a:srgbClr val="E2E8F0"/>
-            </a:solidFill>
-          </a:ln>
-        </p:spPr>
-        <p:style>
-          <a:lnRef idx="1">
-            <a:schemeClr val="accent1"/>
-          </a:lnRef>
-          <a:fillRef idx="3">
-            <a:schemeClr val="accent1"/>
-          </a:fillRef>
-          <a:effectRef idx="2">
-            <a:schemeClr val="accent1"/>
-          </a:effectRef>
-          <a:fontRef idx="minor">
-            <a:schemeClr val="lt1"/>
-          </a:fontRef>
-        </p:style>
-        <p:txBody>
-          <a:bodyPr wrap="square" lIns="228600" tIns="228600" rIns="228600" rtlCol="0" anchor="ctr"/>
-          <a:lstStyle/>
-          <a:p>
-            <a:pPr algn="ctr">
-              <a:defRPr sz="1300" b="1">
-                <a:solidFill>
-                  <a:srgbClr val="1F3C88"/>
-                </a:solidFill>
-              </a:defRPr>
-            </a:pPr>
-            <a:r>
-              <a:t>🛠️ Comprehensive Admin Panel</a:t>
-            </a:r>
-          </a:p>
-          <a:p>
-            <a:pPr>
-              <a:spcBef>
-                <a:spcPts val="800"/>
+              <a:t>• Duplicate Protection: The database automatically blocks duplicate applications for the same job.</a:t>
+            </a:r>
+          </a:p>
+          <a:p>
+            <a:pPr>
+              <a:spcBef>
+                <a:spcPts val="1000"/>
               </a:spcBef>
               <a:defRPr sz="1100">
                 <a:solidFill>
@@ -5830,7 +5094,7 @@
               </a:defRPr>
             </a:pPr>
             <a:r>
-              <a:t>Powerful administrative back-office for creating/editing postings, reviewing student data, and updating recruitment statuses.</a:t>
+              <a:t>• Fast Admin Management: Administrators can easily post jobs, review applicants, and send notifications.</a:t>
             </a:r>
           </a:p>
         </p:txBody>
@@ -5869,8 +5133,8 @@
         </p:nvSpPr>
         <p:spPr>
           <a:xfrm>
-            <a:off x="731520" y="411480"/>
-            <a:ext cx="10698480" cy="320040"/>
+            <a:off x="731520" y="365760"/>
+            <a:ext cx="10698480" cy="274320"/>
           </a:xfrm>
           <a:prstGeom prst="rect">
             <a:avLst/>
@@ -5891,7 +5155,7 @@
               </a:defRPr>
             </a:pPr>
             <a:r>
-              <a:t>SYSTEM ANALYSIS</a:t>
+              <a:t>SLIDE 5 • FEATURES</a:t>
             </a:r>
           </a:p>
         </p:txBody>
@@ -5904,8 +5168,8 @@
         </p:nvSpPr>
         <p:spPr>
           <a:xfrm>
-            <a:off x="731520" y="685800"/>
-            <a:ext cx="10698480" cy="640080"/>
+            <a:off x="731520" y="640080"/>
+            <a:ext cx="10698480" cy="548640"/>
           </a:xfrm>
           <a:prstGeom prst="rect">
             <a:avLst/>
@@ -5926,7 +5190,7 @@
               </a:defRPr>
             </a:pPr>
             <a:r>
-              <a:t>Existing System vs. Proposed System</a:t>
+              <a:t>Core Features</a:t>
             </a:r>
           </a:p>
         </p:txBody>
@@ -5939,8 +5203,8 @@
         </p:nvSpPr>
         <p:spPr>
           <a:xfrm>
-            <a:off x="731520" y="1325880"/>
-            <a:ext cx="10698480" cy="365760"/>
+            <a:off x="731520" y="1234440"/>
+            <a:ext cx="10698480" cy="320040"/>
           </a:xfrm>
           <a:prstGeom prst="rect">
             <a:avLst/>
@@ -5961,7 +5225,7 @@
               </a:defRPr>
             </a:pPr>
             <a:r>
-              <a:t>Comparative analysis highlighting key operational improvements</a:t>
+              <a:t>Key capabilities designed for students and administrators</a:t>
             </a:r>
           </a:p>
         </p:txBody>
@@ -5974,7 +5238,7 @@
         </p:nvSpPr>
         <p:spPr>
           <a:xfrm>
-            <a:off x="731520" y="1691640"/>
+            <a:off x="731520" y="1600200"/>
             <a:ext cx="10728655" cy="18288"/>
           </a:xfrm>
           <a:prstGeom prst="rect">
@@ -6017,18 +5281,18 @@
         </p:nvSpPr>
         <p:spPr>
           <a:xfrm>
-            <a:off x="731520" y="1920240"/>
-            <a:ext cx="5212080" cy="4389120"/>
+            <a:off x="731520" y="1828800"/>
+            <a:ext cx="3474720" cy="2103120"/>
           </a:xfrm>
           <a:prstGeom prst="roundRect">
             <a:avLst/>
           </a:prstGeom>
           <a:solidFill>
-            <a:srgbClr val="FFF1F2"/>
+            <a:srgbClr val="FFFFFF"/>
           </a:solidFill>
           <a:ln w="15240">
             <a:solidFill>
-              <a:srgbClr val="FECDD3"/>
+              <a:srgbClr val="E2E8F0"/>
             </a:solidFill>
           </a:ln>
         </p:spPr>
@@ -6047,18 +5311,18 @@
           </a:fontRef>
         </p:style>
         <p:txBody>
-          <a:bodyPr wrap="square" lIns="274320" tIns="274320" rIns="274320" rtlCol="0" anchor="ctr"/>
+          <a:bodyPr wrap="square" lIns="228600" tIns="228600" rIns="228600" rtlCol="0" anchor="ctr"/>
           <a:lstStyle/>
           <a:p>
             <a:pPr algn="ctr">
-              <a:defRPr sz="1500" b="1">
-                <a:solidFill>
-                  <a:srgbClr val="E11D48"/>
-                </a:solidFill>
-              </a:defRPr>
-            </a:pPr>
-            <a:r>
-              <a:t>❌ Existing System (Manual / Fragmented)</a:t>
+              <a:defRPr sz="1350" b="1">
+                <a:solidFill>
+                  <a:srgbClr val="1F3C88"/>
+                </a:solidFill>
+              </a:defRPr>
+            </a:pPr>
+            <a:r>
+              <a:t>🔐 Student Login &amp; Profiles</a:t>
             </a:r>
           </a:p>
           <a:p>
@@ -6066,74 +5330,14 @@
               <a:spcBef>
                 <a:spcPts val="800"/>
               </a:spcBef>
-              <a:defRPr sz="1050">
+              <a:defRPr sz="1100">
                 <a:solidFill>
                   <a:srgbClr val="1E293B"/>
                 </a:solidFill>
               </a:defRPr>
             </a:pPr>
             <a:r>
-              <a:t>• Scattered Information Channels: Opportunities announced randomly across WhatsApp, physical boards, and forwarded departmental emails.</a:t>
-            </a:r>
-          </a:p>
-          <a:p>
-            <a:pPr>
-              <a:spcBef>
-                <a:spcPts val="800"/>
-              </a:spcBef>
-              <a:defRPr sz="1050">
-                <a:solidFill>
-                  <a:srgbClr val="1E293B"/>
-                </a:solidFill>
-              </a:defRPr>
-            </a:pPr>
-            <a:r>
-              <a:t>• Paper-Based / Email Applications: Resumes submitted physically or to cluttered inboxes, leading to lost records and formatting inconsistencies.</a:t>
-            </a:r>
-          </a:p>
-          <a:p>
-            <a:pPr>
-              <a:spcBef>
-                <a:spcPts val="800"/>
-              </a:spcBef>
-              <a:defRPr sz="1050">
-                <a:solidFill>
-                  <a:srgbClr val="1E293B"/>
-                </a:solidFill>
-              </a:defRPr>
-            </a:pPr>
-            <a:r>
-              <a:t>• No Real-Time Visibility: Students have no mechanism to track their application status; candidates remain uncertain about outcomes.</a:t>
-            </a:r>
-          </a:p>
-          <a:p>
-            <a:pPr>
-              <a:spcBef>
-                <a:spcPts val="800"/>
-              </a:spcBef>
-              <a:defRPr sz="1050">
-                <a:solidFill>
-                  <a:srgbClr val="1E293B"/>
-                </a:solidFill>
-              </a:defRPr>
-            </a:pPr>
-            <a:r>
-              <a:t>• High Duplicate Risk: Students accidentally apply multiple times, creating redundant records and cluttering recruiter review queues.</a:t>
-            </a:r>
-          </a:p>
-          <a:p>
-            <a:pPr>
-              <a:spcBef>
-                <a:spcPts val="800"/>
-              </a:spcBef>
-              <a:defRPr sz="1050">
-                <a:solidFill>
-                  <a:srgbClr val="1E293B"/>
-                </a:solidFill>
-              </a:defRPr>
-            </a:pPr>
-            <a:r>
-              <a:t>• Heavy Administrative Burden: Staff spend excessive hours manually verifying applicant data, logging entries in spreadsheets, and notifying candidates.</a:t>
+              <a:t>Simple sign-up and secure login. Students can view and update their personal and academic details anytime.</a:t>
             </a:r>
           </a:p>
         </p:txBody>
@@ -6146,18 +5350,18 @@
         </p:nvSpPr>
         <p:spPr>
           <a:xfrm>
-            <a:off x="6217920" y="1920240"/>
-            <a:ext cx="5212080" cy="4389120"/>
+            <a:off x="4370832" y="1828800"/>
+            <a:ext cx="3474720" cy="2103120"/>
           </a:xfrm>
           <a:prstGeom prst="roundRect">
             <a:avLst/>
           </a:prstGeom>
           <a:solidFill>
-            <a:srgbClr val="F0FDF4"/>
+            <a:srgbClr val="FFFFFF"/>
           </a:solidFill>
           <a:ln w="15240">
             <a:solidFill>
-              <a:srgbClr val="BBF7D0"/>
+              <a:srgbClr val="E2E8F0"/>
             </a:solidFill>
           </a:ln>
         </p:spPr>
@@ -6176,18 +5380,18 @@
           </a:fontRef>
         </p:style>
         <p:txBody>
-          <a:bodyPr wrap="square" lIns="274320" tIns="274320" rIns="274320" rtlCol="0" anchor="ctr"/>
+          <a:bodyPr wrap="square" lIns="228600" tIns="228600" rIns="228600" rtlCol="0" anchor="ctr"/>
           <a:lstStyle/>
           <a:p>
             <a:pPr algn="ctr">
-              <a:defRPr sz="1500" b="1">
-                <a:solidFill>
-                  <a:srgbClr val="15803D"/>
-                </a:solidFill>
-              </a:defRPr>
-            </a:pPr>
-            <a:r>
-              <a:t>✅ Proposed System (InternHub Portal)</a:t>
+              <a:defRPr sz="1350" b="1">
+                <a:solidFill>
+                  <a:srgbClr val="1F3C88"/>
+                </a:solidFill>
+              </a:defRPr>
+            </a:pPr>
+            <a:r>
+              <a:t>🔍 Smart Job Search</a:t>
             </a:r>
           </a:p>
           <a:p>
@@ -6195,14 +5399,68 @@
               <a:spcBef>
                 <a:spcPts val="800"/>
               </a:spcBef>
-              <a:defRPr sz="1050">
+              <a:defRPr sz="1100">
                 <a:solidFill>
                   <a:srgbClr val="1E293B"/>
                 </a:solidFill>
               </a:defRPr>
             </a:pPr>
             <a:r>
-              <a:t>• Single Centralized Hub: All campus internship drives organized in one standardized digital catalog with full parameters and deadlines.</a:t>
+              <a:t>Fast search bar to filter internships by job title, company name, location, or required programming skills.</a:t>
+            </a:r>
+          </a:p>
+        </p:txBody>
+      </p:sp>
+      <p:sp>
+        <p:nvSpPr>
+          <p:cNvPr id="8" name="Rounded Rectangle 7"/>
+          <p:cNvSpPr/>
+          <p:nvPr/>
+        </p:nvSpPr>
+        <p:spPr>
+          <a:xfrm>
+            <a:off x="8010144" y="1828800"/>
+            <a:ext cx="3474720" cy="2103120"/>
+          </a:xfrm>
+          <a:prstGeom prst="roundRect">
+            <a:avLst/>
+          </a:prstGeom>
+          <a:solidFill>
+            <a:srgbClr val="FFFFFF"/>
+          </a:solidFill>
+          <a:ln w="15240">
+            <a:solidFill>
+              <a:srgbClr val="E2E8F0"/>
+            </a:solidFill>
+          </a:ln>
+        </p:spPr>
+        <p:style>
+          <a:lnRef idx="1">
+            <a:schemeClr val="accent1"/>
+          </a:lnRef>
+          <a:fillRef idx="3">
+            <a:schemeClr val="accent1"/>
+          </a:fillRef>
+          <a:effectRef idx="2">
+            <a:schemeClr val="accent1"/>
+          </a:effectRef>
+          <a:fontRef idx="minor">
+            <a:schemeClr val="lt1"/>
+          </a:fontRef>
+        </p:style>
+        <p:txBody>
+          <a:bodyPr wrap="square" lIns="228600" tIns="228600" rIns="228600" rtlCol="0" anchor="ctr"/>
+          <a:lstStyle/>
+          <a:p>
+            <a:pPr algn="ctr">
+              <a:defRPr sz="1350" b="1">
+                <a:solidFill>
+                  <a:srgbClr val="1F3C88"/>
+                </a:solidFill>
+              </a:defRPr>
+            </a:pPr>
+            <a:r>
+              <a:t>⚡ 1-Click Application</a:t>
             </a:r>
           </a:p>
           <a:p>
@@ -6210,14 +5468,68 @@
               <a:spcBef>
                 <a:spcPts val="800"/>
               </a:spcBef>
-              <a:defRPr sz="1050">
+              <a:defRPr sz="1100">
                 <a:solidFill>
                   <a:srgbClr val="1E293B"/>
                 </a:solidFill>
               </a:defRPr>
             </a:pPr>
             <a:r>
-              <a:t>• 1-Click Authenticated Application: Direct digital submission connecting candidate profile to the internship with automatic timestamping.</a:t>
+              <a:t>Instant application submission that connects the student's profile directly to the chosen internship.</a:t>
+            </a:r>
+          </a:p>
+        </p:txBody>
+      </p:sp>
+      <p:sp>
+        <p:nvSpPr>
+          <p:cNvPr id="9" name="Rounded Rectangle 8"/>
+          <p:cNvSpPr/>
+          <p:nvPr/>
+        </p:nvSpPr>
+        <p:spPr>
+          <a:xfrm>
+            <a:off x="731520" y="4114800"/>
+            <a:ext cx="3474720" cy="2103120"/>
+          </a:xfrm>
+          <a:prstGeom prst="roundRect">
+            <a:avLst/>
+          </a:prstGeom>
+          <a:solidFill>
+            <a:srgbClr val="FFFFFF"/>
+          </a:solidFill>
+          <a:ln w="15240">
+            <a:solidFill>
+              <a:srgbClr val="E2E8F0"/>
+            </a:solidFill>
+          </a:ln>
+        </p:spPr>
+        <p:style>
+          <a:lnRef idx="1">
+            <a:schemeClr val="accent1"/>
+          </a:lnRef>
+          <a:fillRef idx="3">
+            <a:schemeClr val="accent1"/>
+          </a:fillRef>
+          <a:effectRef idx="2">
+            <a:schemeClr val="accent1"/>
+          </a:effectRef>
+          <a:fontRef idx="minor">
+            <a:schemeClr val="lt1"/>
+          </a:fontRef>
+        </p:style>
+        <p:txBody>
+          <a:bodyPr wrap="square" lIns="228600" tIns="228600" rIns="228600" rtlCol="0" anchor="ctr"/>
+          <a:lstStyle/>
+          <a:p>
+            <a:pPr algn="ctr">
+              <a:defRPr sz="1350" b="1">
+                <a:solidFill>
+                  <a:srgbClr val="1F3C88"/>
+                </a:solidFill>
+              </a:defRPr>
+            </a:pPr>
+            <a:r>
+              <a:t>📊 Student Dashboard</a:t>
             </a:r>
           </a:p>
           <a:p>
@@ -6225,14 +5537,68 @@
               <a:spcBef>
                 <a:spcPts val="800"/>
               </a:spcBef>
-              <a:defRPr sz="1050">
+              <a:defRPr sz="1100">
                 <a:solidFill>
                   <a:srgbClr val="1E293B"/>
                 </a:solidFill>
               </a:defRPr>
             </a:pPr>
             <a:r>
-              <a:t>• Dynamic Status Tracking: Live student dashboard showcasing distinct stages: Pending, Under Review, Shortlisted, Selected, Rejected.</a:t>
+              <a:t>Clear dashboard showing counts for Total Applied, Pending, Selected, and Rejected applications.</a:t>
+            </a:r>
+          </a:p>
+        </p:txBody>
+      </p:sp>
+      <p:sp>
+        <p:nvSpPr>
+          <p:cNvPr id="10" name="Rounded Rectangle 9"/>
+          <p:cNvSpPr/>
+          <p:nvPr/>
+        </p:nvSpPr>
+        <p:spPr>
+          <a:xfrm>
+            <a:off x="4370832" y="4114800"/>
+            <a:ext cx="3474720" cy="2103120"/>
+          </a:xfrm>
+          <a:prstGeom prst="roundRect">
+            <a:avLst/>
+          </a:prstGeom>
+          <a:solidFill>
+            <a:srgbClr val="FFFFFF"/>
+          </a:solidFill>
+          <a:ln w="15240">
+            <a:solidFill>
+              <a:srgbClr val="E2E8F0"/>
+            </a:solidFill>
+          </a:ln>
+        </p:spPr>
+        <p:style>
+          <a:lnRef idx="1">
+            <a:schemeClr val="accent1"/>
+          </a:lnRef>
+          <a:fillRef idx="3">
+            <a:schemeClr val="accent1"/>
+          </a:fillRef>
+          <a:effectRef idx="2">
+            <a:schemeClr val="accent1"/>
+          </a:effectRef>
+          <a:fontRef idx="minor">
+            <a:schemeClr val="lt1"/>
+          </a:fontRef>
+        </p:style>
+        <p:txBody>
+          <a:bodyPr wrap="square" lIns="228600" tIns="228600" rIns="228600" rtlCol="0" anchor="ctr"/>
+          <a:lstStyle/>
+          <a:p>
+            <a:pPr algn="ctr">
+              <a:defRPr sz="1350" b="1">
+                <a:solidFill>
+                  <a:srgbClr val="1F3C88"/>
+                </a:solidFill>
+              </a:defRPr>
+            </a:pPr>
+            <a:r>
+              <a:t>🔔 Notification Alerts</a:t>
             </a:r>
           </a:p>
           <a:p>
@@ -6240,14 +5606,68 @@
               <a:spcBef>
                 <a:spcPts val="800"/>
               </a:spcBef>
-              <a:defRPr sz="1050">
+              <a:defRPr sz="1100">
                 <a:solidFill>
                   <a:srgbClr val="1E293B"/>
                 </a:solidFill>
               </a:defRPr>
             </a:pPr>
             <a:r>
-              <a:t>• Zero Duplication Guarantee: Database-enforced unique constraints strictly prevent repeated applications for the same opening.</a:t>
+              <a:t>Built-in notification center with an unread badge that informs students whenever their status changes.</a:t>
+            </a:r>
+          </a:p>
+        </p:txBody>
+      </p:sp>
+      <p:sp>
+        <p:nvSpPr>
+          <p:cNvPr id="11" name="Rounded Rectangle 10"/>
+          <p:cNvSpPr/>
+          <p:nvPr/>
+        </p:nvSpPr>
+        <p:spPr>
+          <a:xfrm>
+            <a:off x="8010144" y="4114800"/>
+            <a:ext cx="3474720" cy="2103120"/>
+          </a:xfrm>
+          <a:prstGeom prst="roundRect">
+            <a:avLst/>
+          </a:prstGeom>
+          <a:solidFill>
+            <a:srgbClr val="FFFFFF"/>
+          </a:solidFill>
+          <a:ln w="15240">
+            <a:solidFill>
+              <a:srgbClr val="E2E8F0"/>
+            </a:solidFill>
+          </a:ln>
+        </p:spPr>
+        <p:style>
+          <a:lnRef idx="1">
+            <a:schemeClr val="accent1"/>
+          </a:lnRef>
+          <a:fillRef idx="3">
+            <a:schemeClr val="accent1"/>
+          </a:fillRef>
+          <a:effectRef idx="2">
+            <a:schemeClr val="accent1"/>
+          </a:effectRef>
+          <a:fontRef idx="minor">
+            <a:schemeClr val="lt1"/>
+          </a:fontRef>
+        </p:style>
+        <p:txBody>
+          <a:bodyPr wrap="square" lIns="228600" tIns="228600" rIns="228600" rtlCol="0" anchor="ctr"/>
+          <a:lstStyle/>
+          <a:p>
+            <a:pPr algn="ctr">
+              <a:defRPr sz="1350" b="1">
+                <a:solidFill>
+                  <a:srgbClr val="1F3C88"/>
+                </a:solidFill>
+              </a:defRPr>
+            </a:pPr>
+            <a:r>
+              <a:t>🛠️ Admin Control Panel</a:t>
             </a:r>
           </a:p>
           <a:p>
@@ -6255,14 +5675,14 @@
               <a:spcBef>
                 <a:spcPts val="800"/>
               </a:spcBef>
-              <a:defRPr sz="1050">
+              <a:defRPr sz="1100">
                 <a:solidFill>
                   <a:srgbClr val="1E293B"/>
                 </a:solidFill>
               </a:defRPr>
             </a:pPr>
             <a:r>
-              <a:t>• Streamlined Management &amp; Alerts: Dedicated admin console for instant status moderation paired with automated in-app notifications.</a:t>
+              <a:t>Dedicated admin panel for staff to post internships, review registered students, and update application results.</a:t>
             </a:r>
           </a:p>
         </p:txBody>
@@ -6301,8 +5721,8 @@
         </p:nvSpPr>
         <p:spPr>
           <a:xfrm>
-            <a:off x="731520" y="411480"/>
-            <a:ext cx="10698480" cy="320040"/>
+            <a:off x="731520" y="365760"/>
+            <a:ext cx="10698480" cy="274320"/>
           </a:xfrm>
           <a:prstGeom prst="rect">
             <a:avLst/>
@@ -6323,7 +5743,7 @@
               </a:defRPr>
             </a:pPr>
             <a:r>
-              <a:t>MODULES</a:t>
+              <a:t>SLIDE 6 • SYSTEM STRUCTURE</a:t>
             </a:r>
           </a:p>
         </p:txBody>
@@ -6336,8 +5756,8 @@
         </p:nvSpPr>
         <p:spPr>
           <a:xfrm>
-            <a:off x="731520" y="685800"/>
-            <a:ext cx="10698480" cy="640080"/>
+            <a:off x="731520" y="640080"/>
+            <a:ext cx="10698480" cy="548640"/>
           </a:xfrm>
           <a:prstGeom prst="rect">
             <a:avLst/>
@@ -6358,7 +5778,7 @@
               </a:defRPr>
             </a:pPr>
             <a:r>
-              <a:t>System Module Breakdown</a:t>
+              <a:t>Module Description</a:t>
             </a:r>
           </a:p>
         </p:txBody>
@@ -6371,8 +5791,8 @@
         </p:nvSpPr>
         <p:spPr>
           <a:xfrm>
-            <a:off x="731520" y="1325880"/>
-            <a:ext cx="10698480" cy="365760"/>
+            <a:off x="731520" y="1234440"/>
+            <a:ext cx="10698480" cy="320040"/>
           </a:xfrm>
           <a:prstGeom prst="rect">
             <a:avLst/>
@@ -6393,7 +5813,7 @@
               </a:defRPr>
             </a:pPr>
             <a:r>
-              <a:t>Functional segregation of the InternHub web application into core subsystems</a:t>
+              <a:t>The 3 main functional modules of the InternHub project</a:t>
             </a:r>
           </a:p>
         </p:txBody>
@@ -6406,7 +5826,7 @@
         </p:nvSpPr>
         <p:spPr>
           <a:xfrm>
-            <a:off x="731520" y="1691640"/>
+            <a:off x="731520" y="1600200"/>
             <a:ext cx="10728655" cy="18288"/>
           </a:xfrm>
           <a:prstGeom prst="rect">
@@ -6449,8 +5869,8 @@
         </p:nvSpPr>
         <p:spPr>
           <a:xfrm>
-            <a:off x="731520" y="1874519"/>
-            <a:ext cx="10728655" cy="777240"/>
+            <a:off x="731520" y="1828800"/>
+            <a:ext cx="3474720" cy="4480560"/>
           </a:xfrm>
           <a:prstGeom prst="roundRect">
             <a:avLst/>
@@ -6479,24 +5899,24 @@
           </a:fontRef>
         </p:style>
         <p:txBody>
-          <a:bodyPr wrap="square" lIns="228600" tIns="109728" rIns="228600" rtlCol="0" anchor="ctr"/>
+          <a:bodyPr wrap="square" lIns="256032" tIns="228600" rIns="256032" rtlCol="0" anchor="ctr"/>
           <a:lstStyle/>
           <a:p>
             <a:pPr algn="ctr">
-              <a:defRPr sz="1300" b="1">
+              <a:defRPr sz="1400" b="1">
                 <a:solidFill>
                   <a:srgbClr val="1F3C88"/>
                 </a:solidFill>
               </a:defRPr>
             </a:pPr>
             <a:r>
-              <a:t>Module 1: User Management &amp; Authentication</a:t>
-            </a:r>
-          </a:p>
-          <a:p>
-            <a:pPr>
-              <a:spcBef>
-                <a:spcPts val="200"/>
+              <a:t>👤 Module 1: User Management</a:t>
+            </a:r>
+          </a:p>
+          <a:p>
+            <a:pPr>
+              <a:spcBef>
+                <a:spcPts val="1000"/>
               </a:spcBef>
               <a:defRPr sz="1050">
                 <a:solidFill>
@@ -6505,7 +5925,52 @@
               </a:defRPr>
             </a:pPr>
             <a:r>
-              <a:t>Handles student account creation, profile management, credentials verification, secure session control, and personal student dashboard analytics.</a:t>
+              <a:t>• Student Registration:  Students sign up with username, password, email, phone, and course.</a:t>
+            </a:r>
+          </a:p>
+          <a:p>
+            <a:pPr>
+              <a:spcBef>
+                <a:spcPts val="1000"/>
+              </a:spcBef>
+              <a:defRPr sz="1050">
+                <a:solidFill>
+                  <a:srgbClr val="1E293B"/>
+                </a:solidFill>
+              </a:defRPr>
+            </a:pPr>
+            <a:r>
+              <a:t>• Secure Authentication:  Login and logout protected by Django's password security.</a:t>
+            </a:r>
+          </a:p>
+          <a:p>
+            <a:pPr>
+              <a:spcBef>
+                <a:spcPts val="1000"/>
+              </a:spcBef>
+              <a:defRPr sz="1050">
+                <a:solidFill>
+                  <a:srgbClr val="1E293B"/>
+                </a:solidFill>
+              </a:defRPr>
+            </a:pPr>
+            <a:r>
+              <a:t>• Profile Management:  Students can view and update their contact details.</a:t>
+            </a:r>
+          </a:p>
+          <a:p>
+            <a:pPr>
+              <a:spcBef>
+                <a:spcPts val="1000"/>
+              </a:spcBef>
+              <a:defRPr sz="1050">
+                <a:solidFill>
+                  <a:srgbClr val="1E293B"/>
+                </a:solidFill>
+              </a:defRPr>
+            </a:pPr>
+            <a:r>
+              <a:t>• Personal Dashboard:  Shows live summary cards of application progress.</a:t>
             </a:r>
           </a:p>
         </p:txBody>
@@ -6518,8 +5983,8 @@
         </p:nvSpPr>
         <p:spPr>
           <a:xfrm>
-            <a:off x="731520" y="2770632"/>
-            <a:ext cx="10728655" cy="777240"/>
+            <a:off x="4370832" y="1828800"/>
+            <a:ext cx="3474720" cy="4480560"/>
           </a:xfrm>
           <a:prstGeom prst="roundRect">
             <a:avLst/>
@@ -6548,24 +6013,24 @@
           </a:fontRef>
         </p:style>
         <p:txBody>
-          <a:bodyPr wrap="square" lIns="228600" tIns="109728" rIns="228600" rtlCol="0" anchor="ctr"/>
+          <a:bodyPr wrap="square" lIns="256032" tIns="228600" rIns="256032" rtlCol="0" anchor="ctr"/>
           <a:lstStyle/>
           <a:p>
             <a:pPr algn="ctr">
-              <a:defRPr sz="1300" b="1">
+              <a:defRPr sz="1400" b="1">
                 <a:solidFill>
                   <a:srgbClr val="2563EB"/>
                 </a:solidFill>
               </a:defRPr>
             </a:pPr>
             <a:r>
-              <a:t>Module 2: Internship Discovery &amp; Search</a:t>
-            </a:r>
-          </a:p>
-          <a:p>
-            <a:pPr>
-              <a:spcBef>
-                <a:spcPts val="200"/>
+              <a:t>💼 Module 2: Internship Portal</a:t>
+            </a:r>
+          </a:p>
+          <a:p>
+            <a:pPr>
+              <a:spcBef>
+                <a:spcPts val="1000"/>
               </a:spcBef>
               <a:defRPr sz="1050">
                 <a:solidFill>
@@ -6574,7 +6039,52 @@
               </a:defRPr>
             </a:pPr>
             <a:r>
-              <a:t>Provides dynamic cataloging of all available internship postings with multi-field search filters (title, company, location, skills) and full detail pages.</a:t>
+              <a:t>• Job Listings:  Displays company name, role, stipend, location, duration, and deadline.</a:t>
+            </a:r>
+          </a:p>
+          <a:p>
+            <a:pPr>
+              <a:spcBef>
+                <a:spcPts val="1000"/>
+              </a:spcBef>
+              <a:defRPr sz="1050">
+                <a:solidFill>
+                  <a:srgbClr val="1E293B"/>
+                </a:solidFill>
+              </a:defRPr>
+            </a:pPr>
+            <a:r>
+              <a:t>• Keyword Search:  Search across job titles, company names, cities, and required skills.</a:t>
+            </a:r>
+          </a:p>
+          <a:p>
+            <a:pPr>
+              <a:spcBef>
+                <a:spcPts val="1000"/>
+              </a:spcBef>
+              <a:defRPr sz="1050">
+                <a:solidFill>
+                  <a:srgbClr val="1E293B"/>
+                </a:solidFill>
+              </a:defRPr>
+            </a:pPr>
+            <a:r>
+              <a:t>• Details Page:  Full job description and requirements with an 'Apply' button.</a:t>
+            </a:r>
+          </a:p>
+          <a:p>
+            <a:pPr>
+              <a:spcBef>
+                <a:spcPts val="1000"/>
+              </a:spcBef>
+              <a:defRPr sz="1050">
+                <a:solidFill>
+                  <a:srgbClr val="1E293B"/>
+                </a:solidFill>
+              </a:defRPr>
+            </a:pPr>
+            <a:r>
+              <a:t>• Chronological Order:  Newest internships always appear at the top.</a:t>
             </a:r>
           </a:p>
         </p:txBody>
@@ -6587,8 +6097,8 @@
         </p:nvSpPr>
         <p:spPr>
           <a:xfrm>
-            <a:off x="731520" y="3666744"/>
-            <a:ext cx="10728655" cy="777240"/>
+            <a:off x="8010144" y="1828800"/>
+            <a:ext cx="3474720" cy="4480560"/>
           </a:xfrm>
           <a:prstGeom prst="roundRect">
             <a:avLst/>
@@ -6617,24 +6127,24 @@
           </a:fontRef>
         </p:style>
         <p:txBody>
-          <a:bodyPr wrap="square" lIns="228600" tIns="109728" rIns="228600" rtlCol="0" anchor="ctr"/>
+          <a:bodyPr wrap="square" lIns="256032" tIns="228600" rIns="256032" rtlCol="0" anchor="ctr"/>
           <a:lstStyle/>
           <a:p>
             <a:pPr algn="ctr">
-              <a:defRPr sz="1300" b="1">
-                <a:solidFill>
-                  <a:srgbClr val="0D9488"/>
-                </a:solidFill>
-              </a:defRPr>
-            </a:pPr>
-            <a:r>
-              <a:t>Module 3: Application Engine &amp; Duplicate Guard</a:t>
-            </a:r>
-          </a:p>
-          <a:p>
-            <a:pPr>
-              <a:spcBef>
-                <a:spcPts val="200"/>
+              <a:defRPr sz="1400" b="1">
+                <a:solidFill>
+                  <a:srgbClr val="10955A"/>
+                </a:solidFill>
+              </a:defRPr>
+            </a:pPr>
+            <a:r>
+              <a:t>📋 Module 3: Application &amp; Alerts</a:t>
+            </a:r>
+          </a:p>
+          <a:p>
+            <a:pPr>
+              <a:spcBef>
+                <a:spcPts val="1000"/>
               </a:spcBef>
               <a:defRPr sz="1050">
                 <a:solidFill>
@@ -6643,67 +6153,13 @@
               </a:defRPr>
             </a:pPr>
             <a:r>
-              <a:t>Manages the one-click student application submission process, validates duplicate restrictions, and records application timestamps.</a:t>
-            </a:r>
-          </a:p>
-        </p:txBody>
-      </p:sp>
-      <p:sp>
-        <p:nvSpPr>
-          <p:cNvPr id="9" name="Rounded Rectangle 8"/>
-          <p:cNvSpPr/>
-          <p:nvPr/>
-        </p:nvSpPr>
-        <p:spPr>
-          <a:xfrm>
-            <a:off x="731520" y="4562856"/>
-            <a:ext cx="10728655" cy="777240"/>
-          </a:xfrm>
-          <a:prstGeom prst="roundRect">
-            <a:avLst/>
-          </a:prstGeom>
-          <a:solidFill>
-            <a:srgbClr val="FFFFFF"/>
-          </a:solidFill>
-          <a:ln w="15240">
-            <a:solidFill>
-              <a:srgbClr val="E2E8F0"/>
-            </a:solidFill>
-          </a:ln>
-        </p:spPr>
-        <p:style>
-          <a:lnRef idx="1">
-            <a:schemeClr val="accent1"/>
-          </a:lnRef>
-          <a:fillRef idx="3">
-            <a:schemeClr val="accent1"/>
-          </a:fillRef>
-          <a:effectRef idx="2">
-            <a:schemeClr val="accent1"/>
-          </a:effectRef>
-          <a:fontRef idx="minor">
-            <a:schemeClr val="lt1"/>
-          </a:fontRef>
-        </p:style>
-        <p:txBody>
-          <a:bodyPr wrap="square" lIns="228600" tIns="109728" rIns="228600" rtlCol="0" anchor="ctr"/>
-          <a:lstStyle/>
-          <a:p>
-            <a:pPr algn="ctr">
-              <a:defRPr sz="1300" b="1">
-                <a:solidFill>
-                  <a:srgbClr val="10B981"/>
-                </a:solidFill>
-              </a:defRPr>
-            </a:pPr>
-            <a:r>
-              <a:t>Module 4: Real-Time Tracking &amp; Notifications</a:t>
-            </a:r>
-          </a:p>
-          <a:p>
-            <a:pPr>
-              <a:spcBef>
-                <a:spcPts val="200"/>
+              <a:t>• 1-Click Apply:  Links the student profile to the selected internship.</a:t>
+            </a:r>
+          </a:p>
+          <a:p>
+            <a:pPr>
+              <a:spcBef>
+                <a:spcPts val="1000"/>
               </a:spcBef>
               <a:defRPr sz="1050">
                 <a:solidFill>
@@ -6712,67 +6168,13 @@
               </a:defRPr>
             </a:pPr>
             <a:r>
-              <a:t>Tracks student applications through recruitment stages and generates automatic in-app alerts whenever statuses are updated by coordinators.</a:t>
-            </a:r>
-          </a:p>
-        </p:txBody>
-      </p:sp>
-      <p:sp>
-        <p:nvSpPr>
-          <p:cNvPr id="10" name="Rounded Rectangle 9"/>
-          <p:cNvSpPr/>
-          <p:nvPr/>
-        </p:nvSpPr>
-        <p:spPr>
-          <a:xfrm>
-            <a:off x="731520" y="5458968"/>
-            <a:ext cx="10728655" cy="777240"/>
-          </a:xfrm>
-          <a:prstGeom prst="roundRect">
-            <a:avLst/>
-          </a:prstGeom>
-          <a:solidFill>
-            <a:srgbClr val="FFFFFF"/>
-          </a:solidFill>
-          <a:ln w="15240">
-            <a:solidFill>
-              <a:srgbClr val="E2E8F0"/>
-            </a:solidFill>
-          </a:ln>
-        </p:spPr>
-        <p:style>
-          <a:lnRef idx="1">
-            <a:schemeClr val="accent1"/>
-          </a:lnRef>
-          <a:fillRef idx="3">
-            <a:schemeClr val="accent1"/>
-          </a:fillRef>
-          <a:effectRef idx="2">
-            <a:schemeClr val="accent1"/>
-          </a:effectRef>
-          <a:fontRef idx="minor">
-            <a:schemeClr val="lt1"/>
-          </a:fontRef>
-        </p:style>
-        <p:txBody>
-          <a:bodyPr wrap="square" lIns="228600" tIns="109728" rIns="228600" rtlCol="0" anchor="ctr"/>
-          <a:lstStyle/>
-          <a:p>
-            <a:pPr algn="ctr">
-              <a:defRPr sz="1300" b="1">
-                <a:solidFill>
-                  <a:srgbClr val="D97706"/>
-                </a:solidFill>
-              </a:defRPr>
-            </a:pPr>
-            <a:r>
-              <a:t>Module 5: Admin Management &amp; Moderation</a:t>
-            </a:r>
-          </a:p>
-          <a:p>
-            <a:pPr>
-              <a:spcBef>
-                <a:spcPts val="200"/>
+              <a:t>• Anti-Duplicate Rule:  Prevents student from submitting twice to the same opening.</a:t>
+            </a:r>
+          </a:p>
+          <a:p>
+            <a:pPr>
+              <a:spcBef>
+                <a:spcPts val="1000"/>
               </a:spcBef>
               <a:defRPr sz="1050">
                 <a:solidFill>
@@ -6781,7 +6183,22 @@
               </a:defRPr>
             </a:pPr>
             <a:r>
-              <a:t>Provides privileged faculty and placement coordinators with tools to post internships, review applicant pools, and update hiring statuses.</a:t>
+              <a:t>• Status Tracking:  Shows statuses: Pending, Under Review, Shortlisted, Selected, Rejected.</a:t>
+            </a:r>
+          </a:p>
+          <a:p>
+            <a:pPr>
+              <a:spcBef>
+                <a:spcPts val="1000"/>
+              </a:spcBef>
+              <a:defRPr sz="1050">
+                <a:solidFill>
+                  <a:srgbClr val="1E293B"/>
+                </a:solidFill>
+              </a:defRPr>
+            </a:pPr>
+            <a:r>
+              <a:t>• In-App Notifications:  Informs students as soon as coordinator updates their status.</a:t>
             </a:r>
           </a:p>
         </p:txBody>
@@ -6820,8 +6237,8 @@
         </p:nvSpPr>
         <p:spPr>
           <a:xfrm>
-            <a:off x="731520" y="411480"/>
-            <a:ext cx="10698480" cy="320040"/>
+            <a:off x="731520" y="365760"/>
+            <a:ext cx="10698480" cy="274320"/>
           </a:xfrm>
           <a:prstGeom prst="rect">
             <a:avLst/>
@@ -6842,7 +6259,7 @@
               </a:defRPr>
             </a:pPr>
             <a:r>
-              <a:t>DATABASE SCHEMA</a:t>
+              <a:t>SLIDE 7 • DATABASE</a:t>
             </a:r>
           </a:p>
         </p:txBody>
@@ -6855,8 +6272,8 @@
         </p:nvSpPr>
         <p:spPr>
           <a:xfrm>
-            <a:off x="731520" y="685800"/>
-            <a:ext cx="10698480" cy="640080"/>
+            <a:off x="731520" y="640080"/>
+            <a:ext cx="10698480" cy="548640"/>
           </a:xfrm>
           <a:prstGeom prst="rect">
             <a:avLst/>
@@ -6877,7 +6294,7 @@
               </a:defRPr>
             </a:pPr>
             <a:r>
-              <a:t>Database Tables: Student &amp; Internship</a:t>
+              <a:t>Database Tables</a:t>
             </a:r>
           </a:p>
         </p:txBody>
@@ -6890,8 +6307,8 @@
         </p:nvSpPr>
         <p:spPr>
           <a:xfrm>
-            <a:off x="731520" y="1325880"/>
-            <a:ext cx="10698480" cy="365760"/>
+            <a:off x="731520" y="1234440"/>
+            <a:ext cx="10698480" cy="320040"/>
           </a:xfrm>
           <a:prstGeom prst="rect">
             <a:avLst/>
@@ -6912,7 +6329,7 @@
               </a:defRPr>
             </a:pPr>
             <a:r>
-              <a:t>Schema specifications, field types, and integrity constraints</a:t>
+              <a:t>The 4 core tables used to store and manage project data</a:t>
             </a:r>
           </a:p>
         </p:txBody>
@@ -6925,7 +6342,7 @@
         </p:nvSpPr>
         <p:spPr>
           <a:xfrm>
-            <a:off x="731520" y="1691640"/>
+            <a:off x="731520" y="1600200"/>
             <a:ext cx="10728655" cy="18288"/>
           </a:xfrm>
           <a:prstGeom prst="rect">
@@ -6968,8 +6385,8 @@
         </p:nvSpPr>
         <p:spPr>
           <a:xfrm>
-            <a:off x="731520" y="1920240"/>
-            <a:ext cx="5212080" cy="4389120"/>
+            <a:off x="731520" y="1828800"/>
+            <a:ext cx="5285232" cy="2148840"/>
           </a:xfrm>
           <a:prstGeom prst="roundRect">
             <a:avLst/>
@@ -6998,7 +6415,7 @@
           </a:fontRef>
         </p:style>
         <p:txBody>
-          <a:bodyPr wrap="square" lIns="182880" tIns="182880" rIns="182880" rtlCol="0" anchor="ctr"/>
+          <a:bodyPr wrap="square" lIns="228600" tIns="182880" rIns="228600" rtlCol="0" anchor="ctr"/>
           <a:lstStyle/>
           <a:p>
             <a:pPr algn="ctr">
@@ -7009,545 +6426,81 @@
               </a:defRPr>
             </a:pPr>
             <a:r>
-              <a:t>TABLE 1: Student (user_management_student)</a:t>
-            </a:r>
-          </a:p>
-        </p:txBody>
-      </p:sp>
-      <p:graphicFrame>
-        <p:nvGraphicFramePr>
-          <p:cNvPr id="7" name="Table 6"/>
-          <p:cNvGraphicFramePr>
-            <a:graphicFrameLocks noGrp="1"/>
-          </p:cNvGraphicFramePr>
-          <p:nvPr/>
-        </p:nvGraphicFramePr>
-        <p:xfrm>
-          <a:off x="822960" y="2377440"/>
-          <a:ext cx="5029200" cy="3749039"/>
-        </p:xfrm>
-        <a:graphic>
-          <a:graphicData uri="http://schemas.openxmlformats.org/drawingml/2006/table">
-            <a:tbl>
-              <a:tblPr firstRow="1" bandRow="1">
-                <a:tableStyleId>{5C22544A-7EE6-4342-B048-85BDC9FD1C3A}</a:tableStyleId>
-              </a:tblPr>
-              <a:tblGrid>
-                <a:gridCol w="1371600"/>
-                <a:gridCol w="1645920"/>
-                <a:gridCol w="2011680"/>
-              </a:tblGrid>
-              <a:tr h="535577">
-                <a:tc>
-                  <a:txBody>
-                    <a:bodyPr/>
-                    <a:lstStyle/>
-                    <a:p>
-                      <a:pPr>
-                        <a:defRPr sz="1000" b="1">
-                          <a:solidFill>
-                            <a:srgbClr val="FFFFFF"/>
-                          </a:solidFill>
-                        </a:defRPr>
-                      </a:pPr>
-                      <a:r>
-                        <a:t>Field Name</a:t>
-                      </a:r>
-                    </a:p>
-                  </a:txBody>
-                  <a:tcPr>
-                    <a:solidFill>
-                      <a:srgbClr val="1F3C88"/>
-                    </a:solidFill>
-                  </a:tcPr>
-                </a:tc>
-                <a:tc>
-                  <a:txBody>
-                    <a:bodyPr/>
-                    <a:lstStyle/>
-                    <a:p>
-                      <a:pPr>
-                        <a:defRPr sz="1000" b="1">
-                          <a:solidFill>
-                            <a:srgbClr val="FFFFFF"/>
-                          </a:solidFill>
-                        </a:defRPr>
-                      </a:pPr>
-                      <a:r>
-                        <a:t>Data Type</a:t>
-                      </a:r>
-                    </a:p>
-                  </a:txBody>
-                  <a:tcPr>
-                    <a:solidFill>
-                      <a:srgbClr val="1F3C88"/>
-                    </a:solidFill>
-                  </a:tcPr>
-                </a:tc>
-                <a:tc>
-                  <a:txBody>
-                    <a:bodyPr/>
-                    <a:lstStyle/>
-                    <a:p>
-                      <a:pPr>
-                        <a:defRPr sz="1000" b="1">
-                          <a:solidFill>
-                            <a:srgbClr val="FFFFFF"/>
-                          </a:solidFill>
-                        </a:defRPr>
-                      </a:pPr>
-                      <a:r>
-                        <a:t>Constraints</a:t>
-                      </a:r>
-                    </a:p>
-                  </a:txBody>
-                  <a:tcPr>
-                    <a:solidFill>
-                      <a:srgbClr val="1F3C88"/>
-                    </a:solidFill>
-                  </a:tcPr>
-                </a:tc>
-              </a:tr>
-              <a:tr h="535577">
-                <a:tc>
-                  <a:txBody>
-                    <a:bodyPr/>
-                    <a:lstStyle/>
-                    <a:p>
-                      <a:pPr>
-                        <a:defRPr sz="950" b="1">
-                          <a:solidFill>
-                            <a:srgbClr val="0F172A"/>
-                          </a:solidFill>
-                        </a:defRPr>
-                      </a:pPr>
-                      <a:r>
-                        <a:t>id</a:t>
-                      </a:r>
-                    </a:p>
-                  </a:txBody>
-                  <a:tcPr>
-                    <a:solidFill>
-                      <a:srgbClr val="FFFFFF"/>
-                    </a:solidFill>
-                  </a:tcPr>
-                </a:tc>
-                <a:tc>
-                  <a:txBody>
-                    <a:bodyPr/>
-                    <a:lstStyle/>
-                    <a:p>
-                      <a:pPr>
-                        <a:defRPr sz="950">
-                          <a:solidFill>
-                            <a:srgbClr val="0F172A"/>
-                          </a:solidFill>
-                        </a:defRPr>
-                      </a:pPr>
-                      <a:r>
-                        <a:t>BIGINT / INT</a:t>
-                      </a:r>
-                    </a:p>
-                  </a:txBody>
-                  <a:tcPr>
-                    <a:solidFill>
-                      <a:srgbClr val="FFFFFF"/>
-                    </a:solidFill>
-                  </a:tcPr>
-                </a:tc>
-                <a:tc>
-                  <a:txBody>
-                    <a:bodyPr/>
-                    <a:lstStyle/>
-                    <a:p>
-                      <a:pPr>
-                        <a:defRPr sz="950">
-                          <a:solidFill>
-                            <a:srgbClr val="0F172A"/>
-                          </a:solidFill>
-                        </a:defRPr>
-                      </a:pPr>
-                      <a:r>
-                        <a:t>PRIMARY KEY, AUTO_INC</a:t>
-                      </a:r>
-                    </a:p>
-                  </a:txBody>
-                  <a:tcPr>
-                    <a:solidFill>
-                      <a:srgbClr val="FFFFFF"/>
-                    </a:solidFill>
-                  </a:tcPr>
-                </a:tc>
-              </a:tr>
-              <a:tr h="535577">
-                <a:tc>
-                  <a:txBody>
-                    <a:bodyPr/>
-                    <a:lstStyle/>
-                    <a:p>
-                      <a:pPr>
-                        <a:defRPr sz="950" b="1">
-                          <a:solidFill>
-                            <a:srgbClr val="0F172A"/>
-                          </a:solidFill>
-                        </a:defRPr>
-                      </a:pPr>
-                      <a:r>
-                        <a:t>user_id</a:t>
-                      </a:r>
-                    </a:p>
-                  </a:txBody>
-                  <a:tcPr>
-                    <a:solidFill>
-                      <a:srgbClr val="F8FAFC"/>
-                    </a:solidFill>
-                  </a:tcPr>
-                </a:tc>
-                <a:tc>
-                  <a:txBody>
-                    <a:bodyPr/>
-                    <a:lstStyle/>
-                    <a:p>
-                      <a:pPr>
-                        <a:defRPr sz="950">
-                          <a:solidFill>
-                            <a:srgbClr val="0F172A"/>
-                          </a:solidFill>
-                        </a:defRPr>
-                      </a:pPr>
-                      <a:r>
-                        <a:t>INT</a:t>
-                      </a:r>
-                    </a:p>
-                  </a:txBody>
-                  <a:tcPr>
-                    <a:solidFill>
-                      <a:srgbClr val="F8FAFC"/>
-                    </a:solidFill>
-                  </a:tcPr>
-                </a:tc>
-                <a:tc>
-                  <a:txBody>
-                    <a:bodyPr/>
-                    <a:lstStyle/>
-                    <a:p>
-                      <a:pPr>
-                        <a:defRPr sz="950">
-                          <a:solidFill>
-                            <a:srgbClr val="0F172A"/>
-                          </a:solidFill>
-                        </a:defRPr>
-                      </a:pPr>
-                      <a:r>
-                        <a:t>FOREIGN KEY -&gt; auth_user</a:t>
-                      </a:r>
-                    </a:p>
-                  </a:txBody>
-                  <a:tcPr>
-                    <a:solidFill>
-                      <a:srgbClr val="F8FAFC"/>
-                    </a:solidFill>
-                  </a:tcPr>
-                </a:tc>
-              </a:tr>
-              <a:tr h="535577">
-                <a:tc>
-                  <a:txBody>
-                    <a:bodyPr/>
-                    <a:lstStyle/>
-                    <a:p>
-                      <a:pPr>
-                        <a:defRPr sz="950" b="1">
-                          <a:solidFill>
-                            <a:srgbClr val="0F172A"/>
-                          </a:solidFill>
-                        </a:defRPr>
-                      </a:pPr>
-                      <a:r>
-                        <a:t>name</a:t>
-                      </a:r>
-                    </a:p>
-                  </a:txBody>
-                  <a:tcPr>
-                    <a:solidFill>
-                      <a:srgbClr val="FFFFFF"/>
-                    </a:solidFill>
-                  </a:tcPr>
-                </a:tc>
-                <a:tc>
-                  <a:txBody>
-                    <a:bodyPr/>
-                    <a:lstStyle/>
-                    <a:p>
-                      <a:pPr>
-                        <a:defRPr sz="950">
-                          <a:solidFill>
-                            <a:srgbClr val="0F172A"/>
-                          </a:solidFill>
-                        </a:defRPr>
-                      </a:pPr>
-                      <a:r>
-                        <a:t>VARCHAR(100)</a:t>
-                      </a:r>
-                    </a:p>
-                  </a:txBody>
-                  <a:tcPr>
-                    <a:solidFill>
-                      <a:srgbClr val="FFFFFF"/>
-                    </a:solidFill>
-                  </a:tcPr>
-                </a:tc>
-                <a:tc>
-                  <a:txBody>
-                    <a:bodyPr/>
-                    <a:lstStyle/>
-                    <a:p>
-                      <a:pPr>
-                        <a:defRPr sz="950">
-                          <a:solidFill>
-                            <a:srgbClr val="0F172A"/>
-                          </a:solidFill>
-                        </a:defRPr>
-                      </a:pPr>
-                      <a:r>
-                        <a:t>NOT NULL</a:t>
-                      </a:r>
-                    </a:p>
-                  </a:txBody>
-                  <a:tcPr>
-                    <a:solidFill>
-                      <a:srgbClr val="FFFFFF"/>
-                    </a:solidFill>
-                  </a:tcPr>
-                </a:tc>
-              </a:tr>
-              <a:tr h="535577">
-                <a:tc>
-                  <a:txBody>
-                    <a:bodyPr/>
-                    <a:lstStyle/>
-                    <a:p>
-                      <a:pPr>
-                        <a:defRPr sz="950" b="1">
-                          <a:solidFill>
-                            <a:srgbClr val="0F172A"/>
-                          </a:solidFill>
-                        </a:defRPr>
-                      </a:pPr>
-                      <a:r>
-                        <a:t>email</a:t>
-                      </a:r>
-                    </a:p>
-                  </a:txBody>
-                  <a:tcPr>
-                    <a:solidFill>
-                      <a:srgbClr val="F8FAFC"/>
-                    </a:solidFill>
-                  </a:tcPr>
-                </a:tc>
-                <a:tc>
-                  <a:txBody>
-                    <a:bodyPr/>
-                    <a:lstStyle/>
-                    <a:p>
-                      <a:pPr>
-                        <a:defRPr sz="950">
-                          <a:solidFill>
-                            <a:srgbClr val="0F172A"/>
-                          </a:solidFill>
-                        </a:defRPr>
-                      </a:pPr>
-                      <a:r>
-                        <a:t>VARCHAR(254)</a:t>
-                      </a:r>
-                    </a:p>
-                  </a:txBody>
-                  <a:tcPr>
-                    <a:solidFill>
-                      <a:srgbClr val="F8FAFC"/>
-                    </a:solidFill>
-                  </a:tcPr>
-                </a:tc>
-                <a:tc>
-                  <a:txBody>
-                    <a:bodyPr/>
-                    <a:lstStyle/>
-                    <a:p>
-                      <a:pPr>
-                        <a:defRPr sz="950">
-                          <a:solidFill>
-                            <a:srgbClr val="0F172A"/>
-                          </a:solidFill>
-                        </a:defRPr>
-                      </a:pPr>
-                      <a:r>
-                        <a:t>NOT NULL</a:t>
-                      </a:r>
-                    </a:p>
-                  </a:txBody>
-                  <a:tcPr>
-                    <a:solidFill>
-                      <a:srgbClr val="F8FAFC"/>
-                    </a:solidFill>
-                  </a:tcPr>
-                </a:tc>
-              </a:tr>
-              <a:tr h="535577">
-                <a:tc>
-                  <a:txBody>
-                    <a:bodyPr/>
-                    <a:lstStyle/>
-                    <a:p>
-                      <a:pPr>
-                        <a:defRPr sz="950" b="1">
-                          <a:solidFill>
-                            <a:srgbClr val="0F172A"/>
-                          </a:solidFill>
-                        </a:defRPr>
-                      </a:pPr>
-                      <a:r>
-                        <a:t>phone</a:t>
-                      </a:r>
-                    </a:p>
-                  </a:txBody>
-                  <a:tcPr>
-                    <a:solidFill>
-                      <a:srgbClr val="FFFFFF"/>
-                    </a:solidFill>
-                  </a:tcPr>
-                </a:tc>
-                <a:tc>
-                  <a:txBody>
-                    <a:bodyPr/>
-                    <a:lstStyle/>
-                    <a:p>
-                      <a:pPr>
-                        <a:defRPr sz="950">
-                          <a:solidFill>
-                            <a:srgbClr val="0F172A"/>
-                          </a:solidFill>
-                        </a:defRPr>
-                      </a:pPr>
-                      <a:r>
-                        <a:t>VARCHAR(15)</a:t>
-                      </a:r>
-                    </a:p>
-                  </a:txBody>
-                  <a:tcPr>
-                    <a:solidFill>
-                      <a:srgbClr val="FFFFFF"/>
-                    </a:solidFill>
-                  </a:tcPr>
-                </a:tc>
-                <a:tc>
-                  <a:txBody>
-                    <a:bodyPr/>
-                    <a:lstStyle/>
-                    <a:p>
-                      <a:pPr>
-                        <a:defRPr sz="950">
-                          <a:solidFill>
-                            <a:srgbClr val="0F172A"/>
-                          </a:solidFill>
-                        </a:defRPr>
-                      </a:pPr>
-                      <a:r>
-                        <a:t>NOT NULL</a:t>
-                      </a:r>
-                    </a:p>
-                  </a:txBody>
-                  <a:tcPr>
-                    <a:solidFill>
-                      <a:srgbClr val="FFFFFF"/>
-                    </a:solidFill>
-                  </a:tcPr>
-                </a:tc>
-              </a:tr>
-              <a:tr h="535577">
-                <a:tc>
-                  <a:txBody>
-                    <a:bodyPr/>
-                    <a:lstStyle/>
-                    <a:p>
-                      <a:pPr>
-                        <a:defRPr sz="950" b="1">
-                          <a:solidFill>
-                            <a:srgbClr val="0F172A"/>
-                          </a:solidFill>
-                        </a:defRPr>
-                      </a:pPr>
-                      <a:r>
-                        <a:t>course</a:t>
-                      </a:r>
-                    </a:p>
-                  </a:txBody>
-                  <a:tcPr>
-                    <a:solidFill>
-                      <a:srgbClr val="F8FAFC"/>
-                    </a:solidFill>
-                  </a:tcPr>
-                </a:tc>
-                <a:tc>
-                  <a:txBody>
-                    <a:bodyPr/>
-                    <a:lstStyle/>
-                    <a:p>
-                      <a:pPr>
-                        <a:defRPr sz="950">
-                          <a:solidFill>
-                            <a:srgbClr val="0F172A"/>
-                          </a:solidFill>
-                        </a:defRPr>
-                      </a:pPr>
-                      <a:r>
-                        <a:t>VARCHAR(100)</a:t>
-                      </a:r>
-                    </a:p>
-                  </a:txBody>
-                  <a:tcPr>
-                    <a:solidFill>
-                      <a:srgbClr val="F8FAFC"/>
-                    </a:solidFill>
-                  </a:tcPr>
-                </a:tc>
-                <a:tc>
-                  <a:txBody>
-                    <a:bodyPr/>
-                    <a:lstStyle/>
-                    <a:p>
-                      <a:pPr>
-                        <a:defRPr sz="950">
-                          <a:solidFill>
-                            <a:srgbClr val="0F172A"/>
-                          </a:solidFill>
-                        </a:defRPr>
-                      </a:pPr>
-                      <a:r>
-                        <a:t>NOT NULL</a:t>
-                      </a:r>
-                    </a:p>
-                  </a:txBody>
-                  <a:tcPr>
-                    <a:solidFill>
-                      <a:srgbClr val="F8FAFC"/>
-                    </a:solidFill>
-                  </a:tcPr>
-                </a:tc>
-              </a:tr>
-            </a:tbl>
-          </a:graphicData>
-        </a:graphic>
-      </p:graphicFrame>
-      <p:sp>
-        <p:nvSpPr>
-          <p:cNvPr id="8" name="Rounded Rectangle 7"/>
+              <a:t>1. Student Table (user_management_student)</a:t>
+            </a:r>
+          </a:p>
+          <a:p>
+            <a:pPr>
+              <a:spcBef>
+                <a:spcPts val="400"/>
+              </a:spcBef>
+              <a:defRPr sz="1050">
+                <a:solidFill>
+                  <a:srgbClr val="1E293B"/>
+                </a:solidFill>
+              </a:defRPr>
+            </a:pPr>
+            <a:r>
+              <a:t>• id: Unique student ID (Primary Key)</a:t>
+            </a:r>
+          </a:p>
+          <a:p>
+            <a:pPr>
+              <a:spcBef>
+                <a:spcPts val="400"/>
+              </a:spcBef>
+              <a:defRPr sz="1050">
+                <a:solidFill>
+                  <a:srgbClr val="1E293B"/>
+                </a:solidFill>
+              </a:defRPr>
+            </a:pPr>
+            <a:r>
+              <a:t>• user_id: Links to Django Auth User login</a:t>
+            </a:r>
+          </a:p>
+          <a:p>
+            <a:pPr>
+              <a:spcBef>
+                <a:spcPts val="400"/>
+              </a:spcBef>
+              <a:defRPr sz="1050">
+                <a:solidFill>
+                  <a:srgbClr val="1E293B"/>
+                </a:solidFill>
+              </a:defRPr>
+            </a:pPr>
+            <a:r>
+              <a:t>• name, email, phone: Contact details of the student</a:t>
+            </a:r>
+          </a:p>
+          <a:p>
+            <a:pPr>
+              <a:spcBef>
+                <a:spcPts val="400"/>
+              </a:spcBef>
+              <a:defRPr sz="1050">
+                <a:solidFill>
+                  <a:srgbClr val="1E293B"/>
+                </a:solidFill>
+              </a:defRPr>
+            </a:pPr>
+            <a:r>
+              <a:t>• course: Enrolled course (e.g., MCA, B.Tech)</a:t>
+            </a:r>
+          </a:p>
+        </p:txBody>
+      </p:sp>
+      <p:sp>
+        <p:nvSpPr>
+          <p:cNvPr id="7" name="Rounded Rectangle 6"/>
           <p:cNvSpPr/>
           <p:nvPr/>
         </p:nvSpPr>
         <p:spPr>
           <a:xfrm>
-            <a:off x="6217920" y="1920240"/>
-            <a:ext cx="5212080" cy="4389120"/>
+            <a:off x="6172200" y="1828800"/>
+            <a:ext cx="5285232" cy="2148840"/>
           </a:xfrm>
           <a:prstGeom prst="roundRect">
             <a:avLst/>
@@ -7576,7 +6529,7 @@
           </a:fontRef>
         </p:style>
         <p:txBody>
-          <a:bodyPr wrap="square" lIns="182880" tIns="182880" rIns="182880" rtlCol="0" anchor="ctr"/>
+          <a:bodyPr wrap="square" lIns="228600" tIns="182880" rIns="228600" rtlCol="0" anchor="ctr"/>
           <a:lstStyle/>
           <a:p>
             <a:pPr algn="ctr">
@@ -7587,748 +6540,314 @@
               </a:defRPr>
             </a:pPr>
             <a:r>
-              <a:t>TABLE 2: Internship (internships_internship)</a:t>
-            </a:r>
-          </a:p>
-        </p:txBody>
-      </p:sp>
-      <p:graphicFrame>
-        <p:nvGraphicFramePr>
-          <p:cNvPr id="9" name="Table 8"/>
-          <p:cNvGraphicFramePr>
-            <a:graphicFrameLocks noGrp="1"/>
-          </p:cNvGraphicFramePr>
+              <a:t>2. Internship Table (internships_internship)</a:t>
+            </a:r>
+          </a:p>
+          <a:p>
+            <a:pPr>
+              <a:spcBef>
+                <a:spcPts val="400"/>
+              </a:spcBef>
+              <a:defRPr sz="1050">
+                <a:solidFill>
+                  <a:srgbClr val="1E293B"/>
+                </a:solidFill>
+              </a:defRPr>
+            </a:pPr>
+            <a:r>
+              <a:t>• id: Unique internship ID (Primary Key)</a:t>
+            </a:r>
+          </a:p>
+          <a:p>
+            <a:pPr>
+              <a:spcBef>
+                <a:spcPts val="400"/>
+              </a:spcBef>
+              <a:defRPr sz="1050">
+                <a:solidFill>
+                  <a:srgbClr val="1E293B"/>
+                </a:solidFill>
+              </a:defRPr>
+            </a:pPr>
+            <a:r>
+              <a:t>• title &amp; company_name: Job role and hiring company</a:t>
+            </a:r>
+          </a:p>
+          <a:p>
+            <a:pPr>
+              <a:spcBef>
+                <a:spcPts val="400"/>
+              </a:spcBef>
+              <a:defRPr sz="1050">
+                <a:solidFill>
+                  <a:srgbClr val="1E293B"/>
+                </a:solidFill>
+              </a:defRPr>
+            </a:pPr>
+            <a:r>
+              <a:t>• location, duration, stipend: Work terms &amp; pay</a:t>
+            </a:r>
+          </a:p>
+          <a:p>
+            <a:pPr>
+              <a:spcBef>
+                <a:spcPts val="400"/>
+              </a:spcBef>
+              <a:defRPr sz="1050">
+                <a:solidFill>
+                  <a:srgbClr val="1E293B"/>
+                </a:solidFill>
+              </a:defRPr>
+            </a:pPr>
+            <a:r>
+              <a:t>• skills_required &amp; deadline: Skill requirements &amp; last date</a:t>
+            </a:r>
+          </a:p>
+        </p:txBody>
+      </p:sp>
+      <p:sp>
+        <p:nvSpPr>
+          <p:cNvPr id="8" name="Rounded Rectangle 7"/>
+          <p:cNvSpPr/>
           <p:nvPr/>
-        </p:nvGraphicFramePr>
-        <p:xfrm>
-          <a:off x="6309360" y="2377440"/>
-          <a:ext cx="5029200" cy="3749039"/>
-        </p:xfrm>
-        <a:graphic>
-          <a:graphicData uri="http://schemas.openxmlformats.org/drawingml/2006/table">
-            <a:tbl>
-              <a:tblPr firstRow="1" bandRow="1">
-                <a:tableStyleId>{5C22544A-7EE6-4342-B048-85BDC9FD1C3A}</a:tableStyleId>
-              </a:tblPr>
-              <a:tblGrid>
-                <a:gridCol w="1645920"/>
-                <a:gridCol w="1463040"/>
-                <a:gridCol w="1920240"/>
-              </a:tblGrid>
-              <a:tr h="374903">
-                <a:tc>
-                  <a:txBody>
-                    <a:bodyPr/>
-                    <a:lstStyle/>
-                    <a:p>
-                      <a:pPr>
-                        <a:defRPr sz="1000" b="1">
-                          <a:solidFill>
-                            <a:srgbClr val="FFFFFF"/>
-                          </a:solidFill>
-                        </a:defRPr>
-                      </a:pPr>
-                      <a:r>
-                        <a:t>Field Name</a:t>
-                      </a:r>
-                    </a:p>
-                  </a:txBody>
-                  <a:tcPr>
-                    <a:solidFill>
-                      <a:srgbClr val="2563EB"/>
-                    </a:solidFill>
-                  </a:tcPr>
-                </a:tc>
-                <a:tc>
-                  <a:txBody>
-                    <a:bodyPr/>
-                    <a:lstStyle/>
-                    <a:p>
-                      <a:pPr>
-                        <a:defRPr sz="1000" b="1">
-                          <a:solidFill>
-                            <a:srgbClr val="FFFFFF"/>
-                          </a:solidFill>
-                        </a:defRPr>
-                      </a:pPr>
-                      <a:r>
-                        <a:t>Data Type</a:t>
-                      </a:r>
-                    </a:p>
-                  </a:txBody>
-                  <a:tcPr>
-                    <a:solidFill>
-                      <a:srgbClr val="2563EB"/>
-                    </a:solidFill>
-                  </a:tcPr>
-                </a:tc>
-                <a:tc>
-                  <a:txBody>
-                    <a:bodyPr/>
-                    <a:lstStyle/>
-                    <a:p>
-                      <a:pPr>
-                        <a:defRPr sz="1000" b="1">
-                          <a:solidFill>
-                            <a:srgbClr val="FFFFFF"/>
-                          </a:solidFill>
-                        </a:defRPr>
-                      </a:pPr>
-                      <a:r>
-                        <a:t>Constraints</a:t>
-                      </a:r>
-                    </a:p>
-                  </a:txBody>
-                  <a:tcPr>
-                    <a:solidFill>
-                      <a:srgbClr val="2563EB"/>
-                    </a:solidFill>
-                  </a:tcPr>
-                </a:tc>
-              </a:tr>
-              <a:tr h="374903">
-                <a:tc>
-                  <a:txBody>
-                    <a:bodyPr/>
-                    <a:lstStyle/>
-                    <a:p>
-                      <a:pPr>
-                        <a:defRPr sz="950" b="1">
-                          <a:solidFill>
-                            <a:srgbClr val="0F172A"/>
-                          </a:solidFill>
-                        </a:defRPr>
-                      </a:pPr>
-                      <a:r>
-                        <a:t>id</a:t>
-                      </a:r>
-                    </a:p>
-                  </a:txBody>
-                  <a:tcPr>
-                    <a:solidFill>
-                      <a:srgbClr val="FFFFFF"/>
-                    </a:solidFill>
-                  </a:tcPr>
-                </a:tc>
-                <a:tc>
-                  <a:txBody>
-                    <a:bodyPr/>
-                    <a:lstStyle/>
-                    <a:p>
-                      <a:pPr>
-                        <a:defRPr sz="950">
-                          <a:solidFill>
-                            <a:srgbClr val="0F172A"/>
-                          </a:solidFill>
-                        </a:defRPr>
-                      </a:pPr>
-                      <a:r>
-                        <a:t>BIGINT / INT</a:t>
-                      </a:r>
-                    </a:p>
-                  </a:txBody>
-                  <a:tcPr>
-                    <a:solidFill>
-                      <a:srgbClr val="FFFFFF"/>
-                    </a:solidFill>
-                  </a:tcPr>
-                </a:tc>
-                <a:tc>
-                  <a:txBody>
-                    <a:bodyPr/>
-                    <a:lstStyle/>
-                    <a:p>
-                      <a:pPr>
-                        <a:defRPr sz="950">
-                          <a:solidFill>
-                            <a:srgbClr val="0F172A"/>
-                          </a:solidFill>
-                        </a:defRPr>
-                      </a:pPr>
-                      <a:r>
-                        <a:t>PRIMARY KEY, AUTO_INC</a:t>
-                      </a:r>
-                    </a:p>
-                  </a:txBody>
-                  <a:tcPr>
-                    <a:solidFill>
-                      <a:srgbClr val="FFFFFF"/>
-                    </a:solidFill>
-                  </a:tcPr>
-                </a:tc>
-              </a:tr>
-              <a:tr h="374903">
-                <a:tc>
-                  <a:txBody>
-                    <a:bodyPr/>
-                    <a:lstStyle/>
-                    <a:p>
-                      <a:pPr>
-                        <a:defRPr sz="950" b="1">
-                          <a:solidFill>
-                            <a:srgbClr val="0F172A"/>
-                          </a:solidFill>
-                        </a:defRPr>
-                      </a:pPr>
-                      <a:r>
-                        <a:t>title</a:t>
-                      </a:r>
-                    </a:p>
-                  </a:txBody>
-                  <a:tcPr>
-                    <a:solidFill>
-                      <a:srgbClr val="F8FAFC"/>
-                    </a:solidFill>
-                  </a:tcPr>
-                </a:tc>
-                <a:tc>
-                  <a:txBody>
-                    <a:bodyPr/>
-                    <a:lstStyle/>
-                    <a:p>
-                      <a:pPr>
-                        <a:defRPr sz="950">
-                          <a:solidFill>
-                            <a:srgbClr val="0F172A"/>
-                          </a:solidFill>
-                        </a:defRPr>
-                      </a:pPr>
-                      <a:r>
-                        <a:t>VARCHAR(200)</a:t>
-                      </a:r>
-                    </a:p>
-                  </a:txBody>
-                  <a:tcPr>
-                    <a:solidFill>
-                      <a:srgbClr val="F8FAFC"/>
-                    </a:solidFill>
-                  </a:tcPr>
-                </a:tc>
-                <a:tc>
-                  <a:txBody>
-                    <a:bodyPr/>
-                    <a:lstStyle/>
-                    <a:p>
-                      <a:pPr>
-                        <a:defRPr sz="950">
-                          <a:solidFill>
-                            <a:srgbClr val="0F172A"/>
-                          </a:solidFill>
-                        </a:defRPr>
-                      </a:pPr>
-                      <a:r>
-                        <a:t>NOT NULL</a:t>
-                      </a:r>
-                    </a:p>
-                  </a:txBody>
-                  <a:tcPr>
-                    <a:solidFill>
-                      <a:srgbClr val="F8FAFC"/>
-                    </a:solidFill>
-                  </a:tcPr>
-                </a:tc>
-              </a:tr>
-              <a:tr h="374903">
-                <a:tc>
-                  <a:txBody>
-                    <a:bodyPr/>
-                    <a:lstStyle/>
-                    <a:p>
-                      <a:pPr>
-                        <a:defRPr sz="950" b="1">
-                          <a:solidFill>
-                            <a:srgbClr val="0F172A"/>
-                          </a:solidFill>
-                        </a:defRPr>
-                      </a:pPr>
-                      <a:r>
-                        <a:t>company_name</a:t>
-                      </a:r>
-                    </a:p>
-                  </a:txBody>
-                  <a:tcPr>
-                    <a:solidFill>
-                      <a:srgbClr val="FFFFFF"/>
-                    </a:solidFill>
-                  </a:tcPr>
-                </a:tc>
-                <a:tc>
-                  <a:txBody>
-                    <a:bodyPr/>
-                    <a:lstStyle/>
-                    <a:p>
-                      <a:pPr>
-                        <a:defRPr sz="950">
-                          <a:solidFill>
-                            <a:srgbClr val="0F172A"/>
-                          </a:solidFill>
-                        </a:defRPr>
-                      </a:pPr>
-                      <a:r>
-                        <a:t>VARCHAR(200)</a:t>
-                      </a:r>
-                    </a:p>
-                  </a:txBody>
-                  <a:tcPr>
-                    <a:solidFill>
-                      <a:srgbClr val="FFFFFF"/>
-                    </a:solidFill>
-                  </a:tcPr>
-                </a:tc>
-                <a:tc>
-                  <a:txBody>
-                    <a:bodyPr/>
-                    <a:lstStyle/>
-                    <a:p>
-                      <a:pPr>
-                        <a:defRPr sz="950">
-                          <a:solidFill>
-                            <a:srgbClr val="0F172A"/>
-                          </a:solidFill>
-                        </a:defRPr>
-                      </a:pPr>
-                      <a:r>
-                        <a:t>NOT NULL</a:t>
-                      </a:r>
-                    </a:p>
-                  </a:txBody>
-                  <a:tcPr>
-                    <a:solidFill>
-                      <a:srgbClr val="FFFFFF"/>
-                    </a:solidFill>
-                  </a:tcPr>
-                </a:tc>
-              </a:tr>
-              <a:tr h="374903">
-                <a:tc>
-                  <a:txBody>
-                    <a:bodyPr/>
-                    <a:lstStyle/>
-                    <a:p>
-                      <a:pPr>
-                        <a:defRPr sz="950" b="1">
-                          <a:solidFill>
-                            <a:srgbClr val="0F172A"/>
-                          </a:solidFill>
-                        </a:defRPr>
-                      </a:pPr>
-                      <a:r>
-                        <a:t>description</a:t>
-                      </a:r>
-                    </a:p>
-                  </a:txBody>
-                  <a:tcPr>
-                    <a:solidFill>
-                      <a:srgbClr val="F8FAFC"/>
-                    </a:solidFill>
-                  </a:tcPr>
-                </a:tc>
-                <a:tc>
-                  <a:txBody>
-                    <a:bodyPr/>
-                    <a:lstStyle/>
-                    <a:p>
-                      <a:pPr>
-                        <a:defRPr sz="950">
-                          <a:solidFill>
-                            <a:srgbClr val="0F172A"/>
-                          </a:solidFill>
-                        </a:defRPr>
-                      </a:pPr>
-                      <a:r>
-                        <a:t>TEXT</a:t>
-                      </a:r>
-                    </a:p>
-                  </a:txBody>
-                  <a:tcPr>
-                    <a:solidFill>
-                      <a:srgbClr val="F8FAFC"/>
-                    </a:solidFill>
-                  </a:tcPr>
-                </a:tc>
-                <a:tc>
-                  <a:txBody>
-                    <a:bodyPr/>
-                    <a:lstStyle/>
-                    <a:p>
-                      <a:pPr>
-                        <a:defRPr sz="950">
-                          <a:solidFill>
-                            <a:srgbClr val="0F172A"/>
-                          </a:solidFill>
-                        </a:defRPr>
-                      </a:pPr>
-                      <a:r>
-                        <a:t>NOT NULL</a:t>
-                      </a:r>
-                    </a:p>
-                  </a:txBody>
-                  <a:tcPr>
-                    <a:solidFill>
-                      <a:srgbClr val="F8FAFC"/>
-                    </a:solidFill>
-                  </a:tcPr>
-                </a:tc>
-              </a:tr>
-              <a:tr h="374903">
-                <a:tc>
-                  <a:txBody>
-                    <a:bodyPr/>
-                    <a:lstStyle/>
-                    <a:p>
-                      <a:pPr>
-                        <a:defRPr sz="950" b="1">
-                          <a:solidFill>
-                            <a:srgbClr val="0F172A"/>
-                          </a:solidFill>
-                        </a:defRPr>
-                      </a:pPr>
-                      <a:r>
-                        <a:t>location</a:t>
-                      </a:r>
-                    </a:p>
-                  </a:txBody>
-                  <a:tcPr>
-                    <a:solidFill>
-                      <a:srgbClr val="FFFFFF"/>
-                    </a:solidFill>
-                  </a:tcPr>
-                </a:tc>
-                <a:tc>
-                  <a:txBody>
-                    <a:bodyPr/>
-                    <a:lstStyle/>
-                    <a:p>
-                      <a:pPr>
-                        <a:defRPr sz="950">
-                          <a:solidFill>
-                            <a:srgbClr val="0F172A"/>
-                          </a:solidFill>
-                        </a:defRPr>
-                      </a:pPr>
-                      <a:r>
-                        <a:t>VARCHAR(100)</a:t>
-                      </a:r>
-                    </a:p>
-                  </a:txBody>
-                  <a:tcPr>
-                    <a:solidFill>
-                      <a:srgbClr val="FFFFFF"/>
-                    </a:solidFill>
-                  </a:tcPr>
-                </a:tc>
-                <a:tc>
-                  <a:txBody>
-                    <a:bodyPr/>
-                    <a:lstStyle/>
-                    <a:p>
-                      <a:pPr>
-                        <a:defRPr sz="950">
-                          <a:solidFill>
-                            <a:srgbClr val="0F172A"/>
-                          </a:solidFill>
-                        </a:defRPr>
-                      </a:pPr>
-                      <a:r>
-                        <a:t>NOT NULL</a:t>
-                      </a:r>
-                    </a:p>
-                  </a:txBody>
-                  <a:tcPr>
-                    <a:solidFill>
-                      <a:srgbClr val="FFFFFF"/>
-                    </a:solidFill>
-                  </a:tcPr>
-                </a:tc>
-              </a:tr>
-              <a:tr h="374903">
-                <a:tc>
-                  <a:txBody>
-                    <a:bodyPr/>
-                    <a:lstStyle/>
-                    <a:p>
-                      <a:pPr>
-                        <a:defRPr sz="950" b="1">
-                          <a:solidFill>
-                            <a:srgbClr val="0F172A"/>
-                          </a:solidFill>
-                        </a:defRPr>
-                      </a:pPr>
-                      <a:r>
-                        <a:t>duration</a:t>
-                      </a:r>
-                    </a:p>
-                  </a:txBody>
-                  <a:tcPr>
-                    <a:solidFill>
-                      <a:srgbClr val="F8FAFC"/>
-                    </a:solidFill>
-                  </a:tcPr>
-                </a:tc>
-                <a:tc>
-                  <a:txBody>
-                    <a:bodyPr/>
-                    <a:lstStyle/>
-                    <a:p>
-                      <a:pPr>
-                        <a:defRPr sz="950">
-                          <a:solidFill>
-                            <a:srgbClr val="0F172A"/>
-                          </a:solidFill>
-                        </a:defRPr>
-                      </a:pPr>
-                      <a:r>
-                        <a:t>VARCHAR(100)</a:t>
-                      </a:r>
-                    </a:p>
-                  </a:txBody>
-                  <a:tcPr>
-                    <a:solidFill>
-                      <a:srgbClr val="F8FAFC"/>
-                    </a:solidFill>
-                  </a:tcPr>
-                </a:tc>
-                <a:tc>
-                  <a:txBody>
-                    <a:bodyPr/>
-                    <a:lstStyle/>
-                    <a:p>
-                      <a:pPr>
-                        <a:defRPr sz="950">
-                          <a:solidFill>
-                            <a:srgbClr val="0F172A"/>
-                          </a:solidFill>
-                        </a:defRPr>
-                      </a:pPr>
-                      <a:r>
-                        <a:t>NOT NULL</a:t>
-                      </a:r>
-                    </a:p>
-                  </a:txBody>
-                  <a:tcPr>
-                    <a:solidFill>
-                      <a:srgbClr val="F8FAFC"/>
-                    </a:solidFill>
-                  </a:tcPr>
-                </a:tc>
-              </a:tr>
-              <a:tr h="374903">
-                <a:tc>
-                  <a:txBody>
-                    <a:bodyPr/>
-                    <a:lstStyle/>
-                    <a:p>
-                      <a:pPr>
-                        <a:defRPr sz="950" b="1">
-                          <a:solidFill>
-                            <a:srgbClr val="0F172A"/>
-                          </a:solidFill>
-                        </a:defRPr>
-                      </a:pPr>
-                      <a:r>
-                        <a:t>stipend</a:t>
-                      </a:r>
-                    </a:p>
-                  </a:txBody>
-                  <a:tcPr>
-                    <a:solidFill>
-                      <a:srgbClr val="FFFFFF"/>
-                    </a:solidFill>
-                  </a:tcPr>
-                </a:tc>
-                <a:tc>
-                  <a:txBody>
-                    <a:bodyPr/>
-                    <a:lstStyle/>
-                    <a:p>
-                      <a:pPr>
-                        <a:defRPr sz="950">
-                          <a:solidFill>
-                            <a:srgbClr val="0F172A"/>
-                          </a:solidFill>
-                        </a:defRPr>
-                      </a:pPr>
-                      <a:r>
-                        <a:t>VARCHAR(100)</a:t>
-                      </a:r>
-                    </a:p>
-                  </a:txBody>
-                  <a:tcPr>
-                    <a:solidFill>
-                      <a:srgbClr val="FFFFFF"/>
-                    </a:solidFill>
-                  </a:tcPr>
-                </a:tc>
-                <a:tc>
-                  <a:txBody>
-                    <a:bodyPr/>
-                    <a:lstStyle/>
-                    <a:p>
-                      <a:pPr>
-                        <a:defRPr sz="950">
-                          <a:solidFill>
-                            <a:srgbClr val="0F172A"/>
-                          </a:solidFill>
-                        </a:defRPr>
-                      </a:pPr>
-                      <a:r>
-                        <a:t>NOT NULL</a:t>
-                      </a:r>
-                    </a:p>
-                  </a:txBody>
-                  <a:tcPr>
-                    <a:solidFill>
-                      <a:srgbClr val="FFFFFF"/>
-                    </a:solidFill>
-                  </a:tcPr>
-                </a:tc>
-              </a:tr>
-              <a:tr h="374903">
-                <a:tc>
-                  <a:txBody>
-                    <a:bodyPr/>
-                    <a:lstStyle/>
-                    <a:p>
-                      <a:pPr>
-                        <a:defRPr sz="950" b="1">
-                          <a:solidFill>
-                            <a:srgbClr val="0F172A"/>
-                          </a:solidFill>
-                        </a:defRPr>
-                      </a:pPr>
-                      <a:r>
-                        <a:t>skills_required</a:t>
-                      </a:r>
-                    </a:p>
-                  </a:txBody>
-                  <a:tcPr>
-                    <a:solidFill>
-                      <a:srgbClr val="F8FAFC"/>
-                    </a:solidFill>
-                  </a:tcPr>
-                </a:tc>
-                <a:tc>
-                  <a:txBody>
-                    <a:bodyPr/>
-                    <a:lstStyle/>
-                    <a:p>
-                      <a:pPr>
-                        <a:defRPr sz="950">
-                          <a:solidFill>
-                            <a:srgbClr val="0F172A"/>
-                          </a:solidFill>
-                        </a:defRPr>
-                      </a:pPr>
-                      <a:r>
-                        <a:t>VARCHAR(300)</a:t>
-                      </a:r>
-                    </a:p>
-                  </a:txBody>
-                  <a:tcPr>
-                    <a:solidFill>
-                      <a:srgbClr val="F8FAFC"/>
-                    </a:solidFill>
-                  </a:tcPr>
-                </a:tc>
-                <a:tc>
-                  <a:txBody>
-                    <a:bodyPr/>
-                    <a:lstStyle/>
-                    <a:p>
-                      <a:pPr>
-                        <a:defRPr sz="950">
-                          <a:solidFill>
-                            <a:srgbClr val="0F172A"/>
-                          </a:solidFill>
-                        </a:defRPr>
-                      </a:pPr>
-                      <a:r>
-                        <a:t>NOT NULL</a:t>
-                      </a:r>
-                    </a:p>
-                  </a:txBody>
-                  <a:tcPr>
-                    <a:solidFill>
-                      <a:srgbClr val="F8FAFC"/>
-                    </a:solidFill>
-                  </a:tcPr>
-                </a:tc>
-              </a:tr>
-              <a:tr h="374912">
-                <a:tc>
-                  <a:txBody>
-                    <a:bodyPr/>
-                    <a:lstStyle/>
-                    <a:p>
-                      <a:pPr>
-                        <a:defRPr sz="950" b="1">
-                          <a:solidFill>
-                            <a:srgbClr val="0F172A"/>
-                          </a:solidFill>
-                        </a:defRPr>
-                      </a:pPr>
-                      <a:r>
-                        <a:t>application_deadline</a:t>
-                      </a:r>
-                    </a:p>
-                  </a:txBody>
-                  <a:tcPr>
-                    <a:solidFill>
-                      <a:srgbClr val="FFFFFF"/>
-                    </a:solidFill>
-                  </a:tcPr>
-                </a:tc>
-                <a:tc>
-                  <a:txBody>
-                    <a:bodyPr/>
-                    <a:lstStyle/>
-                    <a:p>
-                      <a:pPr>
-                        <a:defRPr sz="950">
-                          <a:solidFill>
-                            <a:srgbClr val="0F172A"/>
-                          </a:solidFill>
-                        </a:defRPr>
-                      </a:pPr>
-                      <a:r>
-                        <a:t>DATE</a:t>
-                      </a:r>
-                    </a:p>
-                  </a:txBody>
-                  <a:tcPr>
-                    <a:solidFill>
-                      <a:srgbClr val="FFFFFF"/>
-                    </a:solidFill>
-                  </a:tcPr>
-                </a:tc>
-                <a:tc>
-                  <a:txBody>
-                    <a:bodyPr/>
-                    <a:lstStyle/>
-                    <a:p>
-                      <a:pPr>
-                        <a:defRPr sz="950">
-                          <a:solidFill>
-                            <a:srgbClr val="0F172A"/>
-                          </a:solidFill>
-                        </a:defRPr>
-                      </a:pPr>
-                      <a:r>
-                        <a:t>NOT NULL</a:t>
-                      </a:r>
-                    </a:p>
-                  </a:txBody>
-                  <a:tcPr>
-                    <a:solidFill>
-                      <a:srgbClr val="FFFFFF"/>
-                    </a:solidFill>
-                  </a:tcPr>
-                </a:tc>
-              </a:tr>
-            </a:tbl>
-          </a:graphicData>
-        </a:graphic>
-      </p:graphicFrame>
+        </p:nvSpPr>
+        <p:spPr>
+          <a:xfrm>
+            <a:off x="731520" y="4114800"/>
+            <a:ext cx="5285232" cy="2148840"/>
+          </a:xfrm>
+          <a:prstGeom prst="roundRect">
+            <a:avLst/>
+          </a:prstGeom>
+          <a:solidFill>
+            <a:srgbClr val="FFFFFF"/>
+          </a:solidFill>
+          <a:ln w="15240">
+            <a:solidFill>
+              <a:srgbClr val="E2E8F0"/>
+            </a:solidFill>
+          </a:ln>
+        </p:spPr>
+        <p:style>
+          <a:lnRef idx="1">
+            <a:schemeClr val="accent1"/>
+          </a:lnRef>
+          <a:fillRef idx="3">
+            <a:schemeClr val="accent1"/>
+          </a:fillRef>
+          <a:effectRef idx="2">
+            <a:schemeClr val="accent1"/>
+          </a:effectRef>
+          <a:fontRef idx="minor">
+            <a:schemeClr val="lt1"/>
+          </a:fontRef>
+        </p:style>
+        <p:txBody>
+          <a:bodyPr wrap="square" lIns="228600" tIns="182880" rIns="228600" rtlCol="0" anchor="ctr"/>
+          <a:lstStyle/>
+          <a:p>
+            <a:pPr algn="ctr">
+              <a:defRPr sz="1300" b="1">
+                <a:solidFill>
+                  <a:srgbClr val="10955A"/>
+                </a:solidFill>
+              </a:defRPr>
+            </a:pPr>
+            <a:r>
+              <a:t>3. Application Table (internships_application)</a:t>
+            </a:r>
+          </a:p>
+          <a:p>
+            <a:pPr>
+              <a:spcBef>
+                <a:spcPts val="400"/>
+              </a:spcBef>
+              <a:defRPr sz="1050">
+                <a:solidFill>
+                  <a:srgbClr val="1E293B"/>
+                </a:solidFill>
+              </a:defRPr>
+            </a:pPr>
+            <a:r>
+              <a:t>• id: Unique application ID (Primary Key)</a:t>
+            </a:r>
+          </a:p>
+          <a:p>
+            <a:pPr>
+              <a:spcBef>
+                <a:spcPts val="400"/>
+              </a:spcBef>
+              <a:defRPr sz="1050">
+                <a:solidFill>
+                  <a:srgbClr val="1E293B"/>
+                </a:solidFill>
+              </a:defRPr>
+            </a:pPr>
+            <a:r>
+              <a:t>• student_id &amp; internship_id: Foreign Keys connecting student to job</a:t>
+            </a:r>
+          </a:p>
+          <a:p>
+            <a:pPr>
+              <a:spcBef>
+                <a:spcPts val="400"/>
+              </a:spcBef>
+              <a:defRPr sz="1050">
+                <a:solidFill>
+                  <a:srgbClr val="1E293B"/>
+                </a:solidFill>
+              </a:defRPr>
+            </a:pPr>
+            <a:r>
+              <a:t>• applied_at: Date and time of application</a:t>
+            </a:r>
+          </a:p>
+          <a:p>
+            <a:pPr>
+              <a:spcBef>
+                <a:spcPts val="400"/>
+              </a:spcBef>
+              <a:defRPr sz="1050">
+                <a:solidFill>
+                  <a:srgbClr val="1E293B"/>
+                </a:solidFill>
+              </a:defRPr>
+            </a:pPr>
+            <a:r>
+              <a:t>• status: Pending, Shortlisted, Selected, or Rejected</a:t>
+            </a:r>
+          </a:p>
+          <a:p>
+            <a:pPr>
+              <a:spcBef>
+                <a:spcPts val="400"/>
+              </a:spcBef>
+              <a:defRPr sz="1050">
+                <a:solidFill>
+                  <a:srgbClr val="1E293B"/>
+                </a:solidFill>
+              </a:defRPr>
+            </a:pPr>
+            <a:r>
+              <a:t>• * Unique Rule: A student cannot apply twice for the same job</a:t>
+            </a:r>
+          </a:p>
+        </p:txBody>
+      </p:sp>
+      <p:sp>
+        <p:nvSpPr>
+          <p:cNvPr id="9" name="Rounded Rectangle 8"/>
+          <p:cNvSpPr/>
+          <p:nvPr/>
+        </p:nvSpPr>
+        <p:spPr>
+          <a:xfrm>
+            <a:off x="6172200" y="4114800"/>
+            <a:ext cx="5285232" cy="2148840"/>
+          </a:xfrm>
+          <a:prstGeom prst="roundRect">
+            <a:avLst/>
+          </a:prstGeom>
+          <a:solidFill>
+            <a:srgbClr val="FFFFFF"/>
+          </a:solidFill>
+          <a:ln w="15240">
+            <a:solidFill>
+              <a:srgbClr val="E2E8F0"/>
+            </a:solidFill>
+          </a:ln>
+        </p:spPr>
+        <p:style>
+          <a:lnRef idx="1">
+            <a:schemeClr val="accent1"/>
+          </a:lnRef>
+          <a:fillRef idx="3">
+            <a:schemeClr val="accent1"/>
+          </a:fillRef>
+          <a:effectRef idx="2">
+            <a:schemeClr val="accent1"/>
+          </a:effectRef>
+          <a:fontRef idx="minor">
+            <a:schemeClr val="lt1"/>
+          </a:fontRef>
+        </p:style>
+        <p:txBody>
+          <a:bodyPr wrap="square" lIns="228600" tIns="182880" rIns="228600" rtlCol="0" anchor="ctr"/>
+          <a:lstStyle/>
+          <a:p>
+            <a:pPr algn="ctr">
+              <a:defRPr sz="1300" b="1">
+                <a:solidFill>
+                  <a:srgbClr val="D97706"/>
+                </a:solidFill>
+              </a:defRPr>
+            </a:pPr>
+            <a:r>
+              <a:t>4. Notification Table (internships_notification)</a:t>
+            </a:r>
+          </a:p>
+          <a:p>
+            <a:pPr>
+              <a:spcBef>
+                <a:spcPts val="400"/>
+              </a:spcBef>
+              <a:defRPr sz="1050">
+                <a:solidFill>
+                  <a:srgbClr val="1E293B"/>
+                </a:solidFill>
+              </a:defRPr>
+            </a:pPr>
+            <a:r>
+              <a:t>• id: Unique notification ID (Primary Key)</a:t>
+            </a:r>
+          </a:p>
+          <a:p>
+            <a:pPr>
+              <a:spcBef>
+                <a:spcPts val="400"/>
+              </a:spcBef>
+              <a:defRPr sz="1050">
+                <a:solidFill>
+                  <a:srgbClr val="1E293B"/>
+                </a:solidFill>
+              </a:defRPr>
+            </a:pPr>
+            <a:r>
+              <a:t>• student_id: Target student receiving the alert</a:t>
+            </a:r>
+          </a:p>
+          <a:p>
+            <a:pPr>
+              <a:spcBef>
+                <a:spcPts val="400"/>
+              </a:spcBef>
+              <a:defRPr sz="1050">
+                <a:solidFill>
+                  <a:srgbClr val="1E293B"/>
+                </a:solidFill>
+              </a:defRPr>
+            </a:pPr>
+            <a:r>
+              <a:t>• message: Alert text (e.g., 'Application Submitted')</a:t>
+            </a:r>
+          </a:p>
+          <a:p>
+            <a:pPr>
+              <a:spcBef>
+                <a:spcPts val="400"/>
+              </a:spcBef>
+              <a:defRPr sz="1050">
+                <a:solidFill>
+                  <a:srgbClr val="1E293B"/>
+                </a:solidFill>
+              </a:defRPr>
+            </a:pPr>
+            <a:r>
+              <a:t>• is_read: True/False (Tracks unread messages)</a:t>
+            </a:r>
+          </a:p>
+        </p:txBody>
+      </p:sp>
     </p:spTree>
   </p:cSld>
   <p:clrMapOvr>
@@ -8363,8 +6882,8 @@
         </p:nvSpPr>
         <p:spPr>
           <a:xfrm>
-            <a:off x="731520" y="411480"/>
-            <a:ext cx="10698480" cy="320040"/>
+            <a:off x="731520" y="365760"/>
+            <a:ext cx="10698480" cy="274320"/>
           </a:xfrm>
           <a:prstGeom prst="rect">
             <a:avLst/>
@@ -8385,7 +6904,7 @@
               </a:defRPr>
             </a:pPr>
             <a:r>
-              <a:t>DATABASE SCHEMA</a:t>
+              <a:t>SLIDE 8 • TECH STACK</a:t>
             </a:r>
           </a:p>
         </p:txBody>
@@ -8398,8 +6917,8 @@
         </p:nvSpPr>
         <p:spPr>
           <a:xfrm>
-            <a:off x="731520" y="685800"/>
-            <a:ext cx="10698480" cy="640080"/>
+            <a:off x="731520" y="640080"/>
+            <a:ext cx="10698480" cy="548640"/>
           </a:xfrm>
           <a:prstGeom prst="rect">
             <a:avLst/>
@@ -8420,7 +6939,7 @@
               </a:defRPr>
             </a:pPr>
             <a:r>
-              <a:t>Database Tables: Application &amp; Notification</a:t>
+              <a:t>Technology Stack Used</a:t>
             </a:r>
           </a:p>
         </p:txBody>
@@ -8433,8 +6952,8 @@
         </p:nvSpPr>
         <p:spPr>
           <a:xfrm>
-            <a:off x="731520" y="1325880"/>
-            <a:ext cx="10698480" cy="365760"/>
+            <a:off x="731520" y="1234440"/>
+            <a:ext cx="10698480" cy="320040"/>
           </a:xfrm>
           <a:prstGeom prst="rect">
             <a:avLst/>
@@ -8455,7 +6974,7 @@
               </a:defRPr>
             </a:pPr>
             <a:r>
-              <a:t>Schema specifications, foreign key linkages, and status constraints</a:t>
+              <a:t>Programming language, database, framework, and tools used</a:t>
             </a:r>
           </a:p>
         </p:txBody>
@@ -8468,7 +6987,7 @@
         </p:nvSpPr>
         <p:spPr>
           <a:xfrm>
-            <a:off x="731520" y="1691640"/>
+            <a:off x="731520" y="1600200"/>
             <a:ext cx="10728655" cy="18288"/>
           </a:xfrm>
           <a:prstGeom prst="rect">
@@ -8511,8 +7030,8 @@
         </p:nvSpPr>
         <p:spPr>
           <a:xfrm>
-            <a:off x="731520" y="1920240"/>
-            <a:ext cx="5212080" cy="4389120"/>
+            <a:off x="731520" y="1828800"/>
+            <a:ext cx="3474720" cy="2103120"/>
           </a:xfrm>
           <a:prstGeom prst="roundRect">
             <a:avLst/>
@@ -8541,500 +7060,62 @@
           </a:fontRef>
         </p:style>
         <p:txBody>
-          <a:bodyPr wrap="square" lIns="182880" tIns="182880" rIns="182880" rtlCol="0" anchor="ctr"/>
+          <a:bodyPr wrap="square" lIns="228600" tIns="201168" rIns="228600" rtlCol="0" anchor="ctr"/>
           <a:lstStyle/>
           <a:p>
             <a:pPr algn="ctr">
-              <a:defRPr sz="1300" b="1">
-                <a:solidFill>
-                  <a:srgbClr val="0D9488"/>
-                </a:solidFill>
-              </a:defRPr>
-            </a:pPr>
-            <a:r>
-              <a:t>TABLE 3: Application (internships_application)</a:t>
-            </a:r>
-          </a:p>
-          <a:p>
-            <a:pPr>
-              <a:spcBef>
-                <a:spcPts val="800"/>
-              </a:spcBef>
-              <a:defRPr sz="950" b="1">
-                <a:solidFill>
-                  <a:srgbClr val="E11D48"/>
-                </a:solidFill>
-              </a:defRPr>
-            </a:pPr>
-            <a:r>
-              <a:t>* Enforces UniqueConstraint: ['student', 'internship'] to prohibit duplicate entries.</a:t>
-            </a:r>
-          </a:p>
-        </p:txBody>
-      </p:sp>
-      <p:graphicFrame>
-        <p:nvGraphicFramePr>
-          <p:cNvPr id="7" name="Table 6"/>
-          <p:cNvGraphicFramePr>
-            <a:graphicFrameLocks noGrp="1"/>
-          </p:cNvGraphicFramePr>
-          <p:nvPr/>
-        </p:nvGraphicFramePr>
-        <p:xfrm>
-          <a:off x="822960" y="2377440"/>
-          <a:ext cx="5029200" cy="3749039"/>
-        </p:xfrm>
-        <a:graphic>
-          <a:graphicData uri="http://schemas.openxmlformats.org/drawingml/2006/table">
-            <a:tbl>
-              <a:tblPr firstRow="1" bandRow="1">
-                <a:tableStyleId>{5C22544A-7EE6-4342-B048-85BDC9FD1C3A}</a:tableStyleId>
-              </a:tblPr>
-              <a:tblGrid>
-                <a:gridCol w="1371600"/>
-                <a:gridCol w="1463040"/>
-                <a:gridCol w="2194560"/>
-              </a:tblGrid>
-              <a:tr h="624839">
-                <a:tc>
-                  <a:txBody>
-                    <a:bodyPr/>
-                    <a:lstStyle/>
-                    <a:p>
-                      <a:pPr>
-                        <a:defRPr sz="1000" b="1">
-                          <a:solidFill>
-                            <a:srgbClr val="FFFFFF"/>
-                          </a:solidFill>
-                        </a:defRPr>
-                      </a:pPr>
-                      <a:r>
-                        <a:t>Field Name</a:t>
-                      </a:r>
-                    </a:p>
-                  </a:txBody>
-                  <a:tcPr>
-                    <a:solidFill>
-                      <a:srgbClr val="0D9488"/>
-                    </a:solidFill>
-                  </a:tcPr>
-                </a:tc>
-                <a:tc>
-                  <a:txBody>
-                    <a:bodyPr/>
-                    <a:lstStyle/>
-                    <a:p>
-                      <a:pPr>
-                        <a:defRPr sz="1000" b="1">
-                          <a:solidFill>
-                            <a:srgbClr val="FFFFFF"/>
-                          </a:solidFill>
-                        </a:defRPr>
-                      </a:pPr>
-                      <a:r>
-                        <a:t>Data Type</a:t>
-                      </a:r>
-                    </a:p>
-                  </a:txBody>
-                  <a:tcPr>
-                    <a:solidFill>
-                      <a:srgbClr val="0D9488"/>
-                    </a:solidFill>
-                  </a:tcPr>
-                </a:tc>
-                <a:tc>
-                  <a:txBody>
-                    <a:bodyPr/>
-                    <a:lstStyle/>
-                    <a:p>
-                      <a:pPr>
-                        <a:defRPr sz="1000" b="1">
-                          <a:solidFill>
-                            <a:srgbClr val="FFFFFF"/>
-                          </a:solidFill>
-                        </a:defRPr>
-                      </a:pPr>
-                      <a:r>
-                        <a:t>Constraints</a:t>
-                      </a:r>
-                    </a:p>
-                  </a:txBody>
-                  <a:tcPr>
-                    <a:solidFill>
-                      <a:srgbClr val="0D9488"/>
-                    </a:solidFill>
-                  </a:tcPr>
-                </a:tc>
-              </a:tr>
-              <a:tr h="624839">
-                <a:tc>
-                  <a:txBody>
-                    <a:bodyPr/>
-                    <a:lstStyle/>
-                    <a:p>
-                      <a:pPr>
-                        <a:defRPr sz="950" b="1">
-                          <a:solidFill>
-                            <a:srgbClr val="0F172A"/>
-                          </a:solidFill>
-                        </a:defRPr>
-                      </a:pPr>
-                      <a:r>
-                        <a:t>id</a:t>
-                      </a:r>
-                    </a:p>
-                  </a:txBody>
-                  <a:tcPr>
-                    <a:solidFill>
-                      <a:srgbClr val="FFFFFF"/>
-                    </a:solidFill>
-                  </a:tcPr>
-                </a:tc>
-                <a:tc>
-                  <a:txBody>
-                    <a:bodyPr/>
-                    <a:lstStyle/>
-                    <a:p>
-                      <a:pPr>
-                        <a:defRPr sz="950">
-                          <a:solidFill>
-                            <a:srgbClr val="0F172A"/>
-                          </a:solidFill>
-                        </a:defRPr>
-                      </a:pPr>
-                      <a:r>
-                        <a:t>BIGINT / INT</a:t>
-                      </a:r>
-                    </a:p>
-                  </a:txBody>
-                  <a:tcPr>
-                    <a:solidFill>
-                      <a:srgbClr val="FFFFFF"/>
-                    </a:solidFill>
-                  </a:tcPr>
-                </a:tc>
-                <a:tc>
-                  <a:txBody>
-                    <a:bodyPr/>
-                    <a:lstStyle/>
-                    <a:p>
-                      <a:pPr>
-                        <a:defRPr sz="950">
-                          <a:solidFill>
-                            <a:srgbClr val="0F172A"/>
-                          </a:solidFill>
-                        </a:defRPr>
-                      </a:pPr>
-                      <a:r>
-                        <a:t>PRIMARY KEY, AUTO_INC</a:t>
-                      </a:r>
-                    </a:p>
-                  </a:txBody>
-                  <a:tcPr>
-                    <a:solidFill>
-                      <a:srgbClr val="FFFFFF"/>
-                    </a:solidFill>
-                  </a:tcPr>
-                </a:tc>
-              </a:tr>
-              <a:tr h="624839">
-                <a:tc>
-                  <a:txBody>
-                    <a:bodyPr/>
-                    <a:lstStyle/>
-                    <a:p>
-                      <a:pPr>
-                        <a:defRPr sz="950" b="1">
-                          <a:solidFill>
-                            <a:srgbClr val="0F172A"/>
-                          </a:solidFill>
-                        </a:defRPr>
-                      </a:pPr>
-                      <a:r>
-                        <a:t>student_id</a:t>
-                      </a:r>
-                    </a:p>
-                  </a:txBody>
-                  <a:tcPr>
-                    <a:solidFill>
-                      <a:srgbClr val="F8FAFC"/>
-                    </a:solidFill>
-                  </a:tcPr>
-                </a:tc>
-                <a:tc>
-                  <a:txBody>
-                    <a:bodyPr/>
-                    <a:lstStyle/>
-                    <a:p>
-                      <a:pPr>
-                        <a:defRPr sz="950">
-                          <a:solidFill>
-                            <a:srgbClr val="0F172A"/>
-                          </a:solidFill>
-                        </a:defRPr>
-                      </a:pPr>
-                      <a:r>
-                        <a:t>INT</a:t>
-                      </a:r>
-                    </a:p>
-                  </a:txBody>
-                  <a:tcPr>
-                    <a:solidFill>
-                      <a:srgbClr val="F8FAFC"/>
-                    </a:solidFill>
-                  </a:tcPr>
-                </a:tc>
-                <a:tc>
-                  <a:txBody>
-                    <a:bodyPr/>
-                    <a:lstStyle/>
-                    <a:p>
-                      <a:pPr>
-                        <a:defRPr sz="950">
-                          <a:solidFill>
-                            <a:srgbClr val="0F172A"/>
-                          </a:solidFill>
-                        </a:defRPr>
-                      </a:pPr>
-                      <a:r>
-                        <a:t>FOREIGN KEY -&gt; Student (CASCADE)</a:t>
-                      </a:r>
-                    </a:p>
-                  </a:txBody>
-                  <a:tcPr>
-                    <a:solidFill>
-                      <a:srgbClr val="F8FAFC"/>
-                    </a:solidFill>
-                  </a:tcPr>
-                </a:tc>
-              </a:tr>
-              <a:tr h="624839">
-                <a:tc>
-                  <a:txBody>
-                    <a:bodyPr/>
-                    <a:lstStyle/>
-                    <a:p>
-                      <a:pPr>
-                        <a:defRPr sz="950" b="1">
-                          <a:solidFill>
-                            <a:srgbClr val="0F172A"/>
-                          </a:solidFill>
-                        </a:defRPr>
-                      </a:pPr>
-                      <a:r>
-                        <a:t>internship_id</a:t>
-                      </a:r>
-                    </a:p>
-                  </a:txBody>
-                  <a:tcPr>
-                    <a:solidFill>
-                      <a:srgbClr val="FFFFFF"/>
-                    </a:solidFill>
-                  </a:tcPr>
-                </a:tc>
-                <a:tc>
-                  <a:txBody>
-                    <a:bodyPr/>
-                    <a:lstStyle/>
-                    <a:p>
-                      <a:pPr>
-                        <a:defRPr sz="950">
-                          <a:solidFill>
-                            <a:srgbClr val="0F172A"/>
-                          </a:solidFill>
-                        </a:defRPr>
-                      </a:pPr>
-                      <a:r>
-                        <a:t>INT</a:t>
-                      </a:r>
-                    </a:p>
-                  </a:txBody>
-                  <a:tcPr>
-                    <a:solidFill>
-                      <a:srgbClr val="FFFFFF"/>
-                    </a:solidFill>
-                  </a:tcPr>
-                </a:tc>
-                <a:tc>
-                  <a:txBody>
-                    <a:bodyPr/>
-                    <a:lstStyle/>
-                    <a:p>
-                      <a:pPr>
-                        <a:defRPr sz="950">
-                          <a:solidFill>
-                            <a:srgbClr val="0F172A"/>
-                          </a:solidFill>
-                        </a:defRPr>
-                      </a:pPr>
-                      <a:r>
-                        <a:t>FOREIGN KEY -&gt; Internship (CASCADE)</a:t>
-                      </a:r>
-                    </a:p>
-                  </a:txBody>
-                  <a:tcPr>
-                    <a:solidFill>
-                      <a:srgbClr val="FFFFFF"/>
-                    </a:solidFill>
-                  </a:tcPr>
-                </a:tc>
-              </a:tr>
-              <a:tr h="624839">
-                <a:tc>
-                  <a:txBody>
-                    <a:bodyPr/>
-                    <a:lstStyle/>
-                    <a:p>
-                      <a:pPr>
-                        <a:defRPr sz="950" b="1">
-                          <a:solidFill>
-                            <a:srgbClr val="0F172A"/>
-                          </a:solidFill>
-                        </a:defRPr>
-                      </a:pPr>
-                      <a:r>
-                        <a:t>applied_at</a:t>
-                      </a:r>
-                    </a:p>
-                  </a:txBody>
-                  <a:tcPr>
-                    <a:solidFill>
-                      <a:srgbClr val="F8FAFC"/>
-                    </a:solidFill>
-                  </a:tcPr>
-                </a:tc>
-                <a:tc>
-                  <a:txBody>
-                    <a:bodyPr/>
-                    <a:lstStyle/>
-                    <a:p>
-                      <a:pPr>
-                        <a:defRPr sz="950">
-                          <a:solidFill>
-                            <a:srgbClr val="0F172A"/>
-                          </a:solidFill>
-                        </a:defRPr>
-                      </a:pPr>
-                      <a:r>
-                        <a:t>DATETIME</a:t>
-                      </a:r>
-                    </a:p>
-                  </a:txBody>
-                  <a:tcPr>
-                    <a:solidFill>
-                      <a:srgbClr val="F8FAFC"/>
-                    </a:solidFill>
-                  </a:tcPr>
-                </a:tc>
-                <a:tc>
-                  <a:txBody>
-                    <a:bodyPr/>
-                    <a:lstStyle/>
-                    <a:p>
-                      <a:pPr>
-                        <a:defRPr sz="950">
-                          <a:solidFill>
-                            <a:srgbClr val="0F172A"/>
-                          </a:solidFill>
-                        </a:defRPr>
-                      </a:pPr>
-                      <a:r>
-                        <a:t>NOT NULL, auto_now_add</a:t>
-                      </a:r>
-                    </a:p>
-                  </a:txBody>
-                  <a:tcPr>
-                    <a:solidFill>
-                      <a:srgbClr val="F8FAFC"/>
-                    </a:solidFill>
-                  </a:tcPr>
-                </a:tc>
-              </a:tr>
-              <a:tr h="624844">
-                <a:tc>
-                  <a:txBody>
-                    <a:bodyPr/>
-                    <a:lstStyle/>
-                    <a:p>
-                      <a:pPr>
-                        <a:defRPr sz="950" b="1">
-                          <a:solidFill>
-                            <a:srgbClr val="0F172A"/>
-                          </a:solidFill>
-                        </a:defRPr>
-                      </a:pPr>
-                      <a:r>
-                        <a:t>status</a:t>
-                      </a:r>
-                    </a:p>
-                  </a:txBody>
-                  <a:tcPr>
-                    <a:solidFill>
-                      <a:srgbClr val="FFFFFF"/>
-                    </a:solidFill>
-                  </a:tcPr>
-                </a:tc>
-                <a:tc>
-                  <a:txBody>
-                    <a:bodyPr/>
-                    <a:lstStyle/>
-                    <a:p>
-                      <a:pPr>
-                        <a:defRPr sz="950">
-                          <a:solidFill>
-                            <a:srgbClr val="0F172A"/>
-                          </a:solidFill>
-                        </a:defRPr>
-                      </a:pPr>
-                      <a:r>
-                        <a:t>VARCHAR(20)</a:t>
-                      </a:r>
-                    </a:p>
-                  </a:txBody>
-                  <a:tcPr>
-                    <a:solidFill>
-                      <a:srgbClr val="FFFFFF"/>
-                    </a:solidFill>
-                  </a:tcPr>
-                </a:tc>
-                <a:tc>
-                  <a:txBody>
-                    <a:bodyPr/>
-                    <a:lstStyle/>
-                    <a:p>
-                      <a:pPr>
-                        <a:defRPr sz="950">
-                          <a:solidFill>
-                            <a:srgbClr val="0F172A"/>
-                          </a:solidFill>
-                        </a:defRPr>
-                      </a:pPr>
-                      <a:r>
-                        <a:t>DEFAULT: 'Pending' [Choices: Pending, Under Review, Shortlisted, Selected, Rejected]</a:t>
-                      </a:r>
-                    </a:p>
-                  </a:txBody>
-                  <a:tcPr>
-                    <a:solidFill>
-                      <a:srgbClr val="FFFFFF"/>
-                    </a:solidFill>
-                  </a:tcPr>
-                </a:tc>
-              </a:tr>
-            </a:tbl>
-          </a:graphicData>
-        </a:graphic>
-      </p:graphicFrame>
-      <p:sp>
-        <p:nvSpPr>
-          <p:cNvPr id="8" name="Rounded Rectangle 7"/>
+              <a:defRPr sz="1350" b="1">
+                <a:solidFill>
+                  <a:srgbClr val="1F3C88"/>
+                </a:solidFill>
+              </a:defRPr>
+            </a:pPr>
+            <a:r>
+              <a:t>🐍 Programming Language</a:t>
+            </a:r>
+          </a:p>
+          <a:p>
+            <a:pPr>
+              <a:spcBef>
+                <a:spcPts val="300"/>
+              </a:spcBef>
+              <a:defRPr sz="1200" b="1">
+                <a:solidFill>
+                  <a:srgbClr val="2563EB"/>
+                </a:solidFill>
+              </a:defRPr>
+            </a:pPr>
+            <a:r>
+              <a:t>Python 3.9+</a:t>
+            </a:r>
+          </a:p>
+          <a:p>
+            <a:pPr>
+              <a:spcBef>
+                <a:spcPts val="500"/>
+              </a:spcBef>
+              <a:defRPr sz="1050">
+                <a:solidFill>
+                  <a:srgbClr val="1E293B"/>
+                </a:solidFill>
+              </a:defRPr>
+            </a:pPr>
+            <a:r>
+              <a:t>Primary backend language. Chosen because it is clean, easy to read, and has great web framework support.</a:t>
+            </a:r>
+          </a:p>
+        </p:txBody>
+      </p:sp>
+      <p:sp>
+        <p:nvSpPr>
+          <p:cNvPr id="7" name="Rounded Rectangle 6"/>
           <p:cNvSpPr/>
           <p:nvPr/>
         </p:nvSpPr>
         <p:spPr>
           <a:xfrm>
-            <a:off x="6217920" y="1920240"/>
-            <a:ext cx="5212080" cy="4389120"/>
+            <a:off x="4370832" y="1828800"/>
+            <a:ext cx="3474720" cy="2103120"/>
           </a:xfrm>
           <a:prstGeom prst="roundRect">
             <a:avLst/>
@@ -9063,475 +7144,400 @@
           </a:fontRef>
         </p:style>
         <p:txBody>
-          <a:bodyPr wrap="square" lIns="182880" tIns="182880" rIns="182880" rtlCol="0" anchor="ctr"/>
+          <a:bodyPr wrap="square" lIns="228600" tIns="201168" rIns="228600" rtlCol="0" anchor="ctr"/>
           <a:lstStyle/>
           <a:p>
             <a:pPr algn="ctr">
-              <a:defRPr sz="1300" b="1">
-                <a:solidFill>
-                  <a:srgbClr val="10B981"/>
-                </a:solidFill>
-              </a:defRPr>
-            </a:pPr>
-            <a:r>
-              <a:t>TABLE 4: Notification (internships_notification)</a:t>
-            </a:r>
-          </a:p>
-        </p:txBody>
-      </p:sp>
-      <p:graphicFrame>
-        <p:nvGraphicFramePr>
-          <p:cNvPr id="9" name="Table 8"/>
-          <p:cNvGraphicFramePr>
-            <a:graphicFrameLocks noGrp="1"/>
-          </p:cNvGraphicFramePr>
+              <a:defRPr sz="1350" b="1">
+                <a:solidFill>
+                  <a:srgbClr val="1F3C88"/>
+                </a:solidFill>
+              </a:defRPr>
+            </a:pPr>
+            <a:r>
+              <a:t>🌐 Web Framework</a:t>
+            </a:r>
+          </a:p>
+          <a:p>
+            <a:pPr>
+              <a:spcBef>
+                <a:spcPts val="300"/>
+              </a:spcBef>
+              <a:defRPr sz="1200" b="1">
+                <a:solidFill>
+                  <a:srgbClr val="2563EB"/>
+                </a:solidFill>
+              </a:defRPr>
+            </a:pPr>
+            <a:r>
+              <a:t>Django 4.2 LTS</a:t>
+            </a:r>
+          </a:p>
+          <a:p>
+            <a:pPr>
+              <a:spcBef>
+                <a:spcPts val="500"/>
+              </a:spcBef>
+              <a:defRPr sz="1050">
+                <a:solidFill>
+                  <a:srgbClr val="1E293B"/>
+                </a:solidFill>
+              </a:defRPr>
+            </a:pPr>
+            <a:r>
+              <a:t>A robust Python web framework that comes with built-in security, user authentication, and admin panel.</a:t>
+            </a:r>
+          </a:p>
+        </p:txBody>
+      </p:sp>
+      <p:sp>
+        <p:nvSpPr>
+          <p:cNvPr id="8" name="Rounded Rectangle 7"/>
+          <p:cNvSpPr/>
           <p:nvPr/>
-        </p:nvGraphicFramePr>
-        <p:xfrm>
-          <a:off x="6309360" y="2377440"/>
-          <a:ext cx="5029200" cy="3749039"/>
-        </p:xfrm>
-        <a:graphic>
-          <a:graphicData uri="http://schemas.openxmlformats.org/drawingml/2006/table">
-            <a:tbl>
-              <a:tblPr firstRow="1" bandRow="1">
-                <a:tableStyleId>{5C22544A-7EE6-4342-B048-85BDC9FD1C3A}</a:tableStyleId>
-              </a:tblPr>
-              <a:tblGrid>
-                <a:gridCol w="1371600"/>
-                <a:gridCol w="1463040"/>
-                <a:gridCol w="2194560"/>
-              </a:tblGrid>
-              <a:tr h="624839">
-                <a:tc>
-                  <a:txBody>
-                    <a:bodyPr/>
-                    <a:lstStyle/>
-                    <a:p>
-                      <a:pPr>
-                        <a:defRPr sz="1000" b="1">
-                          <a:solidFill>
-                            <a:srgbClr val="FFFFFF"/>
-                          </a:solidFill>
-                        </a:defRPr>
-                      </a:pPr>
-                      <a:r>
-                        <a:t>Field Name</a:t>
-                      </a:r>
-                    </a:p>
-                  </a:txBody>
-                  <a:tcPr>
-                    <a:solidFill>
-                      <a:srgbClr val="10B981"/>
-                    </a:solidFill>
-                  </a:tcPr>
-                </a:tc>
-                <a:tc>
-                  <a:txBody>
-                    <a:bodyPr/>
-                    <a:lstStyle/>
-                    <a:p>
-                      <a:pPr>
-                        <a:defRPr sz="1000" b="1">
-                          <a:solidFill>
-                            <a:srgbClr val="FFFFFF"/>
-                          </a:solidFill>
-                        </a:defRPr>
-                      </a:pPr>
-                      <a:r>
-                        <a:t>Data Type</a:t>
-                      </a:r>
-                    </a:p>
-                  </a:txBody>
-                  <a:tcPr>
-                    <a:solidFill>
-                      <a:srgbClr val="10B981"/>
-                    </a:solidFill>
-                  </a:tcPr>
-                </a:tc>
-                <a:tc>
-                  <a:txBody>
-                    <a:bodyPr/>
-                    <a:lstStyle/>
-                    <a:p>
-                      <a:pPr>
-                        <a:defRPr sz="1000" b="1">
-                          <a:solidFill>
-                            <a:srgbClr val="FFFFFF"/>
-                          </a:solidFill>
-                        </a:defRPr>
-                      </a:pPr>
-                      <a:r>
-                        <a:t>Constraints</a:t>
-                      </a:r>
-                    </a:p>
-                  </a:txBody>
-                  <a:tcPr>
-                    <a:solidFill>
-                      <a:srgbClr val="10B981"/>
-                    </a:solidFill>
-                  </a:tcPr>
-                </a:tc>
-              </a:tr>
-              <a:tr h="624839">
-                <a:tc>
-                  <a:txBody>
-                    <a:bodyPr/>
-                    <a:lstStyle/>
-                    <a:p>
-                      <a:pPr>
-                        <a:defRPr sz="950" b="1">
-                          <a:solidFill>
-                            <a:srgbClr val="0F172A"/>
-                          </a:solidFill>
-                        </a:defRPr>
-                      </a:pPr>
-                      <a:r>
-                        <a:t>id</a:t>
-                      </a:r>
-                    </a:p>
-                  </a:txBody>
-                  <a:tcPr>
-                    <a:solidFill>
-                      <a:srgbClr val="FFFFFF"/>
-                    </a:solidFill>
-                  </a:tcPr>
-                </a:tc>
-                <a:tc>
-                  <a:txBody>
-                    <a:bodyPr/>
-                    <a:lstStyle/>
-                    <a:p>
-                      <a:pPr>
-                        <a:defRPr sz="950">
-                          <a:solidFill>
-                            <a:srgbClr val="0F172A"/>
-                          </a:solidFill>
-                        </a:defRPr>
-                      </a:pPr>
-                      <a:r>
-                        <a:t>BIGINT / INT</a:t>
-                      </a:r>
-                    </a:p>
-                  </a:txBody>
-                  <a:tcPr>
-                    <a:solidFill>
-                      <a:srgbClr val="FFFFFF"/>
-                    </a:solidFill>
-                  </a:tcPr>
-                </a:tc>
-                <a:tc>
-                  <a:txBody>
-                    <a:bodyPr/>
-                    <a:lstStyle/>
-                    <a:p>
-                      <a:pPr>
-                        <a:defRPr sz="950">
-                          <a:solidFill>
-                            <a:srgbClr val="0F172A"/>
-                          </a:solidFill>
-                        </a:defRPr>
-                      </a:pPr>
-                      <a:r>
-                        <a:t>PRIMARY KEY, AUTO_INC</a:t>
-                      </a:r>
-                    </a:p>
-                  </a:txBody>
-                  <a:tcPr>
-                    <a:solidFill>
-                      <a:srgbClr val="FFFFFF"/>
-                    </a:solidFill>
-                  </a:tcPr>
-                </a:tc>
-              </a:tr>
-              <a:tr h="624839">
-                <a:tc>
-                  <a:txBody>
-                    <a:bodyPr/>
-                    <a:lstStyle/>
-                    <a:p>
-                      <a:pPr>
-                        <a:defRPr sz="950" b="1">
-                          <a:solidFill>
-                            <a:srgbClr val="0F172A"/>
-                          </a:solidFill>
-                        </a:defRPr>
-                      </a:pPr>
-                      <a:r>
-                        <a:t>student_id</a:t>
-                      </a:r>
-                    </a:p>
-                  </a:txBody>
-                  <a:tcPr>
-                    <a:solidFill>
-                      <a:srgbClr val="F8FAFC"/>
-                    </a:solidFill>
-                  </a:tcPr>
-                </a:tc>
-                <a:tc>
-                  <a:txBody>
-                    <a:bodyPr/>
-                    <a:lstStyle/>
-                    <a:p>
-                      <a:pPr>
-                        <a:defRPr sz="950">
-                          <a:solidFill>
-                            <a:srgbClr val="0F172A"/>
-                          </a:solidFill>
-                        </a:defRPr>
-                      </a:pPr>
-                      <a:r>
-                        <a:t>INT</a:t>
-                      </a:r>
-                    </a:p>
-                  </a:txBody>
-                  <a:tcPr>
-                    <a:solidFill>
-                      <a:srgbClr val="F8FAFC"/>
-                    </a:solidFill>
-                  </a:tcPr>
-                </a:tc>
-                <a:tc>
-                  <a:txBody>
-                    <a:bodyPr/>
-                    <a:lstStyle/>
-                    <a:p>
-                      <a:pPr>
-                        <a:defRPr sz="950">
-                          <a:solidFill>
-                            <a:srgbClr val="0F172A"/>
-                          </a:solidFill>
-                        </a:defRPr>
-                      </a:pPr>
-                      <a:r>
-                        <a:t>FOREIGN KEY -&gt; Student (CASCADE)</a:t>
-                      </a:r>
-                    </a:p>
-                  </a:txBody>
-                  <a:tcPr>
-                    <a:solidFill>
-                      <a:srgbClr val="F8FAFC"/>
-                    </a:solidFill>
-                  </a:tcPr>
-                </a:tc>
-              </a:tr>
-              <a:tr h="624839">
-                <a:tc>
-                  <a:txBody>
-                    <a:bodyPr/>
-                    <a:lstStyle/>
-                    <a:p>
-                      <a:pPr>
-                        <a:defRPr sz="950" b="1">
-                          <a:solidFill>
-                            <a:srgbClr val="0F172A"/>
-                          </a:solidFill>
-                        </a:defRPr>
-                      </a:pPr>
-                      <a:r>
-                        <a:t>message</a:t>
-                      </a:r>
-                    </a:p>
-                  </a:txBody>
-                  <a:tcPr>
-                    <a:solidFill>
-                      <a:srgbClr val="FFFFFF"/>
-                    </a:solidFill>
-                  </a:tcPr>
-                </a:tc>
-                <a:tc>
-                  <a:txBody>
-                    <a:bodyPr/>
-                    <a:lstStyle/>
-                    <a:p>
-                      <a:pPr>
-                        <a:defRPr sz="950">
-                          <a:solidFill>
-                            <a:srgbClr val="0F172A"/>
-                          </a:solidFill>
-                        </a:defRPr>
-                      </a:pPr>
-                      <a:r>
-                        <a:t>TEXT</a:t>
-                      </a:r>
-                    </a:p>
-                  </a:txBody>
-                  <a:tcPr>
-                    <a:solidFill>
-                      <a:srgbClr val="FFFFFF"/>
-                    </a:solidFill>
-                  </a:tcPr>
-                </a:tc>
-                <a:tc>
-                  <a:txBody>
-                    <a:bodyPr/>
-                    <a:lstStyle/>
-                    <a:p>
-                      <a:pPr>
-                        <a:defRPr sz="950">
-                          <a:solidFill>
-                            <a:srgbClr val="0F172A"/>
-                          </a:solidFill>
-                        </a:defRPr>
-                      </a:pPr>
-                      <a:r>
-                        <a:t>NOT NULL</a:t>
-                      </a:r>
-                    </a:p>
-                  </a:txBody>
-                  <a:tcPr>
-                    <a:solidFill>
-                      <a:srgbClr val="FFFFFF"/>
-                    </a:solidFill>
-                  </a:tcPr>
-                </a:tc>
-              </a:tr>
-              <a:tr h="624839">
-                <a:tc>
-                  <a:txBody>
-                    <a:bodyPr/>
-                    <a:lstStyle/>
-                    <a:p>
-                      <a:pPr>
-                        <a:defRPr sz="950" b="1">
-                          <a:solidFill>
-                            <a:srgbClr val="0F172A"/>
-                          </a:solidFill>
-                        </a:defRPr>
-                      </a:pPr>
-                      <a:r>
-                        <a:t>is_read</a:t>
-                      </a:r>
-                    </a:p>
-                  </a:txBody>
-                  <a:tcPr>
-                    <a:solidFill>
-                      <a:srgbClr val="F8FAFC"/>
-                    </a:solidFill>
-                  </a:tcPr>
-                </a:tc>
-                <a:tc>
-                  <a:txBody>
-                    <a:bodyPr/>
-                    <a:lstStyle/>
-                    <a:p>
-                      <a:pPr>
-                        <a:defRPr sz="950">
-                          <a:solidFill>
-                            <a:srgbClr val="0F172A"/>
-                          </a:solidFill>
-                        </a:defRPr>
-                      </a:pPr>
-                      <a:r>
-                        <a:t>BOOLEAN</a:t>
-                      </a:r>
-                    </a:p>
-                  </a:txBody>
-                  <a:tcPr>
-                    <a:solidFill>
-                      <a:srgbClr val="F8FAFC"/>
-                    </a:solidFill>
-                  </a:tcPr>
-                </a:tc>
-                <a:tc>
-                  <a:txBody>
-                    <a:bodyPr/>
-                    <a:lstStyle/>
-                    <a:p>
-                      <a:pPr>
-                        <a:defRPr sz="950">
-                          <a:solidFill>
-                            <a:srgbClr val="0F172A"/>
-                          </a:solidFill>
-                        </a:defRPr>
-                      </a:pPr>
-                      <a:r>
-                        <a:t>DEFAULT: FALSE</a:t>
-                      </a:r>
-                    </a:p>
-                  </a:txBody>
-                  <a:tcPr>
-                    <a:solidFill>
-                      <a:srgbClr val="F8FAFC"/>
-                    </a:solidFill>
-                  </a:tcPr>
-                </a:tc>
-              </a:tr>
-              <a:tr h="624844">
-                <a:tc>
-                  <a:txBody>
-                    <a:bodyPr/>
-                    <a:lstStyle/>
-                    <a:p>
-                      <a:pPr>
-                        <a:defRPr sz="950" b="1">
-                          <a:solidFill>
-                            <a:srgbClr val="0F172A"/>
-                          </a:solidFill>
-                        </a:defRPr>
-                      </a:pPr>
-                      <a:r>
-                        <a:t>created_at</a:t>
-                      </a:r>
-                    </a:p>
-                  </a:txBody>
-                  <a:tcPr>
-                    <a:solidFill>
-                      <a:srgbClr val="FFFFFF"/>
-                    </a:solidFill>
-                  </a:tcPr>
-                </a:tc>
-                <a:tc>
-                  <a:txBody>
-                    <a:bodyPr/>
-                    <a:lstStyle/>
-                    <a:p>
-                      <a:pPr>
-                        <a:defRPr sz="950">
-                          <a:solidFill>
-                            <a:srgbClr val="0F172A"/>
-                          </a:solidFill>
-                        </a:defRPr>
-                      </a:pPr>
-                      <a:r>
-                        <a:t>DATETIME</a:t>
-                      </a:r>
-                    </a:p>
-                  </a:txBody>
-                  <a:tcPr>
-                    <a:solidFill>
-                      <a:srgbClr val="FFFFFF"/>
-                    </a:solidFill>
-                  </a:tcPr>
-                </a:tc>
-                <a:tc>
-                  <a:txBody>
-                    <a:bodyPr/>
-                    <a:lstStyle/>
-                    <a:p>
-                      <a:pPr>
-                        <a:defRPr sz="950">
-                          <a:solidFill>
-                            <a:srgbClr val="0F172A"/>
-                          </a:solidFill>
-                        </a:defRPr>
-                      </a:pPr>
-                      <a:r>
-                        <a:t>NOT NULL, auto_now_add</a:t>
-                      </a:r>
-                    </a:p>
-                  </a:txBody>
-                  <a:tcPr>
-                    <a:solidFill>
-                      <a:srgbClr val="FFFFFF"/>
-                    </a:solidFill>
-                  </a:tcPr>
-                </a:tc>
-              </a:tr>
-            </a:tbl>
-          </a:graphicData>
-        </a:graphic>
-      </p:graphicFrame>
+        </p:nvSpPr>
+        <p:spPr>
+          <a:xfrm>
+            <a:off x="8010144" y="1828800"/>
+            <a:ext cx="3474720" cy="2103120"/>
+          </a:xfrm>
+          <a:prstGeom prst="roundRect">
+            <a:avLst/>
+          </a:prstGeom>
+          <a:solidFill>
+            <a:srgbClr val="FFFFFF"/>
+          </a:solidFill>
+          <a:ln w="15240">
+            <a:solidFill>
+              <a:srgbClr val="E2E8F0"/>
+            </a:solidFill>
+          </a:ln>
+        </p:spPr>
+        <p:style>
+          <a:lnRef idx="1">
+            <a:schemeClr val="accent1"/>
+          </a:lnRef>
+          <a:fillRef idx="3">
+            <a:schemeClr val="accent1"/>
+          </a:fillRef>
+          <a:effectRef idx="2">
+            <a:schemeClr val="accent1"/>
+          </a:effectRef>
+          <a:fontRef idx="minor">
+            <a:schemeClr val="lt1"/>
+          </a:fontRef>
+        </p:style>
+        <p:txBody>
+          <a:bodyPr wrap="square" lIns="228600" tIns="201168" rIns="228600" rtlCol="0" anchor="ctr"/>
+          <a:lstStyle/>
+          <a:p>
+            <a:pPr algn="ctr">
+              <a:defRPr sz="1350" b="1">
+                <a:solidFill>
+                  <a:srgbClr val="1F3C88"/>
+                </a:solidFill>
+              </a:defRPr>
+            </a:pPr>
+            <a:r>
+              <a:t>🗄️ Database</a:t>
+            </a:r>
+          </a:p>
+          <a:p>
+            <a:pPr>
+              <a:spcBef>
+                <a:spcPts val="500"/>
+              </a:spcBef>
+              <a:defRPr sz="1050">
+                <a:solidFill>
+                  <a:srgbClr val="1E293B"/>
+                </a:solidFill>
+              </a:defRPr>
+            </a:pPr>
+            <a:r>
+              <a:rPr sz="1200">
+                <a:sym typeface="+mn-ea"/>
+              </a:rPr>
+              <a:t>MySQL Database</a:t>
+            </a:r>
+            <a:endParaRPr sz="1200">
+              <a:sym typeface="+mn-ea"/>
+            </a:endParaRPr>
+          </a:p>
+          <a:p>
+            <a:pPr>
+              <a:spcBef>
+                <a:spcPts val="500"/>
+              </a:spcBef>
+              <a:defRPr sz="1050">
+                <a:solidFill>
+                  <a:srgbClr val="1E293B"/>
+                </a:solidFill>
+              </a:defRPr>
+            </a:pPr>
+            <a:r>
+              <a:t>MySQL database is used for storing student and job data reliably. SQLite is used for fast local testing.</a:t>
+            </a:r>
+          </a:p>
+        </p:txBody>
+      </p:sp>
+      <p:sp>
+        <p:nvSpPr>
+          <p:cNvPr id="9" name="Rounded Rectangle 8"/>
+          <p:cNvSpPr/>
+          <p:nvPr/>
+        </p:nvSpPr>
+        <p:spPr>
+          <a:xfrm>
+            <a:off x="731520" y="4114800"/>
+            <a:ext cx="3474720" cy="2103120"/>
+          </a:xfrm>
+          <a:prstGeom prst="roundRect">
+            <a:avLst/>
+          </a:prstGeom>
+          <a:solidFill>
+            <a:srgbClr val="FFFFFF"/>
+          </a:solidFill>
+          <a:ln w="15240">
+            <a:solidFill>
+              <a:srgbClr val="E2E8F0"/>
+            </a:solidFill>
+          </a:ln>
+        </p:spPr>
+        <p:style>
+          <a:lnRef idx="1">
+            <a:schemeClr val="accent1"/>
+          </a:lnRef>
+          <a:fillRef idx="3">
+            <a:schemeClr val="accent1"/>
+          </a:fillRef>
+          <a:effectRef idx="2">
+            <a:schemeClr val="accent1"/>
+          </a:effectRef>
+          <a:fontRef idx="minor">
+            <a:schemeClr val="lt1"/>
+          </a:fontRef>
+        </p:style>
+        <p:txBody>
+          <a:bodyPr wrap="square" lIns="228600" tIns="201168" rIns="228600" rtlCol="0" anchor="ctr"/>
+          <a:lstStyle/>
+          <a:p>
+            <a:pPr algn="ctr">
+              <a:defRPr sz="1350" b="1">
+                <a:solidFill>
+                  <a:srgbClr val="1F3C88"/>
+                </a:solidFill>
+              </a:defRPr>
+            </a:pPr>
+            <a:r>
+              <a:t>🎨 Frontend (UI)</a:t>
+            </a:r>
+          </a:p>
+          <a:p>
+            <a:pPr>
+              <a:spcBef>
+                <a:spcPts val="300"/>
+              </a:spcBef>
+              <a:defRPr sz="1200" b="1">
+                <a:solidFill>
+                  <a:srgbClr val="2563EB"/>
+                </a:solidFill>
+              </a:defRPr>
+            </a:pPr>
+            <a:r>
+              <a:t>HTML5 &amp; CSS3</a:t>
+            </a:r>
+          </a:p>
+          <a:p>
+            <a:pPr>
+              <a:spcBef>
+                <a:spcPts val="500"/>
+              </a:spcBef>
+              <a:defRPr sz="1050">
+                <a:solidFill>
+                  <a:srgbClr val="1E293B"/>
+                </a:solidFill>
+              </a:defRPr>
+            </a:pPr>
+            <a:r>
+              <a:t>Clean and responsive user interface with card layouts that look great on both desktop screens and mobile phones.</a:t>
+            </a:r>
+          </a:p>
+        </p:txBody>
+      </p:sp>
+      <p:sp>
+        <p:nvSpPr>
+          <p:cNvPr id="10" name="Rounded Rectangle 9"/>
+          <p:cNvSpPr/>
+          <p:nvPr/>
+        </p:nvSpPr>
+        <p:spPr>
+          <a:xfrm>
+            <a:off x="4370832" y="4114800"/>
+            <a:ext cx="3474720" cy="2103120"/>
+          </a:xfrm>
+          <a:prstGeom prst="roundRect">
+            <a:avLst/>
+          </a:prstGeom>
+          <a:solidFill>
+            <a:srgbClr val="FFFFFF"/>
+          </a:solidFill>
+          <a:ln w="15240">
+            <a:solidFill>
+              <a:srgbClr val="E2E8F0"/>
+            </a:solidFill>
+          </a:ln>
+        </p:spPr>
+        <p:style>
+          <a:lnRef idx="1">
+            <a:schemeClr val="accent1"/>
+          </a:lnRef>
+          <a:fillRef idx="3">
+            <a:schemeClr val="accent1"/>
+          </a:fillRef>
+          <a:effectRef idx="2">
+            <a:schemeClr val="accent1"/>
+          </a:effectRef>
+          <a:fontRef idx="minor">
+            <a:schemeClr val="lt1"/>
+          </a:fontRef>
+        </p:style>
+        <p:txBody>
+          <a:bodyPr wrap="square" lIns="228600" tIns="201168" rIns="228600" rtlCol="0" anchor="ctr"/>
+          <a:lstStyle/>
+          <a:p>
+            <a:pPr algn="ctr">
+              <a:defRPr sz="1350" b="1">
+                <a:solidFill>
+                  <a:srgbClr val="1F3C88"/>
+                </a:solidFill>
+              </a:defRPr>
+            </a:pPr>
+            <a:r>
+              <a:t>📦 Libraries &amp; Drivers</a:t>
+            </a:r>
+          </a:p>
+          <a:p>
+            <a:pPr>
+              <a:spcBef>
+                <a:spcPts val="500"/>
+              </a:spcBef>
+              <a:defRPr sz="1050">
+                <a:solidFill>
+                  <a:srgbClr val="1E293B"/>
+                </a:solidFill>
+              </a:defRPr>
+            </a:pPr>
+            <a:r>
+              <a:rPr sz="1200">
+                <a:sym typeface="+mn-ea"/>
+              </a:rPr>
+              <a:t>mysqlclient &amp; Forms</a:t>
+            </a:r>
+            <a:endParaRPr sz="1200">
+              <a:sym typeface="+mn-ea"/>
+            </a:endParaRPr>
+          </a:p>
+          <a:p>
+            <a:pPr>
+              <a:spcBef>
+                <a:spcPts val="500"/>
+              </a:spcBef>
+              <a:defRPr sz="1050">
+                <a:solidFill>
+                  <a:srgbClr val="1E293B"/>
+                </a:solidFill>
+              </a:defRPr>
+            </a:pPr>
+            <a:r>
+              <a:t>PyMySQL connects Python with MySQL. Django Forms handles input validation and clean error messages.</a:t>
+            </a:r>
+          </a:p>
+        </p:txBody>
+      </p:sp>
+      <p:sp>
+        <p:nvSpPr>
+          <p:cNvPr id="11" name="Rounded Rectangle 10"/>
+          <p:cNvSpPr/>
+          <p:nvPr/>
+        </p:nvSpPr>
+        <p:spPr>
+          <a:xfrm>
+            <a:off x="8010144" y="4114800"/>
+            <a:ext cx="3474720" cy="2103120"/>
+          </a:xfrm>
+          <a:prstGeom prst="roundRect">
+            <a:avLst/>
+          </a:prstGeom>
+          <a:solidFill>
+            <a:srgbClr val="FFFFFF"/>
+          </a:solidFill>
+          <a:ln w="15240">
+            <a:solidFill>
+              <a:srgbClr val="E2E8F0"/>
+            </a:solidFill>
+          </a:ln>
+        </p:spPr>
+        <p:style>
+          <a:lnRef idx="1">
+            <a:schemeClr val="accent1"/>
+          </a:lnRef>
+          <a:fillRef idx="3">
+            <a:schemeClr val="accent1"/>
+          </a:fillRef>
+          <a:effectRef idx="2">
+            <a:schemeClr val="accent1"/>
+          </a:effectRef>
+          <a:fontRef idx="minor">
+            <a:schemeClr val="lt1"/>
+          </a:fontRef>
+        </p:style>
+        <p:txBody>
+          <a:bodyPr wrap="square" lIns="228600" tIns="201168" rIns="228600" rtlCol="0" anchor="ctr"/>
+          <a:lstStyle/>
+          <a:p>
+            <a:pPr algn="ctr">
+              <a:defRPr sz="1350" b="1">
+                <a:solidFill>
+                  <a:srgbClr val="1F3C88"/>
+                </a:solidFill>
+              </a:defRPr>
+            </a:pPr>
+            <a:r>
+              <a:t>💻 Development Tools</a:t>
+            </a:r>
+          </a:p>
+          <a:p>
+            <a:pPr>
+              <a:spcBef>
+                <a:spcPts val="300"/>
+              </a:spcBef>
+              <a:defRPr sz="1200" b="1">
+                <a:solidFill>
+                  <a:srgbClr val="2563EB"/>
+                </a:solidFill>
+              </a:defRPr>
+            </a:pPr>
+            <a:r>
+              <a:t>VS Code &amp; Git</a:t>
+            </a:r>
+          </a:p>
+          <a:p>
+            <a:pPr>
+              <a:spcBef>
+                <a:spcPts val="500"/>
+              </a:spcBef>
+              <a:defRPr sz="1050">
+                <a:solidFill>
+                  <a:srgbClr val="1E293B"/>
+                </a:solidFill>
+              </a:defRPr>
+            </a:pPr>
+            <a:r>
+              <a:t>Visual Studio Code used as the code editor, and Git used for source code version management.</a:t>
+            </a:r>
+          </a:p>
+        </p:txBody>
+      </p:sp>
     </p:spTree>
   </p:cSld>
   <p:clrMapOvr>
@@ -9566,8 +7572,8 @@
         </p:nvSpPr>
         <p:spPr>
           <a:xfrm>
-            <a:off x="731520" y="411480"/>
-            <a:ext cx="10698480" cy="320040"/>
+            <a:off x="731520" y="365760"/>
+            <a:ext cx="10698480" cy="274320"/>
           </a:xfrm>
           <a:prstGeom prst="rect">
             <a:avLst/>
@@ -9588,7 +7594,7 @@
               </a:defRPr>
             </a:pPr>
             <a:r>
-              <a:t>TECHNOLOGIES</a:t>
+              <a:t>SLIDE 9 • ROADMAP</a:t>
             </a:r>
           </a:p>
         </p:txBody>
@@ -9601,8 +7607,8 @@
         </p:nvSpPr>
         <p:spPr>
           <a:xfrm>
-            <a:off x="731520" y="685800"/>
-            <a:ext cx="10698480" cy="640080"/>
+            <a:off x="731520" y="640080"/>
+            <a:ext cx="10698480" cy="548640"/>
           </a:xfrm>
           <a:prstGeom prst="rect">
             <a:avLst/>
@@ -9623,7 +7629,7 @@
               </a:defRPr>
             </a:pPr>
             <a:r>
-              <a:t>Technology Stack Used</a:t>
+              <a:t>Future Enhancements</a:t>
             </a:r>
           </a:p>
         </p:txBody>
@@ -9636,8 +7642,8 @@
         </p:nvSpPr>
         <p:spPr>
           <a:xfrm>
-            <a:off x="731520" y="1325880"/>
-            <a:ext cx="10698480" cy="365760"/>
+            <a:off x="731520" y="1234440"/>
+            <a:ext cx="10698480" cy="320040"/>
           </a:xfrm>
           <a:prstGeom prst="rect">
             <a:avLst/>
@@ -9658,7 +7664,7 @@
               </a:defRPr>
             </a:pPr>
             <a:r>
-              <a:t>Tools, frameworks, and programming environments powering InternHub</a:t>
+              <a:t>Useful features that can be added in future versions</a:t>
             </a:r>
           </a:p>
         </p:txBody>
@@ -9671,7 +7677,7 @@
         </p:nvSpPr>
         <p:spPr>
           <a:xfrm>
-            <a:off x="731520" y="1691640"/>
+            <a:off x="731520" y="1600200"/>
             <a:ext cx="10728655" cy="18288"/>
           </a:xfrm>
           <a:prstGeom prst="rect">
@@ -9714,8 +7720,8 @@
         </p:nvSpPr>
         <p:spPr>
           <a:xfrm>
-            <a:off x="731520" y="1920240"/>
-            <a:ext cx="3474720" cy="2057400"/>
+            <a:off x="731520" y="1828800"/>
+            <a:ext cx="3474720" cy="2103120"/>
           </a:xfrm>
           <a:prstGeom prst="roundRect">
             <a:avLst/>
@@ -9755,28 +7761,13 @@
               </a:defRPr>
             </a:pPr>
             <a:r>
-              <a:t>🐍 Backend Language</a:t>
-            </a:r>
-          </a:p>
-          <a:p>
-            <a:pPr>
-              <a:spcBef>
-                <a:spcPts val="300"/>
-              </a:spcBef>
-              <a:defRPr sz="1200" b="1">
-                <a:solidFill>
-                  <a:srgbClr val="2563EB"/>
-                </a:solidFill>
-              </a:defRPr>
-            </a:pPr>
-            <a:r>
-              <a:t>Python 3.9+</a:t>
-            </a:r>
-          </a:p>
-          <a:p>
-            <a:pPr>
-              <a:spcBef>
-                <a:spcPts val="600"/>
+              <a:t>🤖 AI Resume Parser &amp; Matcher</a:t>
+            </a:r>
+          </a:p>
+          <a:p>
+            <a:pPr>
+              <a:spcBef>
+                <a:spcPts val="800"/>
               </a:spcBef>
               <a:defRPr sz="1050">
                 <a:solidFill>
@@ -9785,7 +7776,7 @@
               </a:defRPr>
             </a:pPr>
             <a:r>
-              <a:t>Core server-side language chosen for its clean syntax, readability, extensive ecosystem, and exceptional web framework maturity.</a:t>
+              <a:t>Automatically scan student PDF resumes, extract technical skills, and recommend the best-fitting internships.</a:t>
             </a:r>
           </a:p>
         </p:txBody>
@@ -9798,8 +7789,8 @@
         </p:nvSpPr>
         <p:spPr>
           <a:xfrm>
-            <a:off x="4370832" y="1920240"/>
-            <a:ext cx="3474720" cy="2057400"/>
+            <a:off x="4370832" y="1828800"/>
+            <a:ext cx="3474720" cy="2103120"/>
           </a:xfrm>
           <a:prstGeom prst="roundRect">
             <a:avLst/>
@@ -9839,28 +7830,13 @@
               </a:defRPr>
             </a:pPr>
             <a:r>
-              <a:t>🌐 Web Framework</a:t>
-            </a:r>
-          </a:p>
-          <a:p>
-            <a:pPr>
-              <a:spcBef>
-                <a:spcPts val="300"/>
-              </a:spcBef>
-              <a:defRPr sz="1200" b="1">
-                <a:solidFill>
-                  <a:srgbClr val="2563EB"/>
-                </a:solidFill>
-              </a:defRPr>
-            </a:pPr>
-            <a:r>
-              <a:t>Django 4.2 LTS</a:t>
-            </a:r>
-          </a:p>
-          <a:p>
-            <a:pPr>
-              <a:spcBef>
-                <a:spcPts val="600"/>
+              <a:t>🏢 Direct Company/Recruiter Login</a:t>
+            </a:r>
+          </a:p>
+          <a:p>
+            <a:pPr>
+              <a:spcBef>
+                <a:spcPts val="800"/>
               </a:spcBef>
               <a:defRPr sz="1050">
                 <a:solidFill>
@@ -9869,7 +7845,7 @@
               </a:defRPr>
             </a:pPr>
             <a:r>
-              <a:t>High-level 'batteries-included' Python web framework providing built-in ORM, Admin console, CSRF protection, and session management.</a:t>
+              <a:t>Allow hiring managers from companies to post their own internships and shortlist students directly.</a:t>
             </a:r>
           </a:p>
         </p:txBody>
@@ -9882,8 +7858,8 @@
         </p:nvSpPr>
         <p:spPr>
           <a:xfrm>
-            <a:off x="8010144" y="1920240"/>
-            <a:ext cx="3474720" cy="2057400"/>
+            <a:off x="8010144" y="1828800"/>
+            <a:ext cx="3474720" cy="2103120"/>
           </a:xfrm>
           <a:prstGeom prst="roundRect">
             <a:avLst/>
@@ -9923,28 +7899,13 @@
               </a:defRPr>
             </a:pPr>
             <a:r>
-              <a:t>🗄️ Relational Database</a:t>
-            </a:r>
-          </a:p>
-          <a:p>
-            <a:pPr>
-              <a:spcBef>
-                <a:spcPts val="300"/>
-              </a:spcBef>
-              <a:defRPr sz="1200" b="1">
-                <a:solidFill>
-                  <a:srgbClr val="2563EB"/>
-                </a:solidFill>
-              </a:defRPr>
-            </a:pPr>
-            <a:r>
-              <a:t>MySQL &amp; SQLite</a:t>
-            </a:r>
-          </a:p>
-          <a:p>
-            <a:pPr>
-              <a:spcBef>
-                <a:spcPts val="600"/>
+              <a:t>📩 Automated Email &amp; SMS Alerts</a:t>
+            </a:r>
+          </a:p>
+          <a:p>
+            <a:pPr>
+              <a:spcBef>
+                <a:spcPts val="800"/>
               </a:spcBef>
               <a:defRPr sz="1050">
                 <a:solidFill>
@@ -9953,7 +7914,7 @@
               </a:defRPr>
             </a:pPr>
             <a:r>
-              <a:t>MySQL 8.x configured for production data persistence; SQLite utilized for rapid unit testing and local development agility.</a:t>
+              <a:t>Send instant email and SMS messages to students when an interview is scheduled or an application is accepted.</a:t>
             </a:r>
           </a:p>
         </p:txBody>
@@ -9966,8 +7927,8 @@
         </p:nvSpPr>
         <p:spPr>
           <a:xfrm>
-            <a:off x="731520" y="4160520"/>
-            <a:ext cx="3474720" cy="2057400"/>
+            <a:off x="731520" y="4114800"/>
+            <a:ext cx="3474720" cy="2103120"/>
           </a:xfrm>
           <a:prstGeom prst="roundRect">
             <a:avLst/>
@@ -10007,28 +7968,13 @@
               </a:defRPr>
             </a:pPr>
             <a:r>
-              <a:t>🎨 Frontend UI</a:t>
-            </a:r>
-          </a:p>
-          <a:p>
-            <a:pPr>
-              <a:spcBef>
-                <a:spcPts val="300"/>
-              </a:spcBef>
-              <a:defRPr sz="1200" b="1">
-                <a:solidFill>
-                  <a:srgbClr val="2563EB"/>
-                </a:solidFill>
-              </a:defRPr>
-            </a:pPr>
-            <a:r>
-              <a:t>HTML5 &amp; CSS3</a:t>
-            </a:r>
-          </a:p>
-          <a:p>
-            <a:pPr>
-              <a:spcBef>
-                <a:spcPts val="600"/>
+              <a:t>📅 Integrated Interview Scheduling</a:t>
+            </a:r>
+          </a:p>
+          <a:p>
+            <a:pPr>
+              <a:spcBef>
+                <a:spcPts val="800"/>
               </a:spcBef>
               <a:defRPr sz="1050">
                 <a:solidFill>
@@ -10037,7 +7983,7 @@
               </a:defRPr>
             </a:pPr>
             <a:r>
-              <a:t>Custom modern, responsive UI design featuring CSS grid/flexbox cards, dynamic status badges, and responsive layouts for mobile and desktop.</a:t>
+              <a:t>Add an in-app calendar to schedule interview dates and connect with Google Meet or Zoom.</a:t>
             </a:r>
           </a:p>
         </p:txBody>
@@ -10050,8 +7996,8 @@
         </p:nvSpPr>
         <p:spPr>
           <a:xfrm>
-            <a:off x="4370832" y="4160520"/>
-            <a:ext cx="3474720" cy="2057400"/>
+            <a:off x="4370832" y="4114800"/>
+            <a:ext cx="3474720" cy="2103120"/>
           </a:xfrm>
           <a:prstGeom prst="roundRect">
             <a:avLst/>
@@ -10091,28 +8037,13 @@
               </a:defRPr>
             </a:pPr>
             <a:r>
-              <a:t>📦 Libraries &amp; Tools</a:t>
-            </a:r>
-          </a:p>
-          <a:p>
-            <a:pPr>
-              <a:spcBef>
-                <a:spcPts val="300"/>
-              </a:spcBef>
-              <a:defRPr sz="1200" b="1">
-                <a:solidFill>
-                  <a:srgbClr val="2563EB"/>
-                </a:solidFill>
-              </a:defRPr>
-            </a:pPr>
-            <a:r>
-              <a:t>PyMySQL / Forms</a:t>
-            </a:r>
-          </a:p>
-          <a:p>
-            <a:pPr>
-              <a:spcBef>
-                <a:spcPts val="600"/>
+              <a:t>📱 Mobile Application</a:t>
+            </a:r>
+          </a:p>
+          <a:p>
+            <a:pPr>
+              <a:spcBef>
+                <a:spcPts val="800"/>
               </a:spcBef>
               <a:defRPr sz="1050">
                 <a:solidFill>
@@ -10121,7 +8052,7 @@
               </a:defRPr>
             </a:pPr>
             <a:r>
-              <a:t>PyMySQL / mysqlclient database driver, Django Form validation libraries, Python-pptx for documentation, and Git for version control.</a:t>
+              <a:t>Develop an Android and iOS mobile app using Flutter so students can apply and check alerts on their phones.</a:t>
             </a:r>
           </a:p>
         </p:txBody>
@@ -10134,8 +8065,8 @@
         </p:nvSpPr>
         <p:spPr>
           <a:xfrm>
-            <a:off x="8010144" y="4160520"/>
-            <a:ext cx="3474720" cy="2057400"/>
+            <a:off x="8010144" y="4114800"/>
+            <a:ext cx="3474720" cy="2103120"/>
           </a:xfrm>
           <a:prstGeom prst="roundRect">
             <a:avLst/>
@@ -10175,28 +8106,13 @@
               </a:defRPr>
             </a:pPr>
             <a:r>
-              <a:t>💻 Development Environment</a:t>
-            </a:r>
-          </a:p>
-          <a:p>
-            <a:pPr>
-              <a:spcBef>
-                <a:spcPts val="300"/>
-              </a:spcBef>
-              <a:defRPr sz="1200" b="1">
-                <a:solidFill>
-                  <a:srgbClr val="2563EB"/>
-                </a:solidFill>
-              </a:defRPr>
-            </a:pPr>
-            <a:r>
-              <a:t>VS Code &amp; Powershell</a:t>
-            </a:r>
-          </a:p>
-          <a:p>
-            <a:pPr>
-              <a:spcBef>
-                <a:spcPts val="600"/>
+              <a:t>🎓 Digital Completion Certificates</a:t>
+            </a:r>
+          </a:p>
+          <a:p>
+            <a:pPr>
+              <a:spcBef>
+                <a:spcPts val="800"/>
               </a:spcBef>
               <a:defRPr sz="1050">
                 <a:solidFill>
@@ -10205,7 +8121,7 @@
               </a:defRPr>
             </a:pPr>
             <a:r>
-              <a:t>Visual Studio Code with Python linting &amp; debugging, Django manage.py command-line tools, and virtual environments (venv).</a:t>
+              <a:t>Automatically generate verified digital certificates for students upon successful completion of their internship.</a:t>
             </a:r>
           </a:p>
         </p:txBody>

--- a/InternHub_College_Internship_Management_Presentation.pptx
+++ b/InternHub_College_Internship_Management_Presentation.pptx
@@ -1,22 +1,23 @@
 
 <file path=ppt/presentation.xml><?xml version="1.0" encoding="utf-8"?>
-<p:presentation xmlns:a="http://schemas.openxmlformats.org/drawingml/2006/main" xmlns:r="http://schemas.openxmlformats.org/officeDocument/2006/relationships" xmlns:p="http://schemas.openxmlformats.org/presentationml/2006/main" autoCompressPictures="0">
+<p:presentation xmlns:a="http://schemas.openxmlformats.org/drawingml/2006/main" xmlns:r="http://schemas.openxmlformats.org/officeDocument/2006/relationships" xmlns:p="http://schemas.openxmlformats.org/presentationml/2006/main" saveSubsetFonts="1" autoCompressPictures="0">
   <p:sldMasterIdLst>
     <p:sldMasterId id="2147483648" r:id="rId1"/>
   </p:sldMasterIdLst>
   <p:sldIdLst>
-    <p:sldId id="256" r:id="rId3"/>
-    <p:sldId id="257" r:id="rId4"/>
-    <p:sldId id="258" r:id="rId5"/>
-    <p:sldId id="259" r:id="rId6"/>
-    <p:sldId id="260" r:id="rId7"/>
-    <p:sldId id="261" r:id="rId8"/>
-    <p:sldId id="262" r:id="rId9"/>
-    <p:sldId id="263" r:id="rId10"/>
-    <p:sldId id="264" r:id="rId11"/>
-    <p:sldId id="265" r:id="rId12"/>
+    <p:sldId id="256" r:id="rId7"/>
+    <p:sldId id="257" r:id="rId8"/>
+    <p:sldId id="258" r:id="rId9"/>
+    <p:sldId id="259" r:id="rId10"/>
+    <p:sldId id="260" r:id="rId11"/>
+    <p:sldId id="261" r:id="rId12"/>
+    <p:sldId id="262" r:id="rId13"/>
+    <p:sldId id="263" r:id="rId14"/>
+    <p:sldId id="264" r:id="rId15"/>
+    <p:sldId id="265" r:id="rId16"/>
+    <p:sldId id="266" r:id="rId17"/>
   </p:sldIdLst>
-  <p:sldSz cx="12191365" cy="6858000" type="screen4x3"/>
+  <p:sldSz cx="12191695" cy="6858000" type="screen4x3"/>
   <p:notesSz cx="6858000" cy="9144000"/>
   <p:defaultTextStyle>
     <a:defPPr>
@@ -113,22 +114,6 @@
       </a:defRPr>
     </a:lvl9pPr>
   </p:defaultTextStyle>
-  <p:extLst>
-    <p:ext uri="{EFAFB233-063F-42B5-8137-9DF3F51BA10A}">
-      <p15:sldGuideLst xmlns:p15="http://schemas.microsoft.com/office/powerpoint/2012/main">
-        <p15:guide id="1" orient="horz" pos="2160" userDrawn="1">
-          <p15:clr>
-            <a:srgbClr val="A4A3A4"/>
-          </p15:clr>
-        </p15:guide>
-        <p15:guide id="2" pos="2880" userDrawn="1">
-          <p15:clr>
-            <a:srgbClr val="A4A3A4"/>
-          </p15:clr>
-        </p15:guide>
-      </p15:sldGuideLst>
-    </p:ext>
-  </p:extLst>
 </p:presentation>
 </file>
 
@@ -313,6 +298,7 @@
           <a:p>
             <a:fld id="{5BCAD085-E8A6-8845-BD4E-CB4CCA059FC4}" type="datetimeFigureOut">
               <a:rPr lang="en-US" smtClean="0"/>
+              <a:t>1/27/13</a:t>
             </a:fld>
             <a:endParaRPr lang="en-US"/>
           </a:p>
@@ -354,12 +340,18 @@
           <a:p>
             <a:fld id="{C1FF6DA9-008F-8B48-92A6-B652298478BF}" type="slidenum">
               <a:rPr lang="en-US" smtClean="0"/>
+              <a:t>‹#›</a:t>
             </a:fld>
             <a:endParaRPr lang="en-US"/>
           </a:p>
         </p:txBody>
       </p:sp>
     </p:spTree>
+    <p:extLst>
+      <p:ext uri="{BB962C8B-B14F-4D97-AF65-F5344CB8AC3E}">
+        <p14:creationId xmlns:p14="http://schemas.microsoft.com/office/powerpoint/2010/main" val="3168075583"/>
+      </p:ext>
+    </p:extLst>
   </p:cSld>
   <p:clrMapOvr>
     <a:masterClrMapping/>
@@ -427,7 +419,6 @@
               <a:rPr lang="en-US" smtClean="0"/>
               <a:t>Click to edit Master text styles</a:t>
             </a:r>
-            <a:endParaRPr lang="en-US" smtClean="0"/>
           </a:p>
           <a:p>
             <a:pPr lvl="1"/>
@@ -435,7 +426,6 @@
               <a:rPr lang="en-US" smtClean="0"/>
               <a:t>Second level</a:t>
             </a:r>
-            <a:endParaRPr lang="en-US" smtClean="0"/>
           </a:p>
           <a:p>
             <a:pPr lvl="2"/>
@@ -443,7 +433,6 @@
               <a:rPr lang="en-US" smtClean="0"/>
               <a:t>Third level</a:t>
             </a:r>
-            <a:endParaRPr lang="en-US" smtClean="0"/>
           </a:p>
           <a:p>
             <a:pPr lvl="3"/>
@@ -451,7 +440,6 @@
               <a:rPr lang="en-US" smtClean="0"/>
               <a:t>Fourth level</a:t>
             </a:r>
-            <a:endParaRPr lang="en-US" smtClean="0"/>
           </a:p>
           <a:p>
             <a:pPr lvl="4"/>
@@ -480,6 +468,7 @@
           <a:p>
             <a:fld id="{5BCAD085-E8A6-8845-BD4E-CB4CCA059FC4}" type="datetimeFigureOut">
               <a:rPr lang="en-US" smtClean="0"/>
+              <a:t>1/27/13</a:t>
             </a:fld>
             <a:endParaRPr lang="en-US"/>
           </a:p>
@@ -521,12 +510,18 @@
           <a:p>
             <a:fld id="{C1FF6DA9-008F-8B48-92A6-B652298478BF}" type="slidenum">
               <a:rPr lang="en-US" smtClean="0"/>
+              <a:t>‹#›</a:t>
             </a:fld>
             <a:endParaRPr lang="en-US"/>
           </a:p>
         </p:txBody>
       </p:sp>
     </p:spTree>
+    <p:extLst>
+      <p:ext uri="{BB962C8B-B14F-4D97-AF65-F5344CB8AC3E}">
+        <p14:creationId xmlns:p14="http://schemas.microsoft.com/office/powerpoint/2010/main" val="2910927964"/>
+      </p:ext>
+    </p:extLst>
   </p:cSld>
   <p:clrMapOvr>
     <a:masterClrMapping/>
@@ -604,7 +599,6 @@
               <a:rPr lang="en-US" smtClean="0"/>
               <a:t>Click to edit Master text styles</a:t>
             </a:r>
-            <a:endParaRPr lang="en-US" smtClean="0"/>
           </a:p>
           <a:p>
             <a:pPr lvl="1"/>
@@ -612,7 +606,6 @@
               <a:rPr lang="en-US" smtClean="0"/>
               <a:t>Second level</a:t>
             </a:r>
-            <a:endParaRPr lang="en-US" smtClean="0"/>
           </a:p>
           <a:p>
             <a:pPr lvl="2"/>
@@ -620,7 +613,6 @@
               <a:rPr lang="en-US" smtClean="0"/>
               <a:t>Third level</a:t>
             </a:r>
-            <a:endParaRPr lang="en-US" smtClean="0"/>
           </a:p>
           <a:p>
             <a:pPr lvl="3"/>
@@ -628,7 +620,6 @@
               <a:rPr lang="en-US" smtClean="0"/>
               <a:t>Fourth level</a:t>
             </a:r>
-            <a:endParaRPr lang="en-US" smtClean="0"/>
           </a:p>
           <a:p>
             <a:pPr lvl="4"/>
@@ -657,6 +648,7 @@
           <a:p>
             <a:fld id="{5BCAD085-E8A6-8845-BD4E-CB4CCA059FC4}" type="datetimeFigureOut">
               <a:rPr lang="en-US" smtClean="0"/>
+              <a:t>1/27/13</a:t>
             </a:fld>
             <a:endParaRPr lang="en-US"/>
           </a:p>
@@ -698,12 +690,18 @@
           <a:p>
             <a:fld id="{C1FF6DA9-008F-8B48-92A6-B652298478BF}" type="slidenum">
               <a:rPr lang="en-US" smtClean="0"/>
+              <a:t>‹#›</a:t>
             </a:fld>
             <a:endParaRPr lang="en-US"/>
           </a:p>
         </p:txBody>
       </p:sp>
     </p:spTree>
+    <p:extLst>
+      <p:ext uri="{BB962C8B-B14F-4D97-AF65-F5344CB8AC3E}">
+        <p14:creationId xmlns:p14="http://schemas.microsoft.com/office/powerpoint/2010/main" val="3612223792"/>
+      </p:ext>
+    </p:extLst>
   </p:cSld>
   <p:clrMapOvr>
     <a:masterClrMapping/>
@@ -771,7 +769,6 @@
               <a:rPr lang="en-US" smtClean="0"/>
               <a:t>Click to edit Master text styles</a:t>
             </a:r>
-            <a:endParaRPr lang="en-US" smtClean="0"/>
           </a:p>
           <a:p>
             <a:pPr lvl="1"/>
@@ -779,7 +776,6 @@
               <a:rPr lang="en-US" smtClean="0"/>
               <a:t>Second level</a:t>
             </a:r>
-            <a:endParaRPr lang="en-US" smtClean="0"/>
           </a:p>
           <a:p>
             <a:pPr lvl="2"/>
@@ -787,7 +783,6 @@
               <a:rPr lang="en-US" smtClean="0"/>
               <a:t>Third level</a:t>
             </a:r>
-            <a:endParaRPr lang="en-US" smtClean="0"/>
           </a:p>
           <a:p>
             <a:pPr lvl="3"/>
@@ -795,7 +790,6 @@
               <a:rPr lang="en-US" smtClean="0"/>
               <a:t>Fourth level</a:t>
             </a:r>
-            <a:endParaRPr lang="en-US" smtClean="0"/>
           </a:p>
           <a:p>
             <a:pPr lvl="4"/>
@@ -824,6 +818,7 @@
           <a:p>
             <a:fld id="{5BCAD085-E8A6-8845-BD4E-CB4CCA059FC4}" type="datetimeFigureOut">
               <a:rPr lang="en-US" smtClean="0"/>
+              <a:t>1/27/13</a:t>
             </a:fld>
             <a:endParaRPr lang="en-US"/>
           </a:p>
@@ -865,12 +860,18 @@
           <a:p>
             <a:fld id="{C1FF6DA9-008F-8B48-92A6-B652298478BF}" type="slidenum">
               <a:rPr lang="en-US" smtClean="0"/>
+              <a:t>‹#›</a:t>
             </a:fld>
             <a:endParaRPr lang="en-US"/>
           </a:p>
         </p:txBody>
       </p:sp>
     </p:spTree>
+    <p:extLst>
+      <p:ext uri="{BB962C8B-B14F-4D97-AF65-F5344CB8AC3E}">
+        <p14:creationId xmlns:p14="http://schemas.microsoft.com/office/powerpoint/2010/main" val="2614314258"/>
+      </p:ext>
+    </p:extLst>
   </p:cSld>
   <p:clrMapOvr>
     <a:masterClrMapping/>
@@ -1043,7 +1044,6 @@
               <a:rPr lang="en-US" smtClean="0"/>
               <a:t>Click to edit Master text styles</a:t>
             </a:r>
-            <a:endParaRPr lang="en-US" smtClean="0"/>
           </a:p>
         </p:txBody>
       </p:sp>
@@ -1064,6 +1064,7 @@
           <a:p>
             <a:fld id="{5BCAD085-E8A6-8845-BD4E-CB4CCA059FC4}" type="datetimeFigureOut">
               <a:rPr lang="en-US" smtClean="0"/>
+              <a:t>1/27/13</a:t>
             </a:fld>
             <a:endParaRPr lang="en-US"/>
           </a:p>
@@ -1105,12 +1106,18 @@
           <a:p>
             <a:fld id="{C1FF6DA9-008F-8B48-92A6-B652298478BF}" type="slidenum">
               <a:rPr lang="en-US" smtClean="0"/>
+              <a:t>‹#›</a:t>
             </a:fld>
             <a:endParaRPr lang="en-US"/>
           </a:p>
         </p:txBody>
       </p:sp>
     </p:spTree>
+    <p:extLst>
+      <p:ext uri="{BB962C8B-B14F-4D97-AF65-F5344CB8AC3E}">
+        <p14:creationId xmlns:p14="http://schemas.microsoft.com/office/powerpoint/2010/main" val="960648375"/>
+      </p:ext>
+    </p:extLst>
   </p:cSld>
   <p:clrMapOvr>
     <a:masterClrMapping/>
@@ -1211,7 +1218,6 @@
               <a:rPr lang="en-US" smtClean="0"/>
               <a:t>Click to edit Master text styles</a:t>
             </a:r>
-            <a:endParaRPr lang="en-US" smtClean="0"/>
           </a:p>
           <a:p>
             <a:pPr lvl="1"/>
@@ -1219,7 +1225,6 @@
               <a:rPr lang="en-US" smtClean="0"/>
               <a:t>Second level</a:t>
             </a:r>
-            <a:endParaRPr lang="en-US" smtClean="0"/>
           </a:p>
           <a:p>
             <a:pPr lvl="2"/>
@@ -1227,7 +1232,6 @@
               <a:rPr lang="en-US" smtClean="0"/>
               <a:t>Third level</a:t>
             </a:r>
-            <a:endParaRPr lang="en-US" smtClean="0"/>
           </a:p>
           <a:p>
             <a:pPr lvl="3"/>
@@ -1235,7 +1239,6 @@
               <a:rPr lang="en-US" smtClean="0"/>
               <a:t>Fourth level</a:t>
             </a:r>
-            <a:endParaRPr lang="en-US" smtClean="0"/>
           </a:p>
           <a:p>
             <a:pPr lvl="4"/>
@@ -1300,7 +1303,6 @@
               <a:rPr lang="en-US" smtClean="0"/>
               <a:t>Click to edit Master text styles</a:t>
             </a:r>
-            <a:endParaRPr lang="en-US" smtClean="0"/>
           </a:p>
           <a:p>
             <a:pPr lvl="1"/>
@@ -1308,7 +1310,6 @@
               <a:rPr lang="en-US" smtClean="0"/>
               <a:t>Second level</a:t>
             </a:r>
-            <a:endParaRPr lang="en-US" smtClean="0"/>
           </a:p>
           <a:p>
             <a:pPr lvl="2"/>
@@ -1316,7 +1317,6 @@
               <a:rPr lang="en-US" smtClean="0"/>
               <a:t>Third level</a:t>
             </a:r>
-            <a:endParaRPr lang="en-US" smtClean="0"/>
           </a:p>
           <a:p>
             <a:pPr lvl="3"/>
@@ -1324,7 +1324,6 @@
               <a:rPr lang="en-US" smtClean="0"/>
               <a:t>Fourth level</a:t>
             </a:r>
-            <a:endParaRPr lang="en-US" smtClean="0"/>
           </a:p>
           <a:p>
             <a:pPr lvl="4"/>
@@ -1353,6 +1352,7 @@
           <a:p>
             <a:fld id="{5BCAD085-E8A6-8845-BD4E-CB4CCA059FC4}" type="datetimeFigureOut">
               <a:rPr lang="en-US" smtClean="0"/>
+              <a:t>1/27/13</a:t>
             </a:fld>
             <a:endParaRPr lang="en-US"/>
           </a:p>
@@ -1394,12 +1394,18 @@
           <a:p>
             <a:fld id="{C1FF6DA9-008F-8B48-92A6-B652298478BF}" type="slidenum">
               <a:rPr lang="en-US" smtClean="0"/>
+              <a:t>‹#›</a:t>
             </a:fld>
             <a:endParaRPr lang="en-US"/>
           </a:p>
         </p:txBody>
       </p:sp>
     </p:spTree>
+    <p:extLst>
+      <p:ext uri="{BB962C8B-B14F-4D97-AF65-F5344CB8AC3E}">
+        <p14:creationId xmlns:p14="http://schemas.microsoft.com/office/powerpoint/2010/main" val="2782244947"/>
+      </p:ext>
+    </p:extLst>
   </p:cSld>
   <p:clrMapOvr>
     <a:masterClrMapping/>
@@ -1513,7 +1519,6 @@
               <a:rPr lang="en-US" smtClean="0"/>
               <a:t>Click to edit Master text styles</a:t>
             </a:r>
-            <a:endParaRPr lang="en-US" smtClean="0"/>
           </a:p>
         </p:txBody>
       </p:sp>
@@ -1570,7 +1575,6 @@
               <a:rPr lang="en-US" smtClean="0"/>
               <a:t>Click to edit Master text styles</a:t>
             </a:r>
-            <a:endParaRPr lang="en-US" smtClean="0"/>
           </a:p>
           <a:p>
             <a:pPr lvl="1"/>
@@ -1578,7 +1582,6 @@
               <a:rPr lang="en-US" smtClean="0"/>
               <a:t>Second level</a:t>
             </a:r>
-            <a:endParaRPr lang="en-US" smtClean="0"/>
           </a:p>
           <a:p>
             <a:pPr lvl="2"/>
@@ -1586,7 +1589,6 @@
               <a:rPr lang="en-US" smtClean="0"/>
               <a:t>Third level</a:t>
             </a:r>
-            <a:endParaRPr lang="en-US" smtClean="0"/>
           </a:p>
           <a:p>
             <a:pPr lvl="3"/>
@@ -1594,7 +1596,6 @@
               <a:rPr lang="en-US" smtClean="0"/>
               <a:t>Fourth level</a:t>
             </a:r>
-            <a:endParaRPr lang="en-US" smtClean="0"/>
           </a:p>
           <a:p>
             <a:pPr lvl="4"/>
@@ -1668,7 +1669,6 @@
               <a:rPr lang="en-US" smtClean="0"/>
               <a:t>Click to edit Master text styles</a:t>
             </a:r>
-            <a:endParaRPr lang="en-US" smtClean="0"/>
           </a:p>
         </p:txBody>
       </p:sp>
@@ -1725,7 +1725,6 @@
               <a:rPr lang="en-US" smtClean="0"/>
               <a:t>Click to edit Master text styles</a:t>
             </a:r>
-            <a:endParaRPr lang="en-US" smtClean="0"/>
           </a:p>
           <a:p>
             <a:pPr lvl="1"/>
@@ -1733,7 +1732,6 @@
               <a:rPr lang="en-US" smtClean="0"/>
               <a:t>Second level</a:t>
             </a:r>
-            <a:endParaRPr lang="en-US" smtClean="0"/>
           </a:p>
           <a:p>
             <a:pPr lvl="2"/>
@@ -1741,7 +1739,6 @@
               <a:rPr lang="en-US" smtClean="0"/>
               <a:t>Third level</a:t>
             </a:r>
-            <a:endParaRPr lang="en-US" smtClean="0"/>
           </a:p>
           <a:p>
             <a:pPr lvl="3"/>
@@ -1749,7 +1746,6 @@
               <a:rPr lang="en-US" smtClean="0"/>
               <a:t>Fourth level</a:t>
             </a:r>
-            <a:endParaRPr lang="en-US" smtClean="0"/>
           </a:p>
           <a:p>
             <a:pPr lvl="4"/>
@@ -1778,6 +1774,7 @@
           <a:p>
             <a:fld id="{5BCAD085-E8A6-8845-BD4E-CB4CCA059FC4}" type="datetimeFigureOut">
               <a:rPr lang="en-US" smtClean="0"/>
+              <a:t>1/27/13</a:t>
             </a:fld>
             <a:endParaRPr lang="en-US"/>
           </a:p>
@@ -1819,12 +1816,18 @@
           <a:p>
             <a:fld id="{C1FF6DA9-008F-8B48-92A6-B652298478BF}" type="slidenum">
               <a:rPr lang="en-US" smtClean="0"/>
+              <a:t>‹#›</a:t>
             </a:fld>
             <a:endParaRPr lang="en-US"/>
           </a:p>
         </p:txBody>
       </p:sp>
     </p:spTree>
+    <p:extLst>
+      <p:ext uri="{BB962C8B-B14F-4D97-AF65-F5344CB8AC3E}">
+        <p14:creationId xmlns:p14="http://schemas.microsoft.com/office/powerpoint/2010/main" val="990158736"/>
+      </p:ext>
+    </p:extLst>
   </p:cSld>
   <p:clrMapOvr>
     <a:masterClrMapping/>
@@ -1889,6 +1892,7 @@
           <a:p>
             <a:fld id="{5BCAD085-E8A6-8845-BD4E-CB4CCA059FC4}" type="datetimeFigureOut">
               <a:rPr lang="en-US" smtClean="0"/>
+              <a:t>1/27/13</a:t>
             </a:fld>
             <a:endParaRPr lang="en-US"/>
           </a:p>
@@ -1930,12 +1934,18 @@
           <a:p>
             <a:fld id="{C1FF6DA9-008F-8B48-92A6-B652298478BF}" type="slidenum">
               <a:rPr lang="en-US" smtClean="0"/>
+              <a:t>‹#›</a:t>
             </a:fld>
             <a:endParaRPr lang="en-US"/>
           </a:p>
         </p:txBody>
       </p:sp>
     </p:spTree>
+    <p:extLst>
+      <p:ext uri="{BB962C8B-B14F-4D97-AF65-F5344CB8AC3E}">
+        <p14:creationId xmlns:p14="http://schemas.microsoft.com/office/powerpoint/2010/main" val="727027711"/>
+      </p:ext>
+    </p:extLst>
   </p:cSld>
   <p:clrMapOvr>
     <a:masterClrMapping/>
@@ -1977,6 +1987,7 @@
           <a:p>
             <a:fld id="{5BCAD085-E8A6-8845-BD4E-CB4CCA059FC4}" type="datetimeFigureOut">
               <a:rPr lang="en-US" smtClean="0"/>
+              <a:t>1/27/13</a:t>
             </a:fld>
             <a:endParaRPr lang="en-US"/>
           </a:p>
@@ -2018,12 +2029,18 @@
           <a:p>
             <a:fld id="{C1FF6DA9-008F-8B48-92A6-B652298478BF}" type="slidenum">
               <a:rPr lang="en-US" smtClean="0"/>
+              <a:t>‹#›</a:t>
             </a:fld>
             <a:endParaRPr lang="en-US"/>
           </a:p>
         </p:txBody>
       </p:sp>
     </p:spTree>
+    <p:extLst>
+      <p:ext uri="{BB962C8B-B14F-4D97-AF65-F5344CB8AC3E}">
+        <p14:creationId xmlns:p14="http://schemas.microsoft.com/office/powerpoint/2010/main" val="1212999818"/>
+      </p:ext>
+    </p:extLst>
   </p:cSld>
   <p:clrMapOvr>
     <a:masterClrMapping/>
@@ -2133,7 +2150,6 @@
               <a:rPr lang="en-US" smtClean="0"/>
               <a:t>Click to edit Master text styles</a:t>
             </a:r>
-            <a:endParaRPr lang="en-US" smtClean="0"/>
           </a:p>
           <a:p>
             <a:pPr lvl="1"/>
@@ -2141,7 +2157,6 @@
               <a:rPr lang="en-US" smtClean="0"/>
               <a:t>Second level</a:t>
             </a:r>
-            <a:endParaRPr lang="en-US" smtClean="0"/>
           </a:p>
           <a:p>
             <a:pPr lvl="2"/>
@@ -2149,7 +2164,6 @@
               <a:rPr lang="en-US" smtClean="0"/>
               <a:t>Third level</a:t>
             </a:r>
-            <a:endParaRPr lang="en-US" smtClean="0"/>
           </a:p>
           <a:p>
             <a:pPr lvl="3"/>
@@ -2157,7 +2171,6 @@
               <a:rPr lang="en-US" smtClean="0"/>
               <a:t>Fourth level</a:t>
             </a:r>
-            <a:endParaRPr lang="en-US" smtClean="0"/>
           </a:p>
           <a:p>
             <a:pPr lvl="4"/>
@@ -2231,7 +2244,6 @@
               <a:rPr lang="en-US" smtClean="0"/>
               <a:t>Click to edit Master text styles</a:t>
             </a:r>
-            <a:endParaRPr lang="en-US" smtClean="0"/>
           </a:p>
         </p:txBody>
       </p:sp>
@@ -2252,6 +2264,7 @@
           <a:p>
             <a:fld id="{5BCAD085-E8A6-8845-BD4E-CB4CCA059FC4}" type="datetimeFigureOut">
               <a:rPr lang="en-US" smtClean="0"/>
+              <a:t>1/27/13</a:t>
             </a:fld>
             <a:endParaRPr lang="en-US"/>
           </a:p>
@@ -2293,12 +2306,18 @@
           <a:p>
             <a:fld id="{C1FF6DA9-008F-8B48-92A6-B652298478BF}" type="slidenum">
               <a:rPr lang="en-US" smtClean="0"/>
+              <a:t>‹#›</a:t>
             </a:fld>
             <a:endParaRPr lang="en-US"/>
           </a:p>
         </p:txBody>
       </p:sp>
     </p:spTree>
+    <p:extLst>
+      <p:ext uri="{BB962C8B-B14F-4D97-AF65-F5344CB8AC3E}">
+        <p14:creationId xmlns:p14="http://schemas.microsoft.com/office/powerpoint/2010/main" val="1840726560"/>
+      </p:ext>
+    </p:extLst>
   </p:cSld>
   <p:clrMapOvr>
     <a:masterClrMapping/>
@@ -2478,7 +2497,6 @@
               <a:rPr lang="en-US" smtClean="0"/>
               <a:t>Click to edit Master text styles</a:t>
             </a:r>
-            <a:endParaRPr lang="en-US" smtClean="0"/>
           </a:p>
         </p:txBody>
       </p:sp>
@@ -2499,6 +2517,7 @@
           <a:p>
             <a:fld id="{5BCAD085-E8A6-8845-BD4E-CB4CCA059FC4}" type="datetimeFigureOut">
               <a:rPr lang="en-US" smtClean="0"/>
+              <a:t>1/27/13</a:t>
             </a:fld>
             <a:endParaRPr lang="en-US"/>
           </a:p>
@@ -2540,12 +2559,18 @@
           <a:p>
             <a:fld id="{C1FF6DA9-008F-8B48-92A6-B652298478BF}" type="slidenum">
               <a:rPr lang="en-US" smtClean="0"/>
+              <a:t>‹#›</a:t>
             </a:fld>
             <a:endParaRPr lang="en-US"/>
           </a:p>
         </p:txBody>
       </p:sp>
     </p:spTree>
+    <p:extLst>
+      <p:ext uri="{BB962C8B-B14F-4D97-AF65-F5344CB8AC3E}">
+        <p14:creationId xmlns:p14="http://schemas.microsoft.com/office/powerpoint/2010/main" val="3889236939"/>
+      </p:ext>
+    </p:extLst>
   </p:cSld>
   <p:clrMapOvr>
     <a:masterClrMapping/>
@@ -2638,7 +2663,6 @@
               <a:rPr lang="en-US" smtClean="0"/>
               <a:t>Click to edit Master text styles</a:t>
             </a:r>
-            <a:endParaRPr lang="en-US" smtClean="0"/>
           </a:p>
           <a:p>
             <a:pPr lvl="1"/>
@@ -2646,7 +2670,6 @@
               <a:rPr lang="en-US" smtClean="0"/>
               <a:t>Second level</a:t>
             </a:r>
-            <a:endParaRPr lang="en-US" smtClean="0"/>
           </a:p>
           <a:p>
             <a:pPr lvl="2"/>
@@ -2654,7 +2677,6 @@
               <a:rPr lang="en-US" smtClean="0"/>
               <a:t>Third level</a:t>
             </a:r>
-            <a:endParaRPr lang="en-US" smtClean="0"/>
           </a:p>
           <a:p>
             <a:pPr lvl="3"/>
@@ -2662,7 +2684,6 @@
               <a:rPr lang="en-US" smtClean="0"/>
               <a:t>Fourth level</a:t>
             </a:r>
-            <a:endParaRPr lang="en-US" smtClean="0"/>
           </a:p>
           <a:p>
             <a:pPr lvl="4"/>
@@ -2709,6 +2730,7 @@
           <a:p>
             <a:fld id="{5BCAD085-E8A6-8845-BD4E-CB4CCA059FC4}" type="datetimeFigureOut">
               <a:rPr lang="en-US" smtClean="0"/>
+              <a:t>1/27/13</a:t>
             </a:fld>
             <a:endParaRPr lang="en-US"/>
           </a:p>
@@ -2786,12 +2808,18 @@
           <a:p>
             <a:fld id="{C1FF6DA9-008F-8B48-92A6-B652298478BF}" type="slidenum">
               <a:rPr lang="en-US" smtClean="0"/>
+              <a:t>‹#›</a:t>
             </a:fld>
             <a:endParaRPr lang="en-US"/>
           </a:p>
         </p:txBody>
       </p:sp>
     </p:spTree>
+    <p:extLst>
+      <p:ext uri="{BB962C8B-B14F-4D97-AF65-F5344CB8AC3E}">
+        <p14:creationId xmlns:p14="http://schemas.microsoft.com/office/powerpoint/2010/main" val="2209977519"/>
+      </p:ext>
+    </p:extLst>
   </p:cSld>
   <p:clrMap bg1="lt1" tx1="dk1" bg2="lt2" tx2="dk2" accent1="accent1" accent2="accent2" accent3="accent3" accent4="accent4" accent5="accent5" accent6="accent6" hlink="hlink" folHlink="folHlink"/>
   <p:sldLayoutIdLst>
@@ -2829,7 +2857,7 @@
         <a:spcBef>
           <a:spcPct val="20000"/>
         </a:spcBef>
-        <a:buFont typeface="Arial" panose="020B0604020202020204"/>
+        <a:buFont typeface="Arial"/>
         <a:buChar char="•"/>
         <a:defRPr sz="3200" kern="1200">
           <a:solidFill>
@@ -2844,7 +2872,7 @@
         <a:spcBef>
           <a:spcPct val="20000"/>
         </a:spcBef>
-        <a:buFont typeface="Arial" panose="020B0604020202020204"/>
+        <a:buFont typeface="Arial"/>
         <a:buChar char="–"/>
         <a:defRPr sz="2800" kern="1200">
           <a:solidFill>
@@ -2859,7 +2887,7 @@
         <a:spcBef>
           <a:spcPct val="20000"/>
         </a:spcBef>
-        <a:buFont typeface="Arial" panose="020B0604020202020204"/>
+        <a:buFont typeface="Arial"/>
         <a:buChar char="•"/>
         <a:defRPr sz="2400" kern="1200">
           <a:solidFill>
@@ -2874,7 +2902,7 @@
         <a:spcBef>
           <a:spcPct val="20000"/>
         </a:spcBef>
-        <a:buFont typeface="Arial" panose="020B0604020202020204"/>
+        <a:buFont typeface="Arial"/>
         <a:buChar char="–"/>
         <a:defRPr sz="2000" kern="1200">
           <a:solidFill>
@@ -2889,7 +2917,7 @@
         <a:spcBef>
           <a:spcPct val="20000"/>
         </a:spcBef>
-        <a:buFont typeface="Arial" panose="020B0604020202020204"/>
+        <a:buFont typeface="Arial"/>
         <a:buChar char="»"/>
         <a:defRPr sz="2000" kern="1200">
           <a:solidFill>
@@ -2904,7 +2932,7 @@
         <a:spcBef>
           <a:spcPct val="20000"/>
         </a:spcBef>
-        <a:buFont typeface="Arial" panose="020B0604020202020204"/>
+        <a:buFont typeface="Arial"/>
         <a:buChar char="•"/>
         <a:defRPr sz="2000" kern="1200">
           <a:solidFill>
@@ -2919,7 +2947,7 @@
         <a:spcBef>
           <a:spcPct val="20000"/>
         </a:spcBef>
-        <a:buFont typeface="Arial" panose="020B0604020202020204"/>
+        <a:buFont typeface="Arial"/>
         <a:buChar char="•"/>
         <a:defRPr sz="2000" kern="1200">
           <a:solidFill>
@@ -2934,7 +2962,7 @@
         <a:spcBef>
           <a:spcPct val="20000"/>
         </a:spcBef>
-        <a:buFont typeface="Arial" panose="020B0604020202020204"/>
+        <a:buFont typeface="Arial"/>
         <a:buChar char="•"/>
         <a:defRPr sz="2000" kern="1200">
           <a:solidFill>
@@ -2949,7 +2977,7 @@
         <a:spcBef>
           <a:spcPct val="20000"/>
         </a:spcBef>
-        <a:buFont typeface="Arial" panose="020B0604020202020204"/>
+        <a:buFont typeface="Arial"/>
         <a:buChar char="•"/>
         <a:defRPr sz="2000" kern="1200">
           <a:solidFill>
@@ -3061,7 +3089,7 @@
 </file>
 
 <file path=ppt/slides/slide1.xml><?xml version="1.0" encoding="utf-8"?>
-<p:sld xmlns:a="http://schemas.openxmlformats.org/drawingml/2006/main" xmlns:r="http://schemas.openxmlformats.org/officeDocument/2006/relationships" xmlns:p="http://schemas.openxmlformats.org/presentationml/2006/main">
+<p:sld xmlns:a="http://schemas.openxmlformats.org/drawingml/2006/main" xmlns:p="http://schemas.openxmlformats.org/presentationml/2006/main" xmlns:r="http://schemas.openxmlformats.org/officeDocument/2006/relationships">
   <p:cSld>
     <p:bg>
       <p:bgPr>
@@ -3224,7 +3252,7 @@
           </a:fontRef>
         </p:style>
         <p:txBody>
-          <a:bodyPr wrap="square" lIns="274320" tIns="228600" rIns="274320" rtlCol="0" anchor="ctr"/>
+          <a:bodyPr rtlCol="0" anchor="ctr" wrap="square" lIns="274320" rIns="274320" tIns="228600"/>
           <a:lstStyle/>
           <a:p>
             <a:pPr algn="ctr">
@@ -3317,7 +3345,7 @@
           </a:fontRef>
         </p:style>
         <p:txBody>
-          <a:bodyPr wrap="square" lIns="274320" tIns="228600" rIns="274320" rtlCol="0" anchor="ctr"/>
+          <a:bodyPr rtlCol="0" anchor="ctr" wrap="square" lIns="274320" rIns="274320" tIns="228600"/>
           <a:lstStyle/>
           <a:p>
             <a:pPr algn="ctr">
@@ -3396,7 +3424,595 @@
 </file>
 
 <file path=ppt/slides/slide10.xml><?xml version="1.0" encoding="utf-8"?>
-<p:sld xmlns:a="http://schemas.openxmlformats.org/drawingml/2006/main" xmlns:r="http://schemas.openxmlformats.org/officeDocument/2006/relationships" xmlns:p="http://schemas.openxmlformats.org/presentationml/2006/main">
+<p:sld xmlns:a="http://schemas.openxmlformats.org/drawingml/2006/main" xmlns:p="http://schemas.openxmlformats.org/presentationml/2006/main" xmlns:r="http://schemas.openxmlformats.org/officeDocument/2006/relationships">
+  <p:cSld>
+    <p:bg>
+      <p:bgPr>
+        <a:solidFill>
+          <a:srgbClr val="F4F7FB"/>
+        </a:solidFill>
+        <a:effectLst/>
+      </p:bgPr>
+    </p:bg>
+    <p:spTree>
+      <p:nvGrpSpPr>
+        <p:cNvPr id="1" name=""/>
+        <p:cNvGrpSpPr/>
+        <p:nvPr/>
+      </p:nvGrpSpPr>
+      <p:grpSpPr/>
+      <p:sp>
+        <p:nvSpPr>
+          <p:cNvPr id="2" name="TextBox 1"/>
+          <p:cNvSpPr txBox="1"/>
+          <p:nvPr/>
+        </p:nvSpPr>
+        <p:spPr>
+          <a:xfrm>
+            <a:off x="731520" y="365760"/>
+            <a:ext cx="10698480" cy="274320"/>
+          </a:xfrm>
+          <a:prstGeom prst="rect">
+            <a:avLst/>
+          </a:prstGeom>
+          <a:noFill/>
+        </p:spPr>
+        <p:txBody>
+          <a:bodyPr wrap="square" lIns="0" rIns="0" tIns="0" bIns="0">
+            <a:spAutoFit/>
+          </a:bodyPr>
+          <a:lstStyle/>
+          <a:p>
+            <a:pPr>
+              <a:defRPr sz="1000" b="1">
+                <a:solidFill>
+                  <a:srgbClr val="2563EB"/>
+                </a:solidFill>
+              </a:defRPr>
+            </a:pPr>
+            <a:r>
+              <a:t>SLIDE 10 • ROADMAP</a:t>
+            </a:r>
+          </a:p>
+        </p:txBody>
+      </p:sp>
+      <p:sp>
+        <p:nvSpPr>
+          <p:cNvPr id="3" name="TextBox 2"/>
+          <p:cNvSpPr txBox="1"/>
+          <p:nvPr/>
+        </p:nvSpPr>
+        <p:spPr>
+          <a:xfrm>
+            <a:off x="731520" y="640080"/>
+            <a:ext cx="10698480" cy="548640"/>
+          </a:xfrm>
+          <a:prstGeom prst="rect">
+            <a:avLst/>
+          </a:prstGeom>
+          <a:noFill/>
+        </p:spPr>
+        <p:txBody>
+          <a:bodyPr wrap="square" lIns="0" rIns="0" tIns="0" bIns="0">
+            <a:spAutoFit/>
+          </a:bodyPr>
+          <a:lstStyle/>
+          <a:p>
+            <a:pPr>
+              <a:defRPr sz="2400" b="1">
+                <a:solidFill>
+                  <a:srgbClr val="0F172A"/>
+                </a:solidFill>
+              </a:defRPr>
+            </a:pPr>
+            <a:r>
+              <a:t>Future Enhancements</a:t>
+            </a:r>
+          </a:p>
+        </p:txBody>
+      </p:sp>
+      <p:sp>
+        <p:nvSpPr>
+          <p:cNvPr id="4" name="TextBox 3"/>
+          <p:cNvSpPr txBox="1"/>
+          <p:nvPr/>
+        </p:nvSpPr>
+        <p:spPr>
+          <a:xfrm>
+            <a:off x="731520" y="1234440"/>
+            <a:ext cx="10698480" cy="320040"/>
+          </a:xfrm>
+          <a:prstGeom prst="rect">
+            <a:avLst/>
+          </a:prstGeom>
+          <a:noFill/>
+        </p:spPr>
+        <p:txBody>
+          <a:bodyPr wrap="square" lIns="0" rIns="0" tIns="0" bIns="0">
+            <a:spAutoFit/>
+          </a:bodyPr>
+          <a:lstStyle/>
+          <a:p>
+            <a:pPr>
+              <a:defRPr sz="1200">
+                <a:solidFill>
+                  <a:srgbClr val="64748B"/>
+                </a:solidFill>
+              </a:defRPr>
+            </a:pPr>
+            <a:r>
+              <a:t>Useful features and extensions designed for future production releases</a:t>
+            </a:r>
+          </a:p>
+        </p:txBody>
+      </p:sp>
+      <p:sp>
+        <p:nvSpPr>
+          <p:cNvPr id="5" name="Rectangle 4"/>
+          <p:cNvSpPr/>
+          <p:nvPr/>
+        </p:nvSpPr>
+        <p:spPr>
+          <a:xfrm>
+            <a:off x="731520" y="1600200"/>
+            <a:ext cx="10728655" cy="18288"/>
+          </a:xfrm>
+          <a:prstGeom prst="rect">
+            <a:avLst/>
+          </a:prstGeom>
+          <a:solidFill>
+            <a:srgbClr val="E2E8F0"/>
+          </a:solidFill>
+          <a:ln>
+            <a:noFill/>
+          </a:ln>
+        </p:spPr>
+        <p:style>
+          <a:lnRef idx="1">
+            <a:schemeClr val="accent1"/>
+          </a:lnRef>
+          <a:fillRef idx="3">
+            <a:schemeClr val="accent1"/>
+          </a:fillRef>
+          <a:effectRef idx="2">
+            <a:schemeClr val="accent1"/>
+          </a:effectRef>
+          <a:fontRef idx="minor">
+            <a:schemeClr val="lt1"/>
+          </a:fontRef>
+        </p:style>
+        <p:txBody>
+          <a:bodyPr rtlCol="0" anchor="ctr"/>
+          <a:lstStyle/>
+          <a:p>
+            <a:pPr algn="ctr"/>
+          </a:p>
+        </p:txBody>
+      </p:sp>
+      <p:sp>
+        <p:nvSpPr>
+          <p:cNvPr id="6" name="Rounded Rectangle 5"/>
+          <p:cNvSpPr/>
+          <p:nvPr/>
+        </p:nvSpPr>
+        <p:spPr>
+          <a:xfrm>
+            <a:off x="731520" y="1828800"/>
+            <a:ext cx="3474720" cy="2103120"/>
+          </a:xfrm>
+          <a:prstGeom prst="roundRect">
+            <a:avLst/>
+          </a:prstGeom>
+          <a:solidFill>
+            <a:srgbClr val="FFFFFF"/>
+          </a:solidFill>
+          <a:ln w="15240">
+            <a:solidFill>
+              <a:srgbClr val="E2E8F0"/>
+            </a:solidFill>
+          </a:ln>
+        </p:spPr>
+        <p:style>
+          <a:lnRef idx="1">
+            <a:schemeClr val="accent1"/>
+          </a:lnRef>
+          <a:fillRef idx="3">
+            <a:schemeClr val="accent1"/>
+          </a:fillRef>
+          <a:effectRef idx="2">
+            <a:schemeClr val="accent1"/>
+          </a:effectRef>
+          <a:fontRef idx="minor">
+            <a:schemeClr val="lt1"/>
+          </a:fontRef>
+        </p:style>
+        <p:txBody>
+          <a:bodyPr rtlCol="0" anchor="ctr" wrap="square" lIns="228600" rIns="228600" tIns="228600"/>
+          <a:lstStyle/>
+          <a:p>
+            <a:pPr algn="ctr">
+              <a:defRPr sz="1300" b="1">
+                <a:solidFill>
+                  <a:srgbClr val="1F3C88"/>
+                </a:solidFill>
+              </a:defRPr>
+            </a:pPr>
+            <a:r>
+              <a:t>🤖 AI Resume Parser &amp; Matcher</a:t>
+            </a:r>
+          </a:p>
+          <a:p>
+            <a:pPr>
+              <a:spcBef>
+                <a:spcPts val="800"/>
+              </a:spcBef>
+              <a:defRPr sz="1050">
+                <a:solidFill>
+                  <a:srgbClr val="1E293B"/>
+                </a:solidFill>
+              </a:defRPr>
+            </a:pPr>
+            <a:r>
+              <a:t>Automatically scan student PDF resumes, extract technical skills, and recommend the best-fitting internships.</a:t>
+            </a:r>
+          </a:p>
+        </p:txBody>
+      </p:sp>
+      <p:sp>
+        <p:nvSpPr>
+          <p:cNvPr id="7" name="Rounded Rectangle 6"/>
+          <p:cNvSpPr/>
+          <p:nvPr/>
+        </p:nvSpPr>
+        <p:spPr>
+          <a:xfrm>
+            <a:off x="4370832" y="1828800"/>
+            <a:ext cx="3474720" cy="2103120"/>
+          </a:xfrm>
+          <a:prstGeom prst="roundRect">
+            <a:avLst/>
+          </a:prstGeom>
+          <a:solidFill>
+            <a:srgbClr val="FFFFFF"/>
+          </a:solidFill>
+          <a:ln w="15240">
+            <a:solidFill>
+              <a:srgbClr val="E2E8F0"/>
+            </a:solidFill>
+          </a:ln>
+        </p:spPr>
+        <p:style>
+          <a:lnRef idx="1">
+            <a:schemeClr val="accent1"/>
+          </a:lnRef>
+          <a:fillRef idx="3">
+            <a:schemeClr val="accent1"/>
+          </a:fillRef>
+          <a:effectRef idx="2">
+            <a:schemeClr val="accent1"/>
+          </a:effectRef>
+          <a:fontRef idx="minor">
+            <a:schemeClr val="lt1"/>
+          </a:fontRef>
+        </p:style>
+        <p:txBody>
+          <a:bodyPr rtlCol="0" anchor="ctr" wrap="square" lIns="228600" rIns="228600" tIns="228600"/>
+          <a:lstStyle/>
+          <a:p>
+            <a:pPr algn="ctr">
+              <a:defRPr sz="1300" b="1">
+                <a:solidFill>
+                  <a:srgbClr val="1F3C88"/>
+                </a:solidFill>
+              </a:defRPr>
+            </a:pPr>
+            <a:r>
+              <a:t>🏢 Recruiter Interview Scheduler</a:t>
+            </a:r>
+          </a:p>
+          <a:p>
+            <a:pPr>
+              <a:spcBef>
+                <a:spcPts val="800"/>
+              </a:spcBef>
+              <a:defRPr sz="1050">
+                <a:solidFill>
+                  <a:srgbClr val="1E293B"/>
+                </a:solidFill>
+              </a:defRPr>
+            </a:pPr>
+            <a:r>
+              <a:t>Add an in-app calendar to schedule interview rounds and integrate with Google Meet or Zoom.</a:t>
+            </a:r>
+          </a:p>
+        </p:txBody>
+      </p:sp>
+      <p:sp>
+        <p:nvSpPr>
+          <p:cNvPr id="8" name="Rounded Rectangle 7"/>
+          <p:cNvSpPr/>
+          <p:nvPr/>
+        </p:nvSpPr>
+        <p:spPr>
+          <a:xfrm>
+            <a:off x="8010144" y="1828800"/>
+            <a:ext cx="3474720" cy="2103120"/>
+          </a:xfrm>
+          <a:prstGeom prst="roundRect">
+            <a:avLst/>
+          </a:prstGeom>
+          <a:solidFill>
+            <a:srgbClr val="FFFFFF"/>
+          </a:solidFill>
+          <a:ln w="15240">
+            <a:solidFill>
+              <a:srgbClr val="E2E8F0"/>
+            </a:solidFill>
+          </a:ln>
+        </p:spPr>
+        <p:style>
+          <a:lnRef idx="1">
+            <a:schemeClr val="accent1"/>
+          </a:lnRef>
+          <a:fillRef idx="3">
+            <a:schemeClr val="accent1"/>
+          </a:fillRef>
+          <a:effectRef idx="2">
+            <a:schemeClr val="accent1"/>
+          </a:effectRef>
+          <a:fontRef idx="minor">
+            <a:schemeClr val="lt1"/>
+          </a:fontRef>
+        </p:style>
+        <p:txBody>
+          <a:bodyPr rtlCol="0" anchor="ctr" wrap="square" lIns="228600" rIns="228600" tIns="228600"/>
+          <a:lstStyle/>
+          <a:p>
+            <a:pPr algn="ctr">
+              <a:defRPr sz="1300" b="1">
+                <a:solidFill>
+                  <a:srgbClr val="1F3C88"/>
+                </a:solidFill>
+              </a:defRPr>
+            </a:pPr>
+            <a:r>
+              <a:t>📩 Automated Email &amp; SMS Alerts</a:t>
+            </a:r>
+          </a:p>
+          <a:p>
+            <a:pPr>
+              <a:spcBef>
+                <a:spcPts val="800"/>
+              </a:spcBef>
+              <a:defRPr sz="1050">
+                <a:solidFill>
+                  <a:srgbClr val="1E293B"/>
+                </a:solidFill>
+              </a:defRPr>
+            </a:pPr>
+            <a:r>
+              <a:t>Send automated email and SMS messages to students when an interview is scheduled or status changes.</a:t>
+            </a:r>
+          </a:p>
+        </p:txBody>
+      </p:sp>
+      <p:sp>
+        <p:nvSpPr>
+          <p:cNvPr id="9" name="Rounded Rectangle 8"/>
+          <p:cNvSpPr/>
+          <p:nvPr/>
+        </p:nvSpPr>
+        <p:spPr>
+          <a:xfrm>
+            <a:off x="731520" y="4114800"/>
+            <a:ext cx="3474720" cy="2103120"/>
+          </a:xfrm>
+          <a:prstGeom prst="roundRect">
+            <a:avLst/>
+          </a:prstGeom>
+          <a:solidFill>
+            <a:srgbClr val="FFFFFF"/>
+          </a:solidFill>
+          <a:ln w="15240">
+            <a:solidFill>
+              <a:srgbClr val="E2E8F0"/>
+            </a:solidFill>
+          </a:ln>
+        </p:spPr>
+        <p:style>
+          <a:lnRef idx="1">
+            <a:schemeClr val="accent1"/>
+          </a:lnRef>
+          <a:fillRef idx="3">
+            <a:schemeClr val="accent1"/>
+          </a:fillRef>
+          <a:effectRef idx="2">
+            <a:schemeClr val="accent1"/>
+          </a:effectRef>
+          <a:fontRef idx="minor">
+            <a:schemeClr val="lt1"/>
+          </a:fontRef>
+        </p:style>
+        <p:txBody>
+          <a:bodyPr rtlCol="0" anchor="ctr" wrap="square" lIns="228600" rIns="228600" tIns="228600"/>
+          <a:lstStyle/>
+          <a:p>
+            <a:pPr algn="ctr">
+              <a:defRPr sz="1300" b="1">
+                <a:solidFill>
+                  <a:srgbClr val="1F3C88"/>
+                </a:solidFill>
+              </a:defRPr>
+            </a:pPr>
+            <a:r>
+              <a:t>📊 Placement Analytics &amp; Export</a:t>
+            </a:r>
+          </a:p>
+          <a:p>
+            <a:pPr>
+              <a:spcBef>
+                <a:spcPts val="800"/>
+              </a:spcBef>
+              <a:defRPr sz="1050">
+                <a:solidFill>
+                  <a:srgbClr val="1E293B"/>
+                </a:solidFill>
+              </a:defRPr>
+            </a:pPr>
+            <a:r>
+              <a:t>Generate downloadable placement PDF/Excel reports and analytics for college accreditation records.</a:t>
+            </a:r>
+          </a:p>
+        </p:txBody>
+      </p:sp>
+      <p:sp>
+        <p:nvSpPr>
+          <p:cNvPr id="10" name="Rounded Rectangle 9"/>
+          <p:cNvSpPr/>
+          <p:nvPr/>
+        </p:nvSpPr>
+        <p:spPr>
+          <a:xfrm>
+            <a:off x="4370832" y="4114800"/>
+            <a:ext cx="3474720" cy="2103120"/>
+          </a:xfrm>
+          <a:prstGeom prst="roundRect">
+            <a:avLst/>
+          </a:prstGeom>
+          <a:solidFill>
+            <a:srgbClr val="FFFFFF"/>
+          </a:solidFill>
+          <a:ln w="15240">
+            <a:solidFill>
+              <a:srgbClr val="E2E8F0"/>
+            </a:solidFill>
+          </a:ln>
+        </p:spPr>
+        <p:style>
+          <a:lnRef idx="1">
+            <a:schemeClr val="accent1"/>
+          </a:lnRef>
+          <a:fillRef idx="3">
+            <a:schemeClr val="accent1"/>
+          </a:fillRef>
+          <a:effectRef idx="2">
+            <a:schemeClr val="accent1"/>
+          </a:effectRef>
+          <a:fontRef idx="minor">
+            <a:schemeClr val="lt1"/>
+          </a:fontRef>
+        </p:style>
+        <p:txBody>
+          <a:bodyPr rtlCol="0" anchor="ctr" wrap="square" lIns="228600" rIns="228600" tIns="228600"/>
+          <a:lstStyle/>
+          <a:p>
+            <a:pPr algn="ctr">
+              <a:defRPr sz="1300" b="1">
+                <a:solidFill>
+                  <a:srgbClr val="1F3C88"/>
+                </a:solidFill>
+              </a:defRPr>
+            </a:pPr>
+            <a:r>
+              <a:t>📱 Native Mobile Application</a:t>
+            </a:r>
+          </a:p>
+          <a:p>
+            <a:pPr>
+              <a:spcBef>
+                <a:spcPts val="800"/>
+              </a:spcBef>
+              <a:defRPr sz="1050">
+                <a:solidFill>
+                  <a:srgbClr val="1E293B"/>
+                </a:solidFill>
+              </a:defRPr>
+            </a:pPr>
+            <a:r>
+              <a:t>Develop an Android and iOS mobile app using Flutter so students can receive push notifications on mobile.</a:t>
+            </a:r>
+          </a:p>
+        </p:txBody>
+      </p:sp>
+      <p:sp>
+        <p:nvSpPr>
+          <p:cNvPr id="11" name="Rounded Rectangle 10"/>
+          <p:cNvSpPr/>
+          <p:nvPr/>
+        </p:nvSpPr>
+        <p:spPr>
+          <a:xfrm>
+            <a:off x="8010144" y="4114800"/>
+            <a:ext cx="3474720" cy="2103120"/>
+          </a:xfrm>
+          <a:prstGeom prst="roundRect">
+            <a:avLst/>
+          </a:prstGeom>
+          <a:solidFill>
+            <a:srgbClr val="FFFFFF"/>
+          </a:solidFill>
+          <a:ln w="15240">
+            <a:solidFill>
+              <a:srgbClr val="E2E8F0"/>
+            </a:solidFill>
+          </a:ln>
+        </p:spPr>
+        <p:style>
+          <a:lnRef idx="1">
+            <a:schemeClr val="accent1"/>
+          </a:lnRef>
+          <a:fillRef idx="3">
+            <a:schemeClr val="accent1"/>
+          </a:fillRef>
+          <a:effectRef idx="2">
+            <a:schemeClr val="accent1"/>
+          </a:effectRef>
+          <a:fontRef idx="minor">
+            <a:schemeClr val="lt1"/>
+          </a:fontRef>
+        </p:style>
+        <p:txBody>
+          <a:bodyPr rtlCol="0" anchor="ctr" wrap="square" lIns="228600" rIns="228600" tIns="228600"/>
+          <a:lstStyle/>
+          <a:p>
+            <a:pPr algn="ctr">
+              <a:defRPr sz="1300" b="1">
+                <a:solidFill>
+                  <a:srgbClr val="1F3C88"/>
+                </a:solidFill>
+              </a:defRPr>
+            </a:pPr>
+            <a:r>
+              <a:t>🎓 Digital Completion Certificates</a:t>
+            </a:r>
+          </a:p>
+          <a:p>
+            <a:pPr>
+              <a:spcBef>
+                <a:spcPts val="800"/>
+              </a:spcBef>
+              <a:defRPr sz="1050">
+                <a:solidFill>
+                  <a:srgbClr val="1E293B"/>
+                </a:solidFill>
+              </a:defRPr>
+            </a:pPr>
+            <a:r>
+              <a:t>Automatically issue verifiable, cryptographically signed digital completion certificates upon finishing internships.</a:t>
+            </a:r>
+          </a:p>
+        </p:txBody>
+      </p:sp>
+    </p:spTree>
+  </p:cSld>
+  <p:clrMapOvr>
+    <a:masterClrMapping/>
+  </p:clrMapOvr>
+</p:sld>
+</file>
+
+<file path=ppt/slides/slide11.xml><?xml version="1.0" encoding="utf-8"?>
+<p:sld xmlns:a="http://schemas.openxmlformats.org/drawingml/2006/main" xmlns:p="http://schemas.openxmlformats.org/presentationml/2006/main" xmlns:r="http://schemas.openxmlformats.org/officeDocument/2006/relationships">
   <p:cSld>
     <p:bg>
       <p:bgPr>
@@ -3494,7 +4110,7 @@
           </a:fontRef>
         </p:style>
         <p:txBody>
-          <a:bodyPr wrap="square" lIns="320040" tIns="274320" rIns="320040" rtlCol="0" anchor="ctr"/>
+          <a:bodyPr rtlCol="0" anchor="ctr" wrap="square" lIns="320040" rIns="320040" tIns="274320"/>
           <a:lstStyle/>
           <a:p>
             <a:pPr algn="ctr">
@@ -3520,7 +4136,7 @@
               </a:defRPr>
             </a:pPr>
             <a:r>
-              <a:t>• Solves a Real Problem: Replaces slow, manual paper circulars with an easy, centralized website.</a:t>
+              <a:t>• Solves a Real Campus Problem: Replaces slow, manual circulars and scattered WhatsApp messages with a unified, transparent portal.</a:t>
             </a:r>
           </a:p>
           <a:p>
@@ -3535,7 +4151,7 @@
               </a:defRPr>
             </a:pPr>
             <a:r>
-              <a:t>• Empowers Students: Provides full transparency with 1-click apply, real-time status tracking, and instant alerts.</a:t>
+              <a:t>• Empowers College Students: Direct 1-click applications, resume linkage, live tracking, and instantaneous status notifications.</a:t>
             </a:r>
           </a:p>
           <a:p>
@@ -3550,7 +4166,7 @@
               </a:defRPr>
             </a:pPr>
             <a:r>
-              <a:t>• Reduces Staff Workload: Cuts down coordinator effort and completely prevents duplicate applications.</a:t>
+              <a:t>• Empowers Companies &amp; Admins: Recruiters easily manage drives and evaluate candidates; placement cell gains complete audit oversight.</a:t>
             </a:r>
           </a:p>
           <a:p>
@@ -3565,7 +4181,7 @@
               </a:defRPr>
             </a:pPr>
             <a:r>
-              <a:t>• Clean Architecture: Built on Django's proven MVT architecture with a safe, normalized MySQL database.</a:t>
+              <a:t>• Solid Engineering Foundation: Built on Django's proven MVT architecture with a robust, normalized MySQL relational database.</a:t>
             </a:r>
           </a:p>
         </p:txBody>
@@ -3608,7 +4224,7 @@
           </a:fontRef>
         </p:style>
         <p:txBody>
-          <a:bodyPr wrap="square" lIns="320040" tIns="457200" rIns="320040" rtlCol="0" anchor="ctr"/>
+          <a:bodyPr rtlCol="0" anchor="ctr" wrap="square" lIns="320040" rIns="320040" tIns="457200"/>
           <a:lstStyle/>
           <a:p>
             <a:pPr algn="ctr">
@@ -3686,7 +4302,7 @@
 </file>
 
 <file path=ppt/slides/slide2.xml><?xml version="1.0" encoding="utf-8"?>
-<p:sld xmlns:a="http://schemas.openxmlformats.org/drawingml/2006/main" xmlns:r="http://schemas.openxmlformats.org/officeDocument/2006/relationships" xmlns:p="http://schemas.openxmlformats.org/presentationml/2006/main">
+<p:sld xmlns:a="http://schemas.openxmlformats.org/drawingml/2006/main" xmlns:p="http://schemas.openxmlformats.org/presentationml/2006/main" xmlns:r="http://schemas.openxmlformats.org/officeDocument/2006/relationships">
   <p:cSld>
     <p:bg>
       <p:bgPr>
@@ -3720,7 +4336,7 @@
           <a:noFill/>
         </p:spPr>
         <p:txBody>
-          <a:bodyPr wrap="square" lIns="0" tIns="0" rIns="0" bIns="0">
+          <a:bodyPr wrap="square" lIns="0" rIns="0" tIns="0" bIns="0">
             <a:spAutoFit/>
           </a:bodyPr>
           <a:lstStyle/>
@@ -3755,7 +4371,7 @@
           <a:noFill/>
         </p:spPr>
         <p:txBody>
-          <a:bodyPr wrap="square" lIns="0" tIns="0" rIns="0" bIns="0">
+          <a:bodyPr wrap="square" lIns="0" rIns="0" tIns="0" bIns="0">
             <a:spAutoFit/>
           </a:bodyPr>
           <a:lstStyle/>
@@ -3790,7 +4406,7 @@
           <a:noFill/>
         </p:spPr>
         <p:txBody>
-          <a:bodyPr wrap="square" lIns="0" tIns="0" rIns="0" bIns="0">
+          <a:bodyPr wrap="square" lIns="0" rIns="0" tIns="0" bIns="0">
             <a:spAutoFit/>
           </a:bodyPr>
           <a:lstStyle/>
@@ -3889,7 +4505,7 @@
           </a:fontRef>
         </p:style>
         <p:txBody>
-          <a:bodyPr wrap="square" lIns="320040" tIns="274320" rIns="320040" rtlCol="0" anchor="ctr"/>
+          <a:bodyPr rtlCol="0" anchor="ctr" wrap="square" lIns="320040" rIns="320040" tIns="274320"/>
           <a:lstStyle/>
           <a:p>
             <a:pPr algn="ctr">
@@ -4003,7 +4619,7 @@
           </a:fontRef>
         </p:style>
         <p:txBody>
-          <a:bodyPr wrap="square" lIns="320040" tIns="274320" rIns="320040" rtlCol="0" anchor="ctr"/>
+          <a:bodyPr rtlCol="0" anchor="ctr" wrap="square" lIns="320040" rIns="320040" tIns="274320"/>
           <a:lstStyle/>
           <a:p>
             <a:pPr algn="ctr">
@@ -4088,7 +4704,7 @@
 </file>
 
 <file path=ppt/slides/slide3.xml><?xml version="1.0" encoding="utf-8"?>
-<p:sld xmlns:a="http://schemas.openxmlformats.org/drawingml/2006/main" xmlns:r="http://schemas.openxmlformats.org/officeDocument/2006/relationships" xmlns:p="http://schemas.openxmlformats.org/presentationml/2006/main">
+<p:sld xmlns:a="http://schemas.openxmlformats.org/drawingml/2006/main" xmlns:p="http://schemas.openxmlformats.org/presentationml/2006/main" xmlns:r="http://schemas.openxmlformats.org/officeDocument/2006/relationships">
   <p:cSld>
     <p:bg>
       <p:bgPr>
@@ -4122,7 +4738,7 @@
           <a:noFill/>
         </p:spPr>
         <p:txBody>
-          <a:bodyPr wrap="square" lIns="0" tIns="0" rIns="0" bIns="0">
+          <a:bodyPr wrap="square" lIns="0" rIns="0" tIns="0" bIns="0">
             <a:spAutoFit/>
           </a:bodyPr>
           <a:lstStyle/>
@@ -4157,7 +4773,7 @@
           <a:noFill/>
         </p:spPr>
         <p:txBody>
-          <a:bodyPr wrap="square" lIns="0" tIns="0" rIns="0" bIns="0">
+          <a:bodyPr wrap="square" lIns="0" rIns="0" tIns="0" bIns="0">
             <a:spAutoFit/>
           </a:bodyPr>
           <a:lstStyle/>
@@ -4192,7 +4808,7 @@
           <a:noFill/>
         </p:spPr>
         <p:txBody>
-          <a:bodyPr wrap="square" lIns="0" tIns="0" rIns="0" bIns="0">
+          <a:bodyPr wrap="square" lIns="0" rIns="0" tIns="0" bIns="0">
             <a:spAutoFit/>
           </a:bodyPr>
           <a:lstStyle/>
@@ -4291,7 +4907,7 @@
           </a:fontRef>
         </p:style>
         <p:txBody>
-          <a:bodyPr wrap="square" lIns="228600" tIns="228600" rIns="228600" rtlCol="0" anchor="ctr"/>
+          <a:bodyPr rtlCol="0" anchor="ctr" wrap="square" lIns="228600" rIns="228600" tIns="228600"/>
           <a:lstStyle/>
           <a:p>
             <a:pPr algn="ctr">
@@ -4360,7 +4976,7 @@
           </a:fontRef>
         </p:style>
         <p:txBody>
-          <a:bodyPr wrap="square" lIns="228600" tIns="228600" rIns="228600" rtlCol="0" anchor="ctr"/>
+          <a:bodyPr rtlCol="0" anchor="ctr" wrap="square" lIns="228600" rIns="228600" tIns="228600"/>
           <a:lstStyle/>
           <a:p>
             <a:pPr algn="ctr">
@@ -4429,7 +5045,7 @@
           </a:fontRef>
         </p:style>
         <p:txBody>
-          <a:bodyPr wrap="square" lIns="228600" tIns="228600" rIns="228600" rtlCol="0" anchor="ctr"/>
+          <a:bodyPr rtlCol="0" anchor="ctr" wrap="square" lIns="228600" rIns="228600" tIns="228600"/>
           <a:lstStyle/>
           <a:p>
             <a:pPr algn="ctr">
@@ -4498,7 +5114,7 @@
           </a:fontRef>
         </p:style>
         <p:txBody>
-          <a:bodyPr wrap="square" lIns="228600" tIns="228600" rIns="228600" rtlCol="0" anchor="ctr"/>
+          <a:bodyPr rtlCol="0" anchor="ctr" wrap="square" lIns="228600" rIns="228600" tIns="228600"/>
           <a:lstStyle/>
           <a:p>
             <a:pPr algn="ctr">
@@ -4567,7 +5183,7 @@
           </a:fontRef>
         </p:style>
         <p:txBody>
-          <a:bodyPr wrap="square" lIns="228600" tIns="228600" rIns="228600" rtlCol="0" anchor="ctr"/>
+          <a:bodyPr rtlCol="0" anchor="ctr" wrap="square" lIns="228600" rIns="228600" tIns="228600"/>
           <a:lstStyle/>
           <a:p>
             <a:pPr algn="ctr">
@@ -4636,7 +5252,7 @@
           </a:fontRef>
         </p:style>
         <p:txBody>
-          <a:bodyPr wrap="square" lIns="228600" tIns="228600" rIns="228600" rtlCol="0" anchor="ctr"/>
+          <a:bodyPr rtlCol="0" anchor="ctr" wrap="square" lIns="228600" rIns="228600" tIns="228600"/>
           <a:lstStyle/>
           <a:p>
             <a:pPr algn="ctr">
@@ -4676,7 +5292,7 @@
 </file>
 
 <file path=ppt/slides/slide4.xml><?xml version="1.0" encoding="utf-8"?>
-<p:sld xmlns:a="http://schemas.openxmlformats.org/drawingml/2006/main" xmlns:r="http://schemas.openxmlformats.org/officeDocument/2006/relationships" xmlns:p="http://schemas.openxmlformats.org/presentationml/2006/main">
+<p:sld xmlns:a="http://schemas.openxmlformats.org/drawingml/2006/main" xmlns:p="http://schemas.openxmlformats.org/presentationml/2006/main" xmlns:r="http://schemas.openxmlformats.org/officeDocument/2006/relationships">
   <p:cSld>
     <p:bg>
       <p:bgPr>
@@ -4710,7 +5326,7 @@
           <a:noFill/>
         </p:spPr>
         <p:txBody>
-          <a:bodyPr wrap="square" lIns="0" tIns="0" rIns="0" bIns="0">
+          <a:bodyPr wrap="square" lIns="0" rIns="0" tIns="0" bIns="0">
             <a:spAutoFit/>
           </a:bodyPr>
           <a:lstStyle/>
@@ -4745,7 +5361,7 @@
           <a:noFill/>
         </p:spPr>
         <p:txBody>
-          <a:bodyPr wrap="square" lIns="0" tIns="0" rIns="0" bIns="0">
+          <a:bodyPr wrap="square" lIns="0" rIns="0" tIns="0" bIns="0">
             <a:spAutoFit/>
           </a:bodyPr>
           <a:lstStyle/>
@@ -4780,7 +5396,7 @@
           <a:noFill/>
         </p:spPr>
         <p:txBody>
-          <a:bodyPr wrap="square" lIns="0" tIns="0" rIns="0" bIns="0">
+          <a:bodyPr wrap="square" lIns="0" rIns="0" tIns="0" bIns="0">
             <a:spAutoFit/>
           </a:bodyPr>
           <a:lstStyle/>
@@ -4879,7 +5495,7 @@
           </a:fontRef>
         </p:style>
         <p:txBody>
-          <a:bodyPr wrap="square" lIns="320040" tIns="274320" rIns="320040" rtlCol="0" anchor="ctr"/>
+          <a:bodyPr rtlCol="0" anchor="ctr" wrap="square" lIns="320040" rIns="320040" tIns="274320"/>
           <a:lstStyle/>
           <a:p>
             <a:pPr algn="ctr">
@@ -5008,7 +5624,7 @@
           </a:fontRef>
         </p:style>
         <p:txBody>
-          <a:bodyPr wrap="square" lIns="320040" tIns="274320" rIns="320040" rtlCol="0" anchor="ctr"/>
+          <a:bodyPr rtlCol="0" anchor="ctr" wrap="square" lIns="320040" rIns="320040" tIns="274320"/>
           <a:lstStyle/>
           <a:p>
             <a:pPr algn="ctr">
@@ -5108,7 +5724,7 @@
 </file>
 
 <file path=ppt/slides/slide5.xml><?xml version="1.0" encoding="utf-8"?>
-<p:sld xmlns:a="http://schemas.openxmlformats.org/drawingml/2006/main" xmlns:r="http://schemas.openxmlformats.org/officeDocument/2006/relationships" xmlns:p="http://schemas.openxmlformats.org/presentationml/2006/main">
+<p:sld xmlns:a="http://schemas.openxmlformats.org/drawingml/2006/main" xmlns:p="http://schemas.openxmlformats.org/presentationml/2006/main" xmlns:r="http://schemas.openxmlformats.org/officeDocument/2006/relationships">
   <p:cSld>
     <p:bg>
       <p:bgPr>
@@ -5142,7 +5758,7 @@
           <a:noFill/>
         </p:spPr>
         <p:txBody>
-          <a:bodyPr wrap="square" lIns="0" tIns="0" rIns="0" bIns="0">
+          <a:bodyPr wrap="square" lIns="0" rIns="0" tIns="0" bIns="0">
             <a:spAutoFit/>
           </a:bodyPr>
           <a:lstStyle/>
@@ -5177,7 +5793,7 @@
           <a:noFill/>
         </p:spPr>
         <p:txBody>
-          <a:bodyPr wrap="square" lIns="0" tIns="0" rIns="0" bIns="0">
+          <a:bodyPr wrap="square" lIns="0" rIns="0" tIns="0" bIns="0">
             <a:spAutoFit/>
           </a:bodyPr>
           <a:lstStyle/>
@@ -5212,7 +5828,7 @@
           <a:noFill/>
         </p:spPr>
         <p:txBody>
-          <a:bodyPr wrap="square" lIns="0" tIns="0" rIns="0" bIns="0">
+          <a:bodyPr wrap="square" lIns="0" rIns="0" tIns="0" bIns="0">
             <a:spAutoFit/>
           </a:bodyPr>
           <a:lstStyle/>
@@ -5311,7 +5927,7 @@
           </a:fontRef>
         </p:style>
         <p:txBody>
-          <a:bodyPr wrap="square" lIns="228600" tIns="228600" rIns="228600" rtlCol="0" anchor="ctr"/>
+          <a:bodyPr rtlCol="0" anchor="ctr" wrap="square" lIns="228600" rIns="228600" tIns="228600"/>
           <a:lstStyle/>
           <a:p>
             <a:pPr algn="ctr">
@@ -5322,7 +5938,7 @@
               </a:defRPr>
             </a:pPr>
             <a:r>
-              <a:t>🔐 Student Login &amp; Profiles</a:t>
+              <a:t>🔐 Dual-Portal Authentication</a:t>
             </a:r>
           </a:p>
           <a:p>
@@ -5337,7 +5953,7 @@
               </a:defRPr>
             </a:pPr>
             <a:r>
-              <a:t>Simple sign-up and secure login. Students can view and update their personal and academic details anytime.</a:t>
+              <a:t>Separate secure logins for students (KTU credentials) and verified corporate recruiters/companies.</a:t>
             </a:r>
           </a:p>
         </p:txBody>
@@ -5380,7 +5996,7 @@
           </a:fontRef>
         </p:style>
         <p:txBody>
-          <a:bodyPr wrap="square" lIns="228600" tIns="228600" rIns="228600" rtlCol="0" anchor="ctr"/>
+          <a:bodyPr rtlCol="0" anchor="ctr" wrap="square" lIns="228600" rIns="228600" tIns="228600"/>
           <a:lstStyle/>
           <a:p>
             <a:pPr algn="ctr">
@@ -5391,7 +6007,7 @@
               </a:defRPr>
             </a:pPr>
             <a:r>
-              <a:t>🔍 Smart Job Search</a:t>
+              <a:t>🔍 Smart Search &amp; Filtering</a:t>
             </a:r>
           </a:p>
           <a:p>
@@ -5406,7 +6022,7 @@
               </a:defRPr>
             </a:pPr>
             <a:r>
-              <a:t>Fast search bar to filter internships by job title, company name, location, or required programming skills.</a:t>
+              <a:t>Dynamic search bar to filter opportunities by title, skills, stipend, location, and application deadline.</a:t>
             </a:r>
           </a:p>
         </p:txBody>
@@ -5449,7 +6065,7 @@
           </a:fontRef>
         </p:style>
         <p:txBody>
-          <a:bodyPr wrap="square" lIns="228600" tIns="228600" rIns="228600" rtlCol="0" anchor="ctr"/>
+          <a:bodyPr rtlCol="0" anchor="ctr" wrap="square" lIns="228600" rIns="228600" tIns="228600"/>
           <a:lstStyle/>
           <a:p>
             <a:pPr algn="ctr">
@@ -5460,7 +6076,7 @@
               </a:defRPr>
             </a:pPr>
             <a:r>
-              <a:t>⚡ 1-Click Application</a:t>
+              <a:t>⚡ 1-Click Application System</a:t>
             </a:r>
           </a:p>
           <a:p>
@@ -5475,7 +6091,7 @@
               </a:defRPr>
             </a:pPr>
             <a:r>
-              <a:t>Instant application submission that connects the student's profile directly to the chosen internship.</a:t>
+              <a:t>Instant application workflow that automatically attaches verified student profile &amp; uploaded PDF resume.</a:t>
             </a:r>
           </a:p>
         </p:txBody>
@@ -5518,7 +6134,7 @@
           </a:fontRef>
         </p:style>
         <p:txBody>
-          <a:bodyPr wrap="square" lIns="228600" tIns="228600" rIns="228600" rtlCol="0" anchor="ctr"/>
+          <a:bodyPr rtlCol="0" anchor="ctr" wrap="square" lIns="228600" rIns="228600" tIns="228600"/>
           <a:lstStyle/>
           <a:p>
             <a:pPr algn="ctr">
@@ -5529,7 +6145,7 @@
               </a:defRPr>
             </a:pPr>
             <a:r>
-              <a:t>📊 Student Dashboard</a:t>
+              <a:t>📊 Role-Based Dashboards</a:t>
             </a:r>
           </a:p>
           <a:p>
@@ -5544,7 +6160,7 @@
               </a:defRPr>
             </a:pPr>
             <a:r>
-              <a:t>Clear dashboard showing counts for Total Applied, Pending, Selected, and Rejected applications.</a:t>
+              <a:t>Tailored dashboards for students (application tracking) and recruiters (job listings &amp; candidate evaluation).</a:t>
             </a:r>
           </a:p>
         </p:txBody>
@@ -5587,7 +6203,7 @@
           </a:fontRef>
         </p:style>
         <p:txBody>
-          <a:bodyPr wrap="square" lIns="228600" tIns="228600" rIns="228600" rtlCol="0" anchor="ctr"/>
+          <a:bodyPr rtlCol="0" anchor="ctr" wrap="square" lIns="228600" rIns="228600" tIns="228600"/>
           <a:lstStyle/>
           <a:p>
             <a:pPr algn="ctr">
@@ -5598,7 +6214,7 @@
               </a:defRPr>
             </a:pPr>
             <a:r>
-              <a:t>🔔 Notification Alerts</a:t>
+              <a:t>🔔 Real-Time Notification Center</a:t>
             </a:r>
           </a:p>
           <a:p>
@@ -5613,7 +6229,7 @@
               </a:defRPr>
             </a:pPr>
             <a:r>
-              <a:t>Built-in notification center with an unread badge that informs students whenever their status changes.</a:t>
+              <a:t>Instant in-app alerts notifying students whenever their application review status is updated.</a:t>
             </a:r>
           </a:p>
         </p:txBody>
@@ -5656,7 +6272,7 @@
           </a:fontRef>
         </p:style>
         <p:txBody>
-          <a:bodyPr wrap="square" lIns="228600" tIns="228600" rIns="228600" rtlCol="0" anchor="ctr"/>
+          <a:bodyPr rtlCol="0" anchor="ctr" wrap="square" lIns="228600" rIns="228600" tIns="228600"/>
           <a:lstStyle/>
           <a:p>
             <a:pPr algn="ctr">
@@ -5667,7 +6283,7 @@
               </a:defRPr>
             </a:pPr>
             <a:r>
-              <a:t>🛠️ Admin Control Panel</a:t>
+              <a:t>🛠️ College Placement Admin</a:t>
             </a:r>
           </a:p>
           <a:p>
@@ -5682,7 +6298,7 @@
               </a:defRPr>
             </a:pPr>
             <a:r>
-              <a:t>Dedicated admin panel for staff to post internships, review registered students, and update application results.</a:t>
+              <a:t>Comprehensive administrative control center to audit recruitment drives, manage students, and view analytics.</a:t>
             </a:r>
           </a:p>
         </p:txBody>
@@ -5696,7 +6312,7 @@
 </file>
 
 <file path=ppt/slides/slide6.xml><?xml version="1.0" encoding="utf-8"?>
-<p:sld xmlns:a="http://schemas.openxmlformats.org/drawingml/2006/main" xmlns:r="http://schemas.openxmlformats.org/officeDocument/2006/relationships" xmlns:p="http://schemas.openxmlformats.org/presentationml/2006/main">
+<p:sld xmlns:a="http://schemas.openxmlformats.org/drawingml/2006/main" xmlns:p="http://schemas.openxmlformats.org/presentationml/2006/main" xmlns:r="http://schemas.openxmlformats.org/officeDocument/2006/relationships">
   <p:cSld>
     <p:bg>
       <p:bgPr>
@@ -5730,7 +6346,7 @@
           <a:noFill/>
         </p:spPr>
         <p:txBody>
-          <a:bodyPr wrap="square" lIns="0" tIns="0" rIns="0" bIns="0">
+          <a:bodyPr wrap="square" lIns="0" rIns="0" tIns="0" bIns="0">
             <a:spAutoFit/>
           </a:bodyPr>
           <a:lstStyle/>
@@ -5765,7 +6381,7 @@
           <a:noFill/>
         </p:spPr>
         <p:txBody>
-          <a:bodyPr wrap="square" lIns="0" tIns="0" rIns="0" bIns="0">
+          <a:bodyPr wrap="square" lIns="0" rIns="0" tIns="0" bIns="0">
             <a:spAutoFit/>
           </a:bodyPr>
           <a:lstStyle/>
@@ -5800,7 +6416,7 @@
           <a:noFill/>
         </p:spPr>
         <p:txBody>
-          <a:bodyPr wrap="square" lIns="0" tIns="0" rIns="0" bIns="0">
+          <a:bodyPr wrap="square" lIns="0" rIns="0" tIns="0" bIns="0">
             <a:spAutoFit/>
           </a:bodyPr>
           <a:lstStyle/>
@@ -5813,7 +6429,7 @@
               </a:defRPr>
             </a:pPr>
             <a:r>
-              <a:t>The 3 main functional modules of the InternHub project</a:t>
+              <a:t>Three integrated functional modules designed for Students, Recruiters, and College Placement Admin</a:t>
             </a:r>
           </a:p>
         </p:txBody>
@@ -5869,8 +6485,8 @@
         </p:nvSpPr>
         <p:spPr>
           <a:xfrm>
-            <a:off x="731520" y="1828800"/>
-            <a:ext cx="3474720" cy="4480560"/>
+            <a:off x="731520" y="1783080"/>
+            <a:ext cx="3474720" cy="4526280"/>
           </a:xfrm>
           <a:prstGeom prst="roundRect">
             <a:avLst/>
@@ -5899,78 +6515,108 @@
           </a:fontRef>
         </p:style>
         <p:txBody>
-          <a:bodyPr wrap="square" lIns="256032" tIns="228600" rIns="256032" rtlCol="0" anchor="ctr"/>
+          <a:bodyPr rtlCol="0" anchor="ctr" wrap="square" lIns="219456" rIns="219456" tIns="164592"/>
           <a:lstStyle/>
           <a:p>
             <a:pPr algn="ctr">
-              <a:defRPr sz="1400" b="1">
+              <a:defRPr sz="1300" b="1">
                 <a:solidFill>
                   <a:srgbClr val="1F3C88"/>
                 </a:solidFill>
               </a:defRPr>
             </a:pPr>
             <a:r>
-              <a:t>👤 Module 1: User Management</a:t>
-            </a:r>
-          </a:p>
-          <a:p>
-            <a:pPr>
-              <a:spcBef>
-                <a:spcPts val="1000"/>
-              </a:spcBef>
-              <a:defRPr sz="1050">
+              <a:t>🎓 Module 1: Student Portal</a:t>
+            </a:r>
+          </a:p>
+          <a:p>
+            <a:pPr>
+              <a:spcBef>
+                <a:spcPts val="200"/>
+              </a:spcBef>
+              <a:defRPr sz="900" b="1">
+                <a:solidFill>
+                  <a:srgbClr val="64748B"/>
+                </a:solidFill>
+              </a:defRPr>
+            </a:pPr>
+            <a:r>
+              <a:t>ACTOR: REGISTERED STUDENTS</a:t>
+            </a:r>
+          </a:p>
+          <a:p>
+            <a:pPr>
+              <a:spcBef>
+                <a:spcPts val="500"/>
+              </a:spcBef>
+              <a:defRPr sz="950">
                 <a:solidFill>
                   <a:srgbClr val="1E293B"/>
                 </a:solidFill>
               </a:defRPr>
             </a:pPr>
             <a:r>
-              <a:t>• Student Registration:  Students sign up with username, password, email, phone, and course.</a:t>
-            </a:r>
-          </a:p>
-          <a:p>
-            <a:pPr>
-              <a:spcBef>
-                <a:spcPts val="1000"/>
-              </a:spcBef>
-              <a:defRPr sz="1050">
+              <a:t>• Academic Onboarding:  Students register with KTU Reg No, MCA/B.Tech course branch, contact info, and upload PDF resume.</a:t>
+            </a:r>
+          </a:p>
+          <a:p>
+            <a:pPr>
+              <a:spcBef>
+                <a:spcPts val="500"/>
+              </a:spcBef>
+              <a:defRPr sz="950">
                 <a:solidFill>
                   <a:srgbClr val="1E293B"/>
                 </a:solidFill>
               </a:defRPr>
             </a:pPr>
             <a:r>
-              <a:t>• Secure Authentication:  Login and logout protected by Django's password security.</a:t>
-            </a:r>
-          </a:p>
-          <a:p>
-            <a:pPr>
-              <a:spcBef>
-                <a:spcPts val="1000"/>
-              </a:spcBef>
-              <a:defRPr sz="1050">
+              <a:t>• Job Discovery &amp; Search:  Search vacancies with dynamic multi-filters across technical skills, stipend, location, and deadlines.</a:t>
+            </a:r>
+          </a:p>
+          <a:p>
+            <a:pPr>
+              <a:spcBef>
+                <a:spcPts val="500"/>
+              </a:spcBef>
+              <a:defRPr sz="950">
                 <a:solidFill>
                   <a:srgbClr val="1E293B"/>
                 </a:solidFill>
               </a:defRPr>
             </a:pPr>
             <a:r>
-              <a:t>• Profile Management:  Students can view and update their contact details.</a:t>
-            </a:r>
-          </a:p>
-          <a:p>
-            <a:pPr>
-              <a:spcBef>
-                <a:spcPts val="1000"/>
-              </a:spcBef>
-              <a:defRPr sz="1050">
+              <a:t>• 1-Click Digital Apply:  Submits application in one click, automatically binding verified academic profile and resume.</a:t>
+            </a:r>
+          </a:p>
+          <a:p>
+            <a:pPr>
+              <a:spcBef>
+                <a:spcPts val="500"/>
+              </a:spcBef>
+              <a:defRPr sz="950">
                 <a:solidFill>
                   <a:srgbClr val="1E293B"/>
                 </a:solidFill>
               </a:defRPr>
             </a:pPr>
             <a:r>
-              <a:t>• Personal Dashboard:  Shows live summary cards of application progress.</a:t>
+              <a:t>• Anti-Duplicate Guard:  Enforces database unique constraints to prevent accidental duplicate applications.</a:t>
+            </a:r>
+          </a:p>
+          <a:p>
+            <a:pPr>
+              <a:spcBef>
+                <a:spcPts val="500"/>
+              </a:spcBef>
+              <a:defRPr sz="950">
+                <a:solidFill>
+                  <a:srgbClr val="1E293B"/>
+                </a:solidFill>
+              </a:defRPr>
+            </a:pPr>
+            <a:r>
+              <a:t>• Live Progress Tracking:  Real-time dashboard showing application status (Pending, Under Review, Shortlisted, Selected, Rejected).</a:t>
             </a:r>
           </a:p>
         </p:txBody>
@@ -5983,8 +6629,62 @@
         </p:nvSpPr>
         <p:spPr>
           <a:xfrm>
-            <a:off x="4370832" y="1828800"/>
-            <a:ext cx="3474720" cy="4480560"/>
+            <a:off x="868680" y="5806440"/>
+            <a:ext cx="3200400" cy="384048"/>
+          </a:xfrm>
+          <a:prstGeom prst="roundRect">
+            <a:avLst/>
+          </a:prstGeom>
+          <a:solidFill>
+            <a:srgbClr val="F1F5F9"/>
+          </a:solidFill>
+          <a:ln w="12700">
+            <a:solidFill>
+              <a:srgbClr val="1F3C88"/>
+            </a:solidFill>
+          </a:ln>
+        </p:spPr>
+        <p:style>
+          <a:lnRef idx="1">
+            <a:schemeClr val="accent1"/>
+          </a:lnRef>
+          <a:fillRef idx="3">
+            <a:schemeClr val="accent1"/>
+          </a:fillRef>
+          <a:effectRef idx="2">
+            <a:schemeClr val="accent1"/>
+          </a:effectRef>
+          <a:fontRef idx="minor">
+            <a:schemeClr val="lt1"/>
+          </a:fontRef>
+        </p:style>
+        <p:txBody>
+          <a:bodyPr rtlCol="0" anchor="ctr" wrap="square" lIns="109728" rIns="109728" tIns="54864"/>
+          <a:lstStyle/>
+          <a:p>
+            <a:pPr algn="ctr">
+              <a:defRPr sz="880" b="1">
+                <a:solidFill>
+                  <a:srgbClr val="1F3C88"/>
+                </a:solidFill>
+              </a:defRPr>
+            </a:pPr>
+            <a:r>
+              <a:t>⚡ Outcome: Seamless 1-click apply &amp; full transparency</a:t>
+            </a:r>
+          </a:p>
+        </p:txBody>
+      </p:sp>
+      <p:sp>
+        <p:nvSpPr>
+          <p:cNvPr id="8" name="Rounded Rectangle 7"/>
+          <p:cNvSpPr/>
+          <p:nvPr/>
+        </p:nvSpPr>
+        <p:spPr>
+          <a:xfrm>
+            <a:off x="4370832" y="1783080"/>
+            <a:ext cx="3474720" cy="4526280"/>
           </a:xfrm>
           <a:prstGeom prst="roundRect">
             <a:avLst/>
@@ -6013,92 +6713,176 @@
           </a:fontRef>
         </p:style>
         <p:txBody>
-          <a:bodyPr wrap="square" lIns="256032" tIns="228600" rIns="256032" rtlCol="0" anchor="ctr"/>
+          <a:bodyPr rtlCol="0" anchor="ctr" wrap="square" lIns="219456" rIns="219456" tIns="164592"/>
           <a:lstStyle/>
           <a:p>
             <a:pPr algn="ctr">
-              <a:defRPr sz="1400" b="1">
+              <a:defRPr sz="1300" b="1">
                 <a:solidFill>
                   <a:srgbClr val="2563EB"/>
                 </a:solidFill>
               </a:defRPr>
             </a:pPr>
             <a:r>
-              <a:t>💼 Module 2: Internship Portal</a:t>
-            </a:r>
-          </a:p>
-          <a:p>
-            <a:pPr>
-              <a:spcBef>
-                <a:spcPts val="1000"/>
-              </a:spcBef>
-              <a:defRPr sz="1050">
+              <a:t>🏢 Module 2: Recruiter / Company Portal</a:t>
+            </a:r>
+          </a:p>
+          <a:p>
+            <a:pPr>
+              <a:spcBef>
+                <a:spcPts val="200"/>
+              </a:spcBef>
+              <a:defRPr sz="900" b="1">
+                <a:solidFill>
+                  <a:srgbClr val="64748B"/>
+                </a:solidFill>
+              </a:defRPr>
+            </a:pPr>
+            <a:r>
+              <a:t>ACTOR: CORPORATE RECRUITERS</a:t>
+            </a:r>
+          </a:p>
+          <a:p>
+            <a:pPr>
+              <a:spcBef>
+                <a:spcPts val="500"/>
+              </a:spcBef>
+              <a:defRPr sz="950">
                 <a:solidFill>
                   <a:srgbClr val="1E293B"/>
                 </a:solidFill>
               </a:defRPr>
             </a:pPr>
             <a:r>
-              <a:t>• Job Listings:  Displays company name, role, stipend, location, duration, and deadline.</a:t>
-            </a:r>
-          </a:p>
-          <a:p>
-            <a:pPr>
-              <a:spcBef>
-                <a:spcPts val="1000"/>
-              </a:spcBef>
-              <a:defRPr sz="1050">
+              <a:t>• Company Registration:  Corporate sign-up with company name, recruiter credentials, industry, website, and office address.</a:t>
+            </a:r>
+          </a:p>
+          <a:p>
+            <a:pPr>
+              <a:spcBef>
+                <a:spcPts val="500"/>
+              </a:spcBef>
+              <a:defRPr sz="950">
                 <a:solidFill>
                   <a:srgbClr val="1E293B"/>
                 </a:solidFill>
               </a:defRPr>
             </a:pPr>
             <a:r>
-              <a:t>• Keyword Search:  Search across job titles, company names, cities, and required skills.</a:t>
-            </a:r>
-          </a:p>
-          <a:p>
-            <a:pPr>
-              <a:spcBef>
-                <a:spcPts val="1000"/>
-              </a:spcBef>
-              <a:defRPr sz="1050">
+              <a:t>• Internship Publishing:  Recruiters post job drives with roles, stipend, duration, required skill tags, and deadline dates.</a:t>
+            </a:r>
+          </a:p>
+          <a:p>
+            <a:pPr>
+              <a:spcBef>
+                <a:spcPts val="500"/>
+              </a:spcBef>
+              <a:defRPr sz="950">
                 <a:solidFill>
                   <a:srgbClr val="1E293B"/>
                 </a:solidFill>
               </a:defRPr>
             </a:pPr>
             <a:r>
-              <a:t>• Details Page:  Full job description and requirements with an 'Apply' button.</a:t>
-            </a:r>
-          </a:p>
-          <a:p>
-            <a:pPr>
-              <a:spcBef>
-                <a:spcPts val="1000"/>
-              </a:spcBef>
-              <a:defRPr sz="1050">
+              <a:t>• Applicant Screening:  Inspect candidate roster, review academic credentials, and download student PDF resumes.</a:t>
+            </a:r>
+          </a:p>
+          <a:p>
+            <a:pPr>
+              <a:spcBef>
+                <a:spcPts val="500"/>
+              </a:spcBef>
+              <a:defRPr sz="950">
                 <a:solidFill>
                   <a:srgbClr val="1E293B"/>
                 </a:solidFill>
               </a:defRPr>
             </a:pPr>
             <a:r>
-              <a:t>• Chronological Order:  Newest internships always appear at the top.</a:t>
-            </a:r>
-          </a:p>
-        </p:txBody>
-      </p:sp>
-      <p:sp>
-        <p:nvSpPr>
-          <p:cNvPr id="8" name="Rounded Rectangle 7"/>
+              <a:t>• Status Transition Engine:  Move applicants through evaluation states (Under Review ➔ Shortlisted ➔ Selected / Rejected).</a:t>
+            </a:r>
+          </a:p>
+          <a:p>
+            <a:pPr>
+              <a:spcBef>
+                <a:spcPts val="500"/>
+              </a:spcBef>
+              <a:defRPr sz="950">
+                <a:solidFill>
+                  <a:srgbClr val="1E293B"/>
+                </a:solidFill>
+              </a:defRPr>
+            </a:pPr>
+            <a:r>
+              <a:t>• Recruiter Analytics:  Monitor applicant counts, track drive performance, and manage active internship postings.</a:t>
+            </a:r>
+          </a:p>
+        </p:txBody>
+      </p:sp>
+      <p:sp>
+        <p:nvSpPr>
+          <p:cNvPr id="9" name="Rounded Rectangle 8"/>
           <p:cNvSpPr/>
           <p:nvPr/>
         </p:nvSpPr>
         <p:spPr>
           <a:xfrm>
-            <a:off x="8010144" y="1828800"/>
-            <a:ext cx="3474720" cy="4480560"/>
+            <a:off x="4507992" y="5806440"/>
+            <a:ext cx="3200400" cy="384048"/>
+          </a:xfrm>
+          <a:prstGeom prst="roundRect">
+            <a:avLst/>
+          </a:prstGeom>
+          <a:solidFill>
+            <a:srgbClr val="F1F5F9"/>
+          </a:solidFill>
+          <a:ln w="12700">
+            <a:solidFill>
+              <a:srgbClr val="2563EB"/>
+            </a:solidFill>
+          </a:ln>
+        </p:spPr>
+        <p:style>
+          <a:lnRef idx="1">
+            <a:schemeClr val="accent1"/>
+          </a:lnRef>
+          <a:fillRef idx="3">
+            <a:schemeClr val="accent1"/>
+          </a:fillRef>
+          <a:effectRef idx="2">
+            <a:schemeClr val="accent1"/>
+          </a:effectRef>
+          <a:fontRef idx="minor">
+            <a:schemeClr val="lt1"/>
+          </a:fontRef>
+        </p:style>
+        <p:txBody>
+          <a:bodyPr rtlCol="0" anchor="ctr" wrap="square" lIns="109728" rIns="109728" tIns="54864"/>
+          <a:lstStyle/>
+          <a:p>
+            <a:pPr algn="ctr">
+              <a:defRPr sz="880" b="1">
+                <a:solidFill>
+                  <a:srgbClr val="2563EB"/>
+                </a:solidFill>
+              </a:defRPr>
+            </a:pPr>
+            <a:r>
+              <a:t>⚡ Outcome: Accelerated candidate review &amp; hiring</a:t>
+            </a:r>
+          </a:p>
+        </p:txBody>
+      </p:sp>
+      <p:sp>
+        <p:nvSpPr>
+          <p:cNvPr id="10" name="Rounded Rectangle 9"/>
+          <p:cNvSpPr/>
+          <p:nvPr/>
+        </p:nvSpPr>
+        <p:spPr>
+          <a:xfrm>
+            <a:off x="8010144" y="1783080"/>
+            <a:ext cx="3474720" cy="4526280"/>
           </a:xfrm>
           <a:prstGeom prst="roundRect">
             <a:avLst/>
@@ -6127,78 +6911,162 @@
           </a:fontRef>
         </p:style>
         <p:txBody>
-          <a:bodyPr wrap="square" lIns="256032" tIns="228600" rIns="256032" rtlCol="0" anchor="ctr"/>
+          <a:bodyPr rtlCol="0" anchor="ctr" wrap="square" lIns="219456" rIns="219456" tIns="164592"/>
           <a:lstStyle/>
           <a:p>
             <a:pPr algn="ctr">
-              <a:defRPr sz="1400" b="1">
+              <a:defRPr sz="1300" b="1">
                 <a:solidFill>
                   <a:srgbClr val="10955A"/>
                 </a:solidFill>
               </a:defRPr>
             </a:pPr>
             <a:r>
-              <a:t>📋 Module 3: Application &amp; Alerts</a:t>
-            </a:r>
-          </a:p>
-          <a:p>
-            <a:pPr>
-              <a:spcBef>
-                <a:spcPts val="1000"/>
-              </a:spcBef>
-              <a:defRPr sz="1050">
+              <a:t>🛡️ Module 3: Placement Admin &amp; Governance</a:t>
+            </a:r>
+          </a:p>
+          <a:p>
+            <a:pPr>
+              <a:spcBef>
+                <a:spcPts val="200"/>
+              </a:spcBef>
+              <a:defRPr sz="900" b="1">
+                <a:solidFill>
+                  <a:srgbClr val="64748B"/>
+                </a:solidFill>
+              </a:defRPr>
+            </a:pPr>
+            <a:r>
+              <a:t>ACTOR: COLLEGE PLACEMENT CELL</a:t>
+            </a:r>
+          </a:p>
+          <a:p>
+            <a:pPr>
+              <a:spcBef>
+                <a:spcPts val="500"/>
+              </a:spcBef>
+              <a:defRPr sz="950">
                 <a:solidFill>
                   <a:srgbClr val="1E293B"/>
                 </a:solidFill>
               </a:defRPr>
             </a:pPr>
             <a:r>
-              <a:t>• 1-Click Apply:  Links the student profile to the selected internship.</a:t>
-            </a:r>
-          </a:p>
-          <a:p>
-            <a:pPr>
-              <a:spcBef>
-                <a:spcPts val="1000"/>
-              </a:spcBef>
-              <a:defRPr sz="1050">
+              <a:t>• Student Verification:  Validate student registration numbers and course details against college institutional records.</a:t>
+            </a:r>
+          </a:p>
+          <a:p>
+            <a:pPr>
+              <a:spcBef>
+                <a:spcPts val="500"/>
+              </a:spcBef>
+              <a:defRPr sz="950">
                 <a:solidFill>
                   <a:srgbClr val="1E293B"/>
                 </a:solidFill>
               </a:defRPr>
             </a:pPr>
             <a:r>
-              <a:t>• Anti-Duplicate Rule:  Prevents student from submitting twice to the same opening.</a:t>
-            </a:r>
-          </a:p>
-          <a:p>
-            <a:pPr>
-              <a:spcBef>
-                <a:spcPts val="1000"/>
-              </a:spcBef>
-              <a:defRPr sz="1050">
+              <a:t>• Corporate Oversight:  Moderate registered company profiles and audit postings to ensure legitimate campus opportunities.</a:t>
+            </a:r>
+          </a:p>
+          <a:p>
+            <a:pPr>
+              <a:spcBef>
+                <a:spcPts val="500"/>
+              </a:spcBef>
+              <a:defRPr sz="950">
                 <a:solidFill>
                   <a:srgbClr val="1E293B"/>
                 </a:solidFill>
               </a:defRPr>
             </a:pPr>
             <a:r>
-              <a:t>• Status Tracking:  Shows statuses: Pending, Under Review, Shortlisted, Selected, Rejected.</a:t>
-            </a:r>
-          </a:p>
-          <a:p>
-            <a:pPr>
-              <a:spcBef>
-                <a:spcPts val="1000"/>
-              </a:spcBef>
-              <a:defRPr sz="1050">
+              <a:t>• Application Auditing:  Centralized oversight over all campus recruitment drives, department stats, and placement history.</a:t>
+            </a:r>
+          </a:p>
+          <a:p>
+            <a:pPr>
+              <a:spcBef>
+                <a:spcPts val="500"/>
+              </a:spcBef>
+              <a:defRPr sz="950">
                 <a:solidFill>
                   <a:srgbClr val="1E293B"/>
                 </a:solidFill>
               </a:defRPr>
             </a:pPr>
             <a:r>
-              <a:t>• In-App Notifications:  Informs students as soon as coordinator updates their status.</a:t>
+              <a:t>• Notification Dispatch:  System-wide trigger engine that automatically dispatches in-app alerts upon status changes.</a:t>
+            </a:r>
+          </a:p>
+          <a:p>
+            <a:pPr>
+              <a:spcBef>
+                <a:spcPts val="500"/>
+              </a:spcBef>
+              <a:defRPr sz="950">
+                <a:solidFill>
+                  <a:srgbClr val="1E293B"/>
+                </a:solidFill>
+              </a:defRPr>
+            </a:pPr>
+            <a:r>
+              <a:t>• Access Control &amp; Security:  Django Admin panel with role-based access, session security, and MySQL database integrity.</a:t>
+            </a:r>
+          </a:p>
+        </p:txBody>
+      </p:sp>
+      <p:sp>
+        <p:nvSpPr>
+          <p:cNvPr id="11" name="Rounded Rectangle 10"/>
+          <p:cNvSpPr/>
+          <p:nvPr/>
+        </p:nvSpPr>
+        <p:spPr>
+          <a:xfrm>
+            <a:off x="8147304" y="5806440"/>
+            <a:ext cx="3200400" cy="384048"/>
+          </a:xfrm>
+          <a:prstGeom prst="roundRect">
+            <a:avLst/>
+          </a:prstGeom>
+          <a:solidFill>
+            <a:srgbClr val="F1F5F9"/>
+          </a:solidFill>
+          <a:ln w="12700">
+            <a:solidFill>
+              <a:srgbClr val="10955A"/>
+            </a:solidFill>
+          </a:ln>
+        </p:spPr>
+        <p:style>
+          <a:lnRef idx="1">
+            <a:schemeClr val="accent1"/>
+          </a:lnRef>
+          <a:fillRef idx="3">
+            <a:schemeClr val="accent1"/>
+          </a:fillRef>
+          <a:effectRef idx="2">
+            <a:schemeClr val="accent1"/>
+          </a:effectRef>
+          <a:fontRef idx="minor">
+            <a:schemeClr val="lt1"/>
+          </a:fontRef>
+        </p:style>
+        <p:txBody>
+          <a:bodyPr rtlCol="0" anchor="ctr" wrap="square" lIns="109728" rIns="109728" tIns="54864"/>
+          <a:lstStyle/>
+          <a:p>
+            <a:pPr algn="ctr">
+              <a:defRPr sz="880" b="1">
+                <a:solidFill>
+                  <a:srgbClr val="10955A"/>
+                </a:solidFill>
+              </a:defRPr>
+            </a:pPr>
+            <a:r>
+              <a:t>⚡ Outcome: 100% Campus placement governance &amp; security</a:t>
             </a:r>
           </a:p>
         </p:txBody>
@@ -6212,7 +7080,7 @@
 </file>
 
 <file path=ppt/slides/slide7.xml><?xml version="1.0" encoding="utf-8"?>
-<p:sld xmlns:a="http://schemas.openxmlformats.org/drawingml/2006/main" xmlns:r="http://schemas.openxmlformats.org/officeDocument/2006/relationships" xmlns:p="http://schemas.openxmlformats.org/presentationml/2006/main">
+<p:sld xmlns:a="http://schemas.openxmlformats.org/drawingml/2006/main" xmlns:p="http://schemas.openxmlformats.org/presentationml/2006/main" xmlns:r="http://schemas.openxmlformats.org/officeDocument/2006/relationships">
   <p:cSld>
     <p:bg>
       <p:bgPr>
@@ -6246,7 +7114,7 @@
           <a:noFill/>
         </p:spPr>
         <p:txBody>
-          <a:bodyPr wrap="square" lIns="0" tIns="0" rIns="0" bIns="0">
+          <a:bodyPr wrap="square" lIns="0" rIns="0" tIns="0" bIns="0">
             <a:spAutoFit/>
           </a:bodyPr>
           <a:lstStyle/>
@@ -6259,7 +7127,7 @@
               </a:defRPr>
             </a:pPr>
             <a:r>
-              <a:t>SLIDE 7 • DATABASE</a:t>
+              <a:t>SLIDE 7 • SYSTEM WORKFLOW</a:t>
             </a:r>
           </a:p>
         </p:txBody>
@@ -6281,7 +7149,7 @@
           <a:noFill/>
         </p:spPr>
         <p:txBody>
-          <a:bodyPr wrap="square" lIns="0" tIns="0" rIns="0" bIns="0">
+          <a:bodyPr wrap="square" lIns="0" rIns="0" tIns="0" bIns="0">
             <a:spAutoFit/>
           </a:bodyPr>
           <a:lstStyle/>
@@ -6294,7 +7162,7 @@
               </a:defRPr>
             </a:pPr>
             <a:r>
-              <a:t>Database Tables</a:t>
+              <a:t>Project Workflow</a:t>
             </a:r>
           </a:p>
         </p:txBody>
@@ -6316,7 +7184,7 @@
           <a:noFill/>
         </p:spPr>
         <p:txBody>
-          <a:bodyPr wrap="square" lIns="0" tIns="0" rIns="0" bIns="0">
+          <a:bodyPr wrap="square" lIns="0" rIns="0" tIns="0" bIns="0">
             <a:spAutoFit/>
           </a:bodyPr>
           <a:lstStyle/>
@@ -6329,7 +7197,7 @@
               </a:defRPr>
             </a:pPr>
             <a:r>
-              <a:t>The 4 core tables used to store and manage project data</a:t>
+              <a:t>End-to-end operational lifecycle connecting Students, Recruiters, and College Placement Admin</a:t>
             </a:r>
           </a:p>
         </p:txBody>
@@ -6385,8 +7253,8 @@
         </p:nvSpPr>
         <p:spPr>
           <a:xfrm>
-            <a:off x="731520" y="1828800"/>
-            <a:ext cx="5285232" cy="2148840"/>
+            <a:off x="731520" y="1783080"/>
+            <a:ext cx="2542032" cy="3246120"/>
           </a:xfrm>
           <a:prstGeom prst="roundRect">
             <a:avLst/>
@@ -6415,92 +7283,127 @@
           </a:fontRef>
         </p:style>
         <p:txBody>
-          <a:bodyPr wrap="square" lIns="228600" tIns="182880" rIns="228600" rtlCol="0" anchor="ctr"/>
+          <a:bodyPr rtlCol="0" anchor="ctr" wrap="square" lIns="182880" rIns="182880" tIns="164592"/>
           <a:lstStyle/>
           <a:p>
             <a:pPr algn="ctr">
-              <a:defRPr sz="1300" b="1">
+              <a:defRPr sz="1050" b="1">
                 <a:solidFill>
                   <a:srgbClr val="1F3C88"/>
                 </a:solidFill>
               </a:defRPr>
             </a:pPr>
             <a:r>
-              <a:t>1. Student Table (user_management_student)</a:t>
-            </a:r>
-          </a:p>
-          <a:p>
-            <a:pPr>
-              <a:spcBef>
-                <a:spcPts val="400"/>
-              </a:spcBef>
-              <a:defRPr sz="1050">
+              <a:t>PHASE 01 • REGISTRATION &amp; SETUP</a:t>
+            </a:r>
+          </a:p>
+          <a:p>
+            <a:pPr>
+              <a:spcBef>
+                <a:spcPts val="200"/>
+              </a:spcBef>
+              <a:defRPr sz="950" b="1">
+                <a:solidFill>
+                  <a:srgbClr val="64748B"/>
+                </a:solidFill>
+              </a:defRPr>
+            </a:pPr>
+            <a:r>
+              <a:t>👤 Student &amp; Recruiter</a:t>
+            </a:r>
+          </a:p>
+          <a:p>
+            <a:pPr>
+              <a:spcBef>
+                <a:spcPts val="600"/>
+              </a:spcBef>
+              <a:defRPr sz="950">
                 <a:solidFill>
                   <a:srgbClr val="1E293B"/>
                 </a:solidFill>
               </a:defRPr>
             </a:pPr>
             <a:r>
-              <a:t>• id: Unique student ID (Primary Key)</a:t>
-            </a:r>
-          </a:p>
-          <a:p>
-            <a:pPr>
-              <a:spcBef>
-                <a:spcPts val="400"/>
-              </a:spcBef>
-              <a:defRPr sz="1050">
+              <a:t>• Student Onboarding:  Students register with KTU Reg No, MCA/B.Tech course, contact details &amp; PDF resume upload.</a:t>
+            </a:r>
+          </a:p>
+          <a:p>
+            <a:pPr>
+              <a:spcBef>
+                <a:spcPts val="600"/>
+              </a:spcBef>
+              <a:defRPr sz="950">
                 <a:solidFill>
                   <a:srgbClr val="1E293B"/>
                 </a:solidFill>
               </a:defRPr>
             </a:pPr>
             <a:r>
-              <a:t>• user_id: Links to Django Auth User login</a:t>
-            </a:r>
-          </a:p>
-          <a:p>
-            <a:pPr>
-              <a:spcBef>
-                <a:spcPts val="400"/>
-              </a:spcBef>
-              <a:defRPr sz="1050">
+              <a:t>• Company Account:  Recruiter registers corporate profile with website, contact person &amp; company description.</a:t>
+            </a:r>
+          </a:p>
+          <a:p>
+            <a:pPr>
+              <a:spcBef>
+                <a:spcPts val="600"/>
+              </a:spcBef>
+              <a:defRPr sz="950">
                 <a:solidFill>
                   <a:srgbClr val="1E293B"/>
                 </a:solidFill>
               </a:defRPr>
             </a:pPr>
             <a:r>
-              <a:t>• name, email, phone: Contact details of the student</a:t>
-            </a:r>
-          </a:p>
-          <a:p>
-            <a:pPr>
-              <a:spcBef>
-                <a:spcPts val="400"/>
-              </a:spcBef>
-              <a:defRPr sz="1050">
-                <a:solidFill>
-                  <a:srgbClr val="1E293B"/>
-                </a:solidFill>
-              </a:defRPr>
-            </a:pPr>
-            <a:r>
-              <a:t>• course: Enrolled course (e.g., MCA, B.Tech)</a:t>
-            </a:r>
-          </a:p>
-        </p:txBody>
-      </p:sp>
-      <p:sp>
-        <p:nvSpPr>
-          <p:cNvPr id="7" name="Rounded Rectangle 6"/>
+              <a:t>• Account Verification:  Django authentication validates accounts for secure role-based dashboard access.</a:t>
+            </a:r>
+          </a:p>
+        </p:txBody>
+      </p:sp>
+      <p:sp>
+        <p:nvSpPr>
+          <p:cNvPr id="7" name="TextBox 6"/>
+          <p:cNvSpPr txBox="1"/>
+          <p:nvPr/>
+        </p:nvSpPr>
+        <p:spPr>
+          <a:xfrm>
+            <a:off x="3273552" y="3108960"/>
+            <a:ext cx="182880" cy="365760"/>
+          </a:xfrm>
+          <a:prstGeom prst="rect">
+            <a:avLst/>
+          </a:prstGeom>
+          <a:noFill/>
+        </p:spPr>
+        <p:txBody>
+          <a:bodyPr wrap="none" lIns="0" rIns="0" tIns="0" bIns="0">
+            <a:spAutoFit/>
+          </a:bodyPr>
+          <a:lstStyle/>
+          <a:p>
+            <a:pPr algn="ctr">
+              <a:defRPr sz="1400" b="1">
+                <a:solidFill>
+                  <a:srgbClr val="2563EB"/>
+                </a:solidFill>
+              </a:defRPr>
+            </a:pPr>
+            <a:r>
+              <a:t>➔</a:t>
+            </a:r>
+          </a:p>
+        </p:txBody>
+      </p:sp>
+      <p:sp>
+        <p:nvSpPr>
+          <p:cNvPr id="8" name="Rounded Rectangle 7"/>
           <p:cNvSpPr/>
           <p:nvPr/>
         </p:nvSpPr>
         <p:spPr>
           <a:xfrm>
-            <a:off x="6172200" y="1828800"/>
-            <a:ext cx="5285232" cy="2148840"/>
+            <a:off x="3456432" y="1783080"/>
+            <a:ext cx="2542032" cy="3246120"/>
           </a:xfrm>
           <a:prstGeom prst="roundRect">
             <a:avLst/>
@@ -6529,92 +7432,127 @@
           </a:fontRef>
         </p:style>
         <p:txBody>
-          <a:bodyPr wrap="square" lIns="228600" tIns="182880" rIns="228600" rtlCol="0" anchor="ctr"/>
+          <a:bodyPr rtlCol="0" anchor="ctr" wrap="square" lIns="182880" rIns="182880" tIns="164592"/>
           <a:lstStyle/>
           <a:p>
             <a:pPr algn="ctr">
-              <a:defRPr sz="1300" b="1">
+              <a:defRPr sz="1050" b="1">
                 <a:solidFill>
                   <a:srgbClr val="2563EB"/>
                 </a:solidFill>
               </a:defRPr>
             </a:pPr>
             <a:r>
-              <a:t>2. Internship Table (internships_internship)</a:t>
-            </a:r>
-          </a:p>
-          <a:p>
-            <a:pPr>
-              <a:spcBef>
-                <a:spcPts val="400"/>
-              </a:spcBef>
-              <a:defRPr sz="1050">
+              <a:t>PHASE 02 • VACANCY POSTING</a:t>
+            </a:r>
+          </a:p>
+          <a:p>
+            <a:pPr>
+              <a:spcBef>
+                <a:spcPts val="200"/>
+              </a:spcBef>
+              <a:defRPr sz="950" b="1">
+                <a:solidFill>
+                  <a:srgbClr val="64748B"/>
+                </a:solidFill>
+              </a:defRPr>
+            </a:pPr>
+            <a:r>
+              <a:t>🏢 Recruiter &amp; Placement</a:t>
+            </a:r>
+          </a:p>
+          <a:p>
+            <a:pPr>
+              <a:spcBef>
+                <a:spcPts val="600"/>
+              </a:spcBef>
+              <a:defRPr sz="950">
                 <a:solidFill>
                   <a:srgbClr val="1E293B"/>
                 </a:solidFill>
               </a:defRPr>
             </a:pPr>
             <a:r>
-              <a:t>• id: Unique internship ID (Primary Key)</a:t>
-            </a:r>
-          </a:p>
-          <a:p>
-            <a:pPr>
-              <a:spcBef>
-                <a:spcPts val="400"/>
-              </a:spcBef>
-              <a:defRPr sz="1050">
+              <a:t>• Drive Creation:  Recruiter posts role details, monthly stipend, duration, location &amp; required skill tags.</a:t>
+            </a:r>
+          </a:p>
+          <a:p>
+            <a:pPr>
+              <a:spcBef>
+                <a:spcPts val="600"/>
+              </a:spcBef>
+              <a:defRPr sz="950">
                 <a:solidFill>
                   <a:srgbClr val="1E293B"/>
                 </a:solidFill>
               </a:defRPr>
             </a:pPr>
             <a:r>
-              <a:t>• title &amp; company_name: Job role and hiring company</a:t>
-            </a:r>
-          </a:p>
-          <a:p>
-            <a:pPr>
-              <a:spcBef>
-                <a:spcPts val="400"/>
-              </a:spcBef>
-              <a:defRPr sz="1050">
+              <a:t>• Deadline Scheduling:  Strict application deadline set to organize candidate intake systematically.</a:t>
+            </a:r>
+          </a:p>
+          <a:p>
+            <a:pPr>
+              <a:spcBef>
+                <a:spcPts val="600"/>
+              </a:spcBef>
+              <a:defRPr sz="950">
                 <a:solidFill>
                   <a:srgbClr val="1E293B"/>
                 </a:solidFill>
               </a:defRPr>
             </a:pPr>
             <a:r>
-              <a:t>• location, duration, stipend: Work terms &amp; pay</a:t>
-            </a:r>
-          </a:p>
-          <a:p>
-            <a:pPr>
-              <a:spcBef>
-                <a:spcPts val="400"/>
-              </a:spcBef>
-              <a:defRPr sz="1050">
-                <a:solidFill>
-                  <a:srgbClr val="1E293B"/>
-                </a:solidFill>
-              </a:defRPr>
-            </a:pPr>
-            <a:r>
-              <a:t>• skills_required &amp; deadline: Skill requirements &amp; last date</a:t>
-            </a:r>
-          </a:p>
-        </p:txBody>
-      </p:sp>
-      <p:sp>
-        <p:nvSpPr>
-          <p:cNvPr id="8" name="Rounded Rectangle 7"/>
+              <a:t>• Portal Publishing:  Vacancies are validated and broadcast across the college student network.</a:t>
+            </a:r>
+          </a:p>
+        </p:txBody>
+      </p:sp>
+      <p:sp>
+        <p:nvSpPr>
+          <p:cNvPr id="9" name="TextBox 8"/>
+          <p:cNvSpPr txBox="1"/>
+          <p:nvPr/>
+        </p:nvSpPr>
+        <p:spPr>
+          <a:xfrm>
+            <a:off x="5998464" y="3108960"/>
+            <a:ext cx="182880" cy="365760"/>
+          </a:xfrm>
+          <a:prstGeom prst="rect">
+            <a:avLst/>
+          </a:prstGeom>
+          <a:noFill/>
+        </p:spPr>
+        <p:txBody>
+          <a:bodyPr wrap="none" lIns="0" rIns="0" tIns="0" bIns="0">
+            <a:spAutoFit/>
+          </a:bodyPr>
+          <a:lstStyle/>
+          <a:p>
+            <a:pPr algn="ctr">
+              <a:defRPr sz="1400" b="1">
+                <a:solidFill>
+                  <a:srgbClr val="2563EB"/>
+                </a:solidFill>
+              </a:defRPr>
+            </a:pPr>
+            <a:r>
+              <a:t>➔</a:t>
+            </a:r>
+          </a:p>
+        </p:txBody>
+      </p:sp>
+      <p:sp>
+        <p:nvSpPr>
+          <p:cNvPr id="10" name="Rounded Rectangle 9"/>
           <p:cNvSpPr/>
           <p:nvPr/>
         </p:nvSpPr>
         <p:spPr>
           <a:xfrm>
-            <a:off x="731520" y="4114800"/>
-            <a:ext cx="5285232" cy="2148840"/>
+            <a:off x="6181344" y="1783080"/>
+            <a:ext cx="2542032" cy="3246120"/>
           </a:xfrm>
           <a:prstGeom prst="roundRect">
             <a:avLst/>
@@ -6643,107 +7581,127 @@
           </a:fontRef>
         </p:style>
         <p:txBody>
-          <a:bodyPr wrap="square" lIns="228600" tIns="182880" rIns="228600" rtlCol="0" anchor="ctr"/>
+          <a:bodyPr rtlCol="0" anchor="ctr" wrap="square" lIns="182880" rIns="182880" tIns="164592"/>
           <a:lstStyle/>
           <a:p>
             <a:pPr algn="ctr">
-              <a:defRPr sz="1300" b="1">
+              <a:defRPr sz="1050" b="1">
                 <a:solidFill>
                   <a:srgbClr val="10955A"/>
                 </a:solidFill>
               </a:defRPr>
             </a:pPr>
             <a:r>
-              <a:t>3. Application Table (internships_application)</a:t>
-            </a:r>
-          </a:p>
-          <a:p>
-            <a:pPr>
-              <a:spcBef>
-                <a:spcPts val="400"/>
-              </a:spcBef>
-              <a:defRPr sz="1050">
+              <a:t>PHASE 03 • 1-CLICK APPLICATION</a:t>
+            </a:r>
+          </a:p>
+          <a:p>
+            <a:pPr>
+              <a:spcBef>
+                <a:spcPts val="200"/>
+              </a:spcBef>
+              <a:defRPr sz="950" b="1">
+                <a:solidFill>
+                  <a:srgbClr val="64748B"/>
+                </a:solidFill>
+              </a:defRPr>
+            </a:pPr>
+            <a:r>
+              <a:t>🎓 College Student</a:t>
+            </a:r>
+          </a:p>
+          <a:p>
+            <a:pPr>
+              <a:spcBef>
+                <a:spcPts val="600"/>
+              </a:spcBef>
+              <a:defRPr sz="950">
                 <a:solidFill>
                   <a:srgbClr val="1E293B"/>
                 </a:solidFill>
               </a:defRPr>
             </a:pPr>
             <a:r>
-              <a:t>• id: Unique application ID (Primary Key)</a:t>
-            </a:r>
-          </a:p>
-          <a:p>
-            <a:pPr>
-              <a:spcBef>
-                <a:spcPts val="400"/>
-              </a:spcBef>
-              <a:defRPr sz="1050">
+              <a:t>• Skill-Based Search:  Students filter opportunities by programming skills, stipend, and deadlines.</a:t>
+            </a:r>
+          </a:p>
+          <a:p>
+            <a:pPr>
+              <a:spcBef>
+                <a:spcPts val="600"/>
+              </a:spcBef>
+              <a:defRPr sz="950">
                 <a:solidFill>
                   <a:srgbClr val="1E293B"/>
                 </a:solidFill>
               </a:defRPr>
             </a:pPr>
             <a:r>
-              <a:t>• student_id &amp; internship_id: Foreign Keys connecting student to job</a:t>
-            </a:r>
-          </a:p>
-          <a:p>
-            <a:pPr>
-              <a:spcBef>
-                <a:spcPts val="400"/>
-              </a:spcBef>
-              <a:defRPr sz="1050">
+              <a:t>• 1-Click Digital Apply:  Submits application instantly linking student profile &amp; uploaded PDF resume.</a:t>
+            </a:r>
+          </a:p>
+          <a:p>
+            <a:pPr>
+              <a:spcBef>
+                <a:spcPts val="600"/>
+              </a:spcBef>
+              <a:defRPr sz="950">
                 <a:solidFill>
                   <a:srgbClr val="1E293B"/>
                 </a:solidFill>
               </a:defRPr>
             </a:pPr>
             <a:r>
-              <a:t>• applied_at: Date and time of application</a:t>
-            </a:r>
-          </a:p>
-          <a:p>
-            <a:pPr>
-              <a:spcBef>
-                <a:spcPts val="400"/>
-              </a:spcBef>
-              <a:defRPr sz="1050">
-                <a:solidFill>
-                  <a:srgbClr val="1E293B"/>
-                </a:solidFill>
-              </a:defRPr>
-            </a:pPr>
-            <a:r>
-              <a:t>• status: Pending, Shortlisted, Selected, or Rejected</a:t>
-            </a:r>
-          </a:p>
-          <a:p>
-            <a:pPr>
-              <a:spcBef>
-                <a:spcPts val="400"/>
-              </a:spcBef>
-              <a:defRPr sz="1050">
-                <a:solidFill>
-                  <a:srgbClr val="1E293B"/>
-                </a:solidFill>
-              </a:defRPr>
-            </a:pPr>
-            <a:r>
-              <a:t>• * Unique Rule: A student cannot apply twice for the same job</a:t>
-            </a:r>
-          </a:p>
-        </p:txBody>
-      </p:sp>
-      <p:sp>
-        <p:nvSpPr>
-          <p:cNvPr id="9" name="Rounded Rectangle 8"/>
+              <a:t>• Anti-Duplicate Rule:  Database uniquely prevents multiple applications to the same opportunity.</a:t>
+            </a:r>
+          </a:p>
+        </p:txBody>
+      </p:sp>
+      <p:sp>
+        <p:nvSpPr>
+          <p:cNvPr id="11" name="TextBox 10"/>
+          <p:cNvSpPr txBox="1"/>
+          <p:nvPr/>
+        </p:nvSpPr>
+        <p:spPr>
+          <a:xfrm>
+            <a:off x="8723376" y="3108960"/>
+            <a:ext cx="182880" cy="365760"/>
+          </a:xfrm>
+          <a:prstGeom prst="rect">
+            <a:avLst/>
+          </a:prstGeom>
+          <a:noFill/>
+        </p:spPr>
+        <p:txBody>
+          <a:bodyPr wrap="none" lIns="0" rIns="0" tIns="0" bIns="0">
+            <a:spAutoFit/>
+          </a:bodyPr>
+          <a:lstStyle/>
+          <a:p>
+            <a:pPr algn="ctr">
+              <a:defRPr sz="1400" b="1">
+                <a:solidFill>
+                  <a:srgbClr val="2563EB"/>
+                </a:solidFill>
+              </a:defRPr>
+            </a:pPr>
+            <a:r>
+              <a:t>➔</a:t>
+            </a:r>
+          </a:p>
+        </p:txBody>
+      </p:sp>
+      <p:sp>
+        <p:nvSpPr>
+          <p:cNvPr id="12" name="Rounded Rectangle 11"/>
           <p:cNvSpPr/>
           <p:nvPr/>
         </p:nvSpPr>
         <p:spPr>
           <a:xfrm>
-            <a:off x="6172200" y="4114800"/>
-            <a:ext cx="5285232" cy="2148840"/>
+            <a:off x="8906256" y="1783080"/>
+            <a:ext cx="2542032" cy="3246120"/>
           </a:xfrm>
           <a:prstGeom prst="roundRect">
             <a:avLst/>
@@ -6772,78 +7730,408 @@
           </a:fontRef>
         </p:style>
         <p:txBody>
-          <a:bodyPr wrap="square" lIns="228600" tIns="182880" rIns="228600" rtlCol="0" anchor="ctr"/>
+          <a:bodyPr rtlCol="0" anchor="ctr" wrap="square" lIns="182880" rIns="182880" tIns="164592"/>
           <a:lstStyle/>
           <a:p>
             <a:pPr algn="ctr">
-              <a:defRPr sz="1300" b="1">
+              <a:defRPr sz="1050" b="1">
+                <a:solidFill>
+                  <a:srgbClr val="7C3AED"/>
+                </a:solidFill>
+              </a:defRPr>
+            </a:pPr>
+            <a:r>
+              <a:t>PHASE 04 • SCREENING &amp; ALERTS</a:t>
+            </a:r>
+          </a:p>
+          <a:p>
+            <a:pPr>
+              <a:spcBef>
+                <a:spcPts val="200"/>
+              </a:spcBef>
+              <a:defRPr sz="950" b="1">
+                <a:solidFill>
+                  <a:srgbClr val="64748B"/>
+                </a:solidFill>
+              </a:defRPr>
+            </a:pPr>
+            <a:r>
+              <a:t>💼 Recruiter ➔ Student</a:t>
+            </a:r>
+          </a:p>
+          <a:p>
+            <a:pPr>
+              <a:spcBef>
+                <a:spcPts val="600"/>
+              </a:spcBef>
+              <a:defRPr sz="950">
+                <a:solidFill>
+                  <a:srgbClr val="1E293B"/>
+                </a:solidFill>
+              </a:defRPr>
+            </a:pPr>
+            <a:r>
+              <a:t>• Resume Evaluation:  Recruiter views applicant roster, reviews qualifications, and downloads resumes.</a:t>
+            </a:r>
+          </a:p>
+          <a:p>
+            <a:pPr>
+              <a:spcBef>
+                <a:spcPts val="600"/>
+              </a:spcBef>
+              <a:defRPr sz="950">
+                <a:solidFill>
+                  <a:srgbClr val="1E293B"/>
+                </a:solidFill>
+              </a:defRPr>
+            </a:pPr>
+            <a:r>
+              <a:t>• Status Progression:  Moves candidates through Pending ➔ Under Review ➔ Shortlisted ➔ Selected.</a:t>
+            </a:r>
+          </a:p>
+          <a:p>
+            <a:pPr>
+              <a:spcBef>
+                <a:spcPts val="600"/>
+              </a:spcBef>
+              <a:defRPr sz="950">
+                <a:solidFill>
+                  <a:srgbClr val="1E293B"/>
+                </a:solidFill>
+              </a:defRPr>
+            </a:pPr>
+            <a:r>
+              <a:t>• Real-Time Dispatch:  System dispatches instant in-app notification alerts directly to the student.</a:t>
+            </a:r>
+          </a:p>
+        </p:txBody>
+      </p:sp>
+      <p:sp>
+        <p:nvSpPr>
+          <p:cNvPr id="13" name="Rounded Rectangle 12"/>
+          <p:cNvSpPr/>
+          <p:nvPr/>
+        </p:nvSpPr>
+        <p:spPr>
+          <a:xfrm>
+            <a:off x="731520" y="5166360"/>
+            <a:ext cx="10716768" cy="1298448"/>
+          </a:xfrm>
+          <a:prstGeom prst="roundRect">
+            <a:avLst/>
+          </a:prstGeom>
+          <a:solidFill>
+            <a:srgbClr val="FFFFFF"/>
+          </a:solidFill>
+          <a:ln w="15240">
+            <a:solidFill>
+              <a:srgbClr val="E2E8F0"/>
+            </a:solidFill>
+          </a:ln>
+        </p:spPr>
+        <p:style>
+          <a:lnRef idx="1">
+            <a:schemeClr val="accent1"/>
+          </a:lnRef>
+          <a:fillRef idx="3">
+            <a:schemeClr val="accent1"/>
+          </a:fillRef>
+          <a:effectRef idx="2">
+            <a:schemeClr val="accent1"/>
+          </a:effectRef>
+          <a:fontRef idx="minor">
+            <a:schemeClr val="lt1"/>
+          </a:fontRef>
+        </p:style>
+        <p:txBody>
+          <a:bodyPr rtlCol="0" anchor="ctr" wrap="square" lIns="228600" rIns="228600" tIns="109728"/>
+          <a:lstStyle/>
+          <a:p>
+            <a:pPr algn="ctr">
+              <a:defRPr sz="1100" b="1">
+                <a:solidFill>
+                  <a:srgbClr val="1F3C88"/>
+                </a:solidFill>
+              </a:defRPr>
+            </a:pPr>
+            <a:r>
+              <a:t>📌 APPLICATION LIFECYCLE &amp; STATUS PROGRESSION PIPELINE</a:t>
+            </a:r>
+          </a:p>
+        </p:txBody>
+      </p:sp>
+      <p:sp>
+        <p:nvSpPr>
+          <p:cNvPr id="14" name="Rounded Rectangle 13"/>
+          <p:cNvSpPr/>
+          <p:nvPr/>
+        </p:nvSpPr>
+        <p:spPr>
+          <a:xfrm>
+            <a:off x="914400" y="5532120"/>
+            <a:ext cx="2468880" cy="841248"/>
+          </a:xfrm>
+          <a:prstGeom prst="roundRect">
+            <a:avLst/>
+          </a:prstGeom>
+          <a:solidFill>
+            <a:srgbClr val="F8FAFC"/>
+          </a:solidFill>
+          <a:ln w="12700">
+            <a:solidFill>
+              <a:srgbClr val="D97706"/>
+            </a:solidFill>
+          </a:ln>
+        </p:spPr>
+        <p:style>
+          <a:lnRef idx="1">
+            <a:schemeClr val="accent1"/>
+          </a:lnRef>
+          <a:fillRef idx="3">
+            <a:schemeClr val="accent1"/>
+          </a:fillRef>
+          <a:effectRef idx="2">
+            <a:schemeClr val="accent1"/>
+          </a:effectRef>
+          <a:fontRef idx="minor">
+            <a:schemeClr val="lt1"/>
+          </a:fontRef>
+        </p:style>
+        <p:txBody>
+          <a:bodyPr rtlCol="0" anchor="ctr" wrap="square" lIns="109728" rIns="109728" tIns="73152"/>
+          <a:lstStyle/>
+          <a:p>
+            <a:pPr algn="ctr">
+              <a:defRPr sz="1000" b="1">
                 <a:solidFill>
                   <a:srgbClr val="D97706"/>
                 </a:solidFill>
               </a:defRPr>
             </a:pPr>
             <a:r>
-              <a:t>4. Notification Table (internships_notification)</a:t>
-            </a:r>
-          </a:p>
-          <a:p>
-            <a:pPr>
-              <a:spcBef>
-                <a:spcPts val="400"/>
-              </a:spcBef>
-              <a:defRPr sz="1050">
+              <a:t>1. Pending</a:t>
+            </a:r>
+          </a:p>
+          <a:p>
+            <a:pPr>
+              <a:spcBef>
+                <a:spcPts val="200"/>
+              </a:spcBef>
+              <a:defRPr sz="850">
                 <a:solidFill>
                   <a:srgbClr val="1E293B"/>
                 </a:solidFill>
               </a:defRPr>
             </a:pPr>
             <a:r>
-              <a:t>• id: Unique notification ID (Primary Key)</a:t>
-            </a:r>
-          </a:p>
-          <a:p>
-            <a:pPr>
-              <a:spcBef>
-                <a:spcPts val="400"/>
-              </a:spcBef>
-              <a:defRPr sz="1050">
+              <a:t>Student submitted application; timestamp recorded, duplicate check verified, awaiting review.</a:t>
+            </a:r>
+          </a:p>
+        </p:txBody>
+      </p:sp>
+      <p:sp>
+        <p:nvSpPr>
+          <p:cNvPr id="15" name="Rounded Rectangle 14"/>
+          <p:cNvSpPr/>
+          <p:nvPr/>
+        </p:nvSpPr>
+        <p:spPr>
+          <a:xfrm>
+            <a:off x="3520440" y="5532120"/>
+            <a:ext cx="2468880" cy="841248"/>
+          </a:xfrm>
+          <a:prstGeom prst="roundRect">
+            <a:avLst/>
+          </a:prstGeom>
+          <a:solidFill>
+            <a:srgbClr val="F8FAFC"/>
+          </a:solidFill>
+          <a:ln w="12700">
+            <a:solidFill>
+              <a:srgbClr val="2563EB"/>
+            </a:solidFill>
+          </a:ln>
+        </p:spPr>
+        <p:style>
+          <a:lnRef idx="1">
+            <a:schemeClr val="accent1"/>
+          </a:lnRef>
+          <a:fillRef idx="3">
+            <a:schemeClr val="accent1"/>
+          </a:fillRef>
+          <a:effectRef idx="2">
+            <a:schemeClr val="accent1"/>
+          </a:effectRef>
+          <a:fontRef idx="minor">
+            <a:schemeClr val="lt1"/>
+          </a:fontRef>
+        </p:style>
+        <p:txBody>
+          <a:bodyPr rtlCol="0" anchor="ctr" wrap="square" lIns="109728" rIns="109728" tIns="73152"/>
+          <a:lstStyle/>
+          <a:p>
+            <a:pPr algn="ctr">
+              <a:defRPr sz="1000" b="1">
+                <a:solidFill>
+                  <a:srgbClr val="2563EB"/>
+                </a:solidFill>
+              </a:defRPr>
+            </a:pPr>
+            <a:r>
+              <a:t>2. Under Review</a:t>
+            </a:r>
+          </a:p>
+          <a:p>
+            <a:pPr>
+              <a:spcBef>
+                <a:spcPts val="200"/>
+              </a:spcBef>
+              <a:defRPr sz="850">
                 <a:solidFill>
                   <a:srgbClr val="1E293B"/>
                 </a:solidFill>
               </a:defRPr>
             </a:pPr>
             <a:r>
-              <a:t>• student_id: Target student receiving the alert</a:t>
-            </a:r>
-          </a:p>
-          <a:p>
-            <a:pPr>
-              <a:spcBef>
-                <a:spcPts val="400"/>
-              </a:spcBef>
-              <a:defRPr sz="1050">
+              <a:t>Recruiter or Placement Coordinator is examining academic profile and candidate resume.</a:t>
+            </a:r>
+          </a:p>
+        </p:txBody>
+      </p:sp>
+      <p:sp>
+        <p:nvSpPr>
+          <p:cNvPr id="16" name="Rounded Rectangle 15"/>
+          <p:cNvSpPr/>
+          <p:nvPr/>
+        </p:nvSpPr>
+        <p:spPr>
+          <a:xfrm>
+            <a:off x="6126480" y="5532120"/>
+            <a:ext cx="2468880" cy="841248"/>
+          </a:xfrm>
+          <a:prstGeom prst="roundRect">
+            <a:avLst/>
+          </a:prstGeom>
+          <a:solidFill>
+            <a:srgbClr val="F8FAFC"/>
+          </a:solidFill>
+          <a:ln w="12700">
+            <a:solidFill>
+              <a:srgbClr val="7C3AED"/>
+            </a:solidFill>
+          </a:ln>
+        </p:spPr>
+        <p:style>
+          <a:lnRef idx="1">
+            <a:schemeClr val="accent1"/>
+          </a:lnRef>
+          <a:fillRef idx="3">
+            <a:schemeClr val="accent1"/>
+          </a:fillRef>
+          <a:effectRef idx="2">
+            <a:schemeClr val="accent1"/>
+          </a:effectRef>
+          <a:fontRef idx="minor">
+            <a:schemeClr val="lt1"/>
+          </a:fontRef>
+        </p:style>
+        <p:txBody>
+          <a:bodyPr rtlCol="0" anchor="ctr" wrap="square" lIns="109728" rIns="109728" tIns="73152"/>
+          <a:lstStyle/>
+          <a:p>
+            <a:pPr algn="ctr">
+              <a:defRPr sz="1000" b="1">
+                <a:solidFill>
+                  <a:srgbClr val="7C3AED"/>
+                </a:solidFill>
+              </a:defRPr>
+            </a:pPr>
+            <a:r>
+              <a:t>3. Shortlisted</a:t>
+            </a:r>
+          </a:p>
+          <a:p>
+            <a:pPr>
+              <a:spcBef>
+                <a:spcPts val="200"/>
+              </a:spcBef>
+              <a:defRPr sz="850">
                 <a:solidFill>
                   <a:srgbClr val="1E293B"/>
                 </a:solidFill>
               </a:defRPr>
             </a:pPr>
             <a:r>
-              <a:t>• message: Alert text (e.g., 'Application Submitted')</a:t>
-            </a:r>
-          </a:p>
-          <a:p>
-            <a:pPr>
-              <a:spcBef>
-                <a:spcPts val="400"/>
-              </a:spcBef>
-              <a:defRPr sz="1050">
+              <a:t>Student cleared preliminary screening; invited for interview or online evaluation.</a:t>
+            </a:r>
+          </a:p>
+        </p:txBody>
+      </p:sp>
+      <p:sp>
+        <p:nvSpPr>
+          <p:cNvPr id="17" name="Rounded Rectangle 16"/>
+          <p:cNvSpPr/>
+          <p:nvPr/>
+        </p:nvSpPr>
+        <p:spPr>
+          <a:xfrm>
+            <a:off x="8732520" y="5532120"/>
+            <a:ext cx="2468880" cy="841248"/>
+          </a:xfrm>
+          <a:prstGeom prst="roundRect">
+            <a:avLst/>
+          </a:prstGeom>
+          <a:solidFill>
+            <a:srgbClr val="F8FAFC"/>
+          </a:solidFill>
+          <a:ln w="12700">
+            <a:solidFill>
+              <a:srgbClr val="10955A"/>
+            </a:solidFill>
+          </a:ln>
+        </p:spPr>
+        <p:style>
+          <a:lnRef idx="1">
+            <a:schemeClr val="accent1"/>
+          </a:lnRef>
+          <a:fillRef idx="3">
+            <a:schemeClr val="accent1"/>
+          </a:fillRef>
+          <a:effectRef idx="2">
+            <a:schemeClr val="accent1"/>
+          </a:effectRef>
+          <a:fontRef idx="minor">
+            <a:schemeClr val="lt1"/>
+          </a:fontRef>
+        </p:style>
+        <p:txBody>
+          <a:bodyPr rtlCol="0" anchor="ctr" wrap="square" lIns="109728" rIns="109728" tIns="73152"/>
+          <a:lstStyle/>
+          <a:p>
+            <a:pPr algn="ctr">
+              <a:defRPr sz="1000" b="1">
+                <a:solidFill>
+                  <a:srgbClr val="10955A"/>
+                </a:solidFill>
+              </a:defRPr>
+            </a:pPr>
+            <a:r>
+              <a:t>4. Selected / Rejected</a:t>
+            </a:r>
+          </a:p>
+          <a:p>
+            <a:pPr>
+              <a:spcBef>
+                <a:spcPts val="200"/>
+              </a:spcBef>
+              <a:defRPr sz="850">
                 <a:solidFill>
                   <a:srgbClr val="1E293B"/>
                 </a:solidFill>
               </a:defRPr>
             </a:pPr>
             <a:r>
-              <a:t>• is_read: True/False (Tracks unread messages)</a:t>
+              <a:t>Final hiring decision updated; automated real-time notification alert dispatched to student.</a:t>
             </a:r>
           </a:p>
         </p:txBody>
@@ -6857,7 +8145,7 @@
 </file>
 
 <file path=ppt/slides/slide8.xml><?xml version="1.0" encoding="utf-8"?>
-<p:sld xmlns:a="http://schemas.openxmlformats.org/drawingml/2006/main" xmlns:r="http://schemas.openxmlformats.org/officeDocument/2006/relationships" xmlns:p="http://schemas.openxmlformats.org/presentationml/2006/main">
+<p:sld xmlns:a="http://schemas.openxmlformats.org/drawingml/2006/main" xmlns:p="http://schemas.openxmlformats.org/presentationml/2006/main" xmlns:r="http://schemas.openxmlformats.org/officeDocument/2006/relationships">
   <p:cSld>
     <p:bg>
       <p:bgPr>
@@ -6891,7 +8179,7 @@
           <a:noFill/>
         </p:spPr>
         <p:txBody>
-          <a:bodyPr wrap="square" lIns="0" tIns="0" rIns="0" bIns="0">
+          <a:bodyPr wrap="square" lIns="0" rIns="0" tIns="0" bIns="0">
             <a:spAutoFit/>
           </a:bodyPr>
           <a:lstStyle/>
@@ -6904,7 +8192,7 @@
               </a:defRPr>
             </a:pPr>
             <a:r>
-              <a:t>SLIDE 8 • TECH STACK</a:t>
+              <a:t>SLIDE 8 • DATABASE</a:t>
             </a:r>
           </a:p>
         </p:txBody>
@@ -6926,7 +8214,7 @@
           <a:noFill/>
         </p:spPr>
         <p:txBody>
-          <a:bodyPr wrap="square" lIns="0" tIns="0" rIns="0" bIns="0">
+          <a:bodyPr wrap="square" lIns="0" rIns="0" tIns="0" bIns="0">
             <a:spAutoFit/>
           </a:bodyPr>
           <a:lstStyle/>
@@ -6939,7 +8227,7 @@
               </a:defRPr>
             </a:pPr>
             <a:r>
-              <a:t>Technology Stack Used</a:t>
+              <a:t>Database Tables</a:t>
             </a:r>
           </a:p>
         </p:txBody>
@@ -6961,7 +8249,7 @@
           <a:noFill/>
         </p:spPr>
         <p:txBody>
-          <a:bodyPr wrap="square" lIns="0" tIns="0" rIns="0" bIns="0">
+          <a:bodyPr wrap="square" lIns="0" rIns="0" tIns="0" bIns="0">
             <a:spAutoFit/>
           </a:bodyPr>
           <a:lstStyle/>
@@ -6974,7 +8262,7 @@
               </a:defRPr>
             </a:pPr>
             <a:r>
-              <a:t>Programming language, database, framework, and tools used</a:t>
+              <a:t>The 5 core relational tables used to store and manage project data</a:t>
             </a:r>
           </a:p>
         </p:txBody>
@@ -7030,8 +8318,8 @@
         </p:nvSpPr>
         <p:spPr>
           <a:xfrm>
-            <a:off x="731520" y="1828800"/>
-            <a:ext cx="3474720" cy="2103120"/>
+            <a:off x="731520" y="1783080"/>
+            <a:ext cx="3456432" cy="2148840"/>
           </a:xfrm>
           <a:prstGeom prst="roundRect">
             <a:avLst/>
@@ -7060,18 +8348,18 @@
           </a:fontRef>
         </p:style>
         <p:txBody>
-          <a:bodyPr wrap="square" lIns="228600" tIns="201168" rIns="228600" rtlCol="0" anchor="ctr"/>
+          <a:bodyPr rtlCol="0" anchor="ctr" wrap="square" lIns="201168" rIns="201168" tIns="164592"/>
           <a:lstStyle/>
           <a:p>
             <a:pPr algn="ctr">
-              <a:defRPr sz="1350" b="1">
+              <a:defRPr sz="1150" b="1">
                 <a:solidFill>
                   <a:srgbClr val="1F3C88"/>
                 </a:solidFill>
               </a:defRPr>
             </a:pPr>
             <a:r>
-              <a:t>🐍 Programming Language</a:t>
+              <a:t>1. Student Table (user_management_student)</a:t>
             </a:r>
           </a:p>
           <a:p>
@@ -7079,29 +8367,74 @@
               <a:spcBef>
                 <a:spcPts val="300"/>
               </a:spcBef>
-              <a:defRPr sz="1200" b="1">
-                <a:solidFill>
-                  <a:srgbClr val="2563EB"/>
-                </a:solidFill>
-              </a:defRPr>
-            </a:pPr>
-            <a:r>
-              <a:t>Python 3.9+</a:t>
-            </a:r>
-          </a:p>
-          <a:p>
-            <a:pPr>
-              <a:spcBef>
-                <a:spcPts val="500"/>
-              </a:spcBef>
-              <a:defRPr sz="1050">
+              <a:defRPr sz="980">
                 <a:solidFill>
                   <a:srgbClr val="1E293B"/>
                 </a:solidFill>
               </a:defRPr>
             </a:pPr>
             <a:r>
-              <a:t>Primary backend language. Chosen because it is clean, easy to read, and has great web framework support.</a:t>
+              <a:t>• id: Unique student ID (Primary Key)</a:t>
+            </a:r>
+          </a:p>
+          <a:p>
+            <a:pPr>
+              <a:spcBef>
+                <a:spcPts val="300"/>
+              </a:spcBef>
+              <a:defRPr sz="980">
+                <a:solidFill>
+                  <a:srgbClr val="1E293B"/>
+                </a:solidFill>
+              </a:defRPr>
+            </a:pPr>
+            <a:r>
+              <a:t>• user_id: Links to Django Auth User login</a:t>
+            </a:r>
+          </a:p>
+          <a:p>
+            <a:pPr>
+              <a:spcBef>
+                <a:spcPts val="300"/>
+              </a:spcBef>
+              <a:defRPr sz="980">
+                <a:solidFill>
+                  <a:srgbClr val="1E293B"/>
+                </a:solidFill>
+              </a:defRPr>
+            </a:pPr>
+            <a:r>
+              <a:t>• registration_number: Unique KTU College Reg No</a:t>
+            </a:r>
+          </a:p>
+          <a:p>
+            <a:pPr>
+              <a:spcBef>
+                <a:spcPts val="300"/>
+              </a:spcBef>
+              <a:defRPr sz="980">
+                <a:solidFill>
+                  <a:srgbClr val="1E293B"/>
+                </a:solidFill>
+              </a:defRPr>
+            </a:pPr>
+            <a:r>
+              <a:t>• name, email, phone: Contact details of the student</a:t>
+            </a:r>
+          </a:p>
+          <a:p>
+            <a:pPr>
+              <a:spcBef>
+                <a:spcPts val="300"/>
+              </a:spcBef>
+              <a:defRPr sz="980">
+                <a:solidFill>
+                  <a:srgbClr val="1E293B"/>
+                </a:solidFill>
+              </a:defRPr>
+            </a:pPr>
+            <a:r>
+              <a:t>• course &amp; resume: Degree branch &amp; PDF resume file</a:t>
             </a:r>
           </a:p>
         </p:txBody>
@@ -7114,8 +8447,8 @@
         </p:nvSpPr>
         <p:spPr>
           <a:xfrm>
-            <a:off x="4370832" y="1828800"/>
-            <a:ext cx="3474720" cy="2103120"/>
+            <a:off x="4370832" y="1783080"/>
+            <a:ext cx="3456432" cy="2148840"/>
           </a:xfrm>
           <a:prstGeom prst="roundRect">
             <a:avLst/>
@@ -7144,18 +8477,18 @@
           </a:fontRef>
         </p:style>
         <p:txBody>
-          <a:bodyPr wrap="square" lIns="228600" tIns="201168" rIns="228600" rtlCol="0" anchor="ctr"/>
+          <a:bodyPr rtlCol="0" anchor="ctr" wrap="square" lIns="201168" rIns="201168" tIns="164592"/>
           <a:lstStyle/>
           <a:p>
             <a:pPr algn="ctr">
-              <a:defRPr sz="1350" b="1">
-                <a:solidFill>
-                  <a:srgbClr val="1F3C88"/>
-                </a:solidFill>
-              </a:defRPr>
-            </a:pPr>
-            <a:r>
-              <a:t>🌐 Web Framework</a:t>
+              <a:defRPr sz="1150" b="1">
+                <a:solidFill>
+                  <a:srgbClr val="7C3AED"/>
+                </a:solidFill>
+              </a:defRPr>
+            </a:pPr>
+            <a:r>
+              <a:t>2. Company Table (internships_company)</a:t>
             </a:r>
           </a:p>
           <a:p>
@@ -7163,29 +8496,74 @@
               <a:spcBef>
                 <a:spcPts val="300"/>
               </a:spcBef>
-              <a:defRPr sz="1200" b="1">
-                <a:solidFill>
-                  <a:srgbClr val="2563EB"/>
-                </a:solidFill>
-              </a:defRPr>
-            </a:pPr>
-            <a:r>
-              <a:t>Django 4.2 LTS</a:t>
-            </a:r>
-          </a:p>
-          <a:p>
-            <a:pPr>
-              <a:spcBef>
-                <a:spcPts val="500"/>
-              </a:spcBef>
-              <a:defRPr sz="1050">
+              <a:defRPr sz="980">
                 <a:solidFill>
                   <a:srgbClr val="1E293B"/>
                 </a:solidFill>
               </a:defRPr>
             </a:pPr>
             <a:r>
-              <a:t>A robust Python web framework that comes with built-in security, user authentication, and admin panel.</a:t>
+              <a:t>• id: Unique company ID (Primary Key)</a:t>
+            </a:r>
+          </a:p>
+          <a:p>
+            <a:pPr>
+              <a:spcBef>
+                <a:spcPts val="300"/>
+              </a:spcBef>
+              <a:defRPr sz="980">
+                <a:solidFill>
+                  <a:srgbClr val="1E293B"/>
+                </a:solidFill>
+              </a:defRPr>
+            </a:pPr>
+            <a:r>
+              <a:t>• user_id: Links to Django Auth User login</a:t>
+            </a:r>
+          </a:p>
+          <a:p>
+            <a:pPr>
+              <a:spcBef>
+                <a:spcPts val="300"/>
+              </a:spcBef>
+              <a:defRPr sz="980">
+                <a:solidFill>
+                  <a:srgbClr val="1E293B"/>
+                </a:solidFill>
+              </a:defRPr>
+            </a:pPr>
+            <a:r>
+              <a:t>• company_name &amp; email: Organization identity &amp; email</a:t>
+            </a:r>
+          </a:p>
+          <a:p>
+            <a:pPr>
+              <a:spcBef>
+                <a:spcPts val="300"/>
+              </a:spcBef>
+              <a:defRPr sz="980">
+                <a:solidFill>
+                  <a:srgbClr val="1E293B"/>
+                </a:solidFill>
+              </a:defRPr>
+            </a:pPr>
+            <a:r>
+              <a:t>• phone &amp; website: Recruiter contact &amp; web URL</a:t>
+            </a:r>
+          </a:p>
+          <a:p>
+            <a:pPr>
+              <a:spcBef>
+                <a:spcPts val="300"/>
+              </a:spcBef>
+              <a:defRPr sz="980">
+                <a:solidFill>
+                  <a:srgbClr val="1E293B"/>
+                </a:solidFill>
+              </a:defRPr>
+            </a:pPr>
+            <a:r>
+              <a:t>• address &amp; description: Physical office &amp; company info</a:t>
             </a:r>
           </a:p>
         </p:txBody>
@@ -7198,8 +8576,8 @@
         </p:nvSpPr>
         <p:spPr>
           <a:xfrm>
-            <a:off x="8010144" y="1828800"/>
-            <a:ext cx="3474720" cy="2103120"/>
+            <a:off x="8010144" y="1783080"/>
+            <a:ext cx="3456432" cy="2148840"/>
           </a:xfrm>
           <a:prstGeom prst="roundRect">
             <a:avLst/>
@@ -7228,54 +8606,93 @@
           </a:fontRef>
         </p:style>
         <p:txBody>
-          <a:bodyPr wrap="square" lIns="228600" tIns="201168" rIns="228600" rtlCol="0" anchor="ctr"/>
+          <a:bodyPr rtlCol="0" anchor="ctr" wrap="square" lIns="201168" rIns="201168" tIns="164592"/>
           <a:lstStyle/>
           <a:p>
             <a:pPr algn="ctr">
-              <a:defRPr sz="1350" b="1">
-                <a:solidFill>
-                  <a:srgbClr val="1F3C88"/>
-                </a:solidFill>
-              </a:defRPr>
-            </a:pPr>
-            <a:r>
-              <a:t>🗄️ Database</a:t>
-            </a:r>
-          </a:p>
-          <a:p>
-            <a:pPr>
-              <a:spcBef>
-                <a:spcPts val="500"/>
-              </a:spcBef>
-              <a:defRPr sz="1050">
+              <a:defRPr sz="1150" b="1">
+                <a:solidFill>
+                  <a:srgbClr val="2563EB"/>
+                </a:solidFill>
+              </a:defRPr>
+            </a:pPr>
+            <a:r>
+              <a:t>3. Internship Table (internships_internship)</a:t>
+            </a:r>
+          </a:p>
+          <a:p>
+            <a:pPr>
+              <a:spcBef>
+                <a:spcPts val="300"/>
+              </a:spcBef>
+              <a:defRPr sz="980">
                 <a:solidFill>
                   <a:srgbClr val="1E293B"/>
                 </a:solidFill>
               </a:defRPr>
             </a:pPr>
             <a:r>
-              <a:rPr sz="1200">
-                <a:sym typeface="+mn-ea"/>
-              </a:rPr>
-              <a:t>MySQL Database</a:t>
-            </a:r>
-            <a:endParaRPr sz="1200">
-              <a:sym typeface="+mn-ea"/>
-            </a:endParaRPr>
-          </a:p>
-          <a:p>
-            <a:pPr>
-              <a:spcBef>
-                <a:spcPts val="500"/>
-              </a:spcBef>
-              <a:defRPr sz="1050">
+              <a:t>• id: Unique internship ID (Primary Key)</a:t>
+            </a:r>
+          </a:p>
+          <a:p>
+            <a:pPr>
+              <a:spcBef>
+                <a:spcPts val="300"/>
+              </a:spcBef>
+              <a:defRPr sz="980">
                 <a:solidFill>
                   <a:srgbClr val="1E293B"/>
                 </a:solidFill>
               </a:defRPr>
             </a:pPr>
             <a:r>
-              <a:t>MySQL database is used for storing student and job data reliably. SQLite is used for fast local testing.</a:t>
+              <a:t>• company_id: Foreign Key linking to Company</a:t>
+            </a:r>
+          </a:p>
+          <a:p>
+            <a:pPr>
+              <a:spcBef>
+                <a:spcPts val="300"/>
+              </a:spcBef>
+              <a:defRPr sz="980">
+                <a:solidFill>
+                  <a:srgbClr val="1E293B"/>
+                </a:solidFill>
+              </a:defRPr>
+            </a:pPr>
+            <a:r>
+              <a:t>• title &amp; company_name: Role title &amp; hiring organization</a:t>
+            </a:r>
+          </a:p>
+          <a:p>
+            <a:pPr>
+              <a:spcBef>
+                <a:spcPts val="300"/>
+              </a:spcBef>
+              <a:defRPr sz="980">
+                <a:solidFill>
+                  <a:srgbClr val="1E293B"/>
+                </a:solidFill>
+              </a:defRPr>
+            </a:pPr>
+            <a:r>
+              <a:t>• location, duration, stipend: Work terms &amp; monthly pay</a:t>
+            </a:r>
+          </a:p>
+          <a:p>
+            <a:pPr>
+              <a:spcBef>
+                <a:spcPts val="300"/>
+              </a:spcBef>
+              <a:defRPr sz="980">
+                <a:solidFill>
+                  <a:srgbClr val="1E293B"/>
+                </a:solidFill>
+              </a:defRPr>
+            </a:pPr>
+            <a:r>
+              <a:t>• skills_required &amp; deadline: Skill criteria &amp; last apply date</a:t>
             </a:r>
           </a:p>
         </p:txBody>
@@ -7289,7 +8706,7 @@
         <p:spPr>
           <a:xfrm>
             <a:off x="731520" y="4114800"/>
-            <a:ext cx="3474720" cy="2103120"/>
+            <a:ext cx="5276088" cy="2194560"/>
           </a:xfrm>
           <a:prstGeom prst="roundRect">
             <a:avLst/>
@@ -7318,48 +8735,78 @@
           </a:fontRef>
         </p:style>
         <p:txBody>
-          <a:bodyPr wrap="square" lIns="228600" tIns="201168" rIns="228600" rtlCol="0" anchor="ctr"/>
+          <a:bodyPr rtlCol="0" anchor="ctr" wrap="square" lIns="228600" rIns="228600" tIns="182880"/>
           <a:lstStyle/>
           <a:p>
             <a:pPr algn="ctr">
-              <a:defRPr sz="1350" b="1">
-                <a:solidFill>
-                  <a:srgbClr val="1F3C88"/>
-                </a:solidFill>
-              </a:defRPr>
-            </a:pPr>
-            <a:r>
-              <a:t>🎨 Frontend (UI)</a:t>
-            </a:r>
-          </a:p>
-          <a:p>
-            <a:pPr>
-              <a:spcBef>
-                <a:spcPts val="300"/>
-              </a:spcBef>
               <a:defRPr sz="1200" b="1">
                 <a:solidFill>
-                  <a:srgbClr val="2563EB"/>
-                </a:solidFill>
-              </a:defRPr>
-            </a:pPr>
-            <a:r>
-              <a:t>HTML5 &amp; CSS3</a:t>
-            </a:r>
-          </a:p>
-          <a:p>
-            <a:pPr>
-              <a:spcBef>
-                <a:spcPts val="500"/>
-              </a:spcBef>
-              <a:defRPr sz="1050">
+                  <a:srgbClr val="10955A"/>
+                </a:solidFill>
+              </a:defRPr>
+            </a:pPr>
+            <a:r>
+              <a:t>4. Application Table (internships_application)</a:t>
+            </a:r>
+          </a:p>
+          <a:p>
+            <a:pPr>
+              <a:spcBef>
+                <a:spcPts val="400"/>
+              </a:spcBef>
+              <a:defRPr sz="1000">
                 <a:solidFill>
                   <a:srgbClr val="1E293B"/>
                 </a:solidFill>
               </a:defRPr>
             </a:pPr>
             <a:r>
-              <a:t>Clean and responsive user interface with card layouts that look great on both desktop screens and mobile phones.</a:t>
+              <a:t>• id: Unique application ID (Primary Key)</a:t>
+            </a:r>
+          </a:p>
+          <a:p>
+            <a:pPr>
+              <a:spcBef>
+                <a:spcPts val="400"/>
+              </a:spcBef>
+              <a:defRPr sz="1000">
+                <a:solidFill>
+                  <a:srgbClr val="1E293B"/>
+                </a:solidFill>
+              </a:defRPr>
+            </a:pPr>
+            <a:r>
+              <a:t>• student_id &amp; internship_id: Foreign Keys linking student profile to internship opening</a:t>
+            </a:r>
+          </a:p>
+          <a:p>
+            <a:pPr>
+              <a:spcBef>
+                <a:spcPts val="400"/>
+              </a:spcBef>
+              <a:defRPr sz="1000">
+                <a:solidFill>
+                  <a:srgbClr val="1E293B"/>
+                </a:solidFill>
+              </a:defRPr>
+            </a:pPr>
+            <a:r>
+              <a:t>• applied_at &amp; status: Application timestamp and state (Pending, Under Review, Shortlisted, Selected, Rejected)</a:t>
+            </a:r>
+          </a:p>
+          <a:p>
+            <a:pPr>
+              <a:spcBef>
+                <a:spcPts val="400"/>
+              </a:spcBef>
+              <a:defRPr sz="1000">
+                <a:solidFill>
+                  <a:srgbClr val="1E293B"/>
+                </a:solidFill>
+              </a:defRPr>
+            </a:pPr>
+            <a:r>
+              <a:t>• * Unique Constraint: (student_id, internship_id) prevents duplicate applications for the same opening</a:t>
             </a:r>
           </a:p>
         </p:txBody>
@@ -7372,8 +8819,8 @@
         </p:nvSpPr>
         <p:spPr>
           <a:xfrm>
-            <a:off x="4370832" y="4114800"/>
-            <a:ext cx="3474720" cy="2103120"/>
+            <a:off x="6172200" y="4114800"/>
+            <a:ext cx="5276088" cy="2194560"/>
           </a:xfrm>
           <a:prstGeom prst="roundRect">
             <a:avLst/>
@@ -7402,138 +8849,78 @@
           </a:fontRef>
         </p:style>
         <p:txBody>
-          <a:bodyPr wrap="square" lIns="228600" tIns="201168" rIns="228600" rtlCol="0" anchor="ctr"/>
+          <a:bodyPr rtlCol="0" anchor="ctr" wrap="square" lIns="228600" rIns="228600" tIns="182880"/>
           <a:lstStyle/>
           <a:p>
             <a:pPr algn="ctr">
-              <a:defRPr sz="1350" b="1">
-                <a:solidFill>
-                  <a:srgbClr val="1F3C88"/>
-                </a:solidFill>
-              </a:defRPr>
-            </a:pPr>
-            <a:r>
-              <a:t>📦 Libraries &amp; Drivers</a:t>
-            </a:r>
-          </a:p>
-          <a:p>
-            <a:pPr>
-              <a:spcBef>
-                <a:spcPts val="500"/>
-              </a:spcBef>
-              <a:defRPr sz="1050">
+              <a:defRPr sz="1200" b="1">
+                <a:solidFill>
+                  <a:srgbClr val="D97706"/>
+                </a:solidFill>
+              </a:defRPr>
+            </a:pPr>
+            <a:r>
+              <a:t>5. Notification Table (internships_notification)</a:t>
+            </a:r>
+          </a:p>
+          <a:p>
+            <a:pPr>
+              <a:spcBef>
+                <a:spcPts val="400"/>
+              </a:spcBef>
+              <a:defRPr sz="1000">
                 <a:solidFill>
                   <a:srgbClr val="1E293B"/>
                 </a:solidFill>
               </a:defRPr>
             </a:pPr>
             <a:r>
-              <a:rPr sz="1200">
-                <a:sym typeface="+mn-ea"/>
-              </a:rPr>
-              <a:t>mysqlclient &amp; Forms</a:t>
-            </a:r>
-            <a:endParaRPr sz="1200">
-              <a:sym typeface="+mn-ea"/>
-            </a:endParaRPr>
-          </a:p>
-          <a:p>
-            <a:pPr>
-              <a:spcBef>
-                <a:spcPts val="500"/>
-              </a:spcBef>
-              <a:defRPr sz="1050">
+              <a:t>• id: Unique notification ID (Primary Key)</a:t>
+            </a:r>
+          </a:p>
+          <a:p>
+            <a:pPr>
+              <a:spcBef>
+                <a:spcPts val="400"/>
+              </a:spcBef>
+              <a:defRPr sz="1000">
                 <a:solidFill>
                   <a:srgbClr val="1E293B"/>
                 </a:solidFill>
               </a:defRPr>
             </a:pPr>
             <a:r>
-              <a:t>PyMySQL connects Python with MySQL. Django Forms handles input validation and clean error messages.</a:t>
-            </a:r>
-          </a:p>
-        </p:txBody>
-      </p:sp>
-      <p:sp>
-        <p:nvSpPr>
-          <p:cNvPr id="11" name="Rounded Rectangle 10"/>
-          <p:cNvSpPr/>
-          <p:nvPr/>
-        </p:nvSpPr>
-        <p:spPr>
-          <a:xfrm>
-            <a:off x="8010144" y="4114800"/>
-            <a:ext cx="3474720" cy="2103120"/>
-          </a:xfrm>
-          <a:prstGeom prst="roundRect">
-            <a:avLst/>
-          </a:prstGeom>
-          <a:solidFill>
-            <a:srgbClr val="FFFFFF"/>
-          </a:solidFill>
-          <a:ln w="15240">
-            <a:solidFill>
-              <a:srgbClr val="E2E8F0"/>
-            </a:solidFill>
-          </a:ln>
-        </p:spPr>
-        <p:style>
-          <a:lnRef idx="1">
-            <a:schemeClr val="accent1"/>
-          </a:lnRef>
-          <a:fillRef idx="3">
-            <a:schemeClr val="accent1"/>
-          </a:fillRef>
-          <a:effectRef idx="2">
-            <a:schemeClr val="accent1"/>
-          </a:effectRef>
-          <a:fontRef idx="minor">
-            <a:schemeClr val="lt1"/>
-          </a:fontRef>
-        </p:style>
-        <p:txBody>
-          <a:bodyPr wrap="square" lIns="228600" tIns="201168" rIns="228600" rtlCol="0" anchor="ctr"/>
-          <a:lstStyle/>
-          <a:p>
-            <a:pPr algn="ctr">
-              <a:defRPr sz="1350" b="1">
-                <a:solidFill>
-                  <a:srgbClr val="1F3C88"/>
-                </a:solidFill>
-              </a:defRPr>
-            </a:pPr>
-            <a:r>
-              <a:t>💻 Development Tools</a:t>
-            </a:r>
-          </a:p>
-          <a:p>
-            <a:pPr>
-              <a:spcBef>
-                <a:spcPts val="300"/>
-              </a:spcBef>
-              <a:defRPr sz="1200" b="1">
-                <a:solidFill>
-                  <a:srgbClr val="2563EB"/>
-                </a:solidFill>
-              </a:defRPr>
-            </a:pPr>
-            <a:r>
-              <a:t>VS Code &amp; Git</a:t>
-            </a:r>
-          </a:p>
-          <a:p>
-            <a:pPr>
-              <a:spcBef>
-                <a:spcPts val="500"/>
-              </a:spcBef>
-              <a:defRPr sz="1050">
+              <a:t>• student_id: Foreign Key targeting the student receiving the alert</a:t>
+            </a:r>
+          </a:p>
+          <a:p>
+            <a:pPr>
+              <a:spcBef>
+                <a:spcPts val="400"/>
+              </a:spcBef>
+              <a:defRPr sz="1000">
                 <a:solidFill>
                   <a:srgbClr val="1E293B"/>
                 </a:solidFill>
               </a:defRPr>
             </a:pPr>
             <a:r>
-              <a:t>Visual Studio Code used as the code editor, and Git used for source code version management.</a:t>
+              <a:t>• message: Automated alert text dispatched upon recruiter status updates</a:t>
+            </a:r>
+          </a:p>
+          <a:p>
+            <a:pPr>
+              <a:spcBef>
+                <a:spcPts val="400"/>
+              </a:spcBef>
+              <a:defRPr sz="1000">
+                <a:solidFill>
+                  <a:srgbClr val="1E293B"/>
+                </a:solidFill>
+              </a:defRPr>
+            </a:pPr>
+            <a:r>
+              <a:t>• is_read &amp; created_at: Read state tracking boolean and real-time generation timestamp</a:t>
             </a:r>
           </a:p>
         </p:txBody>
@@ -7547,7 +8934,7 @@
 </file>
 
 <file path=ppt/slides/slide9.xml><?xml version="1.0" encoding="utf-8"?>
-<p:sld xmlns:a="http://schemas.openxmlformats.org/drawingml/2006/main" xmlns:r="http://schemas.openxmlformats.org/officeDocument/2006/relationships" xmlns:p="http://schemas.openxmlformats.org/presentationml/2006/main">
+<p:sld xmlns:a="http://schemas.openxmlformats.org/drawingml/2006/main" xmlns:p="http://schemas.openxmlformats.org/presentationml/2006/main" xmlns:r="http://schemas.openxmlformats.org/officeDocument/2006/relationships">
   <p:cSld>
     <p:bg>
       <p:bgPr>
@@ -7581,7 +8968,7 @@
           <a:noFill/>
         </p:spPr>
         <p:txBody>
-          <a:bodyPr wrap="square" lIns="0" tIns="0" rIns="0" bIns="0">
+          <a:bodyPr wrap="square" lIns="0" rIns="0" tIns="0" bIns="0">
             <a:spAutoFit/>
           </a:bodyPr>
           <a:lstStyle/>
@@ -7594,7 +8981,7 @@
               </a:defRPr>
             </a:pPr>
             <a:r>
-              <a:t>SLIDE 9 • ROADMAP</a:t>
+              <a:t>SLIDE 9 • TECH STACK</a:t>
             </a:r>
           </a:p>
         </p:txBody>
@@ -7616,7 +9003,7 @@
           <a:noFill/>
         </p:spPr>
         <p:txBody>
-          <a:bodyPr wrap="square" lIns="0" tIns="0" rIns="0" bIns="0">
+          <a:bodyPr wrap="square" lIns="0" rIns="0" tIns="0" bIns="0">
             <a:spAutoFit/>
           </a:bodyPr>
           <a:lstStyle/>
@@ -7629,7 +9016,7 @@
               </a:defRPr>
             </a:pPr>
             <a:r>
-              <a:t>Future Enhancements</a:t>
+              <a:t>Technology Stack Used</a:t>
             </a:r>
           </a:p>
         </p:txBody>
@@ -7651,7 +9038,7 @@
           <a:noFill/>
         </p:spPr>
         <p:txBody>
-          <a:bodyPr wrap="square" lIns="0" tIns="0" rIns="0" bIns="0">
+          <a:bodyPr wrap="square" lIns="0" rIns="0" tIns="0" bIns="0">
             <a:spAutoFit/>
           </a:bodyPr>
           <a:lstStyle/>
@@ -7664,7 +9051,7 @@
               </a:defRPr>
             </a:pPr>
             <a:r>
-              <a:t>Useful features that can be added in future versions</a:t>
+              <a:t>Programming language, database, framework, and tools used</a:t>
             </a:r>
           </a:p>
         </p:txBody>
@@ -7750,24 +9137,39 @@
           </a:fontRef>
         </p:style>
         <p:txBody>
-          <a:bodyPr wrap="square" lIns="228600" tIns="228600" rIns="228600" rtlCol="0" anchor="ctr"/>
+          <a:bodyPr rtlCol="0" anchor="ctr" wrap="square" lIns="228600" rIns="228600" tIns="201168"/>
           <a:lstStyle/>
           <a:p>
             <a:pPr algn="ctr">
-              <a:defRPr sz="1300" b="1">
+              <a:defRPr sz="1350" b="1">
                 <a:solidFill>
                   <a:srgbClr val="1F3C88"/>
                 </a:solidFill>
               </a:defRPr>
             </a:pPr>
             <a:r>
-              <a:t>🤖 AI Resume Parser &amp; Matcher</a:t>
-            </a:r>
-          </a:p>
-          <a:p>
-            <a:pPr>
-              <a:spcBef>
-                <a:spcPts val="800"/>
+              <a:t>🐍 Programming Language</a:t>
+            </a:r>
+          </a:p>
+          <a:p>
+            <a:pPr>
+              <a:spcBef>
+                <a:spcPts val="300"/>
+              </a:spcBef>
+              <a:defRPr sz="1200" b="1">
+                <a:solidFill>
+                  <a:srgbClr val="2563EB"/>
+                </a:solidFill>
+              </a:defRPr>
+            </a:pPr>
+            <a:r>
+              <a:t>Python 3.9+</a:t>
+            </a:r>
+          </a:p>
+          <a:p>
+            <a:pPr>
+              <a:spcBef>
+                <a:spcPts val="500"/>
               </a:spcBef>
               <a:defRPr sz="1050">
                 <a:solidFill>
@@ -7776,7 +9178,7 @@
               </a:defRPr>
             </a:pPr>
             <a:r>
-              <a:t>Automatically scan student PDF resumes, extract technical skills, and recommend the best-fitting internships.</a:t>
+              <a:t>Primary backend language. Chosen because it is clean, easy to read, and has robust web framework support.</a:t>
             </a:r>
           </a:p>
         </p:txBody>
@@ -7819,24 +9221,39 @@
           </a:fontRef>
         </p:style>
         <p:txBody>
-          <a:bodyPr wrap="square" lIns="228600" tIns="228600" rIns="228600" rtlCol="0" anchor="ctr"/>
+          <a:bodyPr rtlCol="0" anchor="ctr" wrap="square" lIns="228600" rIns="228600" tIns="201168"/>
           <a:lstStyle/>
           <a:p>
             <a:pPr algn="ctr">
-              <a:defRPr sz="1300" b="1">
+              <a:defRPr sz="1350" b="1">
                 <a:solidFill>
                   <a:srgbClr val="1F3C88"/>
                 </a:solidFill>
               </a:defRPr>
             </a:pPr>
             <a:r>
-              <a:t>🏢 Direct Company/Recruiter Login</a:t>
-            </a:r>
-          </a:p>
-          <a:p>
-            <a:pPr>
-              <a:spcBef>
-                <a:spcPts val="800"/>
+              <a:t>🌐 Web Framework</a:t>
+            </a:r>
+          </a:p>
+          <a:p>
+            <a:pPr>
+              <a:spcBef>
+                <a:spcPts val="300"/>
+              </a:spcBef>
+              <a:defRPr sz="1200" b="1">
+                <a:solidFill>
+                  <a:srgbClr val="2563EB"/>
+                </a:solidFill>
+              </a:defRPr>
+            </a:pPr>
+            <a:r>
+              <a:t>Django 4.2 LTS</a:t>
+            </a:r>
+          </a:p>
+          <a:p>
+            <a:pPr>
+              <a:spcBef>
+                <a:spcPts val="500"/>
               </a:spcBef>
               <a:defRPr sz="1050">
                 <a:solidFill>
@@ -7845,7 +9262,7 @@
               </a:defRPr>
             </a:pPr>
             <a:r>
-              <a:t>Allow hiring managers from companies to post their own internships and shortlist students directly.</a:t>
+              <a:t>A robust Python web framework providing built-in security, user authentication, ORM, and admin panel.</a:t>
             </a:r>
           </a:p>
         </p:txBody>
@@ -7888,24 +9305,39 @@
           </a:fontRef>
         </p:style>
         <p:txBody>
-          <a:bodyPr wrap="square" lIns="228600" tIns="228600" rIns="228600" rtlCol="0" anchor="ctr"/>
+          <a:bodyPr rtlCol="0" anchor="ctr" wrap="square" lIns="228600" rIns="228600" tIns="201168"/>
           <a:lstStyle/>
           <a:p>
             <a:pPr algn="ctr">
-              <a:defRPr sz="1300" b="1">
+              <a:defRPr sz="1350" b="1">
                 <a:solidFill>
                   <a:srgbClr val="1F3C88"/>
                 </a:solidFill>
               </a:defRPr>
             </a:pPr>
             <a:r>
-              <a:t>📩 Automated Email &amp; SMS Alerts</a:t>
-            </a:r>
-          </a:p>
-          <a:p>
-            <a:pPr>
-              <a:spcBef>
-                <a:spcPts val="800"/>
+              <a:t>🗄️ Relational Database</a:t>
+            </a:r>
+          </a:p>
+          <a:p>
+            <a:pPr>
+              <a:spcBef>
+                <a:spcPts val="300"/>
+              </a:spcBef>
+              <a:defRPr sz="1200" b="1">
+                <a:solidFill>
+                  <a:srgbClr val="2563EB"/>
+                </a:solidFill>
+              </a:defRPr>
+            </a:pPr>
+            <a:r>
+              <a:t>MySQL Database</a:t>
+            </a:r>
+          </a:p>
+          <a:p>
+            <a:pPr>
+              <a:spcBef>
+                <a:spcPts val="500"/>
               </a:spcBef>
               <a:defRPr sz="1050">
                 <a:solidFill>
@@ -7914,7 +9346,7 @@
               </a:defRPr>
             </a:pPr>
             <a:r>
-              <a:t>Send instant email and SMS messages to students when an interview is scheduled or an application is accepted.</a:t>
+              <a:t>MySQL is the active database storing student records, company profiles, job postings, applications, and alerts.</a:t>
             </a:r>
           </a:p>
         </p:txBody>
@@ -7957,24 +9389,39 @@
           </a:fontRef>
         </p:style>
         <p:txBody>
-          <a:bodyPr wrap="square" lIns="228600" tIns="228600" rIns="228600" rtlCol="0" anchor="ctr"/>
+          <a:bodyPr rtlCol="0" anchor="ctr" wrap="square" lIns="228600" rIns="228600" tIns="201168"/>
           <a:lstStyle/>
           <a:p>
             <a:pPr algn="ctr">
-              <a:defRPr sz="1300" b="1">
+              <a:defRPr sz="1350" b="1">
                 <a:solidFill>
                   <a:srgbClr val="1F3C88"/>
                 </a:solidFill>
               </a:defRPr>
             </a:pPr>
             <a:r>
-              <a:t>📅 Integrated Interview Scheduling</a:t>
-            </a:r>
-          </a:p>
-          <a:p>
-            <a:pPr>
-              <a:spcBef>
-                <a:spcPts val="800"/>
+              <a:t>🎨 Frontend (UI)</a:t>
+            </a:r>
+          </a:p>
+          <a:p>
+            <a:pPr>
+              <a:spcBef>
+                <a:spcPts val="300"/>
+              </a:spcBef>
+              <a:defRPr sz="1200" b="1">
+                <a:solidFill>
+                  <a:srgbClr val="2563EB"/>
+                </a:solidFill>
+              </a:defRPr>
+            </a:pPr>
+            <a:r>
+              <a:t>HTML5 &amp; CSS3</a:t>
+            </a:r>
+          </a:p>
+          <a:p>
+            <a:pPr>
+              <a:spcBef>
+                <a:spcPts val="500"/>
               </a:spcBef>
               <a:defRPr sz="1050">
                 <a:solidFill>
@@ -7983,7 +9430,7 @@
               </a:defRPr>
             </a:pPr>
             <a:r>
-              <a:t>Add an in-app calendar to schedule interview dates and connect with Google Meet or Zoom.</a:t>
+              <a:t>Clean, responsive user interface with modern card layouts optimized for desktop, tablet, and mobile browsers.</a:t>
             </a:r>
           </a:p>
         </p:txBody>
@@ -8026,24 +9473,39 @@
           </a:fontRef>
         </p:style>
         <p:txBody>
-          <a:bodyPr wrap="square" lIns="228600" tIns="228600" rIns="228600" rtlCol="0" anchor="ctr"/>
+          <a:bodyPr rtlCol="0" anchor="ctr" wrap="square" lIns="228600" rIns="228600" tIns="201168"/>
           <a:lstStyle/>
           <a:p>
             <a:pPr algn="ctr">
-              <a:defRPr sz="1300" b="1">
+              <a:defRPr sz="1350" b="1">
                 <a:solidFill>
                   <a:srgbClr val="1F3C88"/>
                 </a:solidFill>
               </a:defRPr>
             </a:pPr>
             <a:r>
-              <a:t>📱 Mobile Application</a:t>
-            </a:r>
-          </a:p>
-          <a:p>
-            <a:pPr>
-              <a:spcBef>
-                <a:spcPts val="800"/>
+              <a:t>📦 Libraries &amp; Drivers</a:t>
+            </a:r>
+          </a:p>
+          <a:p>
+            <a:pPr>
+              <a:spcBef>
+                <a:spcPts val="300"/>
+              </a:spcBef>
+              <a:defRPr sz="1200" b="1">
+                <a:solidFill>
+                  <a:srgbClr val="2563EB"/>
+                </a:solidFill>
+              </a:defRPr>
+            </a:pPr>
+            <a:r>
+              <a:t>mysqlclient &amp; Forms</a:t>
+            </a:r>
+          </a:p>
+          <a:p>
+            <a:pPr>
+              <a:spcBef>
+                <a:spcPts val="500"/>
               </a:spcBef>
               <a:defRPr sz="1050">
                 <a:solidFill>
@@ -8052,7 +9514,7 @@
               </a:defRPr>
             </a:pPr>
             <a:r>
-              <a:t>Develop an Android and iOS mobile app using Flutter so students can apply and check alerts on their phones.</a:t>
+              <a:t>mysqlclient (MySQLdb) connects Django to MySQL. Django Forms handles strict server-side validation.</a:t>
             </a:r>
           </a:p>
         </p:txBody>
@@ -8095,24 +9557,39 @@
           </a:fontRef>
         </p:style>
         <p:txBody>
-          <a:bodyPr wrap="square" lIns="228600" tIns="228600" rIns="228600" rtlCol="0" anchor="ctr"/>
+          <a:bodyPr rtlCol="0" anchor="ctr" wrap="square" lIns="228600" rIns="228600" tIns="201168"/>
           <a:lstStyle/>
           <a:p>
             <a:pPr algn="ctr">
-              <a:defRPr sz="1300" b="1">
+              <a:defRPr sz="1350" b="1">
                 <a:solidFill>
                   <a:srgbClr val="1F3C88"/>
                 </a:solidFill>
               </a:defRPr>
             </a:pPr>
             <a:r>
-              <a:t>🎓 Digital Completion Certificates</a:t>
-            </a:r>
-          </a:p>
-          <a:p>
-            <a:pPr>
-              <a:spcBef>
-                <a:spcPts val="800"/>
+              <a:t>💻 Development Tools</a:t>
+            </a:r>
+          </a:p>
+          <a:p>
+            <a:pPr>
+              <a:spcBef>
+                <a:spcPts val="300"/>
+              </a:spcBef>
+              <a:defRPr sz="1200" b="1">
+                <a:solidFill>
+                  <a:srgbClr val="2563EB"/>
+                </a:solidFill>
+              </a:defRPr>
+            </a:pPr>
+            <a:r>
+              <a:t>VS Code &amp; Git</a:t>
+            </a:r>
+          </a:p>
+          <a:p>
+            <a:pPr>
+              <a:spcBef>
+                <a:spcPts val="500"/>
               </a:spcBef>
               <a:defRPr sz="1050">
                 <a:solidFill>
@@ -8121,7 +9598,7 @@
               </a:defRPr>
             </a:pPr>
             <a:r>
-              <a:t>Automatically generate verified digital certificates for students upon successful completion of their internship.</a:t>
+              <a:t>Visual Studio Code used as primary code editor, with Git utilized for source code version management.</a:t>
             </a:r>
           </a:p>
         </p:txBody>
@@ -8450,10 +9927,6 @@
       </a:style>
     </a:lnDef>
   </a:objectDefaults>
-  <a:extLst>
-    <a:ext uri="{05A4C25C-085E-4340-85A3-A5531E510DB2}">
-      <thm15:themeFamily xmlns:thm15="http://schemas.microsoft.com/office/thememl/2012/main" name="Office Theme" id="{62F939B6-93AF-4DB8-9C6B-D6C7DFDC589F}" vid="{4A3C46E8-61CC-4603-A589-7422A47A8E4A}"/>
-    </a:ext>
-  </a:extLst>
+  <a:extraClrSchemeLst/>
 </a:theme>
 </file>